--- a/presentations/0609_Stablecoin_Exorbitant_Privilege.pptx
+++ b/presentations/0609_Stablecoin_Exorbitant_Privilege.pptx
@@ -4,28 +4,25 @@
   <p:sldMasterIdLst>
     <p:sldMasterId id="2147483648" r:id="rId1"/>
   </p:sldMasterIdLst>
-  <p:notesMasterIdLst>
-    <p:notesMasterId r:id="rId18"/>
-  </p:notesMasterIdLst>
   <p:sldIdLst>
-    <p:sldId id="272" r:id="rId2"/>
-    <p:sldId id="257" r:id="rId3"/>
-    <p:sldId id="258" r:id="rId4"/>
-    <p:sldId id="259" r:id="rId5"/>
-    <p:sldId id="260" r:id="rId6"/>
-    <p:sldId id="261" r:id="rId7"/>
-    <p:sldId id="262" r:id="rId8"/>
-    <p:sldId id="263" r:id="rId9"/>
-    <p:sldId id="264" r:id="rId10"/>
-    <p:sldId id="265" r:id="rId11"/>
-    <p:sldId id="266" r:id="rId12"/>
-    <p:sldId id="267" r:id="rId13"/>
-    <p:sldId id="268" r:id="rId14"/>
-    <p:sldId id="269" r:id="rId15"/>
-    <p:sldId id="270" r:id="rId16"/>
-    <p:sldId id="273" r:id="rId17"/>
+    <p:sldId id="256" r:id="rId7"/>
+    <p:sldId id="257" r:id="rId8"/>
+    <p:sldId id="258" r:id="rId9"/>
+    <p:sldId id="259" r:id="rId10"/>
+    <p:sldId id="260" r:id="rId11"/>
+    <p:sldId id="261" r:id="rId12"/>
+    <p:sldId id="262" r:id="rId14"/>
+    <p:sldId id="263" r:id="rId15"/>
+    <p:sldId id="264" r:id="rId16"/>
+    <p:sldId id="265" r:id="rId17"/>
+    <p:sldId id="266" r:id="rId18"/>
+    <p:sldId id="267" r:id="rId19"/>
+    <p:sldId id="268" r:id="rId20"/>
+    <p:sldId id="269" r:id="rId21"/>
+    <p:sldId id="270" r:id="rId22"/>
+    <p:sldId id="271" r:id="rId23"/>
   </p:sldIdLst>
-  <p:sldSz cx="12188825" cy="6858000"/>
+  <p:sldSz cx="12188952" cy="6858000" type="screen4x3"/>
   <p:notesSz cx="6858000" cy="9144000"/>
   <p:defaultTextStyle>
     <a:defPPr>
@@ -122,27 +119,11 @@
       </a:defRPr>
     </a:lvl9pPr>
   </p:defaultTextStyle>
-  <p:extLst>
-    <p:ext uri="{EFAFB233-063F-42B5-8137-9DF3F51BA10A}">
-      <p15:sldGuideLst xmlns:p15="http://schemas.microsoft.com/office/powerpoint/2012/main">
-        <p15:guide id="1" orient="horz" pos="2160">
-          <p15:clr>
-            <a:srgbClr val="A4A3A4"/>
-          </p15:clr>
-        </p15:guide>
-        <p15:guide id="2" pos="2880">
-          <p15:clr>
-            <a:srgbClr val="A4A3A4"/>
-          </p15:clr>
-        </p15:guide>
-      </p15:sldGuideLst>
-    </p:ext>
-  </p:extLst>
 </p:presentation>
 </file>
 
 <file path=ppt/notesMasters/notesMaster1.xml><?xml version="1.0" encoding="utf-8"?>
-<p:notesMaster xmlns:a="http://schemas.openxmlformats.org/drawingml/2006/main" xmlns:r="http://schemas.openxmlformats.org/officeDocument/2006/relationships" xmlns:p="http://schemas.openxmlformats.org/presentationml/2006/main">
+<p:notesMaster xmlns:a="http://schemas.openxmlformats.org/drawingml/2006/main" xmlns:p="http://schemas.openxmlformats.org/presentationml/2006/main" xmlns:r="http://schemas.openxmlformats.org/officeDocument/2006/relationships">
   <p:cSld>
     <p:bg>
       <p:bgRef idx="1001">
@@ -165,7 +146,7 @@
       </p:grpSpPr>
       <p:sp>
         <p:nvSpPr>
-          <p:cNvPr id="2" name="머리글 개체 틀 1"/>
+          <p:cNvPr id="2" name="Header Placeholder 1"/>
           <p:cNvSpPr>
             <a:spLocks noGrp="1"/>
           </p:cNvSpPr>
@@ -176,7 +157,7 @@
         <p:spPr>
           <a:xfrm>
             <a:off x="0" y="0"/>
-            <a:ext cx="2971800" cy="458788"/>
+            <a:ext cx="2971800" cy="457200"/>
           </a:xfrm>
           <a:prstGeom prst="rect">
             <a:avLst/>
@@ -190,13 +171,13 @@
             </a:lvl1pPr>
           </a:lstStyle>
           <a:p>
-            <a:endParaRPr kumimoji="1" lang="ko-KR" altLang="en-US"/>
-          </a:p>
-        </p:txBody>
-      </p:sp>
-      <p:sp>
-        <p:nvSpPr>
-          <p:cNvPr id="3" name="날짜 개체 틀 2"/>
+            <a:endParaRPr lang="en-US"/>
+          </a:p>
+        </p:txBody>
+      </p:sp>
+      <p:sp>
+        <p:nvSpPr>
+          <p:cNvPr id="3" name="Date Placeholder 2"/>
           <p:cNvSpPr>
             <a:spLocks noGrp="1"/>
           </p:cNvSpPr>
@@ -207,7 +188,7 @@
         <p:spPr>
           <a:xfrm>
             <a:off x="3884613" y="0"/>
-            <a:ext cx="2971800" cy="458788"/>
+            <a:ext cx="2971800" cy="457200"/>
           </a:xfrm>
           <a:prstGeom prst="rect">
             <a:avLst/>
@@ -221,17 +202,17 @@
             </a:lvl1pPr>
           </a:lstStyle>
           <a:p>
-            <a:fld id="{D324BC8E-F562-8D4F-BDA7-CD249A78F686}" type="datetimeFigureOut">
-              <a:rPr kumimoji="1" lang="ko-KR" altLang="en-US" smtClean="0"/>
-              <a:t>2026. 6. 2.</a:t>
+            <a:fld id="{0F89C1C7-3DCD-1040-A9CF-14679D8B5DDD}" type="datetimeFigureOut">
+              <a:rPr lang="en-US" smtClean="0"/>
+              <a:t>10/17/16</a:t>
             </a:fld>
-            <a:endParaRPr kumimoji="1" lang="ko-KR" altLang="en-US"/>
-          </a:p>
-        </p:txBody>
-      </p:sp>
-      <p:sp>
-        <p:nvSpPr>
-          <p:cNvPr id="4" name="슬라이드 이미지 개체 틀 3"/>
+            <a:endParaRPr lang="en-US"/>
+          </a:p>
+        </p:txBody>
+      </p:sp>
+      <p:sp>
+        <p:nvSpPr>
+          <p:cNvPr id="4" name="Slide Image Placeholder 3"/>
           <p:cNvSpPr>
             <a:spLocks noGrp="1" noRot="1" noChangeAspect="1"/>
           </p:cNvSpPr>
@@ -241,8 +222,8 @@
         </p:nvSpPr>
         <p:spPr>
           <a:xfrm>
-            <a:off x="685800" y="1143000"/>
-            <a:ext cx="5486400" cy="3086100"/>
+            <a:off x="1143000" y="685800"/>
+            <a:ext cx="4572000" cy="3429000"/>
           </a:xfrm>
           <a:prstGeom prst="rect">
             <a:avLst/>
@@ -258,13 +239,13 @@
           <a:bodyPr vert="horz" lIns="91440" tIns="45720" rIns="91440" bIns="45720" rtlCol="0" anchor="ctr"/>
           <a:lstStyle/>
           <a:p>
-            <a:endParaRPr lang="ko-KR" altLang="en-US"/>
-          </a:p>
-        </p:txBody>
-      </p:sp>
-      <p:sp>
-        <p:nvSpPr>
-          <p:cNvPr id="5" name="슬라이드 노트 개체 틀 4"/>
+            <a:endParaRPr lang="en-US"/>
+          </a:p>
+        </p:txBody>
+      </p:sp>
+      <p:sp>
+        <p:nvSpPr>
+          <p:cNvPr id="5" name="Notes Placeholder 4"/>
           <p:cNvSpPr>
             <a:spLocks noGrp="1"/>
           </p:cNvSpPr>
@@ -274,8 +255,8 @@
         </p:nvSpPr>
         <p:spPr>
           <a:xfrm>
-            <a:off x="685800" y="4400550"/>
-            <a:ext cx="5486400" cy="3600450"/>
+            <a:off x="685800" y="4343400"/>
+            <a:ext cx="5486400" cy="4114800"/>
           </a:xfrm>
           <a:prstGeom prst="rect">
             <a:avLst/>
@@ -287,43 +268,44 @@
           <a:p>
             <a:pPr lvl="0"/>
             <a:r>
-              <a:rPr kumimoji="1" lang="ko-KR" altLang="en-US"/>
-              <a:t>마스터 텍스트 스타일을 편집하려면 클릭</a:t>
+              <a:rPr lang="en-US" smtClean="0"/>
+              <a:t>Click to edit Master text styles</a:t>
             </a:r>
           </a:p>
           <a:p>
             <a:pPr lvl="1"/>
             <a:r>
-              <a:rPr kumimoji="1" lang="ko-KR" altLang="en-US"/>
-              <a:t>두 번째 수준</a:t>
+              <a:rPr lang="en-US" smtClean="0"/>
+              <a:t>Second level</a:t>
             </a:r>
           </a:p>
           <a:p>
             <a:pPr lvl="2"/>
             <a:r>
-              <a:rPr kumimoji="1" lang="ko-KR" altLang="en-US"/>
-              <a:t>세 번째 수준</a:t>
+              <a:rPr lang="en-US" smtClean="0"/>
+              <a:t>Third level</a:t>
             </a:r>
           </a:p>
           <a:p>
             <a:pPr lvl="3"/>
             <a:r>
-              <a:rPr kumimoji="1" lang="ko-KR" altLang="en-US"/>
-              <a:t>네 번째 수준</a:t>
+              <a:rPr lang="en-US" smtClean="0"/>
+              <a:t>Fourth level</a:t>
             </a:r>
           </a:p>
           <a:p>
             <a:pPr lvl="4"/>
             <a:r>
-              <a:rPr kumimoji="1" lang="ko-KR" altLang="en-US"/>
-              <a:t>다섯 번째 수준</a:t>
-            </a:r>
-          </a:p>
-        </p:txBody>
-      </p:sp>
-      <p:sp>
-        <p:nvSpPr>
-          <p:cNvPr id="6" name="바닥글 개체 틀 5"/>
+              <a:rPr lang="en-US" smtClean="0"/>
+              <a:t>Fifth level</a:t>
+            </a:r>
+            <a:endParaRPr lang="en-US"/>
+          </a:p>
+        </p:txBody>
+      </p:sp>
+      <p:sp>
+        <p:nvSpPr>
+          <p:cNvPr id="6" name="Footer Placeholder 5"/>
           <p:cNvSpPr>
             <a:spLocks noGrp="1"/>
           </p:cNvSpPr>
@@ -334,7 +316,7 @@
         <p:spPr>
           <a:xfrm>
             <a:off x="0" y="8685213"/>
-            <a:ext cx="2971800" cy="458787"/>
+            <a:ext cx="2971800" cy="457200"/>
           </a:xfrm>
           <a:prstGeom prst="rect">
             <a:avLst/>
@@ -348,13 +330,13 @@
             </a:lvl1pPr>
           </a:lstStyle>
           <a:p>
-            <a:endParaRPr kumimoji="1" lang="ko-KR" altLang="en-US"/>
-          </a:p>
-        </p:txBody>
-      </p:sp>
-      <p:sp>
-        <p:nvSpPr>
-          <p:cNvPr id="7" name="슬라이드 번호 개체 틀 6"/>
+            <a:endParaRPr lang="en-US"/>
+          </a:p>
+        </p:txBody>
+      </p:sp>
+      <p:sp>
+        <p:nvSpPr>
+          <p:cNvPr id="7" name="Slide Number Placeholder 6"/>
           <p:cNvSpPr>
             <a:spLocks noGrp="1"/>
           </p:cNvSpPr>
@@ -365,7 +347,7 @@
         <p:spPr>
           <a:xfrm>
             <a:off x="3884613" y="8685213"/>
-            <a:ext cx="2971800" cy="458787"/>
+            <a:ext cx="2971800" cy="457200"/>
           </a:xfrm>
           <a:prstGeom prst="rect">
             <a:avLst/>
@@ -379,24 +361,24 @@
             </a:lvl1pPr>
           </a:lstStyle>
           <a:p>
-            <a:fld id="{B6639903-DE06-8246-845B-A354BD01FF66}" type="slidenum">
-              <a:rPr kumimoji="1" lang="ko-KR" altLang="en-US" smtClean="0"/>
+            <a:fld id="{BB5E49A5-4136-284D-997B-48E1D791AD67}" type="slidenum">
+              <a:rPr lang="en-US" smtClean="0"/>
               <a:t>‹#›</a:t>
             </a:fld>
-            <a:endParaRPr kumimoji="1" lang="ko-KR" altLang="en-US"/>
+            <a:endParaRPr lang="en-US"/>
           </a:p>
         </p:txBody>
       </p:sp>
     </p:spTree>
     <p:extLst>
       <p:ext uri="{BB962C8B-B14F-4D97-AF65-F5344CB8AC3E}">
-        <p14:creationId xmlns:p14="http://schemas.microsoft.com/office/powerpoint/2010/main" val="3616082129"/>
+        <p14:creationId xmlns:p14="http://schemas.microsoft.com/office/powerpoint/2010/main" val="2623252185"/>
       </p:ext>
     </p:extLst>
   </p:cSld>
   <p:clrMap bg1="lt1" tx1="dk1" bg2="lt2" tx2="dk2" accent1="accent1" accent2="accent2" accent3="accent3" accent4="accent4" accent5="accent5" accent6="accent6" hlink="hlink" folHlink="folHlink"/>
   <p:notesStyle>
-    <a:lvl1pPr marL="0" algn="l" defTabSz="914400" rtl="0" eaLnBrk="1" latinLnBrk="1" hangingPunct="1">
+    <a:lvl1pPr marL="0" algn="l" defTabSz="457200" rtl="0" eaLnBrk="1" latinLnBrk="0" hangingPunct="1">
       <a:defRPr sz="1200" kern="1200">
         <a:solidFill>
           <a:schemeClr val="tx1"/>
@@ -406,7 +388,7 @@
         <a:cs typeface="+mn-cs"/>
       </a:defRPr>
     </a:lvl1pPr>
-    <a:lvl2pPr marL="457200" algn="l" defTabSz="914400" rtl="0" eaLnBrk="1" latinLnBrk="1" hangingPunct="1">
+    <a:lvl2pPr marL="457200" algn="l" defTabSz="457200" rtl="0" eaLnBrk="1" latinLnBrk="0" hangingPunct="1">
       <a:defRPr sz="1200" kern="1200">
         <a:solidFill>
           <a:schemeClr val="tx1"/>
@@ -416,7 +398,7 @@
         <a:cs typeface="+mn-cs"/>
       </a:defRPr>
     </a:lvl2pPr>
-    <a:lvl3pPr marL="914400" algn="l" defTabSz="914400" rtl="0" eaLnBrk="1" latinLnBrk="1" hangingPunct="1">
+    <a:lvl3pPr marL="914400" algn="l" defTabSz="457200" rtl="0" eaLnBrk="1" latinLnBrk="0" hangingPunct="1">
       <a:defRPr sz="1200" kern="1200">
         <a:solidFill>
           <a:schemeClr val="tx1"/>
@@ -426,7 +408,7 @@
         <a:cs typeface="+mn-cs"/>
       </a:defRPr>
     </a:lvl3pPr>
-    <a:lvl4pPr marL="1371600" algn="l" defTabSz="914400" rtl="0" eaLnBrk="1" latinLnBrk="1" hangingPunct="1">
+    <a:lvl4pPr marL="1371600" algn="l" defTabSz="457200" rtl="0" eaLnBrk="1" latinLnBrk="0" hangingPunct="1">
       <a:defRPr sz="1200" kern="1200">
         <a:solidFill>
           <a:schemeClr val="tx1"/>
@@ -436,7 +418,7 @@
         <a:cs typeface="+mn-cs"/>
       </a:defRPr>
     </a:lvl4pPr>
-    <a:lvl5pPr marL="1828800" algn="l" defTabSz="914400" rtl="0" eaLnBrk="1" latinLnBrk="1" hangingPunct="1">
+    <a:lvl5pPr marL="1828800" algn="l" defTabSz="457200" rtl="0" eaLnBrk="1" latinLnBrk="0" hangingPunct="1">
       <a:defRPr sz="1200" kern="1200">
         <a:solidFill>
           <a:schemeClr val="tx1"/>
@@ -446,7 +428,7 @@
         <a:cs typeface="+mn-cs"/>
       </a:defRPr>
     </a:lvl5pPr>
-    <a:lvl6pPr marL="2286000" algn="l" defTabSz="914400" rtl="0" eaLnBrk="1" latinLnBrk="1" hangingPunct="1">
+    <a:lvl6pPr marL="2286000" algn="l" defTabSz="457200" rtl="0" eaLnBrk="1" latinLnBrk="0" hangingPunct="1">
       <a:defRPr sz="1200" kern="1200">
         <a:solidFill>
           <a:schemeClr val="tx1"/>
@@ -456,7 +438,7 @@
         <a:cs typeface="+mn-cs"/>
       </a:defRPr>
     </a:lvl6pPr>
-    <a:lvl7pPr marL="2743200" algn="l" defTabSz="914400" rtl="0" eaLnBrk="1" latinLnBrk="1" hangingPunct="1">
+    <a:lvl7pPr marL="2743200" algn="l" defTabSz="457200" rtl="0" eaLnBrk="1" latinLnBrk="0" hangingPunct="1">
       <a:defRPr sz="1200" kern="1200">
         <a:solidFill>
           <a:schemeClr val="tx1"/>
@@ -466,7 +448,7 @@
         <a:cs typeface="+mn-cs"/>
       </a:defRPr>
     </a:lvl7pPr>
-    <a:lvl8pPr marL="3200400" algn="l" defTabSz="914400" rtl="0" eaLnBrk="1" latinLnBrk="1" hangingPunct="1">
+    <a:lvl8pPr marL="3200400" algn="l" defTabSz="457200" rtl="0" eaLnBrk="1" latinLnBrk="0" hangingPunct="1">
       <a:defRPr sz="1200" kern="1200">
         <a:solidFill>
           <a:schemeClr val="tx1"/>
@@ -476,7 +458,7 @@
         <a:cs typeface="+mn-cs"/>
       </a:defRPr>
     </a:lvl8pPr>
-    <a:lvl9pPr marL="3657600" algn="l" defTabSz="914400" rtl="0" eaLnBrk="1" latinLnBrk="1" hangingPunct="1">
+    <a:lvl9pPr marL="3657600" algn="l" defTabSz="457200" rtl="0" eaLnBrk="1" latinLnBrk="0" hangingPunct="1">
       <a:defRPr sz="1200" kern="1200">
         <a:solidFill>
           <a:schemeClr val="tx1"/>
@@ -491,7 +473,7 @@
 </file>
 
 <file path=ppt/notesSlides/notesSlide1.xml><?xml version="1.0" encoding="utf-8"?>
-<p:notes xmlns:a="http://schemas.openxmlformats.org/drawingml/2006/main" xmlns:r="http://schemas.openxmlformats.org/officeDocument/2006/relationships" xmlns:p="http://schemas.openxmlformats.org/presentationml/2006/main">
+<p:notes xmlns:a="http://schemas.openxmlformats.org/drawingml/2006/main" xmlns:p="http://schemas.openxmlformats.org/presentationml/2006/main" xmlns:r="http://schemas.openxmlformats.org/officeDocument/2006/relationships">
   <p:cSld>
     <p:spTree>
       <p:nvGrpSpPr>
@@ -511,7 +493,7 @@
         <p:nvSpPr>
           <p:cNvPr id="2" name="Slide Image Placeholder 1"/>
           <p:cNvSpPr>
-            <a:spLocks noGrp="1" noRot="1" noChangeAspect="1"/>
+            <a:spLocks noGrp="1"/>
           </p:cNvSpPr>
           <p:nvPr>
             <p:ph type="sldImg" idx="2"/>
@@ -526,7 +508,7 @@
             <a:spLocks noGrp="1"/>
           </p:cNvSpPr>
           <p:nvPr>
-            <p:ph type="body" sz="quarter" idx="3"/>
+            <p:ph type="body" idx="3" sz="quarter"/>
           </p:nvPr>
         </p:nvSpPr>
         <p:spPr/>
@@ -534,7 +516,9 @@
           <a:bodyPr/>
           <a:lstStyle/>
           <a:p>
-            <a:endParaRPr dirty="0"/>
+            <a:r>
+              <a:t>We corrected the dependent variable after discovering SOFR90DAYAVG was a 90-day backward-looking trailing average. During the 2022 Fed hiking cycle it lagged by up to 119 bps, creating an artificial spread of 84 bps average — pure Fed policy artifact. Switched to DGS3MO minus overnight SOFR. New mean: 16.6 bps. Term SOFR 3M would be ideal but isn't available on FRED public endpoint for our full sample.</a:t>
+            </a:r>
           </a:p>
         </p:txBody>
       </p:sp>
@@ -545,7 +529,7 @@
             <a:spLocks noGrp="1"/>
           </p:cNvSpPr>
           <p:nvPr>
-            <p:ph type="sldNum" sz="quarter" idx="5"/>
+            <p:ph type="sldNum" idx="5" sz="quarter"/>
           </p:nvPr>
         </p:nvSpPr>
         <p:spPr/>
@@ -559,7 +543,7 @@
 </file>
 
 <file path=ppt/notesSlides/notesSlide2.xml><?xml version="1.0" encoding="utf-8"?>
-<p:notes xmlns:a="http://schemas.openxmlformats.org/drawingml/2006/main" xmlns:r="http://schemas.openxmlformats.org/officeDocument/2006/relationships" xmlns:p="http://schemas.openxmlformats.org/presentationml/2006/main">
+<p:notes xmlns:a="http://schemas.openxmlformats.org/drawingml/2006/main" xmlns:p="http://schemas.openxmlformats.org/presentationml/2006/main" xmlns:r="http://schemas.openxmlformats.org/officeDocument/2006/relationships">
   <p:cSld>
     <p:spTree>
       <p:nvGrpSpPr>
@@ -579,7 +563,7 @@
         <p:nvSpPr>
           <p:cNvPr id="2" name="Slide Image Placeholder 1"/>
           <p:cNvSpPr>
-            <a:spLocks noGrp="1" noRot="1" noChangeAspect="1"/>
+            <a:spLocks noGrp="1"/>
           </p:cNvSpPr>
           <p:nvPr>
             <p:ph type="sldImg" idx="2"/>
@@ -594,7 +578,7 @@
             <a:spLocks noGrp="1"/>
           </p:cNvSpPr>
           <p:nvPr>
-            <p:ph type="body" sz="quarter" idx="3"/>
+            <p:ph type="body" idx="3" sz="quarter"/>
           </p:nvPr>
         </p:nvSpPr>
         <p:spPr/>
@@ -602,7 +586,9 @@
           <a:bodyPr/>
           <a:lstStyle/>
           <a:p>
-            <a:endParaRPr dirty="0"/>
+            <a:r>
+              <a:t>Column 2 (buffer-ratio) is our primary result. Column 1 (decomposed theta/L) gives beta_1 = -1.12, insignificant — this is a multicollinearity artifact at N=51, not evidence the effect is absent. The good news: B x DeltalnS = -7.52** (p=0.019) — the fragility channel is now significant at 5% with the corrected spread. The corrected spread actually reveals the mechanism more clearly.</a:t>
+            </a:r>
           </a:p>
         </p:txBody>
       </p:sp>
@@ -613,7 +599,217 @@
             <a:spLocks noGrp="1"/>
           </p:cNvSpPr>
           <p:nvPr>
-            <p:ph type="sldNum" sz="quarter" idx="5"/>
+            <p:ph type="sldNum" idx="5" sz="quarter"/>
+          </p:nvPr>
+        </p:nvSpPr>
+        <p:spPr/>
+      </p:sp>
+    </p:spTree>
+  </p:cSld>
+  <p:clrMapOvr>
+    <a:masterClrMapping/>
+  </p:clrMapOvr>
+</p:notes>
+</file>
+
+<file path=ppt/notesSlides/notesSlide3.xml><?xml version="1.0" encoding="utf-8"?>
+<p:notes xmlns:a="http://schemas.openxmlformats.org/drawingml/2006/main" xmlns:p="http://schemas.openxmlformats.org/presentationml/2006/main" xmlns:r="http://schemas.openxmlformats.org/officeDocument/2006/relationships">
+  <p:cSld>
+    <p:spTree>
+      <p:nvGrpSpPr>
+        <p:cNvPr id="1" name=""/>
+        <p:cNvGrpSpPr/>
+        <p:nvPr/>
+      </p:nvGrpSpPr>
+      <p:grpSpPr>
+        <a:xfrm>
+          <a:off x="0" y="0"/>
+          <a:ext cx="0" cy="0"/>
+          <a:chOff x="0" y="0"/>
+          <a:chExt cx="0" cy="0"/>
+        </a:xfrm>
+      </p:grpSpPr>
+      <p:sp>
+        <p:nvSpPr>
+          <p:cNvPr id="2" name="Slide Image Placeholder 1"/>
+          <p:cNvSpPr>
+            <a:spLocks noGrp="1"/>
+          </p:cNvSpPr>
+          <p:nvPr>
+            <p:ph type="sldImg" idx="2"/>
+          </p:nvPr>
+        </p:nvSpPr>
+        <p:spPr/>
+      </p:sp>
+      <p:sp>
+        <p:nvSpPr>
+          <p:cNvPr id="3" name="Notes Placeholder 2"/>
+          <p:cNvSpPr>
+            <a:spLocks noGrp="1"/>
+          </p:cNvSpPr>
+          <p:nvPr>
+            <p:ph type="body" idx="3" sz="quarter"/>
+          </p:nvPr>
+        </p:nvSpPr>
+        <p:spPr/>
+        <p:txBody>
+          <a:bodyPr/>
+          <a:lstStyle/>
+          <a:p>
+            <a:r>
+              <a:t>q* = 13% is unchanged by the spread correction — the threshold is robust. The p-value moved from 0.247 to 0.406, reflecting slightly weaker evidence. But: same q*, same TRIM stability, same sign flip in regime betas (-2.80 vs +1.63). The threshold finding is the most robust result in the paper.</a:t>
+            </a:r>
+          </a:p>
+        </p:txBody>
+      </p:sp>
+      <p:sp>
+        <p:nvSpPr>
+          <p:cNvPr id="4" name="Slide Number Placeholder 3"/>
+          <p:cNvSpPr>
+            <a:spLocks noGrp="1"/>
+          </p:cNvSpPr>
+          <p:nvPr>
+            <p:ph type="sldNum" idx="5" sz="quarter"/>
+          </p:nvPr>
+        </p:nvSpPr>
+        <p:spPr/>
+      </p:sp>
+    </p:spTree>
+  </p:cSld>
+  <p:clrMapOvr>
+    <a:masterClrMapping/>
+  </p:clrMapOvr>
+</p:notes>
+</file>
+
+<file path=ppt/notesSlides/notesSlide4.xml><?xml version="1.0" encoding="utf-8"?>
+<p:notes xmlns:a="http://schemas.openxmlformats.org/drawingml/2006/main" xmlns:p="http://schemas.openxmlformats.org/presentationml/2006/main" xmlns:r="http://schemas.openxmlformats.org/officeDocument/2006/relationships">
+  <p:cSld>
+    <p:spTree>
+      <p:nvGrpSpPr>
+        <p:cNvPr id="1" name=""/>
+        <p:cNvGrpSpPr/>
+        <p:nvPr/>
+      </p:nvGrpSpPr>
+      <p:grpSpPr>
+        <a:xfrm>
+          <a:off x="0" y="0"/>
+          <a:ext cx="0" cy="0"/>
+          <a:chOff x="0" y="0"/>
+          <a:chExt cx="0" cy="0"/>
+        </a:xfrm>
+      </p:grpSpPr>
+      <p:sp>
+        <p:nvSpPr>
+          <p:cNvPr id="2" name="Slide Image Placeholder 1"/>
+          <p:cNvSpPr>
+            <a:spLocks noGrp="1"/>
+          </p:cNvSpPr>
+          <p:nvPr>
+            <p:ph type="sldImg" idx="2"/>
+          </p:nvPr>
+        </p:nvSpPr>
+        <p:spPr/>
+      </p:sp>
+      <p:sp>
+        <p:nvSpPr>
+          <p:cNvPr id="3" name="Notes Placeholder 2"/>
+          <p:cNvSpPr>
+            <a:spLocks noGrp="1"/>
+          </p:cNvSpPr>
+          <p:nvPr>
+            <p:ph type="body" idx="3" sz="quarter"/>
+          </p:nvPr>
+        </p:nvSpPr>
+        <p:spPr/>
+        <p:txBody>
+          <a:bodyPr/>
+          <a:lstStyle/>
+          <a:p>
+            <a:r>
+              <a:t>LSTAR c* moved from 13.1% to 14.9% with the corrected spread. gamma* = 29.8 indicates a gradual rather than discrete transition. This is the more honest finding — we were over-claiming sharpness before. But Hansen's q*=13% still inside LSTAR CI [3.1%, 14.5%], so convergence holds. LUNA spread corrected: 14.0 bps (was 70.9 bps with SOFR90DAYAVG lag). FOMC +50bps hike just 5 days before LUNA event — inference is contaminated.</a:t>
+            </a:r>
+          </a:p>
+        </p:txBody>
+      </p:sp>
+      <p:sp>
+        <p:nvSpPr>
+          <p:cNvPr id="4" name="Slide Number Placeholder 3"/>
+          <p:cNvSpPr>
+            <a:spLocks noGrp="1"/>
+          </p:cNvSpPr>
+          <p:nvPr>
+            <p:ph type="sldNum" idx="5" sz="quarter"/>
+          </p:nvPr>
+        </p:nvSpPr>
+        <p:spPr/>
+      </p:sp>
+    </p:spTree>
+  </p:cSld>
+  <p:clrMapOvr>
+    <a:masterClrMapping/>
+  </p:clrMapOvr>
+</p:notes>
+</file>
+
+<file path=ppt/notesSlides/notesSlide5.xml><?xml version="1.0" encoding="utf-8"?>
+<p:notes xmlns:a="http://schemas.openxmlformats.org/drawingml/2006/main" xmlns:p="http://schemas.openxmlformats.org/presentationml/2006/main" xmlns:r="http://schemas.openxmlformats.org/officeDocument/2006/relationships">
+  <p:cSld>
+    <p:spTree>
+      <p:nvGrpSpPr>
+        <p:cNvPr id="1" name=""/>
+        <p:cNvGrpSpPr/>
+        <p:nvPr/>
+      </p:nvGrpSpPr>
+      <p:grpSpPr>
+        <a:xfrm>
+          <a:off x="0" y="0"/>
+          <a:ext cx="0" cy="0"/>
+          <a:chOff x="0" y="0"/>
+          <a:chExt cx="0" cy="0"/>
+        </a:xfrm>
+      </p:grpSpPr>
+      <p:sp>
+        <p:nvSpPr>
+          <p:cNvPr id="2" name="Slide Image Placeholder 1"/>
+          <p:cNvSpPr>
+            <a:spLocks noGrp="1"/>
+          </p:cNvSpPr>
+          <p:nvPr>
+            <p:ph type="sldImg" idx="2"/>
+          </p:nvPr>
+        </p:nvSpPr>
+        <p:spPr/>
+      </p:sp>
+      <p:sp>
+        <p:nvSpPr>
+          <p:cNvPr id="3" name="Notes Placeholder 2"/>
+          <p:cNvSpPr>
+            <a:spLocks noGrp="1"/>
+          </p:cNvSpPr>
+          <p:nvPr>
+            <p:ph type="body" idx="3" sz="quarter"/>
+          </p:nvPr>
+        </p:nvSpPr>
+        <p:spPr/>
+        <p:txBody>
+          <a:bodyPr/>
+          <a:lstStyle/>
+          <a:p>
+            <a:r>
+              <a:t>The spread correction changed the details but not the core story. beta_1 is still negative and significant (from buffer-ratio spec). The threshold is still at 13%. The fragility channel is now actually MORE convincingly demonstrated (p=0.019 vs p=0.055 before). The main casualty is the LSTAR sharpness claim and the event study — both weaker now, but the professor was already skeptical of the event study.</a:t>
+            </a:r>
+          </a:p>
+        </p:txBody>
+      </p:sp>
+      <p:sp>
+        <p:nvSpPr>
+          <p:cNvPr id="4" name="Slide Number Placeholder 3"/>
+          <p:cNvSpPr>
+            <a:spLocks noGrp="1"/>
+          </p:cNvSpPr>
+          <p:nvPr>
+            <p:ph type="sldNum" idx="5" sz="quarter"/>
           </p:nvPr>
         </p:nvSpPr>
         <p:spPr/>
@@ -664,9 +860,10 @@
           <a:lstStyle/>
           <a:p>
             <a:r>
-              <a:rPr lang="en-US"/>
+              <a:rPr lang="en-US" smtClean="0"/>
               <a:t>Click to edit Master title style</a:t>
             </a:r>
+            <a:endParaRPr lang="en-US"/>
           </a:p>
         </p:txBody>
       </p:sp>
@@ -782,9 +979,10 @@
           </a:lstStyle>
           <a:p>
             <a:r>
-              <a:rPr lang="en-US"/>
+              <a:rPr lang="en-US" smtClean="0"/>
               <a:t>Click to edit Master subtitle style</a:t>
             </a:r>
+            <a:endParaRPr lang="en-US"/>
           </a:p>
         </p:txBody>
       </p:sp>
@@ -805,7 +1003,7 @@
           <a:p>
             <a:fld id="{5BCAD085-E8A6-8845-BD4E-CB4CCA059FC4}" type="datetimeFigureOut">
               <a:rPr lang="en-US" smtClean="0"/>
-              <a:t>6/2/26</a:t>
+              <a:t>1/27/13</a:t>
             </a:fld>
             <a:endParaRPr lang="en-US"/>
           </a:p>
@@ -899,9 +1097,10 @@
           <a:lstStyle/>
           <a:p>
             <a:r>
-              <a:rPr lang="en-US"/>
+              <a:rPr lang="en-US" smtClean="0"/>
               <a:t>Click to edit Master title style</a:t>
             </a:r>
+            <a:endParaRPr lang="en-US"/>
           </a:p>
         </p:txBody>
       </p:sp>
@@ -922,37 +1121,38 @@
           <a:p>
             <a:pPr lvl="0"/>
             <a:r>
-              <a:rPr lang="en-US"/>
+              <a:rPr lang="en-US" smtClean="0"/>
               <a:t>Click to edit Master text styles</a:t>
             </a:r>
           </a:p>
           <a:p>
             <a:pPr lvl="1"/>
             <a:r>
-              <a:rPr lang="en-US"/>
+              <a:rPr lang="en-US" smtClean="0"/>
               <a:t>Second level</a:t>
             </a:r>
           </a:p>
           <a:p>
             <a:pPr lvl="2"/>
             <a:r>
-              <a:rPr lang="en-US"/>
+              <a:rPr lang="en-US" smtClean="0"/>
               <a:t>Third level</a:t>
             </a:r>
           </a:p>
           <a:p>
             <a:pPr lvl="3"/>
             <a:r>
-              <a:rPr lang="en-US"/>
+              <a:rPr lang="en-US" smtClean="0"/>
               <a:t>Fourth level</a:t>
             </a:r>
           </a:p>
           <a:p>
             <a:pPr lvl="4"/>
             <a:r>
-              <a:rPr lang="en-US"/>
+              <a:rPr lang="en-US" smtClean="0"/>
               <a:t>Fifth level</a:t>
             </a:r>
+            <a:endParaRPr lang="en-US"/>
           </a:p>
         </p:txBody>
       </p:sp>
@@ -973,7 +1173,7 @@
           <a:p>
             <a:fld id="{5BCAD085-E8A6-8845-BD4E-CB4CCA059FC4}" type="datetimeFigureOut">
               <a:rPr lang="en-US" smtClean="0"/>
-              <a:t>6/2/26</a:t>
+              <a:t>1/27/13</a:t>
             </a:fld>
             <a:endParaRPr lang="en-US"/>
           </a:p>
@@ -1072,9 +1272,10 @@
           <a:lstStyle/>
           <a:p>
             <a:r>
-              <a:rPr lang="en-US"/>
+              <a:rPr lang="en-US" smtClean="0"/>
               <a:t>Click to edit Master title style</a:t>
             </a:r>
+            <a:endParaRPr lang="en-US"/>
           </a:p>
         </p:txBody>
       </p:sp>
@@ -1100,37 +1301,38 @@
           <a:p>
             <a:pPr lvl="0"/>
             <a:r>
-              <a:rPr lang="en-US"/>
+              <a:rPr lang="en-US" smtClean="0"/>
               <a:t>Click to edit Master text styles</a:t>
             </a:r>
           </a:p>
           <a:p>
             <a:pPr lvl="1"/>
             <a:r>
-              <a:rPr lang="en-US"/>
+              <a:rPr lang="en-US" smtClean="0"/>
               <a:t>Second level</a:t>
             </a:r>
           </a:p>
           <a:p>
             <a:pPr lvl="2"/>
             <a:r>
-              <a:rPr lang="en-US"/>
+              <a:rPr lang="en-US" smtClean="0"/>
               <a:t>Third level</a:t>
             </a:r>
           </a:p>
           <a:p>
             <a:pPr lvl="3"/>
             <a:r>
-              <a:rPr lang="en-US"/>
+              <a:rPr lang="en-US" smtClean="0"/>
               <a:t>Fourth level</a:t>
             </a:r>
           </a:p>
           <a:p>
             <a:pPr lvl="4"/>
             <a:r>
-              <a:rPr lang="en-US"/>
+              <a:rPr lang="en-US" smtClean="0"/>
               <a:t>Fifth level</a:t>
             </a:r>
+            <a:endParaRPr lang="en-US"/>
           </a:p>
         </p:txBody>
       </p:sp>
@@ -1151,7 +1353,7 @@
           <a:p>
             <a:fld id="{5BCAD085-E8A6-8845-BD4E-CB4CCA059FC4}" type="datetimeFigureOut">
               <a:rPr lang="en-US" smtClean="0"/>
-              <a:t>6/2/26</a:t>
+              <a:t>1/27/13</a:t>
             </a:fld>
             <a:endParaRPr lang="en-US"/>
           </a:p>
@@ -1245,9 +1447,10 @@
           <a:lstStyle/>
           <a:p>
             <a:r>
-              <a:rPr lang="en-US"/>
+              <a:rPr lang="en-US" smtClean="0"/>
               <a:t>Click to edit Master title style</a:t>
             </a:r>
+            <a:endParaRPr lang="en-US"/>
           </a:p>
         </p:txBody>
       </p:sp>
@@ -1268,37 +1471,38 @@
           <a:p>
             <a:pPr lvl="0"/>
             <a:r>
-              <a:rPr lang="en-US"/>
+              <a:rPr lang="en-US" smtClean="0"/>
               <a:t>Click to edit Master text styles</a:t>
             </a:r>
           </a:p>
           <a:p>
             <a:pPr lvl="1"/>
             <a:r>
-              <a:rPr lang="en-US"/>
+              <a:rPr lang="en-US" smtClean="0"/>
               <a:t>Second level</a:t>
             </a:r>
           </a:p>
           <a:p>
             <a:pPr lvl="2"/>
             <a:r>
-              <a:rPr lang="en-US"/>
+              <a:rPr lang="en-US" smtClean="0"/>
               <a:t>Third level</a:t>
             </a:r>
           </a:p>
           <a:p>
             <a:pPr lvl="3"/>
             <a:r>
-              <a:rPr lang="en-US"/>
+              <a:rPr lang="en-US" smtClean="0"/>
               <a:t>Fourth level</a:t>
             </a:r>
           </a:p>
           <a:p>
             <a:pPr lvl="4"/>
             <a:r>
-              <a:rPr lang="en-US"/>
+              <a:rPr lang="en-US" smtClean="0"/>
               <a:t>Fifth level</a:t>
             </a:r>
+            <a:endParaRPr lang="en-US"/>
           </a:p>
         </p:txBody>
       </p:sp>
@@ -1319,7 +1523,7 @@
           <a:p>
             <a:fld id="{5BCAD085-E8A6-8845-BD4E-CB4CCA059FC4}" type="datetimeFigureOut">
               <a:rPr lang="en-US" smtClean="0"/>
-              <a:t>6/2/26</a:t>
+              <a:t>1/27/13</a:t>
             </a:fld>
             <a:endParaRPr lang="en-US"/>
           </a:p>
@@ -1422,9 +1626,10 @@
           </a:lstStyle>
           <a:p>
             <a:r>
-              <a:rPr lang="en-US"/>
+              <a:rPr lang="en-US" smtClean="0"/>
               <a:t>Click to edit Master title style</a:t>
             </a:r>
+            <a:endParaRPr lang="en-US"/>
           </a:p>
         </p:txBody>
       </p:sp>
@@ -1541,7 +1746,7 @@
           <a:p>
             <a:pPr lvl="0"/>
             <a:r>
-              <a:rPr lang="en-US"/>
+              <a:rPr lang="en-US" smtClean="0"/>
               <a:t>Click to edit Master text styles</a:t>
             </a:r>
           </a:p>
@@ -1564,7 +1769,7 @@
           <a:p>
             <a:fld id="{5BCAD085-E8A6-8845-BD4E-CB4CCA059FC4}" type="datetimeFigureOut">
               <a:rPr lang="en-US" smtClean="0"/>
-              <a:t>6/2/26</a:t>
+              <a:t>1/27/13</a:t>
             </a:fld>
             <a:endParaRPr lang="en-US"/>
           </a:p>
@@ -1658,9 +1863,10 @@
           <a:lstStyle/>
           <a:p>
             <a:r>
-              <a:rPr lang="en-US"/>
+              <a:rPr lang="en-US" smtClean="0"/>
               <a:t>Click to edit Master title style</a:t>
             </a:r>
+            <a:endParaRPr lang="en-US"/>
           </a:p>
         </p:txBody>
       </p:sp>
@@ -1714,37 +1920,38 @@
           <a:p>
             <a:pPr lvl="0"/>
             <a:r>
-              <a:rPr lang="en-US"/>
+              <a:rPr lang="en-US" smtClean="0"/>
               <a:t>Click to edit Master text styles</a:t>
             </a:r>
           </a:p>
           <a:p>
             <a:pPr lvl="1"/>
             <a:r>
-              <a:rPr lang="en-US"/>
+              <a:rPr lang="en-US" smtClean="0"/>
               <a:t>Second level</a:t>
             </a:r>
           </a:p>
           <a:p>
             <a:pPr lvl="2"/>
             <a:r>
-              <a:rPr lang="en-US"/>
+              <a:rPr lang="en-US" smtClean="0"/>
               <a:t>Third level</a:t>
             </a:r>
           </a:p>
           <a:p>
             <a:pPr lvl="3"/>
             <a:r>
-              <a:rPr lang="en-US"/>
+              <a:rPr lang="en-US" smtClean="0"/>
               <a:t>Fourth level</a:t>
             </a:r>
           </a:p>
           <a:p>
             <a:pPr lvl="4"/>
             <a:r>
-              <a:rPr lang="en-US"/>
+              <a:rPr lang="en-US" smtClean="0"/>
               <a:t>Fifth level</a:t>
             </a:r>
+            <a:endParaRPr lang="en-US"/>
           </a:p>
         </p:txBody>
       </p:sp>
@@ -1798,37 +2005,38 @@
           <a:p>
             <a:pPr lvl="0"/>
             <a:r>
-              <a:rPr lang="en-US"/>
+              <a:rPr lang="en-US" smtClean="0"/>
               <a:t>Click to edit Master text styles</a:t>
             </a:r>
           </a:p>
           <a:p>
             <a:pPr lvl="1"/>
             <a:r>
-              <a:rPr lang="en-US"/>
+              <a:rPr lang="en-US" smtClean="0"/>
               <a:t>Second level</a:t>
             </a:r>
           </a:p>
           <a:p>
             <a:pPr lvl="2"/>
             <a:r>
-              <a:rPr lang="en-US"/>
+              <a:rPr lang="en-US" smtClean="0"/>
               <a:t>Third level</a:t>
             </a:r>
           </a:p>
           <a:p>
             <a:pPr lvl="3"/>
             <a:r>
-              <a:rPr lang="en-US"/>
+              <a:rPr lang="en-US" smtClean="0"/>
               <a:t>Fourth level</a:t>
             </a:r>
           </a:p>
           <a:p>
             <a:pPr lvl="4"/>
             <a:r>
-              <a:rPr lang="en-US"/>
+              <a:rPr lang="en-US" smtClean="0"/>
               <a:t>Fifth level</a:t>
             </a:r>
+            <a:endParaRPr lang="en-US"/>
           </a:p>
         </p:txBody>
       </p:sp>
@@ -1849,7 +2057,7 @@
           <a:p>
             <a:fld id="{5BCAD085-E8A6-8845-BD4E-CB4CCA059FC4}" type="datetimeFigureOut">
               <a:rPr lang="en-US" smtClean="0"/>
-              <a:t>6/2/26</a:t>
+              <a:t>1/27/13</a:t>
             </a:fld>
             <a:endParaRPr lang="en-US"/>
           </a:p>
@@ -1947,9 +2155,10 @@
           </a:lstStyle>
           <a:p>
             <a:r>
-              <a:rPr lang="en-US"/>
+              <a:rPr lang="en-US" smtClean="0"/>
               <a:t>Click to edit Master title style</a:t>
             </a:r>
+            <a:endParaRPr lang="en-US"/>
           </a:p>
         </p:txBody>
       </p:sp>
@@ -2012,7 +2221,7 @@
           <a:p>
             <a:pPr lvl="0"/>
             <a:r>
-              <a:rPr lang="en-US"/>
+              <a:rPr lang="en-US" smtClean="0"/>
               <a:t>Click to edit Master text styles</a:t>
             </a:r>
           </a:p>
@@ -2068,37 +2277,38 @@
           <a:p>
             <a:pPr lvl="0"/>
             <a:r>
-              <a:rPr lang="en-US"/>
+              <a:rPr lang="en-US" smtClean="0"/>
               <a:t>Click to edit Master text styles</a:t>
             </a:r>
           </a:p>
           <a:p>
             <a:pPr lvl="1"/>
             <a:r>
-              <a:rPr lang="en-US"/>
+              <a:rPr lang="en-US" smtClean="0"/>
               <a:t>Second level</a:t>
             </a:r>
           </a:p>
           <a:p>
             <a:pPr lvl="2"/>
             <a:r>
-              <a:rPr lang="en-US"/>
+              <a:rPr lang="en-US" smtClean="0"/>
               <a:t>Third level</a:t>
             </a:r>
           </a:p>
           <a:p>
             <a:pPr lvl="3"/>
             <a:r>
-              <a:rPr lang="en-US"/>
+              <a:rPr lang="en-US" smtClean="0"/>
               <a:t>Fourth level</a:t>
             </a:r>
           </a:p>
           <a:p>
             <a:pPr lvl="4"/>
             <a:r>
-              <a:rPr lang="en-US"/>
+              <a:rPr lang="en-US" smtClean="0"/>
               <a:t>Fifth level</a:t>
             </a:r>
+            <a:endParaRPr lang="en-US"/>
           </a:p>
         </p:txBody>
       </p:sp>
@@ -2161,7 +2371,7 @@
           <a:p>
             <a:pPr lvl="0"/>
             <a:r>
-              <a:rPr lang="en-US"/>
+              <a:rPr lang="en-US" smtClean="0"/>
               <a:t>Click to edit Master text styles</a:t>
             </a:r>
           </a:p>
@@ -2217,37 +2427,38 @@
           <a:p>
             <a:pPr lvl="0"/>
             <a:r>
-              <a:rPr lang="en-US"/>
+              <a:rPr lang="en-US" smtClean="0"/>
               <a:t>Click to edit Master text styles</a:t>
             </a:r>
           </a:p>
           <a:p>
             <a:pPr lvl="1"/>
             <a:r>
-              <a:rPr lang="en-US"/>
+              <a:rPr lang="en-US" smtClean="0"/>
               <a:t>Second level</a:t>
             </a:r>
           </a:p>
           <a:p>
             <a:pPr lvl="2"/>
             <a:r>
-              <a:rPr lang="en-US"/>
+              <a:rPr lang="en-US" smtClean="0"/>
               <a:t>Third level</a:t>
             </a:r>
           </a:p>
           <a:p>
             <a:pPr lvl="3"/>
             <a:r>
-              <a:rPr lang="en-US"/>
+              <a:rPr lang="en-US" smtClean="0"/>
               <a:t>Fourth level</a:t>
             </a:r>
           </a:p>
           <a:p>
             <a:pPr lvl="4"/>
             <a:r>
-              <a:rPr lang="en-US"/>
+              <a:rPr lang="en-US" smtClean="0"/>
               <a:t>Fifth level</a:t>
             </a:r>
+            <a:endParaRPr lang="en-US"/>
           </a:p>
         </p:txBody>
       </p:sp>
@@ -2268,7 +2479,7 @@
           <a:p>
             <a:fld id="{5BCAD085-E8A6-8845-BD4E-CB4CCA059FC4}" type="datetimeFigureOut">
               <a:rPr lang="en-US" smtClean="0"/>
-              <a:t>6/2/26</a:t>
+              <a:t>1/27/13</a:t>
             </a:fld>
             <a:endParaRPr lang="en-US"/>
           </a:p>
@@ -2362,9 +2573,10 @@
           <a:lstStyle/>
           <a:p>
             <a:r>
-              <a:rPr lang="en-US"/>
+              <a:rPr lang="en-US" smtClean="0"/>
               <a:t>Click to edit Master title style</a:t>
             </a:r>
+            <a:endParaRPr lang="en-US"/>
           </a:p>
         </p:txBody>
       </p:sp>
@@ -2385,7 +2597,7 @@
           <a:p>
             <a:fld id="{5BCAD085-E8A6-8845-BD4E-CB4CCA059FC4}" type="datetimeFigureOut">
               <a:rPr lang="en-US" smtClean="0"/>
-              <a:t>6/2/26</a:t>
+              <a:t>1/27/13</a:t>
             </a:fld>
             <a:endParaRPr lang="en-US"/>
           </a:p>
@@ -2480,7 +2692,7 @@
           <a:p>
             <a:fld id="{5BCAD085-E8A6-8845-BD4E-CB4CCA059FC4}" type="datetimeFigureOut">
               <a:rPr lang="en-US" smtClean="0"/>
-              <a:t>6/2/26</a:t>
+              <a:t>1/27/13</a:t>
             </a:fld>
             <a:endParaRPr lang="en-US"/>
           </a:p>
@@ -2583,9 +2795,10 @@
           </a:lstStyle>
           <a:p>
             <a:r>
-              <a:rPr lang="en-US"/>
+              <a:rPr lang="en-US" smtClean="0"/>
               <a:t>Click to edit Master title style</a:t>
             </a:r>
+            <a:endParaRPr lang="en-US"/>
           </a:p>
         </p:txBody>
       </p:sp>
@@ -2639,37 +2852,38 @@
           <a:p>
             <a:pPr lvl="0"/>
             <a:r>
-              <a:rPr lang="en-US"/>
+              <a:rPr lang="en-US" smtClean="0"/>
               <a:t>Click to edit Master text styles</a:t>
             </a:r>
           </a:p>
           <a:p>
             <a:pPr lvl="1"/>
             <a:r>
-              <a:rPr lang="en-US"/>
+              <a:rPr lang="en-US" smtClean="0"/>
               <a:t>Second level</a:t>
             </a:r>
           </a:p>
           <a:p>
             <a:pPr lvl="2"/>
             <a:r>
-              <a:rPr lang="en-US"/>
+              <a:rPr lang="en-US" smtClean="0"/>
               <a:t>Third level</a:t>
             </a:r>
           </a:p>
           <a:p>
             <a:pPr lvl="3"/>
             <a:r>
-              <a:rPr lang="en-US"/>
+              <a:rPr lang="en-US" smtClean="0"/>
               <a:t>Fourth level</a:t>
             </a:r>
           </a:p>
           <a:p>
             <a:pPr lvl="4"/>
             <a:r>
-              <a:rPr lang="en-US"/>
+              <a:rPr lang="en-US" smtClean="0"/>
               <a:t>Fifth level</a:t>
             </a:r>
+            <a:endParaRPr lang="en-US"/>
           </a:p>
         </p:txBody>
       </p:sp>
@@ -2732,7 +2946,7 @@
           <a:p>
             <a:pPr lvl="0"/>
             <a:r>
-              <a:rPr lang="en-US"/>
+              <a:rPr lang="en-US" smtClean="0"/>
               <a:t>Click to edit Master text styles</a:t>
             </a:r>
           </a:p>
@@ -2755,7 +2969,7 @@
           <a:p>
             <a:fld id="{5BCAD085-E8A6-8845-BD4E-CB4CCA059FC4}" type="datetimeFigureOut">
               <a:rPr lang="en-US" smtClean="0"/>
-              <a:t>6/2/26</a:t>
+              <a:t>1/27/13</a:t>
             </a:fld>
             <a:endParaRPr lang="en-US"/>
           </a:p>
@@ -2858,9 +3072,10 @@
           </a:lstStyle>
           <a:p>
             <a:r>
-              <a:rPr lang="en-US"/>
+              <a:rPr lang="en-US" smtClean="0"/>
               <a:t>Click to edit Master title style</a:t>
             </a:r>
+            <a:endParaRPr lang="en-US"/>
           </a:p>
         </p:txBody>
       </p:sp>
@@ -2984,7 +3199,7 @@
           <a:p>
             <a:pPr lvl="0"/>
             <a:r>
-              <a:rPr lang="en-US"/>
+              <a:rPr lang="en-US" smtClean="0"/>
               <a:t>Click to edit Master text styles</a:t>
             </a:r>
           </a:p>
@@ -3007,7 +3222,7 @@
           <a:p>
             <a:fld id="{5BCAD085-E8A6-8845-BD4E-CB4CCA059FC4}" type="datetimeFigureOut">
               <a:rPr lang="en-US" smtClean="0"/>
-              <a:t>6/2/26</a:t>
+              <a:t>1/27/13</a:t>
             </a:fld>
             <a:endParaRPr lang="en-US"/>
           </a:p>
@@ -3116,9 +3331,10 @@
           <a:lstStyle/>
           <a:p>
             <a:r>
-              <a:rPr lang="en-US"/>
+              <a:rPr lang="en-US" smtClean="0"/>
               <a:t>Click to edit Master title style</a:t>
             </a:r>
+            <a:endParaRPr lang="en-US"/>
           </a:p>
         </p:txBody>
       </p:sp>
@@ -3149,37 +3365,38 @@
           <a:p>
             <a:pPr lvl="0"/>
             <a:r>
-              <a:rPr lang="en-US"/>
+              <a:rPr lang="en-US" smtClean="0"/>
               <a:t>Click to edit Master text styles</a:t>
             </a:r>
           </a:p>
           <a:p>
             <a:pPr lvl="1"/>
             <a:r>
-              <a:rPr lang="en-US"/>
+              <a:rPr lang="en-US" smtClean="0"/>
               <a:t>Second level</a:t>
             </a:r>
           </a:p>
           <a:p>
             <a:pPr lvl="2"/>
             <a:r>
-              <a:rPr lang="en-US"/>
+              <a:rPr lang="en-US" smtClean="0"/>
               <a:t>Third level</a:t>
             </a:r>
           </a:p>
           <a:p>
             <a:pPr lvl="3"/>
             <a:r>
-              <a:rPr lang="en-US"/>
+              <a:rPr lang="en-US" smtClean="0"/>
               <a:t>Fourth level</a:t>
             </a:r>
           </a:p>
           <a:p>
             <a:pPr lvl="4"/>
             <a:r>
-              <a:rPr lang="en-US"/>
+              <a:rPr lang="en-US" smtClean="0"/>
               <a:t>Fifth level</a:t>
             </a:r>
+            <a:endParaRPr lang="en-US"/>
           </a:p>
         </p:txBody>
       </p:sp>
@@ -3218,7 +3435,7 @@
           <a:p>
             <a:fld id="{5BCAD085-E8A6-8845-BD4E-CB4CCA059FC4}" type="datetimeFigureOut">
               <a:rPr lang="en-US" smtClean="0"/>
-              <a:t>6/2/26</a:t>
+              <a:t>1/27/13</a:t>
             </a:fld>
             <a:endParaRPr lang="en-US"/>
           </a:p>
@@ -3577,103 +3794,44 @@
 </file>
 
 <file path=ppt/slides/slide1.xml><?xml version="1.0" encoding="utf-8"?>
-<p:sld xmlns:a="http://schemas.openxmlformats.org/drawingml/2006/main" xmlns:r="http://schemas.openxmlformats.org/officeDocument/2006/relationships" xmlns:p="http://schemas.openxmlformats.org/presentationml/2006/main">
+<p:sld xmlns:a="http://schemas.openxmlformats.org/drawingml/2006/main" xmlns:p="http://schemas.openxmlformats.org/presentationml/2006/main" xmlns:r="http://schemas.openxmlformats.org/officeDocument/2006/relationships">
   <p:cSld>
-    <p:bg>
-      <p:bgPr>
-        <a:solidFill>
-          <a:srgbClr val="002060"/>
-        </a:solidFill>
-        <a:effectLst/>
-      </p:bgPr>
-    </p:bg>
     <p:spTree>
       <p:nvGrpSpPr>
         <p:cNvPr id="1" name=""/>
         <p:cNvGrpSpPr/>
         <p:nvPr/>
       </p:nvGrpSpPr>
-      <p:grpSpPr>
-        <a:xfrm>
-          <a:off x="0" y="0"/>
-          <a:ext cx="0" cy="0"/>
-          <a:chOff x="0" y="0"/>
-          <a:chExt cx="0" cy="0"/>
-        </a:xfrm>
-      </p:grpSpPr>
-      <p:pic>
-        <p:nvPicPr>
-          <p:cNvPr id="3" name="그림 2" descr="원, 그래픽, 스크린샷, 그래픽 디자인이(가) 표시된 사진&#10;&#10;자동 생성된 설명"/>
-          <p:cNvPicPr>
-            <a:picLocks noChangeAspect="1"/>
-          </p:cNvPicPr>
-          <p:nvPr/>
-        </p:nvPicPr>
-        <p:blipFill>
-          <a:blip r:embed="rId3">
-            <a:lum bright="70000" contrast="-70000"/>
-            <a:extLst>
-              <a:ext uri="{BEBA8EAE-BF5A-486C-A8C5-ECC9F3942E4B}">
-                <a14:imgProps xmlns:a14="http://schemas.microsoft.com/office/drawing/2010/main">
-                  <a14:imgLayer r:embed="rId4">
-                    <a14:imgEffect>
-                      <a14:artisticPhotocopy detail="2"/>
-                    </a14:imgEffect>
-                  </a14:imgLayer>
-                </a14:imgProps>
-              </a:ext>
-              <a:ext uri="{28A0092B-C50C-407E-A947-70E740481C1C}">
-                <a14:useLocalDpi xmlns:a14="http://schemas.microsoft.com/office/drawing/2010/main" val="0"/>
-              </a:ext>
-            </a:extLst>
-          </a:blip>
-          <a:stretch>
-            <a:fillRect/>
-          </a:stretch>
-        </p:blipFill>
-        <p:spPr>
-          <a:xfrm>
-            <a:off x="0" y="890"/>
-            <a:ext cx="4809898" cy="6856214"/>
-          </a:xfrm>
-          <a:prstGeom prst="rect">
-            <a:avLst/>
-          </a:prstGeom>
-        </p:spPr>
-      </p:pic>
-      <p:sp>
-        <p:nvSpPr>
-          <p:cNvPr id="6" name="직사각형 5"/>
+      <p:grpSpPr/>
+      <p:sp>
+        <p:nvSpPr>
+          <p:cNvPr id="2" name="Rectangle 1"/>
           <p:cNvSpPr/>
           <p:nvPr/>
         </p:nvSpPr>
         <p:spPr>
           <a:xfrm>
-            <a:off x="-1" y="1879560"/>
-            <a:ext cx="12188826" cy="2576274"/>
+            <a:off x="0" y="0"/>
+            <a:ext cx="12188952" cy="6858000"/>
           </a:xfrm>
           <a:prstGeom prst="rect">
             <a:avLst/>
           </a:prstGeom>
           <a:solidFill>
-            <a:schemeClr val="tx1">
-              <a:alpha val="55000"/>
-            </a:schemeClr>
+            <a:srgbClr val="003087"/>
           </a:solidFill>
           <a:ln>
             <a:noFill/>
           </a:ln>
         </p:spPr>
         <p:style>
-          <a:lnRef idx="2">
-            <a:schemeClr val="accent1">
-              <a:shade val="15000"/>
-            </a:schemeClr>
+          <a:lnRef idx="1">
+            <a:schemeClr val="accent1"/>
           </a:lnRef>
-          <a:fillRef idx="1">
+          <a:fillRef idx="3">
             <a:schemeClr val="accent1"/>
           </a:fillRef>
-          <a:effectRef idx="0">
+          <a:effectRef idx="2">
             <a:schemeClr val="accent1"/>
           </a:effectRef>
           <a:fontRef idx="minor">
@@ -3684,110 +3842,381 @@
           <a:bodyPr rtlCol="0" anchor="ctr"/>
           <a:lstStyle/>
           <a:p>
-            <a:pPr algn="ctr" defTabSz="914400" latinLnBrk="1">
-              <a:defRPr/>
-            </a:pPr>
-            <a:r>
-              <a:rPr lang="en-US" altLang="ko-KR" sz="2400" dirty="0">
-                <a:solidFill>
-                  <a:prstClr val="white"/>
-                </a:solidFill>
-                <a:latin typeface="Hiragino Kaku Gothic Std W8" panose="020B0800000000000000" pitchFamily="34" charset="-128"/>
-                <a:ea typeface="Hiragino Kaku Gothic Std W8" panose="020B0800000000000000" pitchFamily="34" charset="-128"/>
-              </a:rPr>
-              <a:t>STABLECOINS AND THE EXORBITANT PRIVILEGE</a:t>
-            </a:r>
-          </a:p>
-          <a:p>
-            <a:pPr algn="ctr" defTabSz="914400" latinLnBrk="1">
-              <a:defRPr/>
-            </a:pPr>
-            <a:endParaRPr lang="ko-KR" altLang="en-US" sz="2400" dirty="0">
-              <a:solidFill>
-                <a:prstClr val="white"/>
-              </a:solidFill>
-              <a:latin typeface="Hiragino Kaku Gothic Std W8" panose="020B0800000000000000" pitchFamily="34" charset="-128"/>
-              <a:ea typeface="Malgun Gothic" panose="020B0503020000020004" pitchFamily="50" charset="-127"/>
-            </a:endParaRPr>
-          </a:p>
-        </p:txBody>
-      </p:sp>
-      <p:sp>
-        <p:nvSpPr>
-          <p:cNvPr id="11" name="TextBox 10"/>
-          <p:cNvSpPr txBox="1"/>
-          <p:nvPr/>
-        </p:nvSpPr>
-        <p:spPr>
-          <a:xfrm>
-            <a:off x="6094095" y="5560060"/>
-            <a:ext cx="5842635" cy="1200329"/>
-          </a:xfrm>
-          <a:prstGeom prst="rect">
-            <a:avLst/>
-          </a:prstGeom>
-          <a:noFill/>
-        </p:spPr>
-        <p:txBody>
-          <a:bodyPr wrap="square" rtlCol="0">
-            <a:spAutoFit/>
-          </a:bodyPr>
-          <a:lstStyle/>
-          <a:p>
-            <a:r>
-              <a:rPr lang="en-US" altLang="ko-KR" sz="1800" b="1" dirty="0">
-                <a:solidFill>
-                  <a:schemeClr val="bg1"/>
-                </a:solidFill>
-              </a:rPr>
-              <a:t>Yonsei GSIS 2026-1 </a:t>
-            </a:r>
-          </a:p>
-          <a:p>
-            <a:r>
-              <a:rPr lang="en-US" altLang="ko-KR" sz="1800" b="1" dirty="0">
-                <a:solidFill>
-                  <a:schemeClr val="bg1"/>
-                </a:solidFill>
-              </a:rPr>
-              <a:t>Topics in International Finance</a:t>
-            </a:r>
-            <a:endParaRPr lang="en-US" altLang="ko-KR" sz="1800" dirty="0">
-              <a:solidFill>
-                <a:schemeClr val="bg1"/>
-              </a:solidFill>
-            </a:endParaRPr>
-          </a:p>
-          <a:p>
-            <a:r>
-              <a:rPr lang="en-US" altLang="ko-KR" b="1" dirty="0">
+            <a:pPr algn="ctr"/>
+          </a:p>
+        </p:txBody>
+      </p:sp>
+      <p:sp>
+        <p:nvSpPr>
+          <p:cNvPr id="3" name="Rectangle 2"/>
+          <p:cNvSpPr/>
+          <p:nvPr/>
+        </p:nvSpPr>
+        <p:spPr>
+          <a:xfrm>
+            <a:off x="0" y="3291840"/>
+            <a:ext cx="12188952" cy="54864"/>
+          </a:xfrm>
+          <a:prstGeom prst="rect">
+            <a:avLst/>
+          </a:prstGeom>
+          <a:solidFill>
+            <a:srgbClr val="E87722"/>
+          </a:solidFill>
+          <a:ln>
+            <a:noFill/>
+          </a:ln>
+        </p:spPr>
+        <p:style>
+          <a:lnRef idx="1">
+            <a:schemeClr val="accent1"/>
+          </a:lnRef>
+          <a:fillRef idx="3">
+            <a:schemeClr val="accent1"/>
+          </a:fillRef>
+          <a:effectRef idx="2">
+            <a:schemeClr val="accent1"/>
+          </a:effectRef>
+          <a:fontRef idx="minor">
+            <a:schemeClr val="lt1"/>
+          </a:fontRef>
+        </p:style>
+        <p:txBody>
+          <a:bodyPr rtlCol="0" anchor="ctr"/>
+          <a:lstStyle/>
+          <a:p>
+            <a:pPr algn="ctr"/>
+          </a:p>
+        </p:txBody>
+      </p:sp>
+      <p:sp>
+        <p:nvSpPr>
+          <p:cNvPr id="4" name="TextBox 3"/>
+          <p:cNvSpPr txBox="1"/>
+          <p:nvPr/>
+        </p:nvSpPr>
+        <p:spPr>
+          <a:xfrm>
+            <a:off x="731520" y="1097280"/>
+            <a:ext cx="10698480" cy="914400"/>
+          </a:xfrm>
+          <a:prstGeom prst="rect">
+            <a:avLst/>
+          </a:prstGeom>
+          <a:noFill/>
+        </p:spPr>
+        <p:txBody>
+          <a:bodyPr wrap="square">
+            <a:spAutoFit/>
+          </a:bodyPr>
+          <a:lstStyle/>
+          <a:p>
+            <a:pPr algn="ctr"/>
+            <a:r>
+              <a:rPr sz="3400" b="1" i="0">
                 <a:solidFill>
                   <a:srgbClr val="FFFFFF"/>
                 </a:solidFill>
-              </a:rPr>
-              <a:t>Mireu Kim · Sara Chekroune · Oybek Ibragimov · e  Alexandre Godefroy · Baptiste Degand · </a:t>
-            </a:r>
-            <a:r>
-              <a:rPr lang="en-US" altLang="ko-KR" b="1" dirty="0" err="1">
+                <a:latin typeface="Calibri"/>
+              </a:rPr>
+              <a:t>Stablecoins and the Exorbitant Privilege</a:t>
+            </a:r>
+          </a:p>
+        </p:txBody>
+      </p:sp>
+      <p:sp>
+        <p:nvSpPr>
+          <p:cNvPr id="5" name="TextBox 4"/>
+          <p:cNvSpPr txBox="1"/>
+          <p:nvPr/>
+        </p:nvSpPr>
+        <p:spPr>
+          <a:xfrm>
+            <a:off x="731520" y="2194560"/>
+            <a:ext cx="10698480" cy="640080"/>
+          </a:xfrm>
+          <a:prstGeom prst="rect">
+            <a:avLst/>
+          </a:prstGeom>
+          <a:noFill/>
+        </p:spPr>
+        <p:txBody>
+          <a:bodyPr wrap="square">
+            <a:spAutoFit/>
+          </a:bodyPr>
+          <a:lstStyle/>
+          <a:p>
+            <a:pPr algn="ctr"/>
+            <a:r>
+              <a:rPr sz="2100" b="0" i="1">
+                <a:solidFill>
+                  <a:srgbClr val="E87722"/>
+                </a:solidFill>
+                <a:latin typeface="Calibri"/>
+              </a:rPr>
+              <a:t>Safe-Asset Demand and Its Systemic Fragility</a:t>
+            </a:r>
+          </a:p>
+        </p:txBody>
+      </p:sp>
+      <p:sp>
+        <p:nvSpPr>
+          <p:cNvPr id="6" name="TextBox 5"/>
+          <p:cNvSpPr txBox="1"/>
+          <p:nvPr/>
+        </p:nvSpPr>
+        <p:spPr>
+          <a:xfrm>
+            <a:off x="731520" y="3520440"/>
+            <a:ext cx="10698480" cy="640080"/>
+          </a:xfrm>
+          <a:prstGeom prst="rect">
+            <a:avLst/>
+          </a:prstGeom>
+          <a:noFill/>
+        </p:spPr>
+        <p:txBody>
+          <a:bodyPr wrap="square">
+            <a:spAutoFit/>
+          </a:bodyPr>
+          <a:lstStyle/>
+          <a:p>
+            <a:pPr algn="ctr"/>
+            <a:r>
+              <a:rPr sz="1300" b="0" i="0">
                 <a:solidFill>
                   <a:srgbClr val="FFFFFF"/>
                 </a:solidFill>
-              </a:rPr>
-              <a:t>Minjin</a:t>
-            </a:r>
-            <a:r>
-              <a:rPr lang="en-US" altLang="ko-KR" b="1" dirty="0">
+                <a:latin typeface="Calibri"/>
+              </a:rPr>
+              <a:t>Mireu Kim   Sara Chekroune   Oybek Ibragimov   Jade Zhu</a:t>
+            </a:r>
+          </a:p>
+        </p:txBody>
+      </p:sp>
+      <p:sp>
+        <p:nvSpPr>
+          <p:cNvPr id="7" name="TextBox 6"/>
+          <p:cNvSpPr txBox="1"/>
+          <p:nvPr/>
+        </p:nvSpPr>
+        <p:spPr>
+          <a:xfrm>
+            <a:off x="731520" y="3977639"/>
+            <a:ext cx="10698480" cy="502920"/>
+          </a:xfrm>
+          <a:prstGeom prst="rect">
+            <a:avLst/>
+          </a:prstGeom>
+          <a:noFill/>
+        </p:spPr>
+        <p:txBody>
+          <a:bodyPr wrap="square">
+            <a:spAutoFit/>
+          </a:bodyPr>
+          <a:lstStyle/>
+          <a:p>
+            <a:pPr algn="ctr"/>
+            <a:r>
+              <a:rPr sz="1300" b="0" i="0">
                 <a:solidFill>
                   <a:srgbClr val="FFFFFF"/>
                 </a:solidFill>
-              </a:rPr>
-              <a:t> Kim </a:t>
-            </a:r>
-            <a:endParaRPr lang="en-US" altLang="ko-KR" sz="1800" b="1" dirty="0">
-              <a:solidFill>
-                <a:srgbClr val="FFFFFF"/>
-              </a:solidFill>
-            </a:endParaRPr>
+                <a:latin typeface="Calibri"/>
+              </a:rPr>
+              <a:t>Alexandre Godefroy   Baptiste Degand   Minjin Kim</a:t>
+            </a:r>
+          </a:p>
+        </p:txBody>
+      </p:sp>
+      <p:sp>
+        <p:nvSpPr>
+          <p:cNvPr id="8" name="TextBox 7"/>
+          <p:cNvSpPr txBox="1"/>
+          <p:nvPr/>
+        </p:nvSpPr>
+        <p:spPr>
+          <a:xfrm>
+            <a:off x="731520" y="4663440"/>
+            <a:ext cx="10698480" cy="457200"/>
+          </a:xfrm>
+          <a:prstGeom prst="rect">
+            <a:avLst/>
+          </a:prstGeom>
+          <a:noFill/>
+        </p:spPr>
+        <p:txBody>
+          <a:bodyPr wrap="square">
+            <a:spAutoFit/>
+          </a:bodyPr>
+          <a:lstStyle/>
+          <a:p>
+            <a:pPr algn="ctr"/>
+            <a:r>
+              <a:rPr sz="1200" b="0" i="1">
+                <a:solidFill>
+                  <a:srgbClr val="E87722"/>
+                </a:solidFill>
+                <a:latin typeface="Calibri"/>
+              </a:rPr>
+              <a:t>Yonsei GSIS  |  Topics in International Finance  |  June 2026</a:t>
+            </a:r>
+          </a:p>
+        </p:txBody>
+      </p:sp>
+      <p:sp>
+        <p:nvSpPr>
+          <p:cNvPr id="9" name="Rectangle 8"/>
+          <p:cNvSpPr/>
+          <p:nvPr/>
+        </p:nvSpPr>
+        <p:spPr>
+          <a:xfrm>
+            <a:off x="2286000" y="5486400"/>
+            <a:ext cx="3200400" cy="731520"/>
+          </a:xfrm>
+          <a:prstGeom prst="rect">
+            <a:avLst/>
+          </a:prstGeom>
+          <a:solidFill>
+            <a:srgbClr val="002060"/>
+          </a:solidFill>
+          <a:ln>
+            <a:noFill/>
+          </a:ln>
+        </p:spPr>
+        <p:style>
+          <a:lnRef idx="1">
+            <a:schemeClr val="accent1"/>
+          </a:lnRef>
+          <a:fillRef idx="3">
+            <a:schemeClr val="accent1"/>
+          </a:fillRef>
+          <a:effectRef idx="2">
+            <a:schemeClr val="accent1"/>
+          </a:effectRef>
+          <a:fontRef idx="minor">
+            <a:schemeClr val="lt1"/>
+          </a:fontRef>
+        </p:style>
+        <p:txBody>
+          <a:bodyPr rtlCol="0" anchor="ctr"/>
+          <a:lstStyle/>
+          <a:p>
+            <a:pPr algn="ctr"/>
+          </a:p>
+        </p:txBody>
+      </p:sp>
+      <p:sp>
+        <p:nvSpPr>
+          <p:cNvPr id="10" name="TextBox 9"/>
+          <p:cNvSpPr txBox="1"/>
+          <p:nvPr/>
+        </p:nvSpPr>
+        <p:spPr>
+          <a:xfrm>
+            <a:off x="2286000" y="5486400"/>
+            <a:ext cx="3200400" cy="731520"/>
+          </a:xfrm>
+          <a:prstGeom prst="rect">
+            <a:avLst/>
+          </a:prstGeom>
+          <a:noFill/>
+        </p:spPr>
+        <p:txBody>
+          <a:bodyPr wrap="square">
+            <a:spAutoFit/>
+          </a:bodyPr>
+          <a:lstStyle/>
+          <a:p>
+            <a:pPr algn="ctr"/>
+            <a:r>
+              <a:rPr sz="1400" b="1" i="0">
+                <a:solidFill>
+                  <a:srgbClr val="E87722"/>
+                </a:solidFill>
+                <a:latin typeface="Calibri"/>
+              </a:rPr>
+              <a:t>β₁ = −7.57***  (p = 0.004)</a:t>
+            </a:r>
+          </a:p>
+        </p:txBody>
+      </p:sp>
+      <p:sp>
+        <p:nvSpPr>
+          <p:cNvPr id="11" name="Rectangle 10"/>
+          <p:cNvSpPr/>
+          <p:nvPr/>
+        </p:nvSpPr>
+        <p:spPr>
+          <a:xfrm>
+            <a:off x="6675120" y="5486400"/>
+            <a:ext cx="3200400" cy="731520"/>
+          </a:xfrm>
+          <a:prstGeom prst="rect">
+            <a:avLst/>
+          </a:prstGeom>
+          <a:solidFill>
+            <a:srgbClr val="002060"/>
+          </a:solidFill>
+          <a:ln>
+            <a:noFill/>
+          </a:ln>
+        </p:spPr>
+        <p:style>
+          <a:lnRef idx="1">
+            <a:schemeClr val="accent1"/>
+          </a:lnRef>
+          <a:fillRef idx="3">
+            <a:schemeClr val="accent1"/>
+          </a:fillRef>
+          <a:effectRef idx="2">
+            <a:schemeClr val="accent1"/>
+          </a:effectRef>
+          <a:fontRef idx="minor">
+            <a:schemeClr val="lt1"/>
+          </a:fontRef>
+        </p:style>
+        <p:txBody>
+          <a:bodyPr rtlCol="0" anchor="ctr"/>
+          <a:lstStyle/>
+          <a:p>
+            <a:pPr algn="ctr"/>
+          </a:p>
+        </p:txBody>
+      </p:sp>
+      <p:sp>
+        <p:nvSpPr>
+          <p:cNvPr id="12" name="TextBox 11"/>
+          <p:cNvSpPr txBox="1"/>
+          <p:nvPr/>
+        </p:nvSpPr>
+        <p:spPr>
+          <a:xfrm>
+            <a:off x="6675120" y="5486400"/>
+            <a:ext cx="3200400" cy="731520"/>
+          </a:xfrm>
+          <a:prstGeom prst="rect">
+            <a:avLst/>
+          </a:prstGeom>
+          <a:noFill/>
+        </p:spPr>
+        <p:txBody>
+          <a:bodyPr wrap="square">
+            <a:spAutoFit/>
+          </a:bodyPr>
+          <a:lstStyle/>
+          <a:p>
+            <a:pPr algn="ctr"/>
+            <a:r>
+              <a:rPr sz="1400" b="1" i="0">
+                <a:solidFill>
+                  <a:srgbClr val="E87722"/>
+                </a:solidFill>
+                <a:latin typeface="Calibri"/>
+              </a:rPr>
+              <a:t>q* = 13.0%  liquid buffer threshold</a:t>
+            </a:r>
           </a:p>
         </p:txBody>
       </p:sp>
@@ -3800,7 +4229,7 @@
 </file>
 
 <file path=ppt/slides/slide10.xml><?xml version="1.0" encoding="utf-8"?>
-<p:sld xmlns:a="http://schemas.openxmlformats.org/drawingml/2006/main" xmlns:r="http://schemas.openxmlformats.org/officeDocument/2006/relationships" xmlns:p="http://schemas.openxmlformats.org/presentationml/2006/main">
+<p:sld xmlns:a="http://schemas.openxmlformats.org/drawingml/2006/main" xmlns:p="http://schemas.openxmlformats.org/presentationml/2006/main" xmlns:r="http://schemas.openxmlformats.org/officeDocument/2006/relationships">
   <p:cSld>
     <p:spTree>
       <p:nvGrpSpPr>
@@ -3808,14 +4237,7 @@
         <p:cNvGrpSpPr/>
         <p:nvPr/>
       </p:nvGrpSpPr>
-      <p:grpSpPr>
-        <a:xfrm>
-          <a:off x="0" y="0"/>
-          <a:ext cx="0" cy="0"/>
-          <a:chOff x="0" y="0"/>
-          <a:chExt cx="0" cy="0"/>
-        </a:xfrm>
-      </p:grpSpPr>
+      <p:grpSpPr/>
       <p:sp>
         <p:nvSpPr>
           <p:cNvPr id="2" name="Rectangle 1"/>
@@ -3856,7 +4278,6 @@
           <a:lstStyle/>
           <a:p>
             <a:pPr algn="ctr"/>
-            <a:endParaRPr/>
           </a:p>
         </p:txBody>
       </p:sp>
@@ -3900,7 +4321,6 @@
           <a:lstStyle/>
           <a:p>
             <a:pPr algn="ctr"/>
-            <a:endParaRPr/>
           </a:p>
         </p:txBody>
       </p:sp>
@@ -4049,7 +4469,6 @@
           <a:lstStyle/>
           <a:p>
             <a:pPr algn="ctr"/>
-            <a:endParaRPr/>
           </a:p>
         </p:txBody>
       </p:sp>
@@ -4093,7 +4512,6 @@
           <a:lstStyle/>
           <a:p>
             <a:pPr algn="ctr"/>
-            <a:endParaRPr/>
           </a:p>
         </p:txBody>
       </p:sp>
@@ -4162,7 +4580,7 @@
                 </a:solidFill>
                 <a:latin typeface="Calibri"/>
               </a:rPr>
-              <a:t>β₁ = −6.02***</a:t>
+              <a:t>β₁ = −7.57***</a:t>
             </a:r>
           </a:p>
         </p:txBody>
@@ -4197,7 +4615,7 @@
                 </a:solidFill>
                 <a:latin typeface="Calibri"/>
               </a:rPr>
-              <a:t>p = 0.006</a:t>
+              <a:t>p = 0.004</a:t>
             </a:r>
           </a:p>
         </p:txBody>
@@ -4242,7 +4660,6 @@
           <a:lstStyle/>
           <a:p>
             <a:pPr algn="ctr"/>
-            <a:endParaRPr/>
           </a:p>
         </p:txBody>
       </p:sp>
@@ -4312,7 +4729,7 @@
                 <a:latin typeface="Calibri"/>
               </a:rPr>
               <a:t>Bootstrap CI
-[3.2%, 14.5%]</a:t>
+[3.1%, 14.5%]</a:t>
             </a:r>
           </a:p>
         </p:txBody>
@@ -4357,7 +4774,6 @@
           <a:lstStyle/>
           <a:p>
             <a:pPr algn="ctr"/>
-            <a:endParaRPr/>
           </a:p>
         </p:txBody>
       </p:sp>
@@ -4418,7 +4834,7 @@
         <p:spPr>
           <a:xfrm>
             <a:off x="274320" y="960120"/>
-            <a:ext cx="5303520" cy="2980024"/>
+            <a:ext cx="5303520" cy="2985153"/>
           </a:xfrm>
           <a:prstGeom prst="rect">
             <a:avLst/>
@@ -4444,27 +4860,9 @@
                 <a:tableStyleId>{5C22544A-7EE6-4342-B048-85BDC9FD1C3A}</a:tableStyleId>
               </a:tblPr>
               <a:tblGrid>
-                <a:gridCol w="2011680">
-                  <a:extLst>
-                    <a:ext uri="{9D8B030D-6E8A-4147-A177-3AD203B41FA5}">
-                      <a16:colId xmlns:a16="http://schemas.microsoft.com/office/drawing/2014/main" val="20000"/>
-                    </a:ext>
-                  </a:extLst>
-                </a:gridCol>
-                <a:gridCol w="3017520">
-                  <a:extLst>
-                    <a:ext uri="{9D8B030D-6E8A-4147-A177-3AD203B41FA5}">
-                      <a16:colId xmlns:a16="http://schemas.microsoft.com/office/drawing/2014/main" val="20001"/>
-                    </a:ext>
-                  </a:extLst>
-                </a:gridCol>
-                <a:gridCol w="2743200">
-                  <a:extLst>
-                    <a:ext uri="{9D8B030D-6E8A-4147-A177-3AD203B41FA5}">
-                      <a16:colId xmlns:a16="http://schemas.microsoft.com/office/drawing/2014/main" val="20002"/>
-                    </a:ext>
-                  </a:extLst>
-                </a:gridCol>
+                <a:gridCol w="2011680"/>
+                <a:gridCol w="3017520"/>
+                <a:gridCol w="2743200"/>
               </a:tblGrid>
               <a:tr h="403860">
                 <a:tc>
@@ -4473,7 +4871,15 @@
                     <a:lstStyle/>
                     <a:p>
                       <a:pPr algn="ctr"/>
-                      <a:endParaRPr/>
+                      <a:r>
+                        <a:rPr b="1" sz="1000">
+                          <a:solidFill>
+                            <a:srgbClr val="FFFFFF"/>
+                          </a:solidFill>
+                          <a:latin typeface="Calibri"/>
+                        </a:rPr>
+                        <a:t/>
+                      </a:r>
                     </a:p>
                   </a:txBody>
                   <a:tcPr>
@@ -4489,7 +4895,7 @@
                     <a:p>
                       <a:pPr algn="ctr"/>
                       <a:r>
-                        <a:rPr sz="1000" b="1">
+                        <a:rPr b="1" sz="1000">
                           <a:solidFill>
                             <a:srgbClr val="FFFFFF"/>
                           </a:solidFill>
@@ -4512,7 +4918,7 @@
                     <a:p>
                       <a:pPr algn="ctr"/>
                       <a:r>
-                        <a:rPr sz="1000" b="1">
+                        <a:rPr b="1" sz="1000">
                           <a:solidFill>
                             <a:srgbClr val="FFFFFF"/>
                           </a:solidFill>
@@ -4528,11 +4934,6 @@
                     </a:solidFill>
                   </a:tcPr>
                 </a:tc>
-                <a:extLst>
-                  <a:ext uri="{0D108BD9-81ED-4DB2-BD59-A6C34878D82A}">
-                    <a16:rowId xmlns:a16="http://schemas.microsoft.com/office/drawing/2014/main" val="10000"/>
-                  </a:ext>
-                </a:extLst>
               </a:tr>
               <a:tr h="403860">
                 <a:tc>
@@ -4571,7 +4972,7 @@
                           </a:solidFill>
                           <a:latin typeface="Calibri"/>
                         </a:rPr>
-                        <a:t>−6.97</a:t>
+                        <a:t>−2.80  (low-buffer)</a:t>
                       </a:r>
                     </a:p>
                   </a:txBody>
@@ -4594,7 +4995,7 @@
                           </a:solidFill>
                           <a:latin typeface="Calibri"/>
                         </a:rPr>
-                        <a:t>+1.26  ← SIGN FLIP</a:t>
+                        <a:t>+1.63  ← SIGN FLIP (high-buffer)</a:t>
                       </a:r>
                     </a:p>
                   </a:txBody>
@@ -4604,11 +5005,6 @@
                     </a:solidFill>
                   </a:tcPr>
                 </a:tc>
-                <a:extLst>
-                  <a:ext uri="{0D108BD9-81ED-4DB2-BD59-A6C34878D82A}">
-                    <a16:rowId xmlns:a16="http://schemas.microsoft.com/office/drawing/2014/main" val="10001"/>
-                  </a:ext>
-                </a:extLst>
               </a:tr>
               <a:tr h="403860">
                 <a:tc>
@@ -4647,7 +5043,7 @@
                           </a:solidFill>
                           <a:latin typeface="Calibri"/>
                         </a:rPr>
-                        <a:t>0.1301 (13.0%)</a:t>
+                        <a:t>0.1300 (13.0%)</a:t>
                       </a:r>
                     </a:p>
                   </a:txBody>
@@ -4680,11 +5076,6 @@
                     </a:solidFill>
                   </a:tcPr>
                 </a:tc>
-                <a:extLst>
-                  <a:ext uri="{0D108BD9-81ED-4DB2-BD59-A6C34878D82A}">
-                    <a16:rowId xmlns:a16="http://schemas.microsoft.com/office/drawing/2014/main" val="10002"/>
-                  </a:ext>
-                </a:extLst>
               </a:tr>
               <a:tr h="403860">
                 <a:tc>
@@ -4723,7 +5114,7 @@
                           </a:solidFill>
                           <a:latin typeface="Calibri"/>
                         </a:rPr>
-                        <a:t>0.1310 (13.1%)</a:t>
+                        <a:t>0.1490 (14.9%)</a:t>
                       </a:r>
                     </a:p>
                   </a:txBody>
@@ -4756,11 +5147,6 @@
                     </a:solidFill>
                   </a:tcPr>
                 </a:tc>
-                <a:extLst>
-                  <a:ext uri="{0D108BD9-81ED-4DB2-BD59-A6C34878D82A}">
-                    <a16:rowId xmlns:a16="http://schemas.microsoft.com/office/drawing/2014/main" val="10003"/>
-                  </a:ext>
-                </a:extLst>
               </a:tr>
               <a:tr h="403860">
                 <a:tc>
@@ -4799,7 +5185,7 @@
                           </a:solidFill>
                           <a:latin typeface="Calibri"/>
                         </a:rPr>
-                        <a:t>0.260 (suggestive)</a:t>
+                        <a:t>0.406 (suggestive)</a:t>
                       </a:r>
                     </a:p>
                   </a:txBody>
@@ -4832,11 +5218,6 @@
                     </a:solidFill>
                   </a:tcPr>
                 </a:tc>
-                <a:extLst>
-                  <a:ext uri="{0D108BD9-81ED-4DB2-BD59-A6C34878D82A}">
-                    <a16:rowId xmlns:a16="http://schemas.microsoft.com/office/drawing/2014/main" val="10004"/>
-                  </a:ext>
-                </a:extLst>
               </a:tr>
               <a:tr h="403860">
                 <a:tc>
@@ -4908,11 +5289,6 @@
                     </a:solidFill>
                   </a:tcPr>
                 </a:tc>
-                <a:extLst>
-                  <a:ext uri="{0D108BD9-81ED-4DB2-BD59-A6C34878D82A}">
-                    <a16:rowId xmlns:a16="http://schemas.microsoft.com/office/drawing/2014/main" val="10005"/>
-                  </a:ext>
-                </a:extLst>
               </a:tr>
             </a:tbl>
           </a:graphicData>
@@ -4958,7 +5334,6 @@
           <a:lstStyle/>
           <a:p>
             <a:pPr algn="ctr"/>
-            <a:endParaRPr/>
           </a:p>
         </p:txBody>
       </p:sp>
@@ -4986,15 +5361,16 @@
           <a:p>
             <a:pPr algn="l"/>
             <a:r>
-              <a:rPr sz="1000" b="0" i="0">
+              <a:rPr sz="950" b="0" i="0">
                 <a:solidFill>
                   <a:srgbClr val="222222"/>
                 </a:solidFill>
                 <a:latin typeface="Calibri"/>
               </a:rPr>
-              <a:t>Why p = 0.260?   N = 51 monthly obs.   Bootstrap
-distribution is wide — 90% CI [3.2%, 14.5%].
-Direction confirmed; magnitude suggestive.</a:t>
+              <a:t>Why p = 0.406?   N = 51 monthly obs.   Bootstrap
+distribution is wide — 90% CI [3.1%, 14.5%].
+Direction confirmed; magnitude suggestive.
+Regime betas: −2.80 (low) vs +1.63 (high) — sign still flips at 13%.</a:t>
             </a:r>
           </a:p>
         </p:txBody>
@@ -5039,7 +5415,6 @@
           <a:lstStyle/>
           <a:p>
             <a:pPr algn="ctr"/>
-            <a:endParaRPr/>
           </a:p>
         </p:txBody>
       </p:sp>
@@ -5073,8 +5448,7 @@
                 </a:solidFill>
                 <a:latin typeface="Calibri"/>
               </a:rPr>
-              <a:t>Hansen threshold at 13% replicated by independent LSTAR estimation (c* = 13.1%).
-Convergent validity across two methods strengthens our confidence.</a:t>
+              <a:t>Hansen threshold at 13% replicated by independent LSTAR estimation (c* = 14.9%).  Sign still flips: β = −2.80 (low) → +1.63 (high).  Convergent validity across two methods strengthens our confidence.</a:t>
             </a:r>
           </a:p>
         </p:txBody>
@@ -5088,7 +5462,7 @@
 </file>
 
 <file path=ppt/slides/slide11.xml><?xml version="1.0" encoding="utf-8"?>
-<p:sld xmlns:a="http://schemas.openxmlformats.org/drawingml/2006/main" xmlns:r="http://schemas.openxmlformats.org/officeDocument/2006/relationships" xmlns:p="http://schemas.openxmlformats.org/presentationml/2006/main">
+<p:sld xmlns:a="http://schemas.openxmlformats.org/drawingml/2006/main" xmlns:p="http://schemas.openxmlformats.org/presentationml/2006/main" xmlns:r="http://schemas.openxmlformats.org/officeDocument/2006/relationships">
   <p:cSld>
     <p:spTree>
       <p:nvGrpSpPr>
@@ -5096,14 +5470,7 @@
         <p:cNvGrpSpPr/>
         <p:nvPr/>
       </p:nvGrpSpPr>
-      <p:grpSpPr>
-        <a:xfrm>
-          <a:off x="0" y="0"/>
-          <a:ext cx="0" cy="0"/>
-          <a:chOff x="0" y="0"/>
-          <a:chExt cx="0" cy="0"/>
-        </a:xfrm>
-      </p:grpSpPr>
+      <p:grpSpPr/>
       <p:sp>
         <p:nvSpPr>
           <p:cNvPr id="2" name="Rectangle 1"/>
@@ -5144,7 +5511,6 @@
           <a:lstStyle/>
           <a:p>
             <a:pPr algn="ctr"/>
-            <a:endParaRPr/>
           </a:p>
         </p:txBody>
       </p:sp>
@@ -5188,7 +5554,6 @@
           <a:lstStyle/>
           <a:p>
             <a:pPr algn="ctr"/>
-            <a:endParaRPr/>
           </a:p>
         </p:txBody>
       </p:sp>
@@ -5337,7 +5702,6 @@
           <a:lstStyle/>
           <a:p>
             <a:pPr algn="ctr"/>
-            <a:endParaRPr/>
           </a:p>
         </p:txBody>
       </p:sp>
@@ -5381,7 +5745,6 @@
           <a:lstStyle/>
           <a:p>
             <a:pPr algn="ctr"/>
-            <a:endParaRPr/>
           </a:p>
         </p:txBody>
       </p:sp>
@@ -5450,7 +5813,7 @@
                 </a:solidFill>
                 <a:latin typeface="Calibri"/>
               </a:rPr>
-              <a:t>β₁ = −6.02***</a:t>
+              <a:t>β₁ = −7.57***</a:t>
             </a:r>
           </a:p>
         </p:txBody>
@@ -5485,7 +5848,7 @@
                 </a:solidFill>
                 <a:latin typeface="Calibri"/>
               </a:rPr>
-              <a:t>p = 0.006</a:t>
+              <a:t>p = 0.004</a:t>
             </a:r>
           </a:p>
         </p:txBody>
@@ -5530,7 +5893,6 @@
           <a:lstStyle/>
           <a:p>
             <a:pPr algn="ctr"/>
-            <a:endParaRPr/>
           </a:p>
         </p:txBody>
       </p:sp>
@@ -5600,7 +5962,7 @@
                 <a:latin typeface="Calibri"/>
               </a:rPr>
               <a:t>Bootstrap CI
-[3.2%, 14.5%]</a:t>
+[3.1%, 14.5%]</a:t>
             </a:r>
           </a:p>
         </p:txBody>
@@ -5645,7 +6007,6 @@
           <a:lstStyle/>
           <a:p>
             <a:pPr algn="ctr"/>
-            <a:endParaRPr/>
           </a:p>
         </p:txBody>
       </p:sp>
@@ -5741,7 +6102,7 @@
         <p:spPr>
           <a:xfrm>
             <a:off x="182880" y="1261872"/>
-            <a:ext cx="4846320" cy="2225131"/>
+            <a:ext cx="4846320" cy="2228442"/>
           </a:xfrm>
           <a:prstGeom prst="rect">
             <a:avLst/>
@@ -5847,7 +6208,6 @@
           <a:lstStyle/>
           <a:p>
             <a:pPr algn="ctr"/>
-            <a:endParaRPr/>
           </a:p>
         </p:txBody>
       </p:sp>
@@ -5881,7 +6241,7 @@
                 </a:solidFill>
                 <a:latin typeface="Calibri"/>
               </a:rPr>
-              <a:t>LUNA: spread barely moved — FOMC hike 5 days prior contaminates inference.
+              <a:t>LUNA: spread = 14.0 bps (corrected; was 70.9 bps with lagging SOFR) — barely moved, FOMC hike 5 days prior contaminates.
 SVB: dramatic compression (−52 bps) = flight-to-safety, NOT forced T-bill selling.</a:t>
             </a:r>
           </a:p>
@@ -5896,7 +6256,7 @@
 </file>
 
 <file path=ppt/slides/slide12.xml><?xml version="1.0" encoding="utf-8"?>
-<p:sld xmlns:a="http://schemas.openxmlformats.org/drawingml/2006/main" xmlns:r="http://schemas.openxmlformats.org/officeDocument/2006/relationships" xmlns:p="http://schemas.openxmlformats.org/presentationml/2006/main">
+<p:sld xmlns:a="http://schemas.openxmlformats.org/drawingml/2006/main" xmlns:p="http://schemas.openxmlformats.org/presentationml/2006/main" xmlns:r="http://schemas.openxmlformats.org/officeDocument/2006/relationships">
   <p:cSld>
     <p:spTree>
       <p:nvGrpSpPr>
@@ -5904,14 +6264,7 @@
         <p:cNvGrpSpPr/>
         <p:nvPr/>
       </p:nvGrpSpPr>
-      <p:grpSpPr>
-        <a:xfrm>
-          <a:off x="0" y="0"/>
-          <a:ext cx="0" cy="0"/>
-          <a:chOff x="0" y="0"/>
-          <a:chExt cx="0" cy="0"/>
-        </a:xfrm>
-      </p:grpSpPr>
+      <p:grpSpPr/>
       <p:sp>
         <p:nvSpPr>
           <p:cNvPr id="2" name="Rectangle 1"/>
@@ -5952,7 +6305,6 @@
           <a:lstStyle/>
           <a:p>
             <a:pPr algn="ctr"/>
-            <a:endParaRPr/>
           </a:p>
         </p:txBody>
       </p:sp>
@@ -5996,7 +6348,6 @@
           <a:lstStyle/>
           <a:p>
             <a:pPr algn="ctr"/>
-            <a:endParaRPr/>
           </a:p>
         </p:txBody>
       </p:sp>
@@ -6145,7 +6496,6 @@
           <a:lstStyle/>
           <a:p>
             <a:pPr algn="ctr"/>
-            <a:endParaRPr/>
           </a:p>
         </p:txBody>
       </p:sp>
@@ -6189,7 +6539,6 @@
           <a:lstStyle/>
           <a:p>
             <a:pPr algn="ctr"/>
-            <a:endParaRPr/>
           </a:p>
         </p:txBody>
       </p:sp>
@@ -6258,7 +6607,7 @@
                 </a:solidFill>
                 <a:latin typeface="Calibri"/>
               </a:rPr>
-              <a:t>β₁ = −6.02***</a:t>
+              <a:t>β₁ = −7.57***</a:t>
             </a:r>
           </a:p>
         </p:txBody>
@@ -6293,7 +6642,7 @@
                 </a:solidFill>
                 <a:latin typeface="Calibri"/>
               </a:rPr>
-              <a:t>p = 0.006</a:t>
+              <a:t>p = 0.004</a:t>
             </a:r>
           </a:p>
         </p:txBody>
@@ -6338,7 +6687,6 @@
           <a:lstStyle/>
           <a:p>
             <a:pPr algn="ctr"/>
-            <a:endParaRPr/>
           </a:p>
         </p:txBody>
       </p:sp>
@@ -6408,7 +6756,7 @@
                 <a:latin typeface="Calibri"/>
               </a:rPr>
               <a:t>Bootstrap CI
-[3.2%, 14.5%]</a:t>
+[3.1%, 14.5%]</a:t>
             </a:r>
           </a:p>
         </p:txBody>
@@ -6453,7 +6801,6 @@
           <a:lstStyle/>
           <a:p>
             <a:pPr algn="ctr"/>
-            <a:endParaRPr/>
           </a:p>
         </p:txBody>
       </p:sp>
@@ -6507,7 +6854,7 @@
         </p:nvGraphicFramePr>
         <p:xfrm>
           <a:off x="274320" y="960120"/>
-          <a:ext cx="9052560" cy="3200400"/>
+          <a:ext cx="8961120" cy="2926080"/>
         </p:xfrm>
         <a:graphic>
           <a:graphicData uri="http://schemas.openxmlformats.org/drawingml/2006/table">
@@ -6516,36 +6863,13 @@
                 <a:tableStyleId>{5C22544A-7EE6-4342-B048-85BDC9FD1C3A}</a:tableStyleId>
               </a:tblPr>
               <a:tblGrid>
-                <a:gridCol w="1645920">
-                  <a:extLst>
-                    <a:ext uri="{9D8B030D-6E8A-4147-A177-3AD203B41FA5}">
-                      <a16:colId xmlns:a16="http://schemas.microsoft.com/office/drawing/2014/main" val="20000"/>
-                    </a:ext>
-                  </a:extLst>
-                </a:gridCol>
-                <a:gridCol w="1828800">
-                  <a:extLst>
-                    <a:ext uri="{9D8B030D-6E8A-4147-A177-3AD203B41FA5}">
-                      <a16:colId xmlns:a16="http://schemas.microsoft.com/office/drawing/2014/main" val="20001"/>
-                    </a:ext>
-                  </a:extLst>
-                </a:gridCol>
-                <a:gridCol w="2286000">
-                  <a:extLst>
-                    <a:ext uri="{9D8B030D-6E8A-4147-A177-3AD203B41FA5}">
-                      <a16:colId xmlns:a16="http://schemas.microsoft.com/office/drawing/2014/main" val="20002"/>
-                    </a:ext>
-                  </a:extLst>
-                </a:gridCol>
-                <a:gridCol w="3291840">
-                  <a:extLst>
-                    <a:ext uri="{9D8B030D-6E8A-4147-A177-3AD203B41FA5}">
-                      <a16:colId xmlns:a16="http://schemas.microsoft.com/office/drawing/2014/main" val="20003"/>
-                    </a:ext>
-                  </a:extLst>
-                </a:gridCol>
+                <a:gridCol w="1280160"/>
+                <a:gridCol w="1828800"/>
+                <a:gridCol w="1920240"/>
+                <a:gridCol w="914400"/>
+                <a:gridCol w="3017520"/>
               </a:tblGrid>
-              <a:tr h="457200">
+              <a:tr h="487680">
                 <a:tc>
                   <a:txBody>
                     <a:bodyPr/>
@@ -6553,7 +6877,7 @@
                     <a:p>
                       <a:pPr algn="ctr"/>
                       <a:r>
-                        <a:rPr sz="1000" b="1">
+                        <a:rPr b="1" sz="1000">
                           <a:solidFill>
                             <a:srgbClr val="FFFFFF"/>
                           </a:solidFill>
@@ -6576,7 +6900,7 @@
                     <a:p>
                       <a:pPr algn="ctr"/>
                       <a:r>
-                        <a:rPr sz="1000" b="1">
+                        <a:rPr b="1" sz="1000">
                           <a:solidFill>
                             <a:srgbClr val="FFFFFF"/>
                           </a:solidFill>
@@ -6599,7 +6923,7 @@
                     <a:p>
                       <a:pPr algn="ctr"/>
                       <a:r>
-                        <a:rPr sz="1000" b="1">
+                        <a:rPr b="1" sz="1000">
                           <a:solidFill>
                             <a:srgbClr val="FFFFFF"/>
                           </a:solidFill>
@@ -6622,13 +6946,13 @@
                     <a:p>
                       <a:pPr algn="ctr"/>
                       <a:r>
-                        <a:rPr sz="1000" b="1">
+                        <a:rPr b="1" sz="1000">
                           <a:solidFill>
                             <a:srgbClr val="FFFFFF"/>
                           </a:solidFill>
                           <a:latin typeface="Calibri"/>
                         </a:rPr>
-                        <a:t>Reason</a:t>
+                        <a:t>Matched?</a:t>
                       </a:r>
                     </a:p>
                   </a:txBody>
@@ -6638,13 +6962,31 @@
                     </a:solidFill>
                   </a:tcPr>
                 </a:tc>
-                <a:extLst>
-                  <a:ext uri="{0D108BD9-81ED-4DB2-BD59-A6C34878D82A}">
-                    <a16:rowId xmlns:a16="http://schemas.microsoft.com/office/drawing/2014/main" val="10000"/>
-                  </a:ext>
-                </a:extLst>
+                <a:tc>
+                  <a:txBody>
+                    <a:bodyPr/>
+                    <a:lstStyle/>
+                    <a:p>
+                      <a:pPr algn="ctr"/>
+                      <a:r>
+                        <a:rPr b="1" sz="1000">
+                          <a:solidFill>
+                            <a:srgbClr val="FFFFFF"/>
+                          </a:solidFill>
+                          <a:latin typeface="Calibri"/>
+                        </a:rPr>
+                        <a:t>Reason if not</a:t>
+                      </a:r>
+                    </a:p>
+                  </a:txBody>
+                  <a:tcPr>
+                    <a:solidFill>
+                      <a:srgbClr val="003087"/>
+                    </a:solidFill>
+                  </a:tcPr>
+                </a:tc>
               </a:tr>
-              <a:tr h="457200">
+              <a:tr h="487680">
                 <a:tc>
                   <a:txBody>
                     <a:bodyPr/>
@@ -6681,7 +7023,7 @@
                           </a:solidFill>
                           <a:latin typeface="Calibri"/>
                         </a:rPr>
-                        <a:t>Negative</a:t>
+                        <a:t>Negative (supply buys T-bills)</a:t>
                       </a:r>
                     </a:p>
                   </a:txBody>
@@ -6704,7 +7046,7 @@
                           </a:solidFill>
                           <a:latin typeface="Calibri"/>
                         </a:rPr>
-                        <a:t>−6.02*** ✓</a:t>
+                        <a:t>−7.57*** ✓</a:t>
                       </a:r>
                     </a:p>
                   </a:txBody>
@@ -6727,7 +7069,7 @@
                           </a:solidFill>
                           <a:latin typeface="Calibri"/>
                         </a:rPr>
-                        <a:t>Matched — supply growth does buy T-bills</a:t>
+                        <a:t>Yes</a:t>
                       </a:r>
                     </a:p>
                   </a:txBody>
@@ -6737,13 +7079,31 @@
                     </a:solidFill>
                   </a:tcPr>
                 </a:tc>
-                <a:extLst>
-                  <a:ext uri="{0D108BD9-81ED-4DB2-BD59-A6C34878D82A}">
-                    <a16:rowId xmlns:a16="http://schemas.microsoft.com/office/drawing/2014/main" val="10001"/>
-                  </a:ext>
-                </a:extLst>
+                <a:tc>
+                  <a:txBody>
+                    <a:bodyPr/>
+                    <a:lstStyle/>
+                    <a:p>
+                      <a:pPr algn="l"/>
+                      <a:r>
+                        <a:rPr sz="1000">
+                          <a:solidFill>
+                            <a:srgbClr val="222222"/>
+                          </a:solidFill>
+                          <a:latin typeface="Calibri"/>
+                        </a:rPr>
+                        <a:t>Buffer-ratio spec; decomposed n.s. due to multicollinearity</a:t>
+                      </a:r>
+                    </a:p>
+                  </a:txBody>
+                  <a:tcPr>
+                    <a:solidFill>
+                      <a:srgbClr val="F2F2F2"/>
+                    </a:solidFill>
+                  </a:tcPr>
+                </a:tc>
               </a:tr>
-              <a:tr h="457200">
+              <a:tr h="487680">
                 <a:tc>
                   <a:txBody>
                     <a:bodyPr/>
@@ -6780,7 +7140,7 @@
                           </a:solidFill>
                           <a:latin typeface="Calibri"/>
                         </a:rPr>
-                        <a:t>Low buffer = fragile</a:t>
+                        <a:t>Low buffer = fragility</a:t>
                       </a:r>
                     </a:p>
                   </a:txBody>
@@ -6803,7 +7163,7 @@
                           </a:solidFill>
                           <a:latin typeface="Calibri"/>
                         </a:rPr>
-                        <a:t>Sign flip at 13% ✓</a:t>
+                        <a:t>Sign flips at 13% ✓</a:t>
                       </a:r>
                     </a:p>
                   </a:txBody>
@@ -6826,7 +7186,7 @@
                           </a:solidFill>
                           <a:latin typeface="Calibri"/>
                         </a:rPr>
-                        <a:t>Matched in direction</a:t>
+                        <a:t>Yes</a:t>
                       </a:r>
                     </a:p>
                   </a:txBody>
@@ -6836,13 +7196,31 @@
                     </a:solidFill>
                   </a:tcPr>
                 </a:tc>
-                <a:extLst>
-                  <a:ext uri="{0D108BD9-81ED-4DB2-BD59-A6C34878D82A}">
-                    <a16:rowId xmlns:a16="http://schemas.microsoft.com/office/drawing/2014/main" val="10002"/>
-                  </a:ext>
-                </a:extLst>
+                <a:tc>
+                  <a:txBody>
+                    <a:bodyPr/>
+                    <a:lstStyle/>
+                    <a:p>
+                      <a:pPr algn="l"/>
+                      <a:r>
+                        <a:rPr sz="1000">
+                          <a:solidFill>
+                            <a:srgbClr val="222222"/>
+                          </a:solidFill>
+                          <a:latin typeface="Calibri"/>
+                        </a:rPr>
+                        <a:t/>
+                      </a:r>
+                    </a:p>
+                  </a:txBody>
+                  <a:tcPr>
+                    <a:solidFill>
+                      <a:srgbClr val="FFFFFF"/>
+                    </a:solidFill>
+                  </a:tcPr>
+                </a:tc>
               </a:tr>
-              <a:tr h="457200">
+              <a:tr h="487680">
                 <a:tc>
                   <a:txBody>
                     <a:bodyPr/>
@@ -6879,7 +7257,7 @@
                           </a:solidFill>
                           <a:latin typeface="Calibri"/>
                         </a:rPr>
-                        <a:t>Confirmed statistically</a:t>
+                        <a:t>Statistically confirmed</a:t>
                       </a:r>
                     </a:p>
                   </a:txBody>
@@ -6902,7 +7280,7 @@
                           </a:solidFill>
                           <a:latin typeface="Calibri"/>
                         </a:rPr>
-                        <a:t>p = 0.260 (suggestive)</a:t>
+                        <a:t>p = 0.406 (suggestive)</a:t>
                       </a:r>
                     </a:p>
                   </a:txBody>
@@ -6925,7 +7303,7 @@
                           </a:solidFill>
                           <a:latin typeface="Calibri"/>
                         </a:rPr>
-                        <a:t>N = 51 too small for power</a:t>
+                        <a:t>Partial</a:t>
                       </a:r>
                     </a:p>
                   </a:txBody>
@@ -6935,13 +7313,6 @@
                     </a:solidFill>
                   </a:tcPr>
                 </a:tc>
-                <a:extLst>
-                  <a:ext uri="{0D108BD9-81ED-4DB2-BD59-A6C34878D82A}">
-                    <a16:rowId xmlns:a16="http://schemas.microsoft.com/office/drawing/2014/main" val="10003"/>
-                  </a:ext>
-                </a:extLst>
-              </a:tr>
-              <a:tr h="457200">
                 <a:tc>
                   <a:txBody>
                     <a:bodyPr/>
@@ -6955,7 +7326,32 @@
                           </a:solidFill>
                           <a:latin typeface="Calibri"/>
                         </a:rPr>
-                        <a:t>Event study</a:t>
+                        <a:t>N=51 limits power</a:t>
+                      </a:r>
+                    </a:p>
+                  </a:txBody>
+                  <a:tcPr>
+                    <a:solidFill>
+                      <a:srgbClr val="F2F2F2"/>
+                    </a:solidFill>
+                  </a:tcPr>
+                </a:tc>
+              </a:tr>
+              <a:tr h="487680">
+                <a:tc>
+                  <a:txBody>
+                    <a:bodyPr/>
+                    <a:lstStyle/>
+                    <a:p>
+                      <a:pPr algn="l"/>
+                      <a:r>
+                        <a:rPr sz="1000">
+                          <a:solidFill>
+                            <a:srgbClr val="222222"/>
+                          </a:solidFill>
+                          <a:latin typeface="Calibri"/>
+                        </a:rPr>
+                        <a:t>LSTAR</a:t>
                       </a:r>
                     </a:p>
                   </a:txBody>
@@ -6978,7 +7374,7 @@
                           </a:solidFill>
                           <a:latin typeface="Calibri"/>
                         </a:rPr>
-                        <a:t>Clear CAR signal</a:t>
+                        <a:t>Sharp threshold</a:t>
                       </a:r>
                     </a:p>
                   </a:txBody>
@@ -7001,7 +7397,7 @@
                           </a:solidFill>
                           <a:latin typeface="Calibri"/>
                         </a:rPr>
-                        <a:t>All insignificant</a:t>
+                        <a:t>Gradual transition (γ*=29.8)</a:t>
                       </a:r>
                     </a:p>
                   </a:txBody>
@@ -7024,7 +7420,7 @@
                           </a:solidFill>
                           <a:latin typeface="Calibri"/>
                         </a:rPr>
-                        <a:t>FOMC contamination + N = 3 events</a:t>
+                        <a:t>Partial</a:t>
                       </a:r>
                     </a:p>
                   </a:txBody>
@@ -7034,13 +7430,6 @@
                     </a:solidFill>
                   </a:tcPr>
                 </a:tc>
-                <a:extLst>
-                  <a:ext uri="{0D108BD9-81ED-4DB2-BD59-A6C34878D82A}">
-                    <a16:rowId xmlns:a16="http://schemas.microsoft.com/office/drawing/2014/main" val="10004"/>
-                  </a:ext>
-                </a:extLst>
-              </a:tr>
-              <a:tr h="457200">
                 <a:tc>
                   <a:txBody>
                     <a:bodyPr/>
@@ -7054,7 +7443,32 @@
                           </a:solidFill>
                           <a:latin typeface="Calibri"/>
                         </a:rPr>
-                        <a:t>SVB</a:t>
+                        <a:t>Corrected spread reveals gradual regime shift</a:t>
+                      </a:r>
+                    </a:p>
+                  </a:txBody>
+                  <a:tcPr>
+                    <a:solidFill>
+                      <a:srgbClr val="FFFFFF"/>
+                    </a:solidFill>
+                  </a:tcPr>
+                </a:tc>
+              </a:tr>
+              <a:tr h="487680">
+                <a:tc>
+                  <a:txBody>
+                    <a:bodyPr/>
+                    <a:lstStyle/>
+                    <a:p>
+                      <a:pPr algn="l"/>
+                      <a:r>
+                        <a:rPr sz="1000">
+                          <a:solidFill>
+                            <a:srgbClr val="222222"/>
+                          </a:solidFill>
+                          <a:latin typeface="Calibri"/>
+                        </a:rPr>
+                        <a:t>Event study</a:t>
                       </a:r>
                     </a:p>
                   </a:txBody>
@@ -7077,7 +7491,7 @@
                           </a:solidFill>
                           <a:latin typeface="Calibri"/>
                         </a:rPr>
-                        <a:t>High buffer protects</a:t>
+                        <a:t>Clear CAR signal</a:t>
                       </a:r>
                     </a:p>
                   </a:txBody>
@@ -7100,7 +7514,7 @@
                           </a:solidFill>
                           <a:latin typeface="Calibri"/>
                         </a:rPr>
-                        <a:t>Spread −52 bps (flight-safety)</a:t>
+                        <a:t>Noisy/insignificant</a:t>
                       </a:r>
                     </a:p>
                   </a:txBody>
@@ -7123,43 +7537,13 @@
                           </a:solidFill>
                           <a:latin typeface="Calibri"/>
                         </a:rPr>
-                        <a:t>Flight-to-safety, not stablecoin mechanism</a:t>
+                        <a:t>No</a:t>
                       </a:r>
                     </a:p>
                   </a:txBody>
                   <a:tcPr>
                     <a:solidFill>
                       <a:srgbClr val="F2F2F2"/>
-                    </a:solidFill>
-                  </a:tcPr>
-                </a:tc>
-                <a:extLst>
-                  <a:ext uri="{0D108BD9-81ED-4DB2-BD59-A6C34878D82A}">
-                    <a16:rowId xmlns:a16="http://schemas.microsoft.com/office/drawing/2014/main" val="10005"/>
-                  </a:ext>
-                </a:extLst>
-              </a:tr>
-              <a:tr h="457200">
-                <a:tc>
-                  <a:txBody>
-                    <a:bodyPr/>
-                    <a:lstStyle/>
-                    <a:p>
-                      <a:pPr algn="l"/>
-                      <a:r>
-                        <a:rPr sz="1000">
-                          <a:solidFill>
-                            <a:srgbClr val="222222"/>
-                          </a:solidFill>
-                          <a:latin typeface="Calibri"/>
-                        </a:rPr>
-                        <a:t>LUNA</a:t>
-                      </a:r>
-                    </a:p>
-                  </a:txBody>
-                  <a:tcPr>
-                    <a:solidFill>
-                      <a:srgbClr val="FFFFFF"/>
                     </a:solidFill>
                   </a:tcPr>
                 </a:tc>
@@ -7176,67 +7560,16 @@
                           </a:solidFill>
                           <a:latin typeface="Calibri"/>
                         </a:rPr>
-                        <a:t>Low buffer causes widening</a:t>
+                        <a:t>FOMC contamination; only 3 events; use raw spread instead</a:t>
                       </a:r>
                     </a:p>
                   </a:txBody>
                   <a:tcPr>
                     <a:solidFill>
-                      <a:srgbClr val="FFFFFF"/>
+                      <a:srgbClr val="F2F2F2"/>
                     </a:solidFill>
                   </a:tcPr>
                 </a:tc>
-                <a:tc>
-                  <a:txBody>
-                    <a:bodyPr/>
-                    <a:lstStyle/>
-                    <a:p>
-                      <a:pPr algn="l"/>
-                      <a:r>
-                        <a:rPr sz="1000">
-                          <a:solidFill>
-                            <a:srgbClr val="222222"/>
-                          </a:solidFill>
-                          <a:latin typeface="Calibri"/>
-                        </a:rPr>
-                        <a:t>Signal present but weak</a:t>
-                      </a:r>
-                    </a:p>
-                  </a:txBody>
-                  <a:tcPr>
-                    <a:solidFill>
-                      <a:srgbClr val="FFFFFF"/>
-                    </a:solidFill>
-                  </a:tcPr>
-                </a:tc>
-                <a:tc>
-                  <a:txBody>
-                    <a:bodyPr/>
-                    <a:lstStyle/>
-                    <a:p>
-                      <a:pPr algn="l"/>
-                      <a:r>
-                        <a:rPr sz="1000">
-                          <a:solidFill>
-                            <a:srgbClr val="222222"/>
-                          </a:solidFill>
-                          <a:latin typeface="Calibri"/>
-                        </a:rPr>
-                        <a:t>FOMC +50bps only 5 days before</a:t>
-                      </a:r>
-                    </a:p>
-                  </a:txBody>
-                  <a:tcPr>
-                    <a:solidFill>
-                      <a:srgbClr val="FFFFFF"/>
-                    </a:solidFill>
-                  </a:tcPr>
-                </a:tc>
-                <a:extLst>
-                  <a:ext uri="{0D108BD9-81ED-4DB2-BD59-A6C34878D82A}">
-                    <a16:rowId xmlns:a16="http://schemas.microsoft.com/office/drawing/2014/main" val="10006"/>
-                  </a:ext>
-                </a:extLst>
               </a:tr>
             </a:tbl>
           </a:graphicData>
@@ -7250,7 +7583,7 @@
         </p:nvSpPr>
         <p:spPr>
           <a:xfrm>
-            <a:off x="274320" y="4297680"/>
+            <a:off x="274320" y="3977639"/>
             <a:ext cx="9326880" cy="777240"/>
           </a:xfrm>
           <a:prstGeom prst="rect">
@@ -7282,7 +7615,6 @@
           <a:lstStyle/>
           <a:p>
             <a:pPr algn="ctr"/>
-            <a:endParaRPr/>
           </a:p>
         </p:txBody>
       </p:sp>
@@ -7294,7 +7626,7 @@
         </p:nvSpPr>
         <p:spPr>
           <a:xfrm>
-            <a:off x="457200" y="4343400"/>
+            <a:off x="457200" y="4023360"/>
             <a:ext cx="9052560" cy="685800"/>
           </a:xfrm>
           <a:prstGeom prst="rect">
@@ -7316,7 +7648,7 @@
                 </a:solidFill>
                 <a:latin typeface="Calibri"/>
               </a:rPr>
-              <a:t>The regression is our STRONGEST evidence.   The event study is directionally consistent but statistically underpowered.
+              <a:t>The regression (β₁ = −7.57***) is our STRONGEST evidence — buffer-ratio spec.   Fragility channel B×ΔlnS = −7.52** (p=0.019) now significant at 5% with corrected spread.
 Three methods point the same direction — convergence without false certainty.</a:t>
             </a:r>
           </a:p>
@@ -7331,7 +7663,7 @@
 </file>
 
 <file path=ppt/slides/slide13.xml><?xml version="1.0" encoding="utf-8"?>
-<p:sld xmlns:a="http://schemas.openxmlformats.org/drawingml/2006/main" xmlns:r="http://schemas.openxmlformats.org/officeDocument/2006/relationships" xmlns:p="http://schemas.openxmlformats.org/presentationml/2006/main">
+<p:sld xmlns:a="http://schemas.openxmlformats.org/drawingml/2006/main" xmlns:p="http://schemas.openxmlformats.org/presentationml/2006/main" xmlns:r="http://schemas.openxmlformats.org/officeDocument/2006/relationships">
   <p:cSld>
     <p:spTree>
       <p:nvGrpSpPr>
@@ -7339,14 +7671,7 @@
         <p:cNvGrpSpPr/>
         <p:nvPr/>
       </p:nvGrpSpPr>
-      <p:grpSpPr>
-        <a:xfrm>
-          <a:off x="0" y="0"/>
-          <a:ext cx="0" cy="0"/>
-          <a:chOff x="0" y="0"/>
-          <a:chExt cx="0" cy="0"/>
-        </a:xfrm>
-      </p:grpSpPr>
+      <p:grpSpPr/>
       <p:sp>
         <p:nvSpPr>
           <p:cNvPr id="2" name="Rectangle 1"/>
@@ -7387,7 +7712,6 @@
           <a:lstStyle/>
           <a:p>
             <a:pPr algn="ctr"/>
-            <a:endParaRPr/>
           </a:p>
         </p:txBody>
       </p:sp>
@@ -7431,7 +7755,6 @@
           <a:lstStyle/>
           <a:p>
             <a:pPr algn="ctr"/>
-            <a:endParaRPr/>
           </a:p>
         </p:txBody>
       </p:sp>
@@ -7580,7 +7903,6 @@
           <a:lstStyle/>
           <a:p>
             <a:pPr algn="ctr"/>
-            <a:endParaRPr/>
           </a:p>
         </p:txBody>
       </p:sp>
@@ -7624,7 +7946,6 @@
           <a:lstStyle/>
           <a:p>
             <a:pPr algn="ctr"/>
-            <a:endParaRPr/>
           </a:p>
         </p:txBody>
       </p:sp>
@@ -7693,7 +8014,7 @@
                 </a:solidFill>
                 <a:latin typeface="Calibri"/>
               </a:rPr>
-              <a:t>β₁ = −6.02***</a:t>
+              <a:t>β₁ = −7.57***</a:t>
             </a:r>
           </a:p>
         </p:txBody>
@@ -7728,7 +8049,7 @@
                 </a:solidFill>
                 <a:latin typeface="Calibri"/>
               </a:rPr>
-              <a:t>p = 0.006</a:t>
+              <a:t>p = 0.004</a:t>
             </a:r>
           </a:p>
         </p:txBody>
@@ -7773,7 +8094,6 @@
           <a:lstStyle/>
           <a:p>
             <a:pPr algn="ctr"/>
-            <a:endParaRPr/>
           </a:p>
         </p:txBody>
       </p:sp>
@@ -7843,7 +8163,7 @@
                 <a:latin typeface="Calibri"/>
               </a:rPr>
               <a:t>Bootstrap CI
-[3.2%, 14.5%]</a:t>
+[3.1%, 14.5%]</a:t>
             </a:r>
           </a:p>
         </p:txBody>
@@ -7888,7 +8208,6 @@
           <a:lstStyle/>
           <a:p>
             <a:pPr algn="ctr"/>
-            <a:endParaRPr/>
           </a:p>
         </p:txBody>
       </p:sp>
@@ -7972,7 +8291,6 @@
           <a:lstStyle/>
           <a:p>
             <a:pPr algn="ctr"/>
-            <a:endParaRPr/>
           </a:p>
         </p:txBody>
       </p:sp>
@@ -8086,7 +8404,6 @@
           <a:lstStyle/>
           <a:p>
             <a:pPr algn="ctr"/>
-            <a:endParaRPr/>
           </a:p>
         </p:txBody>
       </p:sp>
@@ -8155,7 +8472,7 @@
                 </a:solidFill>
                 <a:latin typeface="Calibri"/>
               </a:rPr>
-              <a:t>Requires stablecoin issuers to hold cash or near-cash reserves. Our CI [3.2%, 14.5%] maps to a regulatory range, not a precise floor.</a:t>
+              <a:t>Requires stablecoin issuers to hold cash or near-cash reserves. Our CI [3.1%, 14.5%] maps to a regulatory range, not a precise floor.</a:t>
             </a:r>
           </a:p>
         </p:txBody>
@@ -8200,7 +8517,6 @@
           <a:lstStyle/>
           <a:p>
             <a:pPr algn="ctr"/>
-            <a:endParaRPr/>
           </a:p>
         </p:txBody>
       </p:sp>
@@ -8314,7 +8630,6 @@
           <a:lstStyle/>
           <a:p>
             <a:pPr algn="ctr"/>
-            <a:endParaRPr/>
           </a:p>
         </p:txBody>
       </p:sp>
@@ -8383,7 +8698,7 @@
                 </a:solidFill>
                 <a:latin typeface="Calibri"/>
               </a:rPr>
-              <a:t>Our estimate: require cash/near-cash ≥ 13% of supply outstanding.   Caveat: 90% CI [3.2%, 14.5%] — this is a range, not a precise floor.   Interpretation: anything below 3% is clearly under-reserved; above 14.5% is clearly adequate.</a:t>
+              <a:t>Our estimate: require cash/near-cash ≥ 13% of supply outstanding.   Caveat: 90% CI [3.1%, 14.5%] — this is a range, not a precise floor.   Interpretation: anything below 3% is clearly under-reserved; above 14.5% is clearly adequate.</a:t>
             </a:r>
           </a:p>
         </p:txBody>
@@ -8428,7 +8743,6 @@
           <a:lstStyle/>
           <a:p>
             <a:pPr algn="ctr"/>
-            <a:endParaRPr/>
           </a:p>
         </p:txBody>
       </p:sp>
@@ -8477,7 +8791,7 @@
 </file>
 
 <file path=ppt/slides/slide14.xml><?xml version="1.0" encoding="utf-8"?>
-<p:sld xmlns:a="http://schemas.openxmlformats.org/drawingml/2006/main" xmlns:r="http://schemas.openxmlformats.org/officeDocument/2006/relationships" xmlns:p="http://schemas.openxmlformats.org/presentationml/2006/main">
+<p:sld xmlns:a="http://schemas.openxmlformats.org/drawingml/2006/main" xmlns:p="http://schemas.openxmlformats.org/presentationml/2006/main" xmlns:r="http://schemas.openxmlformats.org/officeDocument/2006/relationships">
   <p:cSld>
     <p:spTree>
       <p:nvGrpSpPr>
@@ -8485,14 +8799,7 @@
         <p:cNvGrpSpPr/>
         <p:nvPr/>
       </p:nvGrpSpPr>
-      <p:grpSpPr>
-        <a:xfrm>
-          <a:off x="0" y="0"/>
-          <a:ext cx="0" cy="0"/>
-          <a:chOff x="0" y="0"/>
-          <a:chExt cx="0" cy="0"/>
-        </a:xfrm>
-      </p:grpSpPr>
+      <p:grpSpPr/>
       <p:sp>
         <p:nvSpPr>
           <p:cNvPr id="2" name="Rectangle 1"/>
@@ -8533,7 +8840,6 @@
           <a:lstStyle/>
           <a:p>
             <a:pPr algn="ctr"/>
-            <a:endParaRPr/>
           </a:p>
         </p:txBody>
       </p:sp>
@@ -8577,7 +8883,6 @@
           <a:lstStyle/>
           <a:p>
             <a:pPr algn="ctr"/>
-            <a:endParaRPr/>
           </a:p>
         </p:txBody>
       </p:sp>
@@ -8726,7 +9031,6 @@
           <a:lstStyle/>
           <a:p>
             <a:pPr algn="ctr"/>
-            <a:endParaRPr/>
           </a:p>
         </p:txBody>
       </p:sp>
@@ -8770,7 +9074,6 @@
           <a:lstStyle/>
           <a:p>
             <a:pPr algn="ctr"/>
-            <a:endParaRPr/>
           </a:p>
         </p:txBody>
       </p:sp>
@@ -8839,7 +9142,7 @@
                 </a:solidFill>
                 <a:latin typeface="Calibri"/>
               </a:rPr>
-              <a:t>β₁ = −6.02***</a:t>
+              <a:t>β₁ = −7.57***</a:t>
             </a:r>
           </a:p>
         </p:txBody>
@@ -8874,7 +9177,7 @@
                 </a:solidFill>
                 <a:latin typeface="Calibri"/>
               </a:rPr>
-              <a:t>p = 0.006</a:t>
+              <a:t>p = 0.004</a:t>
             </a:r>
           </a:p>
         </p:txBody>
@@ -8919,7 +9222,6 @@
           <a:lstStyle/>
           <a:p>
             <a:pPr algn="ctr"/>
-            <a:endParaRPr/>
           </a:p>
         </p:txBody>
       </p:sp>
@@ -8989,7 +9291,7 @@
                 <a:latin typeface="Calibri"/>
               </a:rPr>
               <a:t>Bootstrap CI
-[3.2%, 14.5%]</a:t>
+[3.1%, 14.5%]</a:t>
             </a:r>
           </a:p>
         </p:txBody>
@@ -9034,7 +9336,6 @@
           <a:lstStyle/>
           <a:p>
             <a:pPr algn="ctr"/>
-            <a:endParaRPr/>
           </a:p>
         </p:txBody>
       </p:sp>
@@ -9118,7 +9419,6 @@
           <a:lstStyle/>
           <a:p>
             <a:pPr algn="ctr"/>
-            <a:endParaRPr/>
           </a:p>
         </p:txBody>
       </p:sp>
@@ -9197,7 +9497,6 @@
           <a:lstStyle/>
           <a:p>
             <a:pPr algn="ctr"/>
-            <a:endParaRPr/>
           </a:p>
         </p:txBody>
       </p:sp>
@@ -9231,7 +9530,7 @@
                 </a:solidFill>
                 <a:latin typeface="Calibri"/>
               </a:rPr>
-              <a:t>β₁ = −6.02***</a:t>
+              <a:t>β₁ = −7.57***</a:t>
             </a:r>
           </a:p>
         </p:txBody>
@@ -9266,7 +9565,7 @@
                 </a:solidFill>
                 <a:latin typeface="Calibri"/>
               </a:rPr>
-              <a:t>p = 0.006</a:t>
+              <a:t>p = 0.004  (buffer-ratio spec)</a:t>
             </a:r>
           </a:p>
         </p:txBody>
@@ -9311,7 +9610,6 @@
           <a:lstStyle/>
           <a:p>
             <a:pPr algn="ctr"/>
-            <a:endParaRPr/>
           </a:p>
         </p:txBody>
       </p:sp>
@@ -9346,9 +9644,10 @@
                 <a:latin typeface="Calibri"/>
               </a:rPr>
               <a:t>Privilege amplification confirmed.
-1-SD supply growth → 24 bps spread compression.
-VIX and rate controls included.
-HAC standard errors.
+1-SD supply growth → 30 bps spread compression.
+B×ΔlnS = −7.52** (p=0.019): fragility channel
+now significant at 5%.
+VIX and rate controls; HAC s.e.
 STRONGEST evidence</a:t>
             </a:r>
           </a:p>
@@ -9394,7 +9693,6 @@
           <a:lstStyle/>
           <a:p>
             <a:pPr algn="ctr"/>
-            <a:endParaRPr/>
           </a:p>
         </p:txBody>
       </p:sp>
@@ -9473,7 +9771,6 @@
           <a:lstStyle/>
           <a:p>
             <a:pPr algn="ctr"/>
-            <a:endParaRPr/>
           </a:p>
         </p:txBody>
       </p:sp>
@@ -9542,7 +9839,7 @@
                 </a:solidFill>
                 <a:latin typeface="Calibri"/>
               </a:rPr>
-              <a:t>Bootstrap CI [3.2%, 14.5%]</a:t>
+              <a:t>Bootstrap CI [3.1%, 14.5%]</a:t>
             </a:r>
           </a:p>
         </p:txBody>
@@ -9587,7 +9884,6 @@
           <a:lstStyle/>
           <a:p>
             <a:pPr algn="ctr"/>
-            <a:endParaRPr/>
           </a:p>
         </p:txBody>
       </p:sp>
@@ -9622,9 +9918,9 @@
                 <a:latin typeface="Calibri"/>
               </a:rPr>
               <a:t>Threshold identified independently by
-Hansen grid search AND LSTAR (c* = 13.1%).
-Sign flip confirmed at 13%.
-p = 0.260 — suggestive, not confirmed.
+Hansen grid search AND LSTAR (c* = 14.9%).
+Sign flip: β = −2.80 (low) → +1.63 (high).
+p = 0.406 — suggestive, not confirmed.
 N = 51 limits power.</a:t>
             </a:r>
           </a:p>
@@ -9670,7 +9966,6 @@
           <a:lstStyle/>
           <a:p>
             <a:pPr algn="ctr"/>
-            <a:endParaRPr/>
           </a:p>
         </p:txBody>
       </p:sp>
@@ -9749,7 +10044,6 @@
           <a:lstStyle/>
           <a:p>
             <a:pPr algn="ctr"/>
-            <a:endParaRPr/>
           </a:p>
         </p:txBody>
       </p:sp>
@@ -9863,7 +10157,6 @@
           <a:lstStyle/>
           <a:p>
             <a:pPr algn="ctr"/>
-            <a:endParaRPr/>
           </a:p>
         </p:txBody>
       </p:sp>
@@ -9900,7 +10193,7 @@
               <a:t>Directionally consistent.
 FOMC contamination in 2 of 3 events.
 SVB = flight-to-safety, not mechanism.
-LUNA = most relevant window.
+LUNA: 14.0 bps (corrected spread).
 Qualitative context only.</a:t>
             </a:r>
           </a:p>
@@ -9946,7 +10239,6 @@
           <a:lstStyle/>
           <a:p>
             <a:pPr algn="ctr"/>
-            <a:endParaRPr/>
           </a:p>
         </p:txBody>
       </p:sp>
@@ -9994,7 +10286,7 @@
 </file>
 
 <file path=ppt/slides/slide15.xml><?xml version="1.0" encoding="utf-8"?>
-<p:sld xmlns:a="http://schemas.openxmlformats.org/drawingml/2006/main" xmlns:r="http://schemas.openxmlformats.org/officeDocument/2006/relationships" xmlns:p="http://schemas.openxmlformats.org/presentationml/2006/main">
+<p:sld xmlns:a="http://schemas.openxmlformats.org/drawingml/2006/main" xmlns:p="http://schemas.openxmlformats.org/presentationml/2006/main" xmlns:r="http://schemas.openxmlformats.org/officeDocument/2006/relationships">
   <p:cSld>
     <p:spTree>
       <p:nvGrpSpPr>
@@ -10002,14 +10294,7 @@
         <p:cNvGrpSpPr/>
         <p:nvPr/>
       </p:nvGrpSpPr>
-      <p:grpSpPr>
-        <a:xfrm>
-          <a:off x="0" y="0"/>
-          <a:ext cx="0" cy="0"/>
-          <a:chOff x="0" y="0"/>
-          <a:chExt cx="0" cy="0"/>
-        </a:xfrm>
-      </p:grpSpPr>
+      <p:grpSpPr/>
       <p:sp>
         <p:nvSpPr>
           <p:cNvPr id="2" name="Rectangle 1"/>
@@ -10050,7 +10335,6 @@
           <a:lstStyle/>
           <a:p>
             <a:pPr algn="ctr"/>
-            <a:endParaRPr/>
           </a:p>
         </p:txBody>
       </p:sp>
@@ -10094,7 +10378,6 @@
           <a:lstStyle/>
           <a:p>
             <a:pPr algn="ctr"/>
-            <a:endParaRPr/>
           </a:p>
         </p:txBody>
       </p:sp>
@@ -10243,7 +10526,6 @@
           <a:lstStyle/>
           <a:p>
             <a:pPr algn="ctr"/>
-            <a:endParaRPr/>
           </a:p>
         </p:txBody>
       </p:sp>
@@ -10287,7 +10569,6 @@
           <a:lstStyle/>
           <a:p>
             <a:pPr algn="ctr"/>
-            <a:endParaRPr/>
           </a:p>
         </p:txBody>
       </p:sp>
@@ -10356,7 +10637,7 @@
                 </a:solidFill>
                 <a:latin typeface="Calibri"/>
               </a:rPr>
-              <a:t>β₁ = −6.02***</a:t>
+              <a:t>β₁ = −7.57***</a:t>
             </a:r>
           </a:p>
         </p:txBody>
@@ -10391,7 +10672,7 @@
                 </a:solidFill>
                 <a:latin typeface="Calibri"/>
               </a:rPr>
-              <a:t>p = 0.006</a:t>
+              <a:t>p = 0.004</a:t>
             </a:r>
           </a:p>
         </p:txBody>
@@ -10436,7 +10717,6 @@
           <a:lstStyle/>
           <a:p>
             <a:pPr algn="ctr"/>
-            <a:endParaRPr/>
           </a:p>
         </p:txBody>
       </p:sp>
@@ -10506,7 +10786,7 @@
                 <a:latin typeface="Calibri"/>
               </a:rPr>
               <a:t>Bootstrap CI
-[3.2%, 14.5%]</a:t>
+[3.1%, 14.5%]</a:t>
             </a:r>
           </a:p>
         </p:txBody>
@@ -10551,7 +10831,6 @@
           <a:lstStyle/>
           <a:p>
             <a:pPr algn="ctr"/>
-            <a:endParaRPr/>
           </a:p>
         </p:txBody>
       </p:sp>
@@ -10635,7 +10914,6 @@
           <a:lstStyle/>
           <a:p>
             <a:pPr algn="ctr"/>
-            <a:endParaRPr/>
           </a:p>
         </p:txBody>
       </p:sp>
@@ -10714,7 +10992,6 @@
           <a:lstStyle/>
           <a:p>
             <a:pPr algn="ctr"/>
-            <a:endParaRPr/>
           </a:p>
         </p:txBody>
       </p:sp>
@@ -10794,7 +11071,6 @@
           <a:lstStyle/>
           <a:p>
             <a:pPr algn="ctr"/>
-            <a:endParaRPr/>
           </a:p>
         </p:txBody>
       </p:sp>
@@ -10874,7 +11150,6 @@
           <a:lstStyle/>
           <a:p>
             <a:pPr algn="ctr"/>
-            <a:endParaRPr/>
           </a:p>
         </p:txBody>
       </p:sp>
@@ -10954,7 +11229,6 @@
           <a:lstStyle/>
           <a:p>
             <a:pPr algn="ctr"/>
-            <a:endParaRPr/>
           </a:p>
         </p:txBody>
       </p:sp>
@@ -11034,7 +11308,6 @@
           <a:lstStyle/>
           <a:p>
             <a:pPr algn="ctr"/>
-            <a:endParaRPr/>
           </a:p>
         </p:txBody>
       </p:sp>
@@ -11114,7 +11387,6 @@
           <a:lstStyle/>
           <a:p>
             <a:pPr algn="ctr"/>
-            <a:endParaRPr/>
           </a:p>
         </p:txBody>
       </p:sp>
@@ -11193,7 +11465,6 @@
           <a:lstStyle/>
           <a:p>
             <a:pPr algn="ctr"/>
-            <a:endParaRPr/>
           </a:p>
         </p:txBody>
       </p:sp>
@@ -11307,7 +11578,6 @@
           <a:lstStyle/>
           <a:p>
             <a:pPr algn="ctr"/>
-            <a:endParaRPr/>
           </a:p>
         </p:txBody>
       </p:sp>
@@ -11421,7 +11691,6 @@
           <a:lstStyle/>
           <a:p>
             <a:pPr algn="ctr"/>
-            <a:endParaRPr/>
           </a:p>
         </p:txBody>
       </p:sp>
@@ -11535,7 +11804,6 @@
           <a:lstStyle/>
           <a:p>
             <a:pPr algn="ctr"/>
-            <a:endParaRPr/>
           </a:p>
         </p:txBody>
       </p:sp>
@@ -11649,7 +11917,6 @@
           <a:lstStyle/>
           <a:p>
             <a:pPr algn="ctr"/>
-            <a:endParaRPr/>
           </a:p>
         </p:txBody>
       </p:sp>
@@ -11763,7 +12030,6 @@
           <a:lstStyle/>
           <a:p>
             <a:pPr algn="ctr"/>
-            <a:endParaRPr/>
           </a:p>
         </p:txBody>
       </p:sp>
@@ -11811,103 +12077,44 @@
 </file>
 
 <file path=ppt/slides/slide16.xml><?xml version="1.0" encoding="utf-8"?>
-<p:sld xmlns:a="http://schemas.openxmlformats.org/drawingml/2006/main" xmlns:r="http://schemas.openxmlformats.org/officeDocument/2006/relationships" xmlns:p="http://schemas.openxmlformats.org/presentationml/2006/main">
+<p:sld xmlns:a="http://schemas.openxmlformats.org/drawingml/2006/main" xmlns:p="http://schemas.openxmlformats.org/presentationml/2006/main" xmlns:r="http://schemas.openxmlformats.org/officeDocument/2006/relationships">
   <p:cSld>
-    <p:bg>
-      <p:bgPr>
-        <a:solidFill>
-          <a:srgbClr val="002060"/>
-        </a:solidFill>
-        <a:effectLst/>
-      </p:bgPr>
-    </p:bg>
     <p:spTree>
       <p:nvGrpSpPr>
         <p:cNvPr id="1" name=""/>
         <p:cNvGrpSpPr/>
         <p:nvPr/>
       </p:nvGrpSpPr>
-      <p:grpSpPr>
-        <a:xfrm>
-          <a:off x="0" y="0"/>
-          <a:ext cx="0" cy="0"/>
-          <a:chOff x="0" y="0"/>
-          <a:chExt cx="0" cy="0"/>
-        </a:xfrm>
-      </p:grpSpPr>
-      <p:pic>
-        <p:nvPicPr>
-          <p:cNvPr id="3" name="그림 2" descr="원, 그래픽, 스크린샷, 그래픽 디자인이(가) 표시된 사진&#10;&#10;자동 생성된 설명"/>
-          <p:cNvPicPr>
-            <a:picLocks noChangeAspect="1"/>
-          </p:cNvPicPr>
-          <p:nvPr/>
-        </p:nvPicPr>
-        <p:blipFill>
-          <a:blip r:embed="rId3">
-            <a:lum bright="70000" contrast="-70000"/>
-            <a:extLst>
-              <a:ext uri="{BEBA8EAE-BF5A-486C-A8C5-ECC9F3942E4B}">
-                <a14:imgProps xmlns:a14="http://schemas.microsoft.com/office/drawing/2010/main">
-                  <a14:imgLayer r:embed="rId4">
-                    <a14:imgEffect>
-                      <a14:artisticPhotocopy detail="2"/>
-                    </a14:imgEffect>
-                  </a14:imgLayer>
-                </a14:imgProps>
-              </a:ext>
-              <a:ext uri="{28A0092B-C50C-407E-A947-70E740481C1C}">
-                <a14:useLocalDpi xmlns:a14="http://schemas.microsoft.com/office/drawing/2010/main" val="0"/>
-              </a:ext>
-            </a:extLst>
-          </a:blip>
-          <a:stretch>
-            <a:fillRect/>
-          </a:stretch>
-        </p:blipFill>
-        <p:spPr>
-          <a:xfrm>
-            <a:off x="0" y="890"/>
-            <a:ext cx="4809898" cy="6856214"/>
-          </a:xfrm>
-          <a:prstGeom prst="rect">
-            <a:avLst/>
-          </a:prstGeom>
-        </p:spPr>
-      </p:pic>
-      <p:sp>
-        <p:nvSpPr>
-          <p:cNvPr id="6" name="직사각형 5"/>
+      <p:grpSpPr/>
+      <p:sp>
+        <p:nvSpPr>
+          <p:cNvPr id="2" name="Rectangle 1"/>
           <p:cNvSpPr/>
           <p:nvPr/>
         </p:nvSpPr>
         <p:spPr>
           <a:xfrm>
-            <a:off x="-1" y="1879560"/>
-            <a:ext cx="12188826" cy="2576274"/>
+            <a:off x="0" y="0"/>
+            <a:ext cx="12188952" cy="6858000"/>
           </a:xfrm>
           <a:prstGeom prst="rect">
             <a:avLst/>
           </a:prstGeom>
           <a:solidFill>
-            <a:schemeClr val="tx1">
-              <a:alpha val="55000"/>
-            </a:schemeClr>
+            <a:srgbClr val="003087"/>
           </a:solidFill>
           <a:ln>
             <a:noFill/>
           </a:ln>
         </p:spPr>
         <p:style>
-          <a:lnRef idx="2">
-            <a:schemeClr val="accent1">
-              <a:shade val="15000"/>
-            </a:schemeClr>
+          <a:lnRef idx="1">
+            <a:schemeClr val="accent1"/>
           </a:lnRef>
-          <a:fillRef idx="1">
+          <a:fillRef idx="3">
             <a:schemeClr val="accent1"/>
           </a:fillRef>
-          <a:effectRef idx="0">
+          <a:effectRef idx="2">
             <a:schemeClr val="accent1"/>
           </a:effectRef>
           <a:fontRef idx="minor">
@@ -11918,31 +12125,311 @@
           <a:bodyPr rtlCol="0" anchor="ctr"/>
           <a:lstStyle/>
           <a:p>
-            <a:pPr algn="ctr" defTabSz="914400" latinLnBrk="1">
-              <a:defRPr/>
-            </a:pPr>
-            <a:r>
-              <a:rPr lang="en-US" altLang="ko-KR" sz="2400" dirty="0">
-                <a:solidFill>
-                  <a:prstClr val="white"/>
-                </a:solidFill>
-                <a:latin typeface="Hiragino Kaku Gothic Std W8" panose="020B0800000000000000" pitchFamily="34" charset="-128"/>
-                <a:ea typeface="Hiragino Kaku Gothic Std W8" panose="020B0800000000000000" pitchFamily="34" charset="-128"/>
-              </a:rPr>
-              <a:t>STABLECOINS AND THE EXORBITANT PRIVILEGE</a:t>
-            </a:r>
-          </a:p>
-          <a:p>
-            <a:pPr algn="ctr" defTabSz="914400" latinLnBrk="1">
-              <a:defRPr/>
-            </a:pPr>
-            <a:endParaRPr lang="ko-KR" altLang="en-US" sz="2400" dirty="0">
-              <a:solidFill>
-                <a:prstClr val="white"/>
-              </a:solidFill>
-              <a:latin typeface="Hiragino Kaku Gothic Std W8" panose="020B0800000000000000" pitchFamily="34" charset="-128"/>
-              <a:ea typeface="Malgun Gothic" panose="020B0503020000020004" pitchFamily="50" charset="-127"/>
-            </a:endParaRPr>
+            <a:pPr algn="ctr"/>
+          </a:p>
+        </p:txBody>
+      </p:sp>
+      <p:sp>
+        <p:nvSpPr>
+          <p:cNvPr id="3" name="Rectangle 2"/>
+          <p:cNvSpPr/>
+          <p:nvPr/>
+        </p:nvSpPr>
+        <p:spPr>
+          <a:xfrm>
+            <a:off x="0" y="3200400"/>
+            <a:ext cx="12188952" cy="54864"/>
+          </a:xfrm>
+          <a:prstGeom prst="rect">
+            <a:avLst/>
+          </a:prstGeom>
+          <a:solidFill>
+            <a:srgbClr val="E87722"/>
+          </a:solidFill>
+          <a:ln>
+            <a:noFill/>
+          </a:ln>
+        </p:spPr>
+        <p:style>
+          <a:lnRef idx="1">
+            <a:schemeClr val="accent1"/>
+          </a:lnRef>
+          <a:fillRef idx="3">
+            <a:schemeClr val="accent1"/>
+          </a:fillRef>
+          <a:effectRef idx="2">
+            <a:schemeClr val="accent1"/>
+          </a:effectRef>
+          <a:fontRef idx="minor">
+            <a:schemeClr val="lt1"/>
+          </a:fontRef>
+        </p:style>
+        <p:txBody>
+          <a:bodyPr rtlCol="0" anchor="ctr"/>
+          <a:lstStyle/>
+          <a:p>
+            <a:pPr algn="ctr"/>
+          </a:p>
+        </p:txBody>
+      </p:sp>
+      <p:sp>
+        <p:nvSpPr>
+          <p:cNvPr id="4" name="TextBox 3"/>
+          <p:cNvSpPr txBox="1"/>
+          <p:nvPr/>
+        </p:nvSpPr>
+        <p:spPr>
+          <a:xfrm>
+            <a:off x="731520" y="731520"/>
+            <a:ext cx="10698480" cy="685800"/>
+          </a:xfrm>
+          <a:prstGeom prst="rect">
+            <a:avLst/>
+          </a:prstGeom>
+          <a:noFill/>
+        </p:spPr>
+        <p:txBody>
+          <a:bodyPr wrap="square">
+            <a:spAutoFit/>
+          </a:bodyPr>
+          <a:lstStyle/>
+          <a:p>
+            <a:pPr algn="ctr"/>
+            <a:r>
+              <a:rPr sz="3000" b="1" i="0">
+                <a:solidFill>
+                  <a:srgbClr val="FFFFFF"/>
+                </a:solidFill>
+                <a:latin typeface="Calibri"/>
+              </a:rPr>
+              <a:t>Stablecoins and the Exorbitant Privilege</a:t>
+            </a:r>
+          </a:p>
+        </p:txBody>
+      </p:sp>
+      <p:sp>
+        <p:nvSpPr>
+          <p:cNvPr id="5" name="TextBox 4"/>
+          <p:cNvSpPr txBox="1"/>
+          <p:nvPr/>
+        </p:nvSpPr>
+        <p:spPr>
+          <a:xfrm>
+            <a:off x="731520" y="1508760"/>
+            <a:ext cx="10698480" cy="457200"/>
+          </a:xfrm>
+          <a:prstGeom prst="rect">
+            <a:avLst/>
+          </a:prstGeom>
+          <a:noFill/>
+        </p:spPr>
+        <p:txBody>
+          <a:bodyPr wrap="square">
+            <a:spAutoFit/>
+          </a:bodyPr>
+          <a:lstStyle/>
+          <a:p>
+            <a:pPr algn="ctr"/>
+            <a:r>
+              <a:rPr sz="1800" b="0" i="1">
+                <a:solidFill>
+                  <a:srgbClr val="E87722"/>
+                </a:solidFill>
+                <a:latin typeface="Calibri"/>
+              </a:rPr>
+              <a:t>Safe-Asset Demand and Its Systemic Fragility</a:t>
+            </a:r>
+          </a:p>
+        </p:txBody>
+      </p:sp>
+      <p:sp>
+        <p:nvSpPr>
+          <p:cNvPr id="6" name="Rectangle 5"/>
+          <p:cNvSpPr/>
+          <p:nvPr/>
+        </p:nvSpPr>
+        <p:spPr>
+          <a:xfrm>
+            <a:off x="914400" y="2148840"/>
+            <a:ext cx="3200400" cy="822960"/>
+          </a:xfrm>
+          <a:prstGeom prst="rect">
+            <a:avLst/>
+          </a:prstGeom>
+          <a:solidFill>
+            <a:srgbClr val="002065"/>
+          </a:solidFill>
+          <a:ln>
+            <a:noFill/>
+          </a:ln>
+        </p:spPr>
+        <p:style>
+          <a:lnRef idx="1">
+            <a:schemeClr val="accent1"/>
+          </a:lnRef>
+          <a:fillRef idx="3">
+            <a:schemeClr val="accent1"/>
+          </a:fillRef>
+          <a:effectRef idx="2">
+            <a:schemeClr val="accent1"/>
+          </a:effectRef>
+          <a:fontRef idx="minor">
+            <a:schemeClr val="lt1"/>
+          </a:fontRef>
+        </p:style>
+        <p:txBody>
+          <a:bodyPr rtlCol="0" anchor="ctr"/>
+          <a:lstStyle/>
+          <a:p>
+            <a:pPr algn="ctr"/>
+          </a:p>
+        </p:txBody>
+      </p:sp>
+      <p:sp>
+        <p:nvSpPr>
+          <p:cNvPr id="7" name="TextBox 6"/>
+          <p:cNvSpPr txBox="1"/>
+          <p:nvPr/>
+        </p:nvSpPr>
+        <p:spPr>
+          <a:xfrm>
+            <a:off x="1005840" y="2176272"/>
+            <a:ext cx="3017520" cy="411480"/>
+          </a:xfrm>
+          <a:prstGeom prst="rect">
+            <a:avLst/>
+          </a:prstGeom>
+          <a:noFill/>
+        </p:spPr>
+        <p:txBody>
+          <a:bodyPr wrap="square">
+            <a:spAutoFit/>
+          </a:bodyPr>
+          <a:lstStyle/>
+          <a:p>
+            <a:pPr algn="ctr"/>
+            <a:r>
+              <a:rPr sz="1700" b="1" i="0">
+                <a:solidFill>
+                  <a:srgbClr val="E87722"/>
+                </a:solidFill>
+                <a:latin typeface="Calibri"/>
+              </a:rPr>
+              <a:t>β₁ = −7.57***</a:t>
+            </a:r>
+          </a:p>
+        </p:txBody>
+      </p:sp>
+      <p:sp>
+        <p:nvSpPr>
+          <p:cNvPr id="8" name="TextBox 7"/>
+          <p:cNvSpPr txBox="1"/>
+          <p:nvPr/>
+        </p:nvSpPr>
+        <p:spPr>
+          <a:xfrm>
+            <a:off x="1005840" y="2560320"/>
+            <a:ext cx="3017520" cy="320040"/>
+          </a:xfrm>
+          <a:prstGeom prst="rect">
+            <a:avLst/>
+          </a:prstGeom>
+          <a:noFill/>
+        </p:spPr>
+        <p:txBody>
+          <a:bodyPr wrap="square">
+            <a:spAutoFit/>
+          </a:bodyPr>
+          <a:lstStyle/>
+          <a:p>
+            <a:pPr algn="ctr"/>
+            <a:r>
+              <a:rPr sz="950" b="0" i="1">
+                <a:solidFill>
+                  <a:srgbClr val="FFFFFF"/>
+                </a:solidFill>
+                <a:latin typeface="Calibri"/>
+              </a:rPr>
+              <a:t>p = 0.004</a:t>
+            </a:r>
+          </a:p>
+        </p:txBody>
+      </p:sp>
+      <p:sp>
+        <p:nvSpPr>
+          <p:cNvPr id="9" name="Rectangle 8"/>
+          <p:cNvSpPr/>
+          <p:nvPr/>
+        </p:nvSpPr>
+        <p:spPr>
+          <a:xfrm>
+            <a:off x="4572000" y="2148840"/>
+            <a:ext cx="3200400" cy="822960"/>
+          </a:xfrm>
+          <a:prstGeom prst="rect">
+            <a:avLst/>
+          </a:prstGeom>
+          <a:solidFill>
+            <a:srgbClr val="002065"/>
+          </a:solidFill>
+          <a:ln>
+            <a:noFill/>
+          </a:ln>
+        </p:spPr>
+        <p:style>
+          <a:lnRef idx="1">
+            <a:schemeClr val="accent1"/>
+          </a:lnRef>
+          <a:fillRef idx="3">
+            <a:schemeClr val="accent1"/>
+          </a:fillRef>
+          <a:effectRef idx="2">
+            <a:schemeClr val="accent1"/>
+          </a:effectRef>
+          <a:fontRef idx="minor">
+            <a:schemeClr val="lt1"/>
+          </a:fontRef>
+        </p:style>
+        <p:txBody>
+          <a:bodyPr rtlCol="0" anchor="ctr"/>
+          <a:lstStyle/>
+          <a:p>
+            <a:pPr algn="ctr"/>
+          </a:p>
+        </p:txBody>
+      </p:sp>
+      <p:sp>
+        <p:nvSpPr>
+          <p:cNvPr id="10" name="TextBox 9"/>
+          <p:cNvSpPr txBox="1"/>
+          <p:nvPr/>
+        </p:nvSpPr>
+        <p:spPr>
+          <a:xfrm>
+            <a:off x="4663440" y="2176272"/>
+            <a:ext cx="3017520" cy="411480"/>
+          </a:xfrm>
+          <a:prstGeom prst="rect">
+            <a:avLst/>
+          </a:prstGeom>
+          <a:noFill/>
+        </p:spPr>
+        <p:txBody>
+          <a:bodyPr wrap="square">
+            <a:spAutoFit/>
+          </a:bodyPr>
+          <a:lstStyle/>
+          <a:p>
+            <a:pPr algn="ctr"/>
+            <a:r>
+              <a:rPr sz="1700" b="1" i="0">
+                <a:solidFill>
+                  <a:srgbClr val="E87722"/>
+                </a:solidFill>
+                <a:latin typeface="Calibri"/>
+              </a:rPr>
+              <a:t>q* = 13%</a:t>
+            </a:r>
           </a:p>
         </p:txBody>
       </p:sp>
@@ -11954,74 +12441,318 @@
         </p:nvSpPr>
         <p:spPr>
           <a:xfrm>
-            <a:off x="6094095" y="5560060"/>
-            <a:ext cx="5842635" cy="1200329"/>
-          </a:xfrm>
-          <a:prstGeom prst="rect">
-            <a:avLst/>
-          </a:prstGeom>
-          <a:noFill/>
-        </p:spPr>
-        <p:txBody>
-          <a:bodyPr wrap="square" rtlCol="0">
-            <a:spAutoFit/>
-          </a:bodyPr>
-          <a:lstStyle/>
-          <a:p>
-            <a:r>
-              <a:rPr lang="en-US" altLang="ko-KR" sz="1800" b="1" dirty="0">
-                <a:solidFill>
-                  <a:schemeClr val="bg1"/>
-                </a:solidFill>
-              </a:rPr>
-              <a:t>Yonsei GSIS 2026-1 </a:t>
-            </a:r>
-          </a:p>
-          <a:p>
-            <a:r>
-              <a:rPr lang="en-US" altLang="ko-KR" sz="1800" b="1" dirty="0">
-                <a:solidFill>
-                  <a:schemeClr val="bg1"/>
-                </a:solidFill>
-              </a:rPr>
-              <a:t>Topics in International Finance</a:t>
-            </a:r>
-            <a:endParaRPr lang="en-US" altLang="ko-KR" sz="1800" dirty="0">
-              <a:solidFill>
-                <a:schemeClr val="bg1"/>
-              </a:solidFill>
-            </a:endParaRPr>
-          </a:p>
-          <a:p>
-            <a:r>
-              <a:rPr lang="en-US" altLang="ko-KR" b="1" dirty="0">
+            <a:off x="4663440" y="2560320"/>
+            <a:ext cx="3017520" cy="320040"/>
+          </a:xfrm>
+          <a:prstGeom prst="rect">
+            <a:avLst/>
+          </a:prstGeom>
+          <a:noFill/>
+        </p:spPr>
+        <p:txBody>
+          <a:bodyPr wrap="square">
+            <a:spAutoFit/>
+          </a:bodyPr>
+          <a:lstStyle/>
+          <a:p>
+            <a:pPr algn="ctr"/>
+            <a:r>
+              <a:rPr sz="950" b="0" i="1">
                 <a:solidFill>
                   <a:srgbClr val="FFFFFF"/>
                 </a:solidFill>
-              </a:rPr>
-              <a:t>Mireu Kim · Sara Chekroune · Oybek Ibragimov · e  Alexandre Godefroy · Baptiste Degand · </a:t>
-            </a:r>
-            <a:r>
-              <a:rPr lang="en-US" altLang="ko-KR" b="1" dirty="0" err="1">
+                <a:latin typeface="Calibri"/>
+              </a:rPr>
+              <a:t>Bootstrap CI [3.1%, 14.5%]</a:t>
+            </a:r>
+          </a:p>
+        </p:txBody>
+      </p:sp>
+      <p:sp>
+        <p:nvSpPr>
+          <p:cNvPr id="12" name="Rectangle 11"/>
+          <p:cNvSpPr/>
+          <p:nvPr/>
+        </p:nvSpPr>
+        <p:spPr>
+          <a:xfrm>
+            <a:off x="8229600" y="2148840"/>
+            <a:ext cx="3200400" cy="822960"/>
+          </a:xfrm>
+          <a:prstGeom prst="rect">
+            <a:avLst/>
+          </a:prstGeom>
+          <a:solidFill>
+            <a:srgbClr val="002065"/>
+          </a:solidFill>
+          <a:ln>
+            <a:noFill/>
+          </a:ln>
+        </p:spPr>
+        <p:style>
+          <a:lnRef idx="1">
+            <a:schemeClr val="accent1"/>
+          </a:lnRef>
+          <a:fillRef idx="3">
+            <a:schemeClr val="accent1"/>
+          </a:fillRef>
+          <a:effectRef idx="2">
+            <a:schemeClr val="accent1"/>
+          </a:effectRef>
+          <a:fontRef idx="minor">
+            <a:schemeClr val="lt1"/>
+          </a:fontRef>
+        </p:style>
+        <p:txBody>
+          <a:bodyPr rtlCol="0" anchor="ctr"/>
+          <a:lstStyle/>
+          <a:p>
+            <a:pPr algn="ctr"/>
+          </a:p>
+        </p:txBody>
+      </p:sp>
+      <p:sp>
+        <p:nvSpPr>
+          <p:cNvPr id="13" name="TextBox 12"/>
+          <p:cNvSpPr txBox="1"/>
+          <p:nvPr/>
+        </p:nvSpPr>
+        <p:spPr>
+          <a:xfrm>
+            <a:off x="8321040" y="2176272"/>
+            <a:ext cx="3017520" cy="411480"/>
+          </a:xfrm>
+          <a:prstGeom prst="rect">
+            <a:avLst/>
+          </a:prstGeom>
+          <a:noFill/>
+        </p:spPr>
+        <p:txBody>
+          <a:bodyPr wrap="square">
+            <a:spAutoFit/>
+          </a:bodyPr>
+          <a:lstStyle/>
+          <a:p>
+            <a:pPr algn="ctr"/>
+            <a:r>
+              <a:rPr sz="1700" b="1" i="0">
+                <a:solidFill>
+                  <a:srgbClr val="E87722"/>
+                </a:solidFill>
+                <a:latin typeface="Calibri"/>
+              </a:rPr>
+              <a:t>3 methods</a:t>
+            </a:r>
+          </a:p>
+        </p:txBody>
+      </p:sp>
+      <p:sp>
+        <p:nvSpPr>
+          <p:cNvPr id="14" name="TextBox 13"/>
+          <p:cNvSpPr txBox="1"/>
+          <p:nvPr/>
+        </p:nvSpPr>
+        <p:spPr>
+          <a:xfrm>
+            <a:off x="8321040" y="2560320"/>
+            <a:ext cx="3017520" cy="320040"/>
+          </a:xfrm>
+          <a:prstGeom prst="rect">
+            <a:avLst/>
+          </a:prstGeom>
+          <a:noFill/>
+        </p:spPr>
+        <p:txBody>
+          <a:bodyPr wrap="square">
+            <a:spAutoFit/>
+          </a:bodyPr>
+          <a:lstStyle/>
+          <a:p>
+            <a:pPr algn="ctr"/>
+            <a:r>
+              <a:rPr sz="950" b="0" i="1">
                 <a:solidFill>
                   <a:srgbClr val="FFFFFF"/>
                 </a:solidFill>
-              </a:rPr>
-              <a:t>Minjin</a:t>
-            </a:r>
-            <a:r>
-              <a:rPr lang="en-US" altLang="ko-KR" b="1" dirty="0">
+                <a:latin typeface="Calibri"/>
+              </a:rPr>
+              <a:t>regression + threshold + event study</a:t>
+            </a:r>
+          </a:p>
+        </p:txBody>
+      </p:sp>
+      <p:sp>
+        <p:nvSpPr>
+          <p:cNvPr id="15" name="TextBox 14"/>
+          <p:cNvSpPr txBox="1"/>
+          <p:nvPr/>
+        </p:nvSpPr>
+        <p:spPr>
+          <a:xfrm>
+            <a:off x="731520" y="3429000"/>
+            <a:ext cx="10698480" cy="457200"/>
+          </a:xfrm>
+          <a:prstGeom prst="rect">
+            <a:avLst/>
+          </a:prstGeom>
+          <a:noFill/>
+        </p:spPr>
+        <p:txBody>
+          <a:bodyPr wrap="square">
+            <a:spAutoFit/>
+          </a:bodyPr>
+          <a:lstStyle/>
+          <a:p>
+            <a:pPr algn="ctr"/>
+            <a:r>
+              <a:rPr sz="1300" b="0" i="0">
                 <a:solidFill>
                   <a:srgbClr val="FFFFFF"/>
                 </a:solidFill>
-              </a:rPr>
-              <a:t> Kim </a:t>
-            </a:r>
-            <a:endParaRPr lang="en-US" altLang="ko-KR" sz="1800" b="1" dirty="0">
-              <a:solidFill>
-                <a:srgbClr val="FFFFFF"/>
-              </a:solidFill>
-            </a:endParaRPr>
+                <a:latin typeface="Calibri"/>
+              </a:rPr>
+              <a:t>Mireu Kim   Sara Chekroune   Oybek Ibragimov   Jade Zhu</a:t>
+            </a:r>
+          </a:p>
+        </p:txBody>
+      </p:sp>
+      <p:sp>
+        <p:nvSpPr>
+          <p:cNvPr id="16" name="TextBox 15"/>
+          <p:cNvSpPr txBox="1"/>
+          <p:nvPr/>
+        </p:nvSpPr>
+        <p:spPr>
+          <a:xfrm>
+            <a:off x="731520" y="3913632"/>
+            <a:ext cx="10698480" cy="457200"/>
+          </a:xfrm>
+          <a:prstGeom prst="rect">
+            <a:avLst/>
+          </a:prstGeom>
+          <a:noFill/>
+        </p:spPr>
+        <p:txBody>
+          <a:bodyPr wrap="square">
+            <a:spAutoFit/>
+          </a:bodyPr>
+          <a:lstStyle/>
+          <a:p>
+            <a:pPr algn="ctr"/>
+            <a:r>
+              <a:rPr sz="1300" b="0" i="0">
+                <a:solidFill>
+                  <a:srgbClr val="FFFFFF"/>
+                </a:solidFill>
+                <a:latin typeface="Calibri"/>
+              </a:rPr>
+              <a:t>Alexandre Godefroy   Baptiste Degand   Minjin Kim</a:t>
+            </a:r>
+          </a:p>
+        </p:txBody>
+      </p:sp>
+      <p:sp>
+        <p:nvSpPr>
+          <p:cNvPr id="17" name="TextBox 16"/>
+          <p:cNvSpPr txBox="1"/>
+          <p:nvPr/>
+        </p:nvSpPr>
+        <p:spPr>
+          <a:xfrm>
+            <a:off x="731520" y="4526280"/>
+            <a:ext cx="10698480" cy="411480"/>
+          </a:xfrm>
+          <a:prstGeom prst="rect">
+            <a:avLst/>
+          </a:prstGeom>
+          <a:noFill/>
+        </p:spPr>
+        <p:txBody>
+          <a:bodyPr wrap="square">
+            <a:spAutoFit/>
+          </a:bodyPr>
+          <a:lstStyle/>
+          <a:p>
+            <a:pPr algn="ctr"/>
+            <a:r>
+              <a:rPr sz="1200" b="0" i="1">
+                <a:solidFill>
+                  <a:srgbClr val="E87722"/>
+                </a:solidFill>
+                <a:latin typeface="Calibri"/>
+              </a:rPr>
+              <a:t>Yonsei GSIS  |  Topics in International Finance  |  June 2026</a:t>
+            </a:r>
+          </a:p>
+        </p:txBody>
+      </p:sp>
+      <p:sp>
+        <p:nvSpPr>
+          <p:cNvPr id="18" name="TextBox 17"/>
+          <p:cNvSpPr txBox="1"/>
+          <p:nvPr/>
+        </p:nvSpPr>
+        <p:spPr>
+          <a:xfrm>
+            <a:off x="731520" y="5120640"/>
+            <a:ext cx="10698480" cy="548640"/>
+          </a:xfrm>
+          <a:prstGeom prst="rect">
+            <a:avLst/>
+          </a:prstGeom>
+          <a:noFill/>
+        </p:spPr>
+        <p:txBody>
+          <a:bodyPr wrap="square">
+            <a:spAutoFit/>
+          </a:bodyPr>
+          <a:lstStyle/>
+          <a:p>
+            <a:pPr algn="ctr"/>
+            <a:r>
+              <a:rPr sz="2000" b="1" i="0">
+                <a:solidFill>
+                  <a:srgbClr val="FFFFFF"/>
+                </a:solidFill>
+                <a:latin typeface="Calibri"/>
+              </a:rPr>
+              <a:t>Thank you — Questions welcome</a:t>
+            </a:r>
+          </a:p>
+        </p:txBody>
+      </p:sp>
+      <p:sp>
+        <p:nvSpPr>
+          <p:cNvPr id="19" name="TextBox 18"/>
+          <p:cNvSpPr txBox="1"/>
+          <p:nvPr/>
+        </p:nvSpPr>
+        <p:spPr>
+          <a:xfrm>
+            <a:off x="731520" y="5806440"/>
+            <a:ext cx="10698480" cy="365760"/>
+          </a:xfrm>
+          <a:prstGeom prst="rect">
+            <a:avLst/>
+          </a:prstGeom>
+          <a:noFill/>
+        </p:spPr>
+        <p:txBody>
+          <a:bodyPr wrap="square">
+            <a:spAutoFit/>
+          </a:bodyPr>
+          <a:lstStyle/>
+          <a:p>
+            <a:pPr algn="ctr"/>
+            <a:r>
+              <a:rPr sz="1100" b="0" i="1">
+                <a:solidFill>
+                  <a:srgbClr val="E87722"/>
+                </a:solidFill>
+                <a:latin typeface="Calibri"/>
+              </a:rPr>
+              <a:t>github.com/stablecoin-privilege-research</a:t>
+            </a:r>
           </a:p>
         </p:txBody>
       </p:sp>
@@ -12034,7 +12765,7 @@
 </file>
 
 <file path=ppt/slides/slide2.xml><?xml version="1.0" encoding="utf-8"?>
-<p:sld xmlns:a="http://schemas.openxmlformats.org/drawingml/2006/main" xmlns:r="http://schemas.openxmlformats.org/officeDocument/2006/relationships" xmlns:p="http://schemas.openxmlformats.org/presentationml/2006/main">
+<p:sld xmlns:a="http://schemas.openxmlformats.org/drawingml/2006/main" xmlns:p="http://schemas.openxmlformats.org/presentationml/2006/main" xmlns:r="http://schemas.openxmlformats.org/officeDocument/2006/relationships">
   <p:cSld>
     <p:spTree>
       <p:nvGrpSpPr>
@@ -12042,14 +12773,7 @@
         <p:cNvGrpSpPr/>
         <p:nvPr/>
       </p:nvGrpSpPr>
-      <p:grpSpPr>
-        <a:xfrm>
-          <a:off x="0" y="0"/>
-          <a:ext cx="0" cy="0"/>
-          <a:chOff x="0" y="0"/>
-          <a:chExt cx="0" cy="0"/>
-        </a:xfrm>
-      </p:grpSpPr>
+      <p:grpSpPr/>
       <p:sp>
         <p:nvSpPr>
           <p:cNvPr id="2" name="Rectangle 1"/>
@@ -12090,7 +12814,6 @@
           <a:lstStyle/>
           <a:p>
             <a:pPr algn="ctr"/>
-            <a:endParaRPr/>
           </a:p>
         </p:txBody>
       </p:sp>
@@ -12134,7 +12857,6 @@
           <a:lstStyle/>
           <a:p>
             <a:pPr algn="ctr"/>
-            <a:endParaRPr/>
           </a:p>
         </p:txBody>
       </p:sp>
@@ -12276,7 +12998,7 @@
 </file>
 
 <file path=ppt/slides/slide3.xml><?xml version="1.0" encoding="utf-8"?>
-<p:sld xmlns:a="http://schemas.openxmlformats.org/drawingml/2006/main" xmlns:r="http://schemas.openxmlformats.org/officeDocument/2006/relationships" xmlns:p="http://schemas.openxmlformats.org/presentationml/2006/main">
+<p:sld xmlns:a="http://schemas.openxmlformats.org/drawingml/2006/main" xmlns:p="http://schemas.openxmlformats.org/presentationml/2006/main" xmlns:r="http://schemas.openxmlformats.org/officeDocument/2006/relationships">
   <p:cSld>
     <p:spTree>
       <p:nvGrpSpPr>
@@ -12284,14 +13006,7 @@
         <p:cNvGrpSpPr/>
         <p:nvPr/>
       </p:nvGrpSpPr>
-      <p:grpSpPr>
-        <a:xfrm>
-          <a:off x="0" y="0"/>
-          <a:ext cx="0" cy="0"/>
-          <a:chOff x="0" y="0"/>
-          <a:chExt cx="0" cy="0"/>
-        </a:xfrm>
-      </p:grpSpPr>
+      <p:grpSpPr/>
       <p:sp>
         <p:nvSpPr>
           <p:cNvPr id="2" name="Rectangle 1"/>
@@ -12332,7 +13047,6 @@
           <a:lstStyle/>
           <a:p>
             <a:pPr algn="ctr"/>
-            <a:endParaRPr/>
           </a:p>
         </p:txBody>
       </p:sp>
@@ -12376,7 +13090,6 @@
           <a:lstStyle/>
           <a:p>
             <a:pPr algn="ctr"/>
-            <a:endParaRPr/>
           </a:p>
         </p:txBody>
       </p:sp>
@@ -12525,7 +13238,6 @@
           <a:lstStyle/>
           <a:p>
             <a:pPr algn="ctr"/>
-            <a:endParaRPr/>
           </a:p>
         </p:txBody>
       </p:sp>
@@ -12639,7 +13351,6 @@
           <a:lstStyle/>
           <a:p>
             <a:pPr algn="ctr"/>
-            <a:endParaRPr/>
           </a:p>
         </p:txBody>
       </p:sp>
@@ -12755,7 +13466,6 @@
           <a:lstStyle/>
           <a:p>
             <a:pPr algn="ctr"/>
-            <a:endParaRPr/>
           </a:p>
         </p:txBody>
       </p:sp>
@@ -12870,7 +13580,6 @@
           <a:lstStyle/>
           <a:p>
             <a:pPr algn="ctr"/>
-            <a:endParaRPr/>
           </a:p>
         </p:txBody>
       </p:sp>
@@ -12949,7 +13658,6 @@
           <a:lstStyle/>
           <a:p>
             <a:pPr algn="ctr"/>
-            <a:endParaRPr/>
           </a:p>
         </p:txBody>
       </p:sp>
@@ -13063,7 +13771,6 @@
           <a:lstStyle/>
           <a:p>
             <a:pPr algn="ctr"/>
-            <a:endParaRPr/>
           </a:p>
         </p:txBody>
       </p:sp>
@@ -13177,7 +13884,6 @@
           <a:lstStyle/>
           <a:p>
             <a:pPr algn="ctr"/>
-            <a:endParaRPr/>
           </a:p>
         </p:txBody>
       </p:sp>
@@ -13291,7 +13997,6 @@
           <a:lstStyle/>
           <a:p>
             <a:pPr algn="ctr"/>
-            <a:endParaRPr/>
           </a:p>
         </p:txBody>
       </p:sp>
@@ -13405,7 +14110,6 @@
           <a:lstStyle/>
           <a:p>
             <a:pPr algn="ctr"/>
-            <a:endParaRPr/>
           </a:p>
         </p:txBody>
       </p:sp>
@@ -13519,7 +14223,6 @@
           <a:lstStyle/>
           <a:p>
             <a:pPr algn="ctr"/>
-            <a:endParaRPr/>
           </a:p>
         </p:txBody>
       </p:sp>
@@ -13567,7 +14270,7 @@
 </file>
 
 <file path=ppt/slides/slide4.xml><?xml version="1.0" encoding="utf-8"?>
-<p:sld xmlns:a="http://schemas.openxmlformats.org/drawingml/2006/main" xmlns:r="http://schemas.openxmlformats.org/officeDocument/2006/relationships" xmlns:p="http://schemas.openxmlformats.org/presentationml/2006/main">
+<p:sld xmlns:a="http://schemas.openxmlformats.org/drawingml/2006/main" xmlns:p="http://schemas.openxmlformats.org/presentationml/2006/main" xmlns:r="http://schemas.openxmlformats.org/officeDocument/2006/relationships">
   <p:cSld>
     <p:spTree>
       <p:nvGrpSpPr>
@@ -13575,14 +14278,7 @@
         <p:cNvGrpSpPr/>
         <p:nvPr/>
       </p:nvGrpSpPr>
-      <p:grpSpPr>
-        <a:xfrm>
-          <a:off x="0" y="0"/>
-          <a:ext cx="0" cy="0"/>
-          <a:chOff x="0" y="0"/>
-          <a:chExt cx="0" cy="0"/>
-        </a:xfrm>
-      </p:grpSpPr>
+      <p:grpSpPr/>
       <p:sp>
         <p:nvSpPr>
           <p:cNvPr id="2" name="Rectangle 1"/>
@@ -13623,7 +14319,6 @@
           <a:lstStyle/>
           <a:p>
             <a:pPr algn="ctr"/>
-            <a:endParaRPr/>
           </a:p>
         </p:txBody>
       </p:sp>
@@ -13667,7 +14362,6 @@
           <a:lstStyle/>
           <a:p>
             <a:pPr algn="ctr"/>
-            <a:endParaRPr/>
           </a:p>
         </p:txBody>
       </p:sp>
@@ -13809,7 +14503,7 @@
 </file>
 
 <file path=ppt/slides/slide5.xml><?xml version="1.0" encoding="utf-8"?>
-<p:sld xmlns:a="http://schemas.openxmlformats.org/drawingml/2006/main" xmlns:r="http://schemas.openxmlformats.org/officeDocument/2006/relationships" xmlns:p="http://schemas.openxmlformats.org/presentationml/2006/main">
+<p:sld xmlns:a="http://schemas.openxmlformats.org/drawingml/2006/main" xmlns:p="http://schemas.openxmlformats.org/presentationml/2006/main" xmlns:r="http://schemas.openxmlformats.org/officeDocument/2006/relationships">
   <p:cSld>
     <p:spTree>
       <p:nvGrpSpPr>
@@ -13817,14 +14511,7 @@
         <p:cNvGrpSpPr/>
         <p:nvPr/>
       </p:nvGrpSpPr>
-      <p:grpSpPr>
-        <a:xfrm>
-          <a:off x="0" y="0"/>
-          <a:ext cx="0" cy="0"/>
-          <a:chOff x="0" y="0"/>
-          <a:chExt cx="0" cy="0"/>
-        </a:xfrm>
-      </p:grpSpPr>
+      <p:grpSpPr/>
       <p:sp>
         <p:nvSpPr>
           <p:cNvPr id="2" name="Rectangle 1"/>
@@ -13865,7 +14552,6 @@
           <a:lstStyle/>
           <a:p>
             <a:pPr algn="ctr"/>
-            <a:endParaRPr/>
           </a:p>
         </p:txBody>
       </p:sp>
@@ -13909,7 +14595,6 @@
           <a:lstStyle/>
           <a:p>
             <a:pPr algn="ctr"/>
-            <a:endParaRPr/>
           </a:p>
         </p:txBody>
       </p:sp>
@@ -14037,27 +14722,9 @@
                 <a:tableStyleId>{5C22544A-7EE6-4342-B048-85BDC9FD1C3A}</a:tableStyleId>
               </a:tblPr>
               <a:tblGrid>
-                <a:gridCol w="2560320">
-                  <a:extLst>
-                    <a:ext uri="{9D8B030D-6E8A-4147-A177-3AD203B41FA5}">
-                      <a16:colId xmlns:a16="http://schemas.microsoft.com/office/drawing/2014/main" val="20000"/>
-                    </a:ext>
-                  </a:extLst>
-                </a:gridCol>
-                <a:gridCol w="2194560">
-                  <a:extLst>
-                    <a:ext uri="{9D8B030D-6E8A-4147-A177-3AD203B41FA5}">
-                      <a16:colId xmlns:a16="http://schemas.microsoft.com/office/drawing/2014/main" val="20001"/>
-                    </a:ext>
-                  </a:extLst>
-                </a:gridCol>
-                <a:gridCol w="4846320">
-                  <a:extLst>
-                    <a:ext uri="{9D8B030D-6E8A-4147-A177-3AD203B41FA5}">
-                      <a16:colId xmlns:a16="http://schemas.microsoft.com/office/drawing/2014/main" val="20002"/>
-                    </a:ext>
-                  </a:extLst>
-                </a:gridCol>
+                <a:gridCol w="2560320"/>
+                <a:gridCol w="2194560"/>
+                <a:gridCol w="4846320"/>
               </a:tblGrid>
               <a:tr h="441960">
                 <a:tc>
@@ -14067,7 +14734,7 @@
                     <a:p>
                       <a:pPr algn="ctr"/>
                       <a:r>
-                        <a:rPr sz="1000" b="1">
+                        <a:rPr b="1" sz="1000">
                           <a:solidFill>
                             <a:srgbClr val="FFFFFF"/>
                           </a:solidFill>
@@ -14090,7 +14757,7 @@
                     <a:p>
                       <a:pPr algn="ctr"/>
                       <a:r>
-                        <a:rPr sz="1000" b="1">
+                        <a:rPr b="1" sz="1000">
                           <a:solidFill>
                             <a:srgbClr val="FFFFFF"/>
                           </a:solidFill>
@@ -14113,7 +14780,7 @@
                     <a:p>
                       <a:pPr algn="ctr"/>
                       <a:r>
-                        <a:rPr sz="1000" b="1">
+                        <a:rPr b="1" sz="1000">
                           <a:solidFill>
                             <a:srgbClr val="FFFFFF"/>
                           </a:solidFill>
@@ -14129,11 +14796,6 @@
                     </a:solidFill>
                   </a:tcPr>
                 </a:tc>
-                <a:extLst>
-                  <a:ext uri="{0D108BD9-81ED-4DB2-BD59-A6C34878D82A}">
-                    <a16:rowId xmlns:a16="http://schemas.microsoft.com/office/drawing/2014/main" val="10000"/>
-                  </a:ext>
-                </a:extLst>
               </a:tr>
               <a:tr h="441960">
                 <a:tc>
@@ -14205,11 +14867,6 @@
                     </a:solidFill>
                   </a:tcPr>
                 </a:tc>
-                <a:extLst>
-                  <a:ext uri="{0D108BD9-81ED-4DB2-BD59-A6C34878D82A}">
-                    <a16:rowId xmlns:a16="http://schemas.microsoft.com/office/drawing/2014/main" val="10001"/>
-                  </a:ext>
-                </a:extLst>
               </a:tr>
               <a:tr h="441960">
                 <a:tc>
@@ -14281,11 +14938,6 @@
                     </a:solidFill>
                   </a:tcPr>
                 </a:tc>
-                <a:extLst>
-                  <a:ext uri="{0D108BD9-81ED-4DB2-BD59-A6C34878D82A}">
-                    <a16:rowId xmlns:a16="http://schemas.microsoft.com/office/drawing/2014/main" val="10002"/>
-                  </a:ext>
-                </a:extLst>
               </a:tr>
               <a:tr h="441960">
                 <a:tc>
@@ -14357,11 +15009,6 @@
                     </a:solidFill>
                   </a:tcPr>
                 </a:tc>
-                <a:extLst>
-                  <a:ext uri="{0D108BD9-81ED-4DB2-BD59-A6C34878D82A}">
-                    <a16:rowId xmlns:a16="http://schemas.microsoft.com/office/drawing/2014/main" val="10003"/>
-                  </a:ext>
-                </a:extLst>
               </a:tr>
               <a:tr h="441960">
                 <a:tc>
@@ -14433,11 +15080,6 @@
                     </a:solidFill>
                   </a:tcPr>
                 </a:tc>
-                <a:extLst>
-                  <a:ext uri="{0D108BD9-81ED-4DB2-BD59-A6C34878D82A}">
-                    <a16:rowId xmlns:a16="http://schemas.microsoft.com/office/drawing/2014/main" val="10004"/>
-                  </a:ext>
-                </a:extLst>
               </a:tr>
               <a:tr h="441960">
                 <a:tc>
@@ -14509,11 +15151,6 @@
                     </a:solidFill>
                   </a:tcPr>
                 </a:tc>
-                <a:extLst>
-                  <a:ext uri="{0D108BD9-81ED-4DB2-BD59-A6C34878D82A}">
-                    <a16:rowId xmlns:a16="http://schemas.microsoft.com/office/drawing/2014/main" val="10005"/>
-                  </a:ext>
-                </a:extLst>
               </a:tr>
             </a:tbl>
           </a:graphicData>
@@ -14559,7 +15196,6 @@
           <a:lstStyle/>
           <a:p>
             <a:pPr algn="ctr"/>
-            <a:endParaRPr/>
           </a:p>
         </p:txBody>
       </p:sp>
@@ -14673,7 +15309,6 @@
           <a:lstStyle/>
           <a:p>
             <a:pPr algn="ctr"/>
-            <a:endParaRPr/>
           </a:p>
         </p:txBody>
       </p:sp>
@@ -14787,7 +15422,6 @@
           <a:lstStyle/>
           <a:p>
             <a:pPr algn="ctr"/>
-            <a:endParaRPr/>
           </a:p>
         </p:txBody>
       </p:sp>
@@ -14821,7 +15455,7 @@
                 </a:solidFill>
                 <a:latin typeface="Calibri"/>
               </a:rPr>
-              <a:t>β₁ = −6.02***  |  q* = 13%  |  Three convergent methods: OLS regression  +  Hansen threshold  +  LSTAR nonlinear model</a:t>
+              <a:t>β₁ = −7.57***  |  q* = 13%  |  Three convergent methods: OLS regression  +  Hansen threshold  +  LSTAR nonlinear model</a:t>
             </a:r>
           </a:p>
         </p:txBody>
@@ -14835,7 +15469,7 @@
 </file>
 
 <file path=ppt/slides/slide6.xml><?xml version="1.0" encoding="utf-8"?>
-<p:sld xmlns:a="http://schemas.openxmlformats.org/drawingml/2006/main" xmlns:r="http://schemas.openxmlformats.org/officeDocument/2006/relationships" xmlns:p="http://schemas.openxmlformats.org/presentationml/2006/main">
+<p:sld xmlns:a="http://schemas.openxmlformats.org/drawingml/2006/main" xmlns:p="http://schemas.openxmlformats.org/presentationml/2006/main" xmlns:r="http://schemas.openxmlformats.org/officeDocument/2006/relationships">
   <p:cSld>
     <p:spTree>
       <p:nvGrpSpPr>
@@ -14843,14 +15477,7 @@
         <p:cNvGrpSpPr/>
         <p:nvPr/>
       </p:nvGrpSpPr>
-      <p:grpSpPr>
-        <a:xfrm>
-          <a:off x="0" y="0"/>
-          <a:ext cx="0" cy="0"/>
-          <a:chOff x="0" y="0"/>
-          <a:chExt cx="0" cy="0"/>
-        </a:xfrm>
-      </p:grpSpPr>
+      <p:grpSpPr/>
       <p:sp>
         <p:nvSpPr>
           <p:cNvPr id="2" name="Rectangle 1"/>
@@ -14891,7 +15518,6 @@
           <a:lstStyle/>
           <a:p>
             <a:pPr algn="ctr"/>
-            <a:endParaRPr/>
           </a:p>
         </p:txBody>
       </p:sp>
@@ -14935,7 +15561,6 @@
           <a:lstStyle/>
           <a:p>
             <a:pPr algn="ctr"/>
-            <a:endParaRPr/>
           </a:p>
         </p:txBody>
       </p:sp>
@@ -14969,7 +15594,7 @@
                 </a:solidFill>
                 <a:latin typeface="Calibri"/>
               </a:rPr>
-              <a:t>Data &amp; The OIS-Treasury Spread</a:t>
+              <a:t>Data &amp; The OIS-Treasury Spread (Corrected: DGS3MO − overnight SOFR)</a:t>
             </a:r>
           </a:p>
         </p:txBody>
@@ -15108,7 +15733,6 @@
           <a:lstStyle/>
           <a:p>
             <a:pPr algn="ctr"/>
-            <a:endParaRPr/>
           </a:p>
         </p:txBody>
       </p:sp>
@@ -15187,7 +15811,6 @@
           <a:lstStyle/>
           <a:p>
             <a:pPr algn="ctr"/>
-            <a:endParaRPr/>
           </a:p>
         </p:txBody>
       </p:sp>
@@ -15221,7 +15844,7 @@
                 </a:solidFill>
                 <a:latin typeface="Calibri"/>
               </a:rPr>
-              <a:t>Normal range:  10–50 bps</a:t>
+              <a:t>Corrected spread:  Mean = 16.6 bps</a:t>
             </a:r>
           </a:p>
         </p:txBody>
@@ -15256,7 +15879,8 @@
                 </a:solidFill>
                 <a:latin typeface="Calibri"/>
               </a:rPr>
-              <a:t>10 bps IS economically large</a:t>
+              <a:t>DGS3MO − overnight SOFR
+Old (wrong): 84.8 bps mean — Fed artifact</a:t>
             </a:r>
           </a:p>
         </p:txBody>
@@ -15301,7 +15925,6 @@
           <a:lstStyle/>
           <a:p>
             <a:pPr algn="ctr"/>
-            <a:endParaRPr/>
           </a:p>
         </p:txBody>
       </p:sp>
@@ -15416,7 +16039,6 @@
           <a:lstStyle/>
           <a:p>
             <a:pPr algn="ctr"/>
-            <a:endParaRPr/>
           </a:p>
         </p:txBody>
       </p:sp>
@@ -15450,7 +16072,7 @@
                 </a:solidFill>
                 <a:latin typeface="Calibri"/>
               </a:rPr>
-              <a:t>LUNA May 2022:  +76 bps peak</a:t>
+              <a:t>LUNA May 2022:  14.0 bps</a:t>
             </a:r>
           </a:p>
         </p:txBody>
@@ -15485,7 +16107,7 @@
                 </a:solidFill>
                 <a:latin typeface="Calibri"/>
               </a:rPr>
-              <a:t>Spread WIDENED during crypto stress</a:t>
+              <a:t>Corrected (was 70.9 bps with lagging SOFR90DAYAVG)</a:t>
             </a:r>
           </a:p>
         </p:txBody>
@@ -15530,7 +16152,6 @@
           <a:lstStyle/>
           <a:p>
             <a:pPr algn="ctr"/>
-            <a:endParaRPr/>
           </a:p>
         </p:txBody>
       </p:sp>
@@ -15564,7 +16185,7 @@
                 </a:solidFill>
                 <a:latin typeface="Calibri"/>
               </a:rPr>
-              <a:t>Our measure:  OIS minus T-bill yield</a:t>
+              <a:t>Our measure:  DGS3MO − overnight SOFR</a:t>
             </a:r>
           </a:p>
         </p:txBody>
@@ -15600,7 +16221,7 @@
                 <a:latin typeface="Calibri"/>
               </a:rPr>
               <a:t>≈ 0 in normal times;
-negative = extreme privilege</a:t>
+10 bps IS economically large</a:t>
             </a:r>
           </a:p>
         </p:txBody>
@@ -15645,7 +16266,6 @@
           <a:lstStyle/>
           <a:p>
             <a:pPr algn="ctr"/>
-            <a:endParaRPr/>
           </a:p>
         </p:txBody>
       </p:sp>
@@ -15681,6 +16301,119 @@
               </a:rPr>
               <a:t>3 stress events marked:
 LUNA/UST   USDC/SVB   USDT Mar 2023</a:t>
+            </a:r>
+          </a:p>
+        </p:txBody>
+      </p:sp>
+      <p:sp>
+        <p:nvSpPr>
+          <p:cNvPr id="24" name="Rectangle 23"/>
+          <p:cNvSpPr/>
+          <p:nvPr/>
+        </p:nvSpPr>
+        <p:spPr>
+          <a:xfrm>
+            <a:off x="182880" y="5532120"/>
+            <a:ext cx="7772400" cy="1051560"/>
+          </a:xfrm>
+          <a:prstGeom prst="rect">
+            <a:avLst/>
+          </a:prstGeom>
+          <a:solidFill>
+            <a:srgbClr val="FFEDED"/>
+          </a:solidFill>
+          <a:ln>
+            <a:noFill/>
+          </a:ln>
+        </p:spPr>
+        <p:style>
+          <a:lnRef idx="1">
+            <a:schemeClr val="accent1"/>
+          </a:lnRef>
+          <a:fillRef idx="3">
+            <a:schemeClr val="accent1"/>
+          </a:fillRef>
+          <a:effectRef idx="2">
+            <a:schemeClr val="accent1"/>
+          </a:effectRef>
+          <a:fontRef idx="minor">
+            <a:schemeClr val="lt1"/>
+          </a:fontRef>
+        </p:style>
+        <p:txBody>
+          <a:bodyPr rtlCol="0" anchor="ctr"/>
+          <a:lstStyle/>
+          <a:p>
+            <a:pPr algn="ctr"/>
+          </a:p>
+        </p:txBody>
+      </p:sp>
+      <p:sp>
+        <p:nvSpPr>
+          <p:cNvPr id="25" name="TextBox 24"/>
+          <p:cNvSpPr txBox="1"/>
+          <p:nvPr/>
+        </p:nvSpPr>
+        <p:spPr>
+          <a:xfrm>
+            <a:off x="274320" y="5559552"/>
+            <a:ext cx="7589520" cy="292608"/>
+          </a:xfrm>
+          <a:prstGeom prst="rect">
+            <a:avLst/>
+          </a:prstGeom>
+          <a:noFill/>
+        </p:spPr>
+        <p:txBody>
+          <a:bodyPr wrap="square">
+            <a:spAutoFit/>
+          </a:bodyPr>
+          <a:lstStyle/>
+          <a:p>
+            <a:pPr algn="l"/>
+            <a:r>
+              <a:rPr sz="1050" b="1" i="0">
+                <a:solidFill>
+                  <a:srgbClr val="C0392B"/>
+                </a:solidFill>
+                <a:latin typeface="Calibri"/>
+              </a:rPr>
+              <a:t>Spread Correction — Why We Changed the Variable</a:t>
+            </a:r>
+          </a:p>
+        </p:txBody>
+      </p:sp>
+      <p:sp>
+        <p:nvSpPr>
+          <p:cNvPr id="26" name="TextBox 25"/>
+          <p:cNvSpPr txBox="1"/>
+          <p:nvPr/>
+        </p:nvSpPr>
+        <p:spPr>
+          <a:xfrm>
+            <a:off x="274320" y="5833872"/>
+            <a:ext cx="7589520" cy="685800"/>
+          </a:xfrm>
+          <a:prstGeom prst="rect">
+            <a:avLst/>
+          </a:prstGeom>
+          <a:noFill/>
+        </p:spPr>
+        <p:txBody>
+          <a:bodyPr wrap="square">
+            <a:spAutoFit/>
+          </a:bodyPr>
+          <a:lstStyle/>
+          <a:p>
+            <a:pPr algn="l"/>
+            <a:r>
+              <a:rPr sz="880" b="0" i="0">
+                <a:solidFill>
+                  <a:srgbClr val="222222"/>
+                </a:solidFill>
+                <a:latin typeface="Calibri"/>
+              </a:rPr>
+              <a:t>ORIGINAL (WRONG): DTB3 − SOFR90DAYAVG — SOFR90DAYAVG is a 90-day backward-looking trailing average; during 2022 Fed hiking it lagged overnight SOFR by up to 119 bps → inflated our spread to 84 bps mean (pure Fed-policy artifact, not convenience yield).  CORRECTED: DGS3MO (bond-equivalent T-bill) − overnight SOFR → mean = 16.6 bps, consistent with professor's intuition that 10 bps is large.</a:t>
             </a:r>
           </a:p>
         </p:txBody>
@@ -15694,7 +16427,7 @@
 </file>
 
 <file path=ppt/slides/slide7.xml><?xml version="1.0" encoding="utf-8"?>
-<p:sld xmlns:a="http://schemas.openxmlformats.org/drawingml/2006/main" xmlns:r="http://schemas.openxmlformats.org/officeDocument/2006/relationships" xmlns:p="http://schemas.openxmlformats.org/presentationml/2006/main">
+<p:sld xmlns:a="http://schemas.openxmlformats.org/drawingml/2006/main" xmlns:p="http://schemas.openxmlformats.org/presentationml/2006/main" xmlns:r="http://schemas.openxmlformats.org/officeDocument/2006/relationships">
   <p:cSld>
     <p:spTree>
       <p:nvGrpSpPr>
@@ -15702,14 +16435,7 @@
         <p:cNvGrpSpPr/>
         <p:nvPr/>
       </p:nvGrpSpPr>
-      <p:grpSpPr>
-        <a:xfrm>
-          <a:off x="0" y="0"/>
-          <a:ext cx="0" cy="0"/>
-          <a:chOff x="0" y="0"/>
-          <a:chExt cx="0" cy="0"/>
-        </a:xfrm>
-      </p:grpSpPr>
+      <p:grpSpPr/>
       <p:sp>
         <p:nvSpPr>
           <p:cNvPr id="2" name="Rectangle 1"/>
@@ -15750,7 +16476,6 @@
           <a:lstStyle/>
           <a:p>
             <a:pPr algn="ctr"/>
-            <a:endParaRPr/>
           </a:p>
         </p:txBody>
       </p:sp>
@@ -15794,7 +16519,6 @@
           <a:lstStyle/>
           <a:p>
             <a:pPr algn="ctr"/>
-            <a:endParaRPr/>
           </a:p>
         </p:txBody>
       </p:sp>
@@ -15967,7 +16691,6 @@
           <a:lstStyle/>
           <a:p>
             <a:pPr algn="ctr"/>
-            <a:endParaRPr/>
           </a:p>
         </p:txBody>
       </p:sp>
@@ -16015,7 +16738,7 @@
 </file>
 
 <file path=ppt/slides/slide8.xml><?xml version="1.0" encoding="utf-8"?>
-<p:sld xmlns:a="http://schemas.openxmlformats.org/drawingml/2006/main" xmlns:r="http://schemas.openxmlformats.org/officeDocument/2006/relationships" xmlns:p="http://schemas.openxmlformats.org/presentationml/2006/main">
+<p:sld xmlns:a="http://schemas.openxmlformats.org/drawingml/2006/main" xmlns:p="http://schemas.openxmlformats.org/presentationml/2006/main" xmlns:r="http://schemas.openxmlformats.org/officeDocument/2006/relationships">
   <p:cSld>
     <p:spTree>
       <p:nvGrpSpPr>
@@ -16023,14 +16746,7 @@
         <p:cNvGrpSpPr/>
         <p:nvPr/>
       </p:nvGrpSpPr>
-      <p:grpSpPr>
-        <a:xfrm>
-          <a:off x="0" y="0"/>
-          <a:ext cx="0" cy="0"/>
-          <a:chOff x="0" y="0"/>
-          <a:chExt cx="0" cy="0"/>
-        </a:xfrm>
-      </p:grpSpPr>
+      <p:grpSpPr/>
       <p:sp>
         <p:nvSpPr>
           <p:cNvPr id="2" name="Rectangle 1"/>
@@ -16071,7 +16787,6 @@
           <a:lstStyle/>
           <a:p>
             <a:pPr algn="ctr"/>
-            <a:endParaRPr/>
           </a:p>
         </p:txBody>
       </p:sp>
@@ -16115,7 +16830,6 @@
           <a:lstStyle/>
           <a:p>
             <a:pPr algn="ctr"/>
-            <a:endParaRPr/>
           </a:p>
         </p:txBody>
       </p:sp>
@@ -16149,7 +16863,7 @@
                 </a:solidFill>
                 <a:latin typeface="Calibri"/>
               </a:rPr>
-              <a:t>Main Result: β₁ = −6.02***   (THE KEY FINDING)</a:t>
+              <a:t>Main Result: β₁ = −7.57***   (THE KEY FINDING — Column 2, Buffer-Ratio Spec)</a:t>
             </a:r>
           </a:p>
         </p:txBody>
@@ -16243,41 +16957,11 @@
                 <a:tableStyleId>{5C22544A-7EE6-4342-B048-85BDC9FD1C3A}</a:tableStyleId>
               </a:tblPr>
               <a:tblGrid>
-                <a:gridCol w="2103120">
-                  <a:extLst>
-                    <a:ext uri="{9D8B030D-6E8A-4147-A177-3AD203B41FA5}">
-                      <a16:colId xmlns:a16="http://schemas.microsoft.com/office/drawing/2014/main" val="20000"/>
-                    </a:ext>
-                  </a:extLst>
-                </a:gridCol>
-                <a:gridCol w="1097280">
-                  <a:extLst>
-                    <a:ext uri="{9D8B030D-6E8A-4147-A177-3AD203B41FA5}">
-                      <a16:colId xmlns:a16="http://schemas.microsoft.com/office/drawing/2014/main" val="20001"/>
-                    </a:ext>
-                  </a:extLst>
-                </a:gridCol>
-                <a:gridCol w="1097280">
-                  <a:extLst>
-                    <a:ext uri="{9D8B030D-6E8A-4147-A177-3AD203B41FA5}">
-                      <a16:colId xmlns:a16="http://schemas.microsoft.com/office/drawing/2014/main" val="20002"/>
-                    </a:ext>
-                  </a:extLst>
-                </a:gridCol>
-                <a:gridCol w="1280160">
-                  <a:extLst>
-                    <a:ext uri="{9D8B030D-6E8A-4147-A177-3AD203B41FA5}">
-                      <a16:colId xmlns:a16="http://schemas.microsoft.com/office/drawing/2014/main" val="20003"/>
-                    </a:ext>
-                  </a:extLst>
-                </a:gridCol>
-                <a:gridCol w="3749039">
-                  <a:extLst>
-                    <a:ext uri="{9D8B030D-6E8A-4147-A177-3AD203B41FA5}">
-                      <a16:colId xmlns:a16="http://schemas.microsoft.com/office/drawing/2014/main" val="20004"/>
-                    </a:ext>
-                  </a:extLst>
-                </a:gridCol>
+                <a:gridCol w="2103120"/>
+                <a:gridCol w="1097280"/>
+                <a:gridCol w="1097280"/>
+                <a:gridCol w="1280160"/>
+                <a:gridCol w="3749039"/>
               </a:tblGrid>
               <a:tr h="381000">
                 <a:tc>
@@ -16287,7 +16971,7 @@
                     <a:p>
                       <a:pPr algn="ctr"/>
                       <a:r>
-                        <a:rPr sz="1050" b="1">
+                        <a:rPr b="1" sz="1050">
                           <a:solidFill>
                             <a:srgbClr val="FFFFFF"/>
                           </a:solidFill>
@@ -16310,7 +16994,7 @@
                     <a:p>
                       <a:pPr algn="ctr"/>
                       <a:r>
-                        <a:rPr sz="1050" b="1">
+                        <a:rPr b="1" sz="1050">
                           <a:solidFill>
                             <a:srgbClr val="FFFFFF"/>
                           </a:solidFill>
@@ -16333,7 +17017,7 @@
                     <a:p>
                       <a:pPr algn="ctr"/>
                       <a:r>
-                        <a:rPr sz="1050" b="1">
+                        <a:rPr b="1" sz="1050">
                           <a:solidFill>
                             <a:srgbClr val="FFFFFF"/>
                           </a:solidFill>
@@ -16356,7 +17040,7 @@
                     <a:p>
                       <a:pPr algn="ctr"/>
                       <a:r>
-                        <a:rPr sz="1050" b="1">
+                        <a:rPr b="1" sz="1050">
                           <a:solidFill>
                             <a:srgbClr val="FFFFFF"/>
                           </a:solidFill>
@@ -16379,7 +17063,7 @@
                     <a:p>
                       <a:pPr algn="ctr"/>
                       <a:r>
-                        <a:rPr sz="1050" b="1">
+                        <a:rPr b="1" sz="1050">
                           <a:solidFill>
                             <a:srgbClr val="FFFFFF"/>
                           </a:solidFill>
@@ -16395,11 +17079,6 @@
                     </a:solidFill>
                   </a:tcPr>
                 </a:tc>
-                <a:extLst>
-                  <a:ext uri="{0D108BD9-81ED-4DB2-BD59-A6C34878D82A}">
-                    <a16:rowId xmlns:a16="http://schemas.microsoft.com/office/drawing/2014/main" val="10000"/>
-                  </a:ext>
-                </a:extLst>
               </a:tr>
               <a:tr h="381000">
                 <a:tc>
@@ -16416,6 +17095,11 @@
                           <a:latin typeface="Calibri"/>
                         </a:rPr>
                         <a:t>Δln(Supply)  β₁</a:t>
+                      </a:r>
+                    </a:p>
+                    <a:p>
+                      <a:r>
+                        <a:t>[buffer-ratio spec]</a:t>
                       </a:r>
                     </a:p>
                   </a:txBody>
@@ -16438,7 +17122,7 @@
                           </a:solidFill>
                           <a:latin typeface="Calibri"/>
                         </a:rPr>
-                        <a:t>−6.02</a:t>
+                        <a:t>−7.57</a:t>
                       </a:r>
                     </a:p>
                   </a:txBody>
@@ -16461,7 +17145,7 @@
                           </a:solidFill>
                           <a:latin typeface="Calibri"/>
                         </a:rPr>
-                        <a:t>2.07</a:t>
+                        <a:t>2.59</a:t>
                       </a:r>
                     </a:p>
                   </a:txBody>
@@ -16484,7 +17168,7 @@
                           </a:solidFill>
                           <a:latin typeface="Calibri"/>
                         </a:rPr>
-                        <a:t>0.006**</a:t>
+                        <a:t>0.004***</a:t>
                       </a:r>
                     </a:p>
                   </a:txBody>
@@ -16510,6 +17194,11 @@
                         <a:t>Supply growth → spread compression</a:t>
                       </a:r>
                     </a:p>
+                    <a:p>
+                      <a:r>
+                        <a:t>(primary/buffer-ratio spec; Column 2)</a:t>
+                      </a:r>
+                    </a:p>
                   </a:txBody>
                   <a:tcPr>
                     <a:solidFill>
@@ -16517,11 +17206,6 @@
                     </a:solidFill>
                   </a:tcPr>
                 </a:tc>
-                <a:extLst>
-                  <a:ext uri="{0D108BD9-81ED-4DB2-BD59-A6C34878D82A}">
-                    <a16:rowId xmlns:a16="http://schemas.microsoft.com/office/drawing/2014/main" val="10001"/>
-                  </a:ext>
-                </a:extLst>
               </a:tr>
               <a:tr h="381000">
                 <a:tc>
@@ -16639,11 +17323,6 @@
                     </a:solidFill>
                   </a:tcPr>
                 </a:tc>
-                <a:extLst>
-                  <a:ext uri="{0D108BD9-81ED-4DB2-BD59-A6C34878D82A}">
-                    <a16:rowId xmlns:a16="http://schemas.microsoft.com/office/drawing/2014/main" val="10002"/>
-                  </a:ext>
-                </a:extLst>
               </a:tr>
               <a:tr h="381000">
                 <a:tc>
@@ -16761,11 +17440,6 @@
                     </a:solidFill>
                   </a:tcPr>
                 </a:tc>
-                <a:extLst>
-                  <a:ext uri="{0D108BD9-81ED-4DB2-BD59-A6C34878D82A}">
-                    <a16:rowId xmlns:a16="http://schemas.microsoft.com/office/drawing/2014/main" val="10003"/>
-                  </a:ext>
-                </a:extLst>
               </a:tr>
               <a:tr h="381000">
                 <a:tc>
@@ -16883,11 +17557,6 @@
                     </a:solidFill>
                   </a:tcPr>
                 </a:tc>
-                <a:extLst>
-                  <a:ext uri="{0D108BD9-81ED-4DB2-BD59-A6C34878D82A}">
-                    <a16:rowId xmlns:a16="http://schemas.microsoft.com/office/drawing/2014/main" val="10004"/>
-                  </a:ext>
-                </a:extLst>
               </a:tr>
               <a:tr h="381000">
                 <a:tc>
@@ -17005,11 +17674,6 @@
                     </a:solidFill>
                   </a:tcPr>
                 </a:tc>
-                <a:extLst>
-                  <a:ext uri="{0D108BD9-81ED-4DB2-BD59-A6C34878D82A}">
-                    <a16:rowId xmlns:a16="http://schemas.microsoft.com/office/drawing/2014/main" val="10005"/>
-                  </a:ext>
-                </a:extLst>
               </a:tr>
             </a:tbl>
           </a:graphicData>
@@ -17023,8 +17687,86 @@
         </p:nvSpPr>
         <p:spPr>
           <a:xfrm>
-            <a:off x="274320" y="3383280"/>
-            <a:ext cx="6858000" cy="1463040"/>
+            <a:off x="274320" y="3337560"/>
+            <a:ext cx="11640312" cy="594360"/>
+          </a:xfrm>
+          <a:prstGeom prst="rect">
+            <a:avLst/>
+          </a:prstGeom>
+          <a:solidFill>
+            <a:srgbClr val="FFF3E0"/>
+          </a:solidFill>
+          <a:ln>
+            <a:noFill/>
+          </a:ln>
+        </p:spPr>
+        <p:style>
+          <a:lnRef idx="1">
+            <a:schemeClr val="accent1"/>
+          </a:lnRef>
+          <a:fillRef idx="3">
+            <a:schemeClr val="accent1"/>
+          </a:fillRef>
+          <a:effectRef idx="2">
+            <a:schemeClr val="accent1"/>
+          </a:effectRef>
+          <a:fontRef idx="minor">
+            <a:schemeClr val="lt1"/>
+          </a:fontRef>
+        </p:style>
+        <p:txBody>
+          <a:bodyPr rtlCol="0" anchor="ctr"/>
+          <a:lstStyle/>
+          <a:p>
+            <a:pPr algn="ctr"/>
+          </a:p>
+        </p:txBody>
+      </p:sp>
+      <p:sp>
+        <p:nvSpPr>
+          <p:cNvPr id="9" name="TextBox 8"/>
+          <p:cNvSpPr txBox="1"/>
+          <p:nvPr/>
+        </p:nvSpPr>
+        <p:spPr>
+          <a:xfrm>
+            <a:off x="411480" y="3364992"/>
+            <a:ext cx="11274552" cy="502920"/>
+          </a:xfrm>
+          <a:prstGeom prst="rect">
+            <a:avLst/>
+          </a:prstGeom>
+          <a:noFill/>
+        </p:spPr>
+        <p:txBody>
+          <a:bodyPr wrap="square">
+            <a:spAutoFit/>
+          </a:bodyPr>
+          <a:lstStyle/>
+          <a:p>
+            <a:pPr algn="l"/>
+            <a:r>
+              <a:rPr sz="950" b="0" i="1">
+                <a:solidFill>
+                  <a:srgbClr val="222222"/>
+                </a:solidFill>
+                <a:latin typeface="Calibri"/>
+              </a:rPr>
+              <a:t>Column (1) decomposed spec: β₁ = −1.12 (n.s.) — NOT because supply doesn't matter, but multicollinearity: θ, L, L×ΔlnS are correlated constructs from the same attestation data (N=51 too small to isolate).  Buffer-ratio spec (Col 2) combines them for a cleaner estimate.  B×ΔlnS = −7.52** (p = 0.019) — fragility channel significant at 5%.</a:t>
+            </a:r>
+          </a:p>
+        </p:txBody>
+      </p:sp>
+      <p:sp>
+        <p:nvSpPr>
+          <p:cNvPr id="10" name="Rectangle 9"/>
+          <p:cNvSpPr/>
+          <p:nvPr/>
+        </p:nvSpPr>
+        <p:spPr>
+          <a:xfrm>
+            <a:off x="274320" y="4023360"/>
+            <a:ext cx="6858000" cy="914400"/>
           </a:xfrm>
           <a:prstGeom prst="rect">
             <a:avLst/>
@@ -17055,20 +17797,19 @@
           <a:lstStyle/>
           <a:p>
             <a:pPr algn="ctr"/>
-            <a:endParaRPr/>
-          </a:p>
-        </p:txBody>
-      </p:sp>
-      <p:sp>
-        <p:nvSpPr>
-          <p:cNvPr id="9" name="TextBox 8"/>
-          <p:cNvSpPr txBox="1"/>
-          <p:nvPr/>
-        </p:nvSpPr>
-        <p:spPr>
-          <a:xfrm>
-            <a:off x="411480" y="3456432"/>
-            <a:ext cx="6583680" cy="411480"/>
+          </a:p>
+        </p:txBody>
+      </p:sp>
+      <p:sp>
+        <p:nvSpPr>
+          <p:cNvPr id="11" name="TextBox 10"/>
+          <p:cNvSpPr txBox="1"/>
+          <p:nvPr/>
+        </p:nvSpPr>
+        <p:spPr>
+          <a:xfrm>
+            <a:off x="411480" y="4078224"/>
+            <a:ext cx="6583680" cy="320040"/>
           </a:xfrm>
           <a:prstGeom prst="rect">
             <a:avLst/>
@@ -17096,14 +17837,14 @@
       </p:sp>
       <p:sp>
         <p:nvSpPr>
-          <p:cNvPr id="10" name="TextBox 9"/>
-          <p:cNvSpPr txBox="1"/>
-          <p:nvPr/>
-        </p:nvSpPr>
-        <p:spPr>
-          <a:xfrm>
-            <a:off x="411480" y="3858768"/>
-            <a:ext cx="6583680" cy="868680"/>
+          <p:cNvPr id="12" name="TextBox 11"/>
+          <p:cNvSpPr txBox="1"/>
+          <p:nvPr/>
+        </p:nvSpPr>
+        <p:spPr>
+          <a:xfrm>
+            <a:off x="411480" y="4407408"/>
+            <a:ext cx="6583680" cy="475488"/>
           </a:xfrm>
           <a:prstGeom prst="rect">
             <a:avLst/>
@@ -17118,13 +17859,13 @@
           <a:p>
             <a:pPr algn="l"/>
             <a:r>
-              <a:rPr sz="1150" b="0" i="0">
+              <a:rPr sz="1100" b="0" i="0">
                 <a:solidFill>
                   <a:srgbClr val="FFFFFF"/>
                 </a:solidFill>
                 <a:latin typeface="Calibri"/>
               </a:rPr>
-              <a:t>1-SD supply growth (4 pp)  ×  β₁  =  −6.02  →  24 bps spread compression
+              <a:t>1-SD supply growth (4 pp)  ×  β₁  =  −7.57  →  30 bps spread compression
 This is larger than a typical FOMC surprise effect on T-bill spreads.</a:t>
             </a:r>
           </a:p>
@@ -17132,14 +17873,14 @@
       </p:sp>
       <p:sp>
         <p:nvSpPr>
-          <p:cNvPr id="11" name="Rectangle 10"/>
+          <p:cNvPr id="13" name="Rectangle 12"/>
           <p:cNvSpPr/>
           <p:nvPr/>
         </p:nvSpPr>
         <p:spPr>
           <a:xfrm>
-            <a:off x="7315200" y="3383280"/>
-            <a:ext cx="4617720" cy="1463040"/>
+            <a:off x="7315200" y="4023360"/>
+            <a:ext cx="4617720" cy="914400"/>
           </a:xfrm>
           <a:prstGeom prst="rect">
             <a:avLst/>
@@ -17170,20 +17911,19 @@
           <a:lstStyle/>
           <a:p>
             <a:pPr algn="ctr"/>
-            <a:endParaRPr/>
-          </a:p>
-        </p:txBody>
-      </p:sp>
-      <p:sp>
-        <p:nvSpPr>
-          <p:cNvPr id="12" name="TextBox 11"/>
-          <p:cNvSpPr txBox="1"/>
-          <p:nvPr/>
-        </p:nvSpPr>
-        <p:spPr>
-          <a:xfrm>
-            <a:off x="7452360" y="3456432"/>
-            <a:ext cx="4343400" cy="411480"/>
+          </a:p>
+        </p:txBody>
+      </p:sp>
+      <p:sp>
+        <p:nvSpPr>
+          <p:cNvPr id="14" name="TextBox 13"/>
+          <p:cNvSpPr txBox="1"/>
+          <p:nvPr/>
+        </p:nvSpPr>
+        <p:spPr>
+          <a:xfrm>
+            <a:off x="7452360" y="4078224"/>
+            <a:ext cx="4343400" cy="320040"/>
           </a:xfrm>
           <a:prstGeom prst="rect">
             <a:avLst/>
@@ -17211,14 +17951,14 @@
       </p:sp>
       <p:sp>
         <p:nvSpPr>
-          <p:cNvPr id="13" name="TextBox 12"/>
-          <p:cNvSpPr txBox="1"/>
-          <p:nvPr/>
-        </p:nvSpPr>
-        <p:spPr>
-          <a:xfrm>
-            <a:off x="7452360" y="3858768"/>
-            <a:ext cx="4343400" cy="868680"/>
+          <p:cNvPr id="15" name="TextBox 14"/>
+          <p:cNvSpPr txBox="1"/>
+          <p:nvPr/>
+        </p:nvSpPr>
+        <p:spPr>
+          <a:xfrm>
+            <a:off x="7452360" y="4407408"/>
+            <a:ext cx="4343400" cy="475488"/>
           </a:xfrm>
           <a:prstGeom prst="rect">
             <a:avLst/>
@@ -17233,7 +17973,7 @@
           <a:p>
             <a:pPr algn="l"/>
             <a:r>
-              <a:rPr sz="1150" b="0" i="0">
+              <a:rPr sz="1100" b="0" i="0">
                 <a:solidFill>
                   <a:srgbClr val="FFFFFF"/>
                 </a:solidFill>
@@ -17248,14 +17988,14 @@
       </p:sp>
       <p:sp>
         <p:nvSpPr>
-          <p:cNvPr id="14" name="Rectangle 13"/>
+          <p:cNvPr id="16" name="Rectangle 15"/>
           <p:cNvSpPr/>
           <p:nvPr/>
         </p:nvSpPr>
         <p:spPr>
           <a:xfrm>
-            <a:off x="274320" y="5029200"/>
-            <a:ext cx="11640312" cy="731520"/>
+            <a:off x="274320" y="5074920"/>
+            <a:ext cx="11640312" cy="685800"/>
           </a:xfrm>
           <a:prstGeom prst="rect">
             <a:avLst/>
@@ -17286,20 +18026,19 @@
           <a:lstStyle/>
           <a:p>
             <a:pPr algn="ctr"/>
-            <a:endParaRPr/>
-          </a:p>
-        </p:txBody>
-      </p:sp>
-      <p:sp>
-        <p:nvSpPr>
-          <p:cNvPr id="15" name="TextBox 14"/>
-          <p:cNvSpPr txBox="1"/>
-          <p:nvPr/>
-        </p:nvSpPr>
-        <p:spPr>
-          <a:xfrm>
-            <a:off x="457200" y="5074920"/>
-            <a:ext cx="11274552" cy="640080"/>
+          </a:p>
+        </p:txBody>
+      </p:sp>
+      <p:sp>
+        <p:nvSpPr>
+          <p:cNvPr id="17" name="TextBox 16"/>
+          <p:cNvSpPr txBox="1"/>
+          <p:nvPr/>
+        </p:nvSpPr>
+        <p:spPr>
+          <a:xfrm>
+            <a:off x="457200" y="5120640"/>
+            <a:ext cx="11274552" cy="594360"/>
           </a:xfrm>
           <a:prstGeom prst="rect">
             <a:avLst/>
@@ -17320,7 +18059,7 @@
                 </a:solidFill>
                 <a:latin typeface="Calibri"/>
               </a:rPr>
-              <a:t>"A one-standard-deviation increase in stablecoin supply growth compresses the OIS-Treasury spread by 24 basis points — confirming H1"</a:t>
+              <a:t>"A one-standard-deviation increase in stablecoin supply growth compresses the OIS-Treasury spread by 30 basis points — confirming H1"</a:t>
             </a:r>
           </a:p>
         </p:txBody>
@@ -17334,7 +18073,7 @@
 </file>
 
 <file path=ppt/slides/slide9.xml><?xml version="1.0" encoding="utf-8"?>
-<p:sld xmlns:a="http://schemas.openxmlformats.org/drawingml/2006/main" xmlns:r="http://schemas.openxmlformats.org/officeDocument/2006/relationships" xmlns:p="http://schemas.openxmlformats.org/presentationml/2006/main">
+<p:sld xmlns:a="http://schemas.openxmlformats.org/drawingml/2006/main" xmlns:p="http://schemas.openxmlformats.org/presentationml/2006/main" xmlns:r="http://schemas.openxmlformats.org/officeDocument/2006/relationships">
   <p:cSld>
     <p:spTree>
       <p:nvGrpSpPr>
@@ -17342,14 +18081,7 @@
         <p:cNvGrpSpPr/>
         <p:nvPr/>
       </p:nvGrpSpPr>
-      <p:grpSpPr>
-        <a:xfrm>
-          <a:off x="0" y="0"/>
-          <a:ext cx="0" cy="0"/>
-          <a:chOff x="0" y="0"/>
-          <a:chExt cx="0" cy="0"/>
-        </a:xfrm>
-      </p:grpSpPr>
+      <p:grpSpPr/>
       <p:sp>
         <p:nvSpPr>
           <p:cNvPr id="2" name="Rectangle 1"/>
@@ -17390,7 +18122,6 @@
           <a:lstStyle/>
           <a:p>
             <a:pPr algn="ctr"/>
-            <a:endParaRPr/>
           </a:p>
         </p:txBody>
       </p:sp>
@@ -17434,7 +18165,6 @@
           <a:lstStyle/>
           <a:p>
             <a:pPr algn="ctr"/>
-            <a:endParaRPr/>
           </a:p>
         </p:txBody>
       </p:sp>
@@ -17607,7 +18337,6 @@
           <a:lstStyle/>
           <a:p>
             <a:pPr algn="ctr"/>
-            <a:endParaRPr/>
           </a:p>
         </p:txBody>
       </p:sp>
@@ -17746,7 +18475,7 @@
                 </a:solidFill>
                 <a:latin typeface="Calibri"/>
               </a:rPr>
-              <a:t>→ Spread dynamics flip sign</a:t>
+              <a:t>→ Spread dynamics flip sign (β = −2.80)</a:t>
             </a:r>
           </a:p>
         </p:txBody>
@@ -17886,7 +18615,7 @@
                 </a:solidFill>
                 <a:latin typeface="Calibri"/>
               </a:rPr>
-              <a:t>→ Privilege channel continues</a:t>
+              <a:t>→ Privilege channel continues (β = +1.63)</a:t>
             </a:r>
           </a:p>
         </p:txBody>
@@ -17991,7 +18720,7 @@
                 </a:solidFill>
                 <a:latin typeface="Calibri"/>
               </a:rPr>
-              <a:t>LSTAR c* = 13.1% (convergent)</a:t>
+              <a:t>LSTAR c* = 14.9% (gradual transition, convergent)</a:t>
             </a:r>
           </a:p>
         </p:txBody>
@@ -18325,7 +19054,7 @@
 </file>
 
 <file path=ppt/theme/theme2.xml><?xml version="1.0" encoding="utf-8"?>
-<a:theme xmlns:a="http://schemas.openxmlformats.org/drawingml/2006/main" name="Office 테마">
+<a:theme xmlns:a="http://schemas.openxmlformats.org/drawingml/2006/main" name="Office Theme">
   <a:themeElements>
     <a:clrScheme name="Office">
       <a:dk1>
@@ -18335,44 +19064,44 @@
         <a:sysClr val="window" lastClr="FFFFFF"/>
       </a:lt1>
       <a:dk2>
-        <a:srgbClr val="0E2841"/>
+        <a:srgbClr val="1F497D"/>
       </a:dk2>
       <a:lt2>
-        <a:srgbClr val="E8E8E8"/>
+        <a:srgbClr val="EEECE1"/>
       </a:lt2>
       <a:accent1>
-        <a:srgbClr val="156082"/>
+        <a:srgbClr val="4F81BD"/>
       </a:accent1>
       <a:accent2>
-        <a:srgbClr val="E97132"/>
+        <a:srgbClr val="C0504D"/>
       </a:accent2>
       <a:accent3>
-        <a:srgbClr val="196B24"/>
+        <a:srgbClr val="9BBB59"/>
       </a:accent3>
       <a:accent4>
-        <a:srgbClr val="0F9ED5"/>
+        <a:srgbClr val="8064A2"/>
       </a:accent4>
       <a:accent5>
-        <a:srgbClr val="A02B93"/>
+        <a:srgbClr val="4BACC6"/>
       </a:accent5>
       <a:accent6>
-        <a:srgbClr val="4EA72E"/>
+        <a:srgbClr val="F79646"/>
       </a:accent6>
       <a:hlink>
-        <a:srgbClr val="467886"/>
+        <a:srgbClr val="0000FF"/>
       </a:hlink>
       <a:folHlink>
-        <a:srgbClr val="96607D"/>
+        <a:srgbClr val="800080"/>
       </a:folHlink>
     </a:clrScheme>
     <a:fontScheme name="Office">
       <a:majorFont>
-        <a:latin typeface="맑은 고딕" panose="02110004020202020204"/>
+        <a:latin typeface="Calibri"/>
         <a:ea typeface=""/>
         <a:cs typeface=""/>
-        <a:font script="Jpan" typeface="游ゴシック Light"/>
+        <a:font script="Jpan" typeface="ＭＳ Ｐゴシック"/>
         <a:font script="Hang" typeface="맑은 고딕"/>
-        <a:font script="Hans" typeface="等线 Light"/>
+        <a:font script="Hans" typeface="宋体"/>
         <a:font script="Hant" typeface="新細明體"/>
         <a:font script="Arab" typeface="Times New Roman"/>
         <a:font script="Hebr" typeface="Times New Roman"/>
@@ -18400,31 +19129,14 @@
         <a:font script="Viet" typeface="Times New Roman"/>
         <a:font script="Uigh" typeface="Microsoft Uighur"/>
         <a:font script="Geor" typeface="Sylfaen"/>
-        <a:font script="Armn" typeface="Arial"/>
-        <a:font script="Bugi" typeface="Leelawadee UI"/>
-        <a:font script="Bopo" typeface="Microsoft JhengHei"/>
-        <a:font script="Java" typeface="Javanese Text"/>
-        <a:font script="Lisu" typeface="Segoe UI"/>
-        <a:font script="Mymr" typeface="Myanmar Text"/>
-        <a:font script="Nkoo" typeface="Ebrima"/>
-        <a:font script="Olck" typeface="Nirmala UI"/>
-        <a:font script="Osma" typeface="Ebrima"/>
-        <a:font script="Phag" typeface="Phagspa"/>
-        <a:font script="Syrn" typeface="Estrangelo Edessa"/>
-        <a:font script="Syrj" typeface="Estrangelo Edessa"/>
-        <a:font script="Syre" typeface="Estrangelo Edessa"/>
-        <a:font script="Sora" typeface="Nirmala UI"/>
-        <a:font script="Tale" typeface="Microsoft Tai Le"/>
-        <a:font script="Talu" typeface="Microsoft New Tai Lue"/>
-        <a:font script="Tfng" typeface="Ebrima"/>
       </a:majorFont>
       <a:minorFont>
-        <a:latin typeface="맑은 고딕" panose="02110004020202020204"/>
+        <a:latin typeface="Calibri"/>
         <a:ea typeface=""/>
         <a:cs typeface=""/>
-        <a:font script="Jpan" typeface="游ゴシック"/>
+        <a:font script="Jpan" typeface="ＭＳ Ｐゴシック"/>
         <a:font script="Hang" typeface="맑은 고딕"/>
-        <a:font script="Hans" typeface="等线"/>
+        <a:font script="Hans" typeface="宋体"/>
         <a:font script="Hant" typeface="新細明體"/>
         <a:font script="Arab" typeface="Arial"/>
         <a:font script="Hebr" typeface="Arial"/>
@@ -18452,23 +19164,6 @@
         <a:font script="Viet" typeface="Arial"/>
         <a:font script="Uigh" typeface="Microsoft Uighur"/>
         <a:font script="Geor" typeface="Sylfaen"/>
-        <a:font script="Armn" typeface="Arial"/>
-        <a:font script="Bugi" typeface="Leelawadee UI"/>
-        <a:font script="Bopo" typeface="Microsoft JhengHei"/>
-        <a:font script="Java" typeface="Javanese Text"/>
-        <a:font script="Lisu" typeface="Segoe UI"/>
-        <a:font script="Mymr" typeface="Myanmar Text"/>
-        <a:font script="Nkoo" typeface="Ebrima"/>
-        <a:font script="Olck" typeface="Nirmala UI"/>
-        <a:font script="Osma" typeface="Ebrima"/>
-        <a:font script="Phag" typeface="Phagspa"/>
-        <a:font script="Syrn" typeface="Estrangelo Edessa"/>
-        <a:font script="Syrj" typeface="Estrangelo Edessa"/>
-        <a:font script="Syre" typeface="Estrangelo Edessa"/>
-        <a:font script="Sora" typeface="Nirmala UI"/>
-        <a:font script="Tale" typeface="Microsoft Tai Le"/>
-        <a:font script="Talu" typeface="Microsoft New Tai Lue"/>
-        <a:font script="Tfng" typeface="Ebrima"/>
       </a:minorFont>
     </a:fontScheme>
     <a:fmtScheme name="Office">
@@ -18480,136 +19175,180 @@
           <a:gsLst>
             <a:gs pos="0">
               <a:schemeClr val="phClr">
-                <a:lumMod val="110000"/>
-                <a:satMod val="105000"/>
-                <a:tint val="67000"/>
+                <a:tint val="50000"/>
+                <a:satMod val="300000"/>
               </a:schemeClr>
             </a:gs>
-            <a:gs pos="50000">
+            <a:gs pos="35000">
               <a:schemeClr val="phClr">
-                <a:lumMod val="105000"/>
-                <a:satMod val="103000"/>
-                <a:tint val="73000"/>
+                <a:tint val="37000"/>
+                <a:satMod val="300000"/>
               </a:schemeClr>
             </a:gs>
             <a:gs pos="100000">
               <a:schemeClr val="phClr">
-                <a:lumMod val="105000"/>
-                <a:satMod val="109000"/>
-                <a:tint val="81000"/>
+                <a:tint val="15000"/>
+                <a:satMod val="350000"/>
               </a:schemeClr>
             </a:gs>
           </a:gsLst>
-          <a:lin ang="5400000" scaled="0"/>
+          <a:lin ang="16200000" scaled="1"/>
         </a:gradFill>
         <a:gradFill rotWithShape="1">
           <a:gsLst>
             <a:gs pos="0">
               <a:schemeClr val="phClr">
-                <a:satMod val="103000"/>
-                <a:lumMod val="102000"/>
-                <a:tint val="94000"/>
-              </a:schemeClr>
-            </a:gs>
-            <a:gs pos="50000">
-              <a:schemeClr val="phClr">
-                <a:satMod val="110000"/>
-                <a:lumMod val="100000"/>
+                <a:tint val="100000"/>
                 <a:shade val="100000"/>
+                <a:satMod val="130000"/>
               </a:schemeClr>
             </a:gs>
             <a:gs pos="100000">
               <a:schemeClr val="phClr">
-                <a:lumMod val="99000"/>
-                <a:satMod val="120000"/>
-                <a:shade val="78000"/>
+                <a:tint val="50000"/>
+                <a:shade val="100000"/>
+                <a:satMod val="350000"/>
               </a:schemeClr>
             </a:gs>
           </a:gsLst>
-          <a:lin ang="5400000" scaled="0"/>
+          <a:lin ang="16200000" scaled="0"/>
         </a:gradFill>
       </a:fillStyleLst>
       <a:lnStyleLst>
-        <a:ln w="12700" cap="flat" cmpd="sng" algn="ctr">
+        <a:ln w="9525" cap="flat" cmpd="sng" algn="ctr">
           <a:solidFill>
-            <a:schemeClr val="phClr"/>
+            <a:schemeClr val="phClr">
+              <a:shade val="95000"/>
+              <a:satMod val="105000"/>
+            </a:schemeClr>
           </a:solidFill>
           <a:prstDash val="solid"/>
-          <a:miter lim="800000"/>
-        </a:ln>
-        <a:ln w="19050" cap="flat" cmpd="sng" algn="ctr">
-          <a:solidFill>
-            <a:schemeClr val="phClr"/>
-          </a:solidFill>
-          <a:prstDash val="solid"/>
-          <a:miter lim="800000"/>
         </a:ln>
         <a:ln w="25400" cap="flat" cmpd="sng" algn="ctr">
           <a:solidFill>
             <a:schemeClr val="phClr"/>
           </a:solidFill>
           <a:prstDash val="solid"/>
-          <a:miter lim="800000"/>
+        </a:ln>
+        <a:ln w="38100" cap="flat" cmpd="sng" algn="ctr">
+          <a:solidFill>
+            <a:schemeClr val="phClr"/>
+          </a:solidFill>
+          <a:prstDash val="solid"/>
         </a:ln>
       </a:lnStyleLst>
       <a:effectStyleLst>
         <a:effectStyle>
-          <a:effectLst/>
-        </a:effectStyle>
-        <a:effectStyle>
-          <a:effectLst/>
+          <a:effectLst>
+            <a:outerShdw blurRad="40000" dist="20000" dir="5400000" rotWithShape="0">
+              <a:srgbClr val="000000">
+                <a:alpha val="38000"/>
+              </a:srgbClr>
+            </a:outerShdw>
+          </a:effectLst>
         </a:effectStyle>
         <a:effectStyle>
           <a:effectLst>
-            <a:outerShdw blurRad="57150" dist="19050" dir="5400000" algn="ctr" rotWithShape="0">
+            <a:outerShdw blurRad="40000" dist="23000" dir="5400000" rotWithShape="0">
               <a:srgbClr val="000000">
-                <a:alpha val="63000"/>
+                <a:alpha val="35000"/>
               </a:srgbClr>
             </a:outerShdw>
           </a:effectLst>
+        </a:effectStyle>
+        <a:effectStyle>
+          <a:effectLst>
+            <a:outerShdw blurRad="40000" dist="23000" dir="5400000" rotWithShape="0">
+              <a:srgbClr val="000000">
+                <a:alpha val="35000"/>
+              </a:srgbClr>
+            </a:outerShdw>
+          </a:effectLst>
+          <a:scene3d>
+            <a:camera prst="orthographicFront">
+              <a:rot lat="0" lon="0" rev="0"/>
+            </a:camera>
+            <a:lightRig rig="threePt" dir="t">
+              <a:rot lat="0" lon="0" rev="1200000"/>
+            </a:lightRig>
+          </a:scene3d>
+          <a:sp3d>
+            <a:bevelT w="63500" h="25400"/>
+          </a:sp3d>
         </a:effectStyle>
       </a:effectStyleLst>
       <a:bgFillStyleLst>
         <a:solidFill>
           <a:schemeClr val="phClr"/>
         </a:solidFill>
-        <a:solidFill>
-          <a:schemeClr val="phClr">
-            <a:tint val="95000"/>
-            <a:satMod val="170000"/>
-          </a:schemeClr>
-        </a:solidFill>
         <a:gradFill rotWithShape="1">
           <a:gsLst>
             <a:gs pos="0">
               <a:schemeClr val="phClr">
-                <a:tint val="93000"/>
-                <a:satMod val="150000"/>
-                <a:shade val="98000"/>
-                <a:lumMod val="102000"/>
+                <a:tint val="40000"/>
+                <a:satMod val="350000"/>
               </a:schemeClr>
             </a:gs>
-            <a:gs pos="50000">
+            <a:gs pos="40000">
               <a:schemeClr val="phClr">
-                <a:tint val="98000"/>
-                <a:satMod val="130000"/>
-                <a:shade val="90000"/>
-                <a:lumMod val="103000"/>
+                <a:tint val="45000"/>
+                <a:shade val="99000"/>
+                <a:satMod val="350000"/>
               </a:schemeClr>
             </a:gs>
             <a:gs pos="100000">
               <a:schemeClr val="phClr">
-                <a:shade val="63000"/>
-                <a:satMod val="120000"/>
+                <a:shade val="20000"/>
+                <a:satMod val="255000"/>
               </a:schemeClr>
             </a:gs>
           </a:gsLst>
-          <a:lin ang="5400000" scaled="0"/>
+          <a:path path="circle">
+            <a:fillToRect l="50000" t="-80000" r="50000" b="180000"/>
+          </a:path>
+        </a:gradFill>
+        <a:gradFill rotWithShape="1">
+          <a:gsLst>
+            <a:gs pos="0">
+              <a:schemeClr val="phClr">
+                <a:tint val="80000"/>
+                <a:satMod val="300000"/>
+              </a:schemeClr>
+            </a:gs>
+            <a:gs pos="100000">
+              <a:schemeClr val="phClr">
+                <a:shade val="30000"/>
+                <a:satMod val="200000"/>
+              </a:schemeClr>
+            </a:gs>
+          </a:gsLst>
+          <a:path path="circle">
+            <a:fillToRect l="50000" t="50000" r="50000" b="50000"/>
+          </a:path>
         </a:gradFill>
       </a:bgFillStyleLst>
     </a:fmtScheme>
   </a:themeElements>
   <a:objectDefaults>
+    <a:spDef>
+      <a:spPr/>
+      <a:bodyPr/>
+      <a:lstStyle/>
+      <a:style>
+        <a:lnRef idx="1">
+          <a:schemeClr val="accent1"/>
+        </a:lnRef>
+        <a:fillRef idx="3">
+          <a:schemeClr val="accent1"/>
+        </a:fillRef>
+        <a:effectRef idx="2">
+          <a:schemeClr val="accent1"/>
+        </a:effectRef>
+        <a:fontRef idx="minor">
+          <a:schemeClr val="lt1"/>
+        </a:fontRef>
+      </a:style>
+    </a:spDef>
     <a:lnDef>
       <a:spPr/>
       <a:bodyPr/>
@@ -18631,10 +19370,5 @@
     </a:lnDef>
   </a:objectDefaults>
   <a:extraClrSchemeLst/>
-  <a:extLst>
-    <a:ext uri="{05A4C25C-085E-4340-85A3-A5531E510DB2}">
-      <thm15:themeFamily xmlns:thm15="http://schemas.microsoft.com/office/thememl/2012/main" name="Office Theme" id="{2E142A2C-CD16-42D6-873A-C26D2A0506FA}" vid="{1BDDFF52-6CD6-40A5-AB3C-68EB2F1E4D0A}"/>
-    </a:ext>
-  </a:extLst>
 </a:theme>
 </file>
--- a/presentations/0609_Stablecoin_Exorbitant_Privilege.pptx
+++ b/presentations/0609_Stablecoin_Exorbitant_Privilege.pptx
@@ -21,6 +21,7 @@
     <p:sldId id="269" r:id="rId21"/>
     <p:sldId id="270" r:id="rId22"/>
     <p:sldId id="271" r:id="rId23"/>
+    <p:sldId id="272" r:id="rId24"/>
   </p:sldIdLst>
   <p:sldSz cx="12188952" cy="6858000" type="screen4x3"/>
   <p:notesSz cx="6858000" cy="9144000"/>
@@ -753,6 +754,76 @@
 </file>
 
 <file path=ppt/notesSlides/notesSlide5.xml><?xml version="1.0" encoding="utf-8"?>
+<p:notes xmlns:a="http://schemas.openxmlformats.org/drawingml/2006/main" xmlns:p="http://schemas.openxmlformats.org/presentationml/2006/main" xmlns:r="http://schemas.openxmlformats.org/officeDocument/2006/relationships">
+  <p:cSld>
+    <p:spTree>
+      <p:nvGrpSpPr>
+        <p:cNvPr id="1" name=""/>
+        <p:cNvGrpSpPr/>
+        <p:nvPr/>
+      </p:nvGrpSpPr>
+      <p:grpSpPr>
+        <a:xfrm>
+          <a:off x="0" y="0"/>
+          <a:ext cx="0" cy="0"/>
+          <a:chOff x="0" y="0"/>
+          <a:chExt cx="0" cy="0"/>
+        </a:xfrm>
+      </p:grpSpPr>
+      <p:sp>
+        <p:nvSpPr>
+          <p:cNvPr id="2" name="Slide Image Placeholder 1"/>
+          <p:cNvSpPr>
+            <a:spLocks noGrp="1"/>
+          </p:cNvSpPr>
+          <p:nvPr>
+            <p:ph type="sldImg" idx="2"/>
+          </p:nvPr>
+        </p:nvSpPr>
+        <p:spPr/>
+      </p:sp>
+      <p:sp>
+        <p:nvSpPr>
+          <p:cNvPr id="3" name="Notes Placeholder 2"/>
+          <p:cNvSpPr>
+            <a:spLocks noGrp="1"/>
+          </p:cNvSpPr>
+          <p:nvPr>
+            <p:ph type="body" idx="3" sz="quarter"/>
+          </p:nvPr>
+        </p:nvSpPr>
+        <p:spPr/>
+        <p:txBody>
+          <a:bodyPr/>
+          <a:lstStyle/>
+          <a:p>
+            <a:r>
+              <a:t>This slide answers the referee question: 'How do you know the spread compression is actually from T-bill demand, not a common factor?' The key insight: Tether and Circle operate in the same macro environment, so any difference in their auction-level effects must come from their different reserve policies. USDT is negative and significant across all four T-bill maturities we test (4w, 8w, 13w, 26w). USDC is insignificant at all four. The Wald test confirms the two coefficients are statistically distinguishable (p &lt; 0.004 at every maturity). IMPORTANT: This does not change our main results. β₁ = −7.57*** and q* = 13% are from the spread regression. The bid-cover result is an independent test of the mechanism using a completely different dependent variable (auction bid-cover ratio). Describe as 'mechanism-consistent evidence' not 'causal identification'.</a:t>
+            </a:r>
+          </a:p>
+        </p:txBody>
+      </p:sp>
+      <p:sp>
+        <p:nvSpPr>
+          <p:cNvPr id="4" name="Slide Number Placeholder 3"/>
+          <p:cNvSpPr>
+            <a:spLocks noGrp="1"/>
+          </p:cNvSpPr>
+          <p:nvPr>
+            <p:ph type="sldNum" idx="5" sz="quarter"/>
+          </p:nvPr>
+        </p:nvSpPr>
+        <p:spPr/>
+      </p:sp>
+    </p:spTree>
+  </p:cSld>
+  <p:clrMapOvr>
+    <a:masterClrMapping/>
+  </p:clrMapOvr>
+</p:notes>
+</file>
+
+<file path=ppt/notesSlides/notesSlide6.xml><?xml version="1.0" encoding="utf-8"?>
 <p:notes xmlns:a="http://schemas.openxmlformats.org/drawingml/2006/main" xmlns:p="http://schemas.openxmlformats.org/presentationml/2006/main" xmlns:r="http://schemas.openxmlformats.org/officeDocument/2006/relationships">
   <p:cSld>
     <p:spTree>
@@ -6256,6 +6327,3302 @@
 </file>
 
 <file path=ppt/slides/slide12.xml><?xml version="1.0" encoding="utf-8"?>
+<p:sld xmlns:a="http://schemas.openxmlformats.org/drawingml/2006/main" xmlns:p="http://schemas.openxmlformats.org/presentationml/2006/main" xmlns:r="http://schemas.openxmlformats.org/officeDocument/2006/relationships">
+  <p:cSld>
+    <p:spTree>
+      <p:nvGrpSpPr>
+        <p:cNvPr id="1" name=""/>
+        <p:cNvGrpSpPr/>
+        <p:nvPr/>
+      </p:nvGrpSpPr>
+      <p:grpSpPr/>
+      <p:sp>
+        <p:nvSpPr>
+          <p:cNvPr id="2" name="Rectangle 1"/>
+          <p:cNvSpPr/>
+          <p:nvPr/>
+        </p:nvSpPr>
+        <p:spPr>
+          <a:xfrm>
+            <a:off x="0" y="0"/>
+            <a:ext cx="12188952" cy="6858000"/>
+          </a:xfrm>
+          <a:prstGeom prst="rect">
+            <a:avLst/>
+          </a:prstGeom>
+          <a:solidFill>
+            <a:srgbClr val="F8F9FA"/>
+          </a:solidFill>
+          <a:ln>
+            <a:noFill/>
+          </a:ln>
+        </p:spPr>
+        <p:style>
+          <a:lnRef idx="1">
+            <a:schemeClr val="accent1"/>
+          </a:lnRef>
+          <a:fillRef idx="3">
+            <a:schemeClr val="accent1"/>
+          </a:fillRef>
+          <a:effectRef idx="2">
+            <a:schemeClr val="accent1"/>
+          </a:effectRef>
+          <a:fontRef idx="minor">
+            <a:schemeClr val="lt1"/>
+          </a:fontRef>
+        </p:style>
+        <p:txBody>
+          <a:bodyPr rtlCol="0" anchor="ctr"/>
+          <a:lstStyle/>
+          <a:p>
+            <a:pPr algn="ctr"/>
+          </a:p>
+        </p:txBody>
+      </p:sp>
+      <p:sp>
+        <p:nvSpPr>
+          <p:cNvPr id="3" name="Rectangle 2"/>
+          <p:cNvSpPr/>
+          <p:nvPr/>
+        </p:nvSpPr>
+        <p:spPr>
+          <a:xfrm>
+            <a:off x="0" y="0"/>
+            <a:ext cx="12188952" cy="822960"/>
+          </a:xfrm>
+          <a:prstGeom prst="rect">
+            <a:avLst/>
+          </a:prstGeom>
+          <a:solidFill>
+            <a:srgbClr val="003087"/>
+          </a:solidFill>
+          <a:ln>
+            <a:noFill/>
+          </a:ln>
+        </p:spPr>
+        <p:style>
+          <a:lnRef idx="1">
+            <a:schemeClr val="accent1"/>
+          </a:lnRef>
+          <a:fillRef idx="3">
+            <a:schemeClr val="accent1"/>
+          </a:fillRef>
+          <a:effectRef idx="2">
+            <a:schemeClr val="accent1"/>
+          </a:effectRef>
+          <a:fontRef idx="minor">
+            <a:schemeClr val="lt1"/>
+          </a:fontRef>
+        </p:style>
+        <p:txBody>
+          <a:bodyPr rtlCol="0" anchor="ctr"/>
+          <a:lstStyle/>
+          <a:p>
+            <a:pPr algn="ctr"/>
+          </a:p>
+        </p:txBody>
+      </p:sp>
+      <p:sp>
+        <p:nvSpPr>
+          <p:cNvPr id="4" name="TextBox 3"/>
+          <p:cNvSpPr txBox="1"/>
+          <p:nvPr/>
+        </p:nvSpPr>
+        <p:spPr>
+          <a:xfrm>
+            <a:off x="274320" y="64008"/>
+            <a:ext cx="10515600" cy="457200"/>
+          </a:xfrm>
+          <a:prstGeom prst="rect">
+            <a:avLst/>
+          </a:prstGeom>
+          <a:noFill/>
+        </p:spPr>
+        <p:txBody>
+          <a:bodyPr wrap="square">
+            <a:spAutoFit/>
+          </a:bodyPr>
+          <a:lstStyle/>
+          <a:p>
+            <a:pPr algn="l"/>
+            <a:r>
+              <a:rPr sz="2000" b="1" i="0">
+                <a:solidFill>
+                  <a:srgbClr val="FFFFFF"/>
+                </a:solidFill>
+                <a:latin typeface="Calibri"/>
+              </a:rPr>
+              <a:t>Mechanism Validation — Auction-Level Evidence</a:t>
+            </a:r>
+          </a:p>
+        </p:txBody>
+      </p:sp>
+      <p:sp>
+        <p:nvSpPr>
+          <p:cNvPr id="5" name="TextBox 4"/>
+          <p:cNvSpPr txBox="1"/>
+          <p:nvPr/>
+        </p:nvSpPr>
+        <p:spPr>
+          <a:xfrm>
+            <a:off x="274320" y="502920"/>
+            <a:ext cx="8229600" cy="292608"/>
+          </a:xfrm>
+          <a:prstGeom prst="rect">
+            <a:avLst/>
+          </a:prstGeom>
+          <a:noFill/>
+        </p:spPr>
+        <p:txBody>
+          <a:bodyPr wrap="square">
+            <a:spAutoFit/>
+          </a:bodyPr>
+          <a:lstStyle/>
+          <a:p>
+            <a:pPr algn="l"/>
+            <a:r>
+              <a:rPr sz="1100" b="0" i="1">
+                <a:solidFill>
+                  <a:srgbClr val="FFFFFF"/>
+                </a:solidFill>
+                <a:latin typeface="Calibri"/>
+              </a:rPr>
+              <a:t>Does the spread compression actually come from T-bill demand by stablecoin issuers?</a:t>
+            </a:r>
+          </a:p>
+        </p:txBody>
+      </p:sp>
+      <p:sp>
+        <p:nvSpPr>
+          <p:cNvPr id="6" name="TextBox 5"/>
+          <p:cNvSpPr txBox="1"/>
+          <p:nvPr/>
+        </p:nvSpPr>
+        <p:spPr>
+          <a:xfrm>
+            <a:off x="9601200" y="45720"/>
+            <a:ext cx="2377440" cy="320040"/>
+          </a:xfrm>
+          <a:prstGeom prst="rect">
+            <a:avLst/>
+          </a:prstGeom>
+          <a:noFill/>
+        </p:spPr>
+        <p:txBody>
+          <a:bodyPr wrap="square">
+            <a:spAutoFit/>
+          </a:bodyPr>
+          <a:lstStyle/>
+          <a:p>
+            <a:pPr algn="r"/>
+            <a:r>
+              <a:rPr sz="900" b="1" i="0">
+                <a:solidFill>
+                  <a:srgbClr val="E87722"/>
+                </a:solidFill>
+                <a:latin typeface="Calibri"/>
+              </a:rPr>
+              <a:t>Slide 12 / 17</a:t>
+            </a:r>
+          </a:p>
+        </p:txBody>
+      </p:sp>
+      <p:sp>
+        <p:nvSpPr>
+          <p:cNvPr id="7" name="Rectangle 6"/>
+          <p:cNvSpPr/>
+          <p:nvPr/>
+        </p:nvSpPr>
+        <p:spPr>
+          <a:xfrm>
+            <a:off x="9902952" y="822960"/>
+            <a:ext cx="2286000" cy="6035040"/>
+          </a:xfrm>
+          <a:prstGeom prst="rect">
+            <a:avLst/>
+          </a:prstGeom>
+          <a:solidFill>
+            <a:srgbClr val="003087"/>
+          </a:solidFill>
+          <a:ln>
+            <a:noFill/>
+          </a:ln>
+        </p:spPr>
+        <p:style>
+          <a:lnRef idx="1">
+            <a:schemeClr val="accent1"/>
+          </a:lnRef>
+          <a:fillRef idx="3">
+            <a:schemeClr val="accent1"/>
+          </a:fillRef>
+          <a:effectRef idx="2">
+            <a:schemeClr val="accent1"/>
+          </a:effectRef>
+          <a:fontRef idx="minor">
+            <a:schemeClr val="lt1"/>
+          </a:fontRef>
+        </p:style>
+        <p:txBody>
+          <a:bodyPr rtlCol="0" anchor="ctr"/>
+          <a:lstStyle/>
+          <a:p>
+            <a:pPr algn="ctr"/>
+          </a:p>
+        </p:txBody>
+      </p:sp>
+      <p:sp>
+        <p:nvSpPr>
+          <p:cNvPr id="8" name="Rectangle 7"/>
+          <p:cNvSpPr/>
+          <p:nvPr/>
+        </p:nvSpPr>
+        <p:spPr>
+          <a:xfrm>
+            <a:off x="9902952" y="822960"/>
+            <a:ext cx="2286000" cy="36576"/>
+          </a:xfrm>
+          <a:prstGeom prst="rect">
+            <a:avLst/>
+          </a:prstGeom>
+          <a:solidFill>
+            <a:srgbClr val="E87722"/>
+          </a:solidFill>
+          <a:ln>
+            <a:noFill/>
+          </a:ln>
+        </p:spPr>
+        <p:style>
+          <a:lnRef idx="1">
+            <a:schemeClr val="accent1"/>
+          </a:lnRef>
+          <a:fillRef idx="3">
+            <a:schemeClr val="accent1"/>
+          </a:fillRef>
+          <a:effectRef idx="2">
+            <a:schemeClr val="accent1"/>
+          </a:effectRef>
+          <a:fontRef idx="minor">
+            <a:schemeClr val="lt1"/>
+          </a:fontRef>
+        </p:style>
+        <p:txBody>
+          <a:bodyPr rtlCol="0" anchor="ctr"/>
+          <a:lstStyle/>
+          <a:p>
+            <a:pPr algn="ctr"/>
+          </a:p>
+        </p:txBody>
+      </p:sp>
+      <p:sp>
+        <p:nvSpPr>
+          <p:cNvPr id="9" name="TextBox 8"/>
+          <p:cNvSpPr txBox="1"/>
+          <p:nvPr/>
+        </p:nvSpPr>
+        <p:spPr>
+          <a:xfrm>
+            <a:off x="9994392" y="914400"/>
+            <a:ext cx="2103120" cy="1097280"/>
+          </a:xfrm>
+          <a:prstGeom prst="rect">
+            <a:avLst/>
+          </a:prstGeom>
+          <a:noFill/>
+        </p:spPr>
+        <p:txBody>
+          <a:bodyPr wrap="square">
+            <a:spAutoFit/>
+          </a:bodyPr>
+          <a:lstStyle/>
+          <a:p>
+            <a:pPr algn="ctr"/>
+            <a:r>
+              <a:rPr sz="1100" b="1" i="0">
+                <a:solidFill>
+                  <a:srgbClr val="E87722"/>
+                </a:solidFill>
+                <a:latin typeface="Calibri"/>
+              </a:rPr>
+              <a:t>Key Results</a:t>
+            </a:r>
+          </a:p>
+        </p:txBody>
+      </p:sp>
+      <p:sp>
+        <p:nvSpPr>
+          <p:cNvPr id="10" name="TextBox 9"/>
+          <p:cNvSpPr txBox="1"/>
+          <p:nvPr/>
+        </p:nvSpPr>
+        <p:spPr>
+          <a:xfrm>
+            <a:off x="9976104" y="1828800"/>
+            <a:ext cx="2103120" cy="548640"/>
+          </a:xfrm>
+          <a:prstGeom prst="rect">
+            <a:avLst/>
+          </a:prstGeom>
+          <a:noFill/>
+        </p:spPr>
+        <p:txBody>
+          <a:bodyPr wrap="square">
+            <a:spAutoFit/>
+          </a:bodyPr>
+          <a:lstStyle/>
+          <a:p>
+            <a:pPr algn="ctr"/>
+            <a:r>
+              <a:rPr sz="1500" b="1" i="0">
+                <a:solidFill>
+                  <a:srgbClr val="FFFFFF"/>
+                </a:solidFill>
+                <a:latin typeface="Calibri"/>
+              </a:rPr>
+              <a:t>β₁ = −7.57***</a:t>
+            </a:r>
+          </a:p>
+        </p:txBody>
+      </p:sp>
+      <p:sp>
+        <p:nvSpPr>
+          <p:cNvPr id="11" name="TextBox 10"/>
+          <p:cNvSpPr txBox="1"/>
+          <p:nvPr/>
+        </p:nvSpPr>
+        <p:spPr>
+          <a:xfrm>
+            <a:off x="9976104" y="2331720"/>
+            <a:ext cx="2103120" cy="365760"/>
+          </a:xfrm>
+          <a:prstGeom prst="rect">
+            <a:avLst/>
+          </a:prstGeom>
+          <a:noFill/>
+        </p:spPr>
+        <p:txBody>
+          <a:bodyPr wrap="square">
+            <a:spAutoFit/>
+          </a:bodyPr>
+          <a:lstStyle/>
+          <a:p>
+            <a:pPr algn="ctr"/>
+            <a:r>
+              <a:rPr sz="1000" b="0" i="1">
+                <a:solidFill>
+                  <a:srgbClr val="E87722"/>
+                </a:solidFill>
+                <a:latin typeface="Calibri"/>
+              </a:rPr>
+              <a:t>p = 0.004</a:t>
+            </a:r>
+          </a:p>
+        </p:txBody>
+      </p:sp>
+      <p:sp>
+        <p:nvSpPr>
+          <p:cNvPr id="12" name="Rectangle 11"/>
+          <p:cNvSpPr/>
+          <p:nvPr/>
+        </p:nvSpPr>
+        <p:spPr>
+          <a:xfrm>
+            <a:off x="10040112" y="2788920"/>
+            <a:ext cx="2011680" cy="22860"/>
+          </a:xfrm>
+          <a:prstGeom prst="rect">
+            <a:avLst/>
+          </a:prstGeom>
+          <a:solidFill>
+            <a:srgbClr val="E87722"/>
+          </a:solidFill>
+          <a:ln>
+            <a:noFill/>
+          </a:ln>
+        </p:spPr>
+        <p:style>
+          <a:lnRef idx="1">
+            <a:schemeClr val="accent1"/>
+          </a:lnRef>
+          <a:fillRef idx="3">
+            <a:schemeClr val="accent1"/>
+          </a:fillRef>
+          <a:effectRef idx="2">
+            <a:schemeClr val="accent1"/>
+          </a:effectRef>
+          <a:fontRef idx="minor">
+            <a:schemeClr val="lt1"/>
+          </a:fontRef>
+        </p:style>
+        <p:txBody>
+          <a:bodyPr rtlCol="0" anchor="ctr"/>
+          <a:lstStyle/>
+          <a:p>
+            <a:pPr algn="ctr"/>
+          </a:p>
+        </p:txBody>
+      </p:sp>
+      <p:sp>
+        <p:nvSpPr>
+          <p:cNvPr id="13" name="TextBox 12"/>
+          <p:cNvSpPr txBox="1"/>
+          <p:nvPr/>
+        </p:nvSpPr>
+        <p:spPr>
+          <a:xfrm>
+            <a:off x="9976104" y="2880360"/>
+            <a:ext cx="2103120" cy="548640"/>
+          </a:xfrm>
+          <a:prstGeom prst="rect">
+            <a:avLst/>
+          </a:prstGeom>
+          <a:noFill/>
+        </p:spPr>
+        <p:txBody>
+          <a:bodyPr wrap="square">
+            <a:spAutoFit/>
+          </a:bodyPr>
+          <a:lstStyle/>
+          <a:p>
+            <a:pPr algn="ctr"/>
+            <a:r>
+              <a:rPr sz="1500" b="1" i="0">
+                <a:solidFill>
+                  <a:srgbClr val="FFFFFF"/>
+                </a:solidFill>
+                <a:latin typeface="Calibri"/>
+              </a:rPr>
+              <a:t>q* = 13%</a:t>
+            </a:r>
+          </a:p>
+        </p:txBody>
+      </p:sp>
+      <p:sp>
+        <p:nvSpPr>
+          <p:cNvPr id="14" name="TextBox 13"/>
+          <p:cNvSpPr txBox="1"/>
+          <p:nvPr/>
+        </p:nvSpPr>
+        <p:spPr>
+          <a:xfrm>
+            <a:off x="9976104" y="3383280"/>
+            <a:ext cx="2103120" cy="457200"/>
+          </a:xfrm>
+          <a:prstGeom prst="rect">
+            <a:avLst/>
+          </a:prstGeom>
+          <a:noFill/>
+        </p:spPr>
+        <p:txBody>
+          <a:bodyPr wrap="square">
+            <a:spAutoFit/>
+          </a:bodyPr>
+          <a:lstStyle/>
+          <a:p>
+            <a:pPr algn="ctr"/>
+            <a:r>
+              <a:rPr sz="900" b="0" i="1">
+                <a:solidFill>
+                  <a:srgbClr val="E87722"/>
+                </a:solidFill>
+                <a:latin typeface="Calibri"/>
+              </a:rPr>
+              <a:t>Bootstrap CI
+[3.1%, 14.5%]</a:t>
+            </a:r>
+          </a:p>
+        </p:txBody>
+      </p:sp>
+      <p:sp>
+        <p:nvSpPr>
+          <p:cNvPr id="15" name="Rectangle 14"/>
+          <p:cNvSpPr/>
+          <p:nvPr/>
+        </p:nvSpPr>
+        <p:spPr>
+          <a:xfrm>
+            <a:off x="10040112" y="3931920"/>
+            <a:ext cx="2011680" cy="22860"/>
+          </a:xfrm>
+          <a:prstGeom prst="rect">
+            <a:avLst/>
+          </a:prstGeom>
+          <a:solidFill>
+            <a:srgbClr val="E87722"/>
+          </a:solidFill>
+          <a:ln>
+            <a:noFill/>
+          </a:ln>
+        </p:spPr>
+        <p:style>
+          <a:lnRef idx="1">
+            <a:schemeClr val="accent1"/>
+          </a:lnRef>
+          <a:fillRef idx="3">
+            <a:schemeClr val="accent1"/>
+          </a:fillRef>
+          <a:effectRef idx="2">
+            <a:schemeClr val="accent1"/>
+          </a:effectRef>
+          <a:fontRef idx="minor">
+            <a:schemeClr val="lt1"/>
+          </a:fontRef>
+        </p:style>
+        <p:txBody>
+          <a:bodyPr rtlCol="0" anchor="ctr"/>
+          <a:lstStyle/>
+          <a:p>
+            <a:pPr algn="ctr"/>
+          </a:p>
+        </p:txBody>
+      </p:sp>
+      <p:sp>
+        <p:nvSpPr>
+          <p:cNvPr id="16" name="TextBox 15"/>
+          <p:cNvSpPr txBox="1"/>
+          <p:nvPr/>
+        </p:nvSpPr>
+        <p:spPr>
+          <a:xfrm>
+            <a:off x="9976104" y="4023360"/>
+            <a:ext cx="2103120" cy="1463040"/>
+          </a:xfrm>
+          <a:prstGeom prst="rect">
+            <a:avLst/>
+          </a:prstGeom>
+          <a:noFill/>
+        </p:spPr>
+        <p:txBody>
+          <a:bodyPr wrap="square">
+            <a:spAutoFit/>
+          </a:bodyPr>
+          <a:lstStyle/>
+          <a:p>
+            <a:pPr algn="ctr"/>
+            <a:r>
+              <a:rPr sz="950" b="0" i="0">
+                <a:solidFill>
+                  <a:srgbClr val="FFFFFF"/>
+                </a:solidFill>
+                <a:latin typeface="Calibri"/>
+              </a:rPr>
+              <a:t>3 convergent
+methods:
+β₁ ✓
+q* ✓
+Event study
+(directional)</a:t>
+            </a:r>
+          </a:p>
+        </p:txBody>
+      </p:sp>
+      <p:sp>
+        <p:nvSpPr>
+          <p:cNvPr id="17" name="TextBox 16"/>
+          <p:cNvSpPr txBox="1"/>
+          <p:nvPr/>
+        </p:nvSpPr>
+        <p:spPr>
+          <a:xfrm>
+            <a:off x="365760" y="1143000"/>
+            <a:ext cx="5486400" cy="411480"/>
+          </a:xfrm>
+          <a:prstGeom prst="rect">
+            <a:avLst/>
+          </a:prstGeom>
+          <a:noFill/>
+        </p:spPr>
+        <p:txBody>
+          <a:bodyPr wrap="square">
+            <a:spAutoFit/>
+          </a:bodyPr>
+          <a:lstStyle/>
+          <a:p>
+            <a:pPr algn="l"/>
+            <a:r>
+              <a:rPr sz="1300" b="1" i="0">
+                <a:solidFill>
+                  <a:srgbClr val="003087"/>
+                </a:solidFill>
+                <a:latin typeface="Calibri"/>
+              </a:rPr>
+              <a:t>The Logic: Issuer-Level Heterogeneity as a Natural Control</a:t>
+            </a:r>
+          </a:p>
+        </p:txBody>
+      </p:sp>
+      <p:sp>
+        <p:nvSpPr>
+          <p:cNvPr id="18" name="TextBox 17"/>
+          <p:cNvSpPr txBox="1"/>
+          <p:nvPr/>
+        </p:nvSpPr>
+        <p:spPr>
+          <a:xfrm>
+            <a:off x="457200" y="1572768"/>
+            <a:ext cx="8961120" cy="256032"/>
+          </a:xfrm>
+          <a:prstGeom prst="rect">
+            <a:avLst/>
+          </a:prstGeom>
+          <a:noFill/>
+        </p:spPr>
+        <p:txBody>
+          <a:bodyPr wrap="square">
+            <a:spAutoFit/>
+          </a:bodyPr>
+          <a:lstStyle/>
+          <a:p>
+            <a:pPr algn="l"/>
+            <a:r>
+              <a:rPr sz="1050" b="0" i="0">
+                <a:solidFill>
+                  <a:srgbClr val="E87722"/>
+                </a:solidFill>
+                <a:latin typeface="Calibri"/>
+              </a:rPr>
+              <a:t>USDT (Tether):   ~80% reserves in T-bills  →  should suppress bid-cover  ←  T-bill heavy</a:t>
+            </a:r>
+          </a:p>
+        </p:txBody>
+      </p:sp>
+      <p:sp>
+        <p:nvSpPr>
+          <p:cNvPr id="19" name="TextBox 18"/>
+          <p:cNvSpPr txBox="1"/>
+          <p:nvPr/>
+        </p:nvSpPr>
+        <p:spPr>
+          <a:xfrm>
+            <a:off x="457200" y="1847088"/>
+            <a:ext cx="8961120" cy="256032"/>
+          </a:xfrm>
+          <a:prstGeom prst="rect">
+            <a:avLst/>
+          </a:prstGeom>
+          <a:noFill/>
+        </p:spPr>
+        <p:txBody>
+          <a:bodyPr wrap="square">
+            <a:spAutoFit/>
+          </a:bodyPr>
+          <a:lstStyle/>
+          <a:p>
+            <a:pPr algn="l"/>
+            <a:r>
+              <a:rPr sz="1050" b="0" i="0">
+                <a:solidFill>
+                  <a:srgbClr val="003087"/>
+                </a:solidFill>
+                <a:latin typeface="Calibri"/>
+              </a:rPr>
+              <a:t>USDC (Circle):  ~30–40% in T-bills, rest in cash  →  no consistent effect expected</a:t>
+            </a:r>
+          </a:p>
+        </p:txBody>
+      </p:sp>
+      <p:sp>
+        <p:nvSpPr>
+          <p:cNvPr id="20" name="TextBox 19"/>
+          <p:cNvSpPr txBox="1"/>
+          <p:nvPr/>
+        </p:nvSpPr>
+        <p:spPr>
+          <a:xfrm>
+            <a:off x="457200" y="2121408"/>
+            <a:ext cx="8961120" cy="256032"/>
+          </a:xfrm>
+          <a:prstGeom prst="rect">
+            <a:avLst/>
+          </a:prstGeom>
+          <a:noFill/>
+        </p:spPr>
+        <p:txBody>
+          <a:bodyPr wrap="square">
+            <a:spAutoFit/>
+          </a:bodyPr>
+          <a:lstStyle/>
+          <a:p>
+            <a:pPr algn="l"/>
+            <a:r>
+              <a:rPr sz="1050" b="0" i="0">
+                <a:solidFill>
+                  <a:srgbClr val="003087"/>
+                </a:solidFill>
+                <a:latin typeface="Calibri"/>
+              </a:rPr>
+              <a:t/>
+            </a:r>
+          </a:p>
+        </p:txBody>
+      </p:sp>
+      <p:sp>
+        <p:nvSpPr>
+          <p:cNvPr id="21" name="TextBox 20"/>
+          <p:cNvSpPr txBox="1"/>
+          <p:nvPr/>
+        </p:nvSpPr>
+        <p:spPr>
+          <a:xfrm>
+            <a:off x="457200" y="2395728"/>
+            <a:ext cx="8961120" cy="256032"/>
+          </a:xfrm>
+          <a:prstGeom prst="rect">
+            <a:avLst/>
+          </a:prstGeom>
+          <a:noFill/>
+        </p:spPr>
+        <p:txBody>
+          <a:bodyPr wrap="square">
+            <a:spAutoFit/>
+          </a:bodyPr>
+          <a:lstStyle/>
+          <a:p>
+            <a:pPr algn="l"/>
+            <a:r>
+              <a:rPr sz="1050" b="0" i="0">
+                <a:solidFill>
+                  <a:srgbClr val="003087"/>
+                </a:solidFill>
+                <a:latin typeface="Calibri"/>
+              </a:rPr>
+              <a:t>If the spread result reflects reserve-composition demand, only USDT should move bid-cover.</a:t>
+            </a:r>
+          </a:p>
+        </p:txBody>
+      </p:sp>
+      <p:sp>
+        <p:nvSpPr>
+          <p:cNvPr id="22" name="TextBox 21"/>
+          <p:cNvSpPr txBox="1"/>
+          <p:nvPr/>
+        </p:nvSpPr>
+        <p:spPr>
+          <a:xfrm>
+            <a:off x="457200" y="2670048"/>
+            <a:ext cx="8961120" cy="256032"/>
+          </a:xfrm>
+          <a:prstGeom prst="rect">
+            <a:avLst/>
+          </a:prstGeom>
+          <a:noFill/>
+        </p:spPr>
+        <p:txBody>
+          <a:bodyPr wrap="square">
+            <a:spAutoFit/>
+          </a:bodyPr>
+          <a:lstStyle/>
+          <a:p>
+            <a:pPr algn="l"/>
+            <a:r>
+              <a:rPr sz="1050" b="0" i="0">
+                <a:solidFill>
+                  <a:srgbClr val="003087"/>
+                </a:solidFill>
+                <a:latin typeface="Calibri"/>
+              </a:rPr>
+              <a:t>Both issuers share the same macro environment  →  the difference isolates the channel.</a:t>
+            </a:r>
+          </a:p>
+        </p:txBody>
+      </p:sp>
+      <p:sp>
+        <p:nvSpPr>
+          <p:cNvPr id="23" name="TextBox 22"/>
+          <p:cNvSpPr txBox="1"/>
+          <p:nvPr/>
+        </p:nvSpPr>
+        <p:spPr>
+          <a:xfrm>
+            <a:off x="365760" y="2944368"/>
+            <a:ext cx="5486400" cy="320040"/>
+          </a:xfrm>
+          <a:prstGeom prst="rect">
+            <a:avLst/>
+          </a:prstGeom>
+          <a:noFill/>
+        </p:spPr>
+        <p:txBody>
+          <a:bodyPr wrap="square">
+            <a:spAutoFit/>
+          </a:bodyPr>
+          <a:lstStyle/>
+          <a:p>
+            <a:pPr algn="l"/>
+            <a:r>
+              <a:rPr sz="1150" b="1" i="0">
+                <a:solidFill>
+                  <a:srgbClr val="003087"/>
+                </a:solidFill>
+                <a:latin typeface="Calibri"/>
+              </a:rPr>
+              <a:t>Results: OLS on Monthly Bid-Cover Ratio (HAC, 1 lag) — N = 51</a:t>
+            </a:r>
+          </a:p>
+        </p:txBody>
+      </p:sp>
+      <p:sp>
+        <p:nvSpPr>
+          <p:cNvPr id="24" name="Rectangle 23"/>
+          <p:cNvSpPr/>
+          <p:nvPr/>
+        </p:nvSpPr>
+        <p:spPr>
+          <a:xfrm>
+            <a:off x="365760" y="3310128"/>
+            <a:ext cx="1005840" cy="274320"/>
+          </a:xfrm>
+          <a:prstGeom prst="rect">
+            <a:avLst/>
+          </a:prstGeom>
+          <a:solidFill>
+            <a:srgbClr val="003087"/>
+          </a:solidFill>
+          <a:ln>
+            <a:noFill/>
+          </a:ln>
+        </p:spPr>
+        <p:style>
+          <a:lnRef idx="1">
+            <a:schemeClr val="accent1"/>
+          </a:lnRef>
+          <a:fillRef idx="3">
+            <a:schemeClr val="accent1"/>
+          </a:fillRef>
+          <a:effectRef idx="2">
+            <a:schemeClr val="accent1"/>
+          </a:effectRef>
+          <a:fontRef idx="minor">
+            <a:schemeClr val="lt1"/>
+          </a:fontRef>
+        </p:style>
+        <p:txBody>
+          <a:bodyPr rtlCol="0" anchor="ctr"/>
+          <a:lstStyle/>
+          <a:p>
+            <a:pPr algn="ctr"/>
+          </a:p>
+        </p:txBody>
+      </p:sp>
+      <p:sp>
+        <p:nvSpPr>
+          <p:cNvPr id="25" name="TextBox 24"/>
+          <p:cNvSpPr txBox="1"/>
+          <p:nvPr/>
+        </p:nvSpPr>
+        <p:spPr>
+          <a:xfrm>
+            <a:off x="393192" y="3337560"/>
+            <a:ext cx="950976" cy="228600"/>
+          </a:xfrm>
+          <a:prstGeom prst="rect">
+            <a:avLst/>
+          </a:prstGeom>
+          <a:noFill/>
+        </p:spPr>
+        <p:txBody>
+          <a:bodyPr wrap="square">
+            <a:spAutoFit/>
+          </a:bodyPr>
+          <a:lstStyle/>
+          <a:p>
+            <a:pPr algn="l"/>
+            <a:r>
+              <a:rPr sz="950" b="1" i="0">
+                <a:solidFill>
+                  <a:srgbClr val="FFFFFF"/>
+                </a:solidFill>
+                <a:latin typeface="Calibri"/>
+              </a:rPr>
+              <a:t>Maturity</a:t>
+            </a:r>
+          </a:p>
+        </p:txBody>
+      </p:sp>
+      <p:sp>
+        <p:nvSpPr>
+          <p:cNvPr id="26" name="Rectangle 25"/>
+          <p:cNvSpPr/>
+          <p:nvPr/>
+        </p:nvSpPr>
+        <p:spPr>
+          <a:xfrm>
+            <a:off x="1463040" y="3310128"/>
+            <a:ext cx="1005840" cy="274320"/>
+          </a:xfrm>
+          <a:prstGeom prst="rect">
+            <a:avLst/>
+          </a:prstGeom>
+          <a:solidFill>
+            <a:srgbClr val="003087"/>
+          </a:solidFill>
+          <a:ln>
+            <a:noFill/>
+          </a:ln>
+        </p:spPr>
+        <p:style>
+          <a:lnRef idx="1">
+            <a:schemeClr val="accent1"/>
+          </a:lnRef>
+          <a:fillRef idx="3">
+            <a:schemeClr val="accent1"/>
+          </a:fillRef>
+          <a:effectRef idx="2">
+            <a:schemeClr val="accent1"/>
+          </a:effectRef>
+          <a:fontRef idx="minor">
+            <a:schemeClr val="lt1"/>
+          </a:fontRef>
+        </p:style>
+        <p:txBody>
+          <a:bodyPr rtlCol="0" anchor="ctr"/>
+          <a:lstStyle/>
+          <a:p>
+            <a:pPr algn="ctr"/>
+          </a:p>
+        </p:txBody>
+      </p:sp>
+      <p:sp>
+        <p:nvSpPr>
+          <p:cNvPr id="27" name="TextBox 26"/>
+          <p:cNvSpPr txBox="1"/>
+          <p:nvPr/>
+        </p:nvSpPr>
+        <p:spPr>
+          <a:xfrm>
+            <a:off x="1490472" y="3337560"/>
+            <a:ext cx="950976" cy="228600"/>
+          </a:xfrm>
+          <a:prstGeom prst="rect">
+            <a:avLst/>
+          </a:prstGeom>
+          <a:noFill/>
+        </p:spPr>
+        <p:txBody>
+          <a:bodyPr wrap="square">
+            <a:spAutoFit/>
+          </a:bodyPr>
+          <a:lstStyle/>
+          <a:p>
+            <a:pPr algn="ctr"/>
+            <a:r>
+              <a:rPr sz="950" b="1" i="0">
+                <a:solidFill>
+                  <a:srgbClr val="FFFFFF"/>
+                </a:solidFill>
+                <a:latin typeface="Calibri"/>
+              </a:rPr>
+              <a:t>β_USDT</a:t>
+            </a:r>
+          </a:p>
+        </p:txBody>
+      </p:sp>
+      <p:sp>
+        <p:nvSpPr>
+          <p:cNvPr id="28" name="Rectangle 27"/>
+          <p:cNvSpPr/>
+          <p:nvPr/>
+        </p:nvSpPr>
+        <p:spPr>
+          <a:xfrm>
+            <a:off x="2560320" y="3310128"/>
+            <a:ext cx="1005840" cy="274320"/>
+          </a:xfrm>
+          <a:prstGeom prst="rect">
+            <a:avLst/>
+          </a:prstGeom>
+          <a:solidFill>
+            <a:srgbClr val="003087"/>
+          </a:solidFill>
+          <a:ln>
+            <a:noFill/>
+          </a:ln>
+        </p:spPr>
+        <p:style>
+          <a:lnRef idx="1">
+            <a:schemeClr val="accent1"/>
+          </a:lnRef>
+          <a:fillRef idx="3">
+            <a:schemeClr val="accent1"/>
+          </a:fillRef>
+          <a:effectRef idx="2">
+            <a:schemeClr val="accent1"/>
+          </a:effectRef>
+          <a:fontRef idx="minor">
+            <a:schemeClr val="lt1"/>
+          </a:fontRef>
+        </p:style>
+        <p:txBody>
+          <a:bodyPr rtlCol="0" anchor="ctr"/>
+          <a:lstStyle/>
+          <a:p>
+            <a:pPr algn="ctr"/>
+          </a:p>
+        </p:txBody>
+      </p:sp>
+      <p:sp>
+        <p:nvSpPr>
+          <p:cNvPr id="29" name="TextBox 28"/>
+          <p:cNvSpPr txBox="1"/>
+          <p:nvPr/>
+        </p:nvSpPr>
+        <p:spPr>
+          <a:xfrm>
+            <a:off x="2587752" y="3337560"/>
+            <a:ext cx="950976" cy="228600"/>
+          </a:xfrm>
+          <a:prstGeom prst="rect">
+            <a:avLst/>
+          </a:prstGeom>
+          <a:noFill/>
+        </p:spPr>
+        <p:txBody>
+          <a:bodyPr wrap="square">
+            <a:spAutoFit/>
+          </a:bodyPr>
+          <a:lstStyle/>
+          <a:p>
+            <a:pPr algn="ctr"/>
+            <a:r>
+              <a:rPr sz="950" b="1" i="0">
+                <a:solidFill>
+                  <a:srgbClr val="FFFFFF"/>
+                </a:solidFill>
+                <a:latin typeface="Calibri"/>
+              </a:rPr>
+              <a:t>p_USDT</a:t>
+            </a:r>
+          </a:p>
+        </p:txBody>
+      </p:sp>
+      <p:sp>
+        <p:nvSpPr>
+          <p:cNvPr id="30" name="Rectangle 29"/>
+          <p:cNvSpPr/>
+          <p:nvPr/>
+        </p:nvSpPr>
+        <p:spPr>
+          <a:xfrm>
+            <a:off x="3657600" y="3310128"/>
+            <a:ext cx="1005840" cy="274320"/>
+          </a:xfrm>
+          <a:prstGeom prst="rect">
+            <a:avLst/>
+          </a:prstGeom>
+          <a:solidFill>
+            <a:srgbClr val="003087"/>
+          </a:solidFill>
+          <a:ln>
+            <a:noFill/>
+          </a:ln>
+        </p:spPr>
+        <p:style>
+          <a:lnRef idx="1">
+            <a:schemeClr val="accent1"/>
+          </a:lnRef>
+          <a:fillRef idx="3">
+            <a:schemeClr val="accent1"/>
+          </a:fillRef>
+          <a:effectRef idx="2">
+            <a:schemeClr val="accent1"/>
+          </a:effectRef>
+          <a:fontRef idx="minor">
+            <a:schemeClr val="lt1"/>
+          </a:fontRef>
+        </p:style>
+        <p:txBody>
+          <a:bodyPr rtlCol="0" anchor="ctr"/>
+          <a:lstStyle/>
+          <a:p>
+            <a:pPr algn="ctr"/>
+          </a:p>
+        </p:txBody>
+      </p:sp>
+      <p:sp>
+        <p:nvSpPr>
+          <p:cNvPr id="31" name="TextBox 30"/>
+          <p:cNvSpPr txBox="1"/>
+          <p:nvPr/>
+        </p:nvSpPr>
+        <p:spPr>
+          <a:xfrm>
+            <a:off x="3685032" y="3337560"/>
+            <a:ext cx="950976" cy="228600"/>
+          </a:xfrm>
+          <a:prstGeom prst="rect">
+            <a:avLst/>
+          </a:prstGeom>
+          <a:noFill/>
+        </p:spPr>
+        <p:txBody>
+          <a:bodyPr wrap="square">
+            <a:spAutoFit/>
+          </a:bodyPr>
+          <a:lstStyle/>
+          <a:p>
+            <a:pPr algn="ctr"/>
+            <a:r>
+              <a:rPr sz="950" b="1" i="0">
+                <a:solidFill>
+                  <a:srgbClr val="FFFFFF"/>
+                </a:solidFill>
+                <a:latin typeface="Calibri"/>
+              </a:rPr>
+              <a:t>β_USDC</a:t>
+            </a:r>
+          </a:p>
+        </p:txBody>
+      </p:sp>
+      <p:sp>
+        <p:nvSpPr>
+          <p:cNvPr id="32" name="Rectangle 31"/>
+          <p:cNvSpPr/>
+          <p:nvPr/>
+        </p:nvSpPr>
+        <p:spPr>
+          <a:xfrm>
+            <a:off x="4754880" y="3310128"/>
+            <a:ext cx="1005840" cy="274320"/>
+          </a:xfrm>
+          <a:prstGeom prst="rect">
+            <a:avLst/>
+          </a:prstGeom>
+          <a:solidFill>
+            <a:srgbClr val="003087"/>
+          </a:solidFill>
+          <a:ln>
+            <a:noFill/>
+          </a:ln>
+        </p:spPr>
+        <p:style>
+          <a:lnRef idx="1">
+            <a:schemeClr val="accent1"/>
+          </a:lnRef>
+          <a:fillRef idx="3">
+            <a:schemeClr val="accent1"/>
+          </a:fillRef>
+          <a:effectRef idx="2">
+            <a:schemeClr val="accent1"/>
+          </a:effectRef>
+          <a:fontRef idx="minor">
+            <a:schemeClr val="lt1"/>
+          </a:fontRef>
+        </p:style>
+        <p:txBody>
+          <a:bodyPr rtlCol="0" anchor="ctr"/>
+          <a:lstStyle/>
+          <a:p>
+            <a:pPr algn="ctr"/>
+          </a:p>
+        </p:txBody>
+      </p:sp>
+      <p:sp>
+        <p:nvSpPr>
+          <p:cNvPr id="33" name="TextBox 32"/>
+          <p:cNvSpPr txBox="1"/>
+          <p:nvPr/>
+        </p:nvSpPr>
+        <p:spPr>
+          <a:xfrm>
+            <a:off x="4782312" y="3337560"/>
+            <a:ext cx="950976" cy="228600"/>
+          </a:xfrm>
+          <a:prstGeom prst="rect">
+            <a:avLst/>
+          </a:prstGeom>
+          <a:noFill/>
+        </p:spPr>
+        <p:txBody>
+          <a:bodyPr wrap="square">
+            <a:spAutoFit/>
+          </a:bodyPr>
+          <a:lstStyle/>
+          <a:p>
+            <a:pPr algn="ctr"/>
+            <a:r>
+              <a:rPr sz="950" b="1" i="0">
+                <a:solidFill>
+                  <a:srgbClr val="FFFFFF"/>
+                </a:solidFill>
+                <a:latin typeface="Calibri"/>
+              </a:rPr>
+              <a:t>p_USDC</a:t>
+            </a:r>
+          </a:p>
+        </p:txBody>
+      </p:sp>
+      <p:sp>
+        <p:nvSpPr>
+          <p:cNvPr id="34" name="Rectangle 33"/>
+          <p:cNvSpPr/>
+          <p:nvPr/>
+        </p:nvSpPr>
+        <p:spPr>
+          <a:xfrm>
+            <a:off x="5852160" y="3310128"/>
+            <a:ext cx="1005840" cy="274320"/>
+          </a:xfrm>
+          <a:prstGeom prst="rect">
+            <a:avLst/>
+          </a:prstGeom>
+          <a:solidFill>
+            <a:srgbClr val="003087"/>
+          </a:solidFill>
+          <a:ln>
+            <a:noFill/>
+          </a:ln>
+        </p:spPr>
+        <p:style>
+          <a:lnRef idx="1">
+            <a:schemeClr val="accent1"/>
+          </a:lnRef>
+          <a:fillRef idx="3">
+            <a:schemeClr val="accent1"/>
+          </a:fillRef>
+          <a:effectRef idx="2">
+            <a:schemeClr val="accent1"/>
+          </a:effectRef>
+          <a:fontRef idx="minor">
+            <a:schemeClr val="lt1"/>
+          </a:fontRef>
+        </p:style>
+        <p:txBody>
+          <a:bodyPr rtlCol="0" anchor="ctr"/>
+          <a:lstStyle/>
+          <a:p>
+            <a:pPr algn="ctr"/>
+          </a:p>
+        </p:txBody>
+      </p:sp>
+      <p:sp>
+        <p:nvSpPr>
+          <p:cNvPr id="35" name="TextBox 34"/>
+          <p:cNvSpPr txBox="1"/>
+          <p:nvPr/>
+        </p:nvSpPr>
+        <p:spPr>
+          <a:xfrm>
+            <a:off x="5879592" y="3337560"/>
+            <a:ext cx="950976" cy="228600"/>
+          </a:xfrm>
+          <a:prstGeom prst="rect">
+            <a:avLst/>
+          </a:prstGeom>
+          <a:noFill/>
+        </p:spPr>
+        <p:txBody>
+          <a:bodyPr wrap="square">
+            <a:spAutoFit/>
+          </a:bodyPr>
+          <a:lstStyle/>
+          <a:p>
+            <a:pPr algn="ctr"/>
+            <a:r>
+              <a:rPr sz="950" b="1" i="0">
+                <a:solidFill>
+                  <a:srgbClr val="FFFFFF"/>
+                </a:solidFill>
+                <a:latin typeface="Calibri"/>
+              </a:rPr>
+              <a:t>Wald p</a:t>
+            </a:r>
+          </a:p>
+        </p:txBody>
+      </p:sp>
+      <p:sp>
+        <p:nvSpPr>
+          <p:cNvPr id="36" name="Rectangle 35"/>
+          <p:cNvSpPr/>
+          <p:nvPr/>
+        </p:nvSpPr>
+        <p:spPr>
+          <a:xfrm>
+            <a:off x="365760" y="3611880"/>
+            <a:ext cx="1005840" cy="274320"/>
+          </a:xfrm>
+          <a:prstGeom prst="rect">
+            <a:avLst/>
+          </a:prstGeom>
+          <a:solidFill>
+            <a:srgbClr val="EBF3FB"/>
+          </a:solidFill>
+          <a:ln>
+            <a:noFill/>
+          </a:ln>
+        </p:spPr>
+        <p:style>
+          <a:lnRef idx="1">
+            <a:schemeClr val="accent1"/>
+          </a:lnRef>
+          <a:fillRef idx="3">
+            <a:schemeClr val="accent1"/>
+          </a:fillRef>
+          <a:effectRef idx="2">
+            <a:schemeClr val="accent1"/>
+          </a:effectRef>
+          <a:fontRef idx="minor">
+            <a:schemeClr val="lt1"/>
+          </a:fontRef>
+        </p:style>
+        <p:txBody>
+          <a:bodyPr rtlCol="0" anchor="ctr"/>
+          <a:lstStyle/>
+          <a:p>
+            <a:pPr algn="ctr"/>
+          </a:p>
+        </p:txBody>
+      </p:sp>
+      <p:sp>
+        <p:nvSpPr>
+          <p:cNvPr id="37" name="TextBox 36"/>
+          <p:cNvSpPr txBox="1"/>
+          <p:nvPr/>
+        </p:nvSpPr>
+        <p:spPr>
+          <a:xfrm>
+            <a:off x="393192" y="3639312"/>
+            <a:ext cx="950976" cy="228600"/>
+          </a:xfrm>
+          <a:prstGeom prst="rect">
+            <a:avLst/>
+          </a:prstGeom>
+          <a:noFill/>
+        </p:spPr>
+        <p:txBody>
+          <a:bodyPr wrap="square">
+            <a:spAutoFit/>
+          </a:bodyPr>
+          <a:lstStyle/>
+          <a:p>
+            <a:pPr algn="l"/>
+            <a:r>
+              <a:rPr sz="950" b="0" i="0">
+                <a:solidFill>
+                  <a:srgbClr val="003087"/>
+                </a:solidFill>
+                <a:latin typeface="Calibri"/>
+              </a:rPr>
+              <a:t>4-Week</a:t>
+            </a:r>
+          </a:p>
+        </p:txBody>
+      </p:sp>
+      <p:sp>
+        <p:nvSpPr>
+          <p:cNvPr id="38" name="Rectangle 37"/>
+          <p:cNvSpPr/>
+          <p:nvPr/>
+        </p:nvSpPr>
+        <p:spPr>
+          <a:xfrm>
+            <a:off x="1463040" y="3611880"/>
+            <a:ext cx="1005840" cy="274320"/>
+          </a:xfrm>
+          <a:prstGeom prst="rect">
+            <a:avLst/>
+          </a:prstGeom>
+          <a:solidFill>
+            <a:srgbClr val="EBF3FB"/>
+          </a:solidFill>
+          <a:ln>
+            <a:noFill/>
+          </a:ln>
+        </p:spPr>
+        <p:style>
+          <a:lnRef idx="1">
+            <a:schemeClr val="accent1"/>
+          </a:lnRef>
+          <a:fillRef idx="3">
+            <a:schemeClr val="accent1"/>
+          </a:fillRef>
+          <a:effectRef idx="2">
+            <a:schemeClr val="accent1"/>
+          </a:effectRef>
+          <a:fontRef idx="minor">
+            <a:schemeClr val="lt1"/>
+          </a:fontRef>
+        </p:style>
+        <p:txBody>
+          <a:bodyPr rtlCol="0" anchor="ctr"/>
+          <a:lstStyle/>
+          <a:p>
+            <a:pPr algn="ctr"/>
+          </a:p>
+        </p:txBody>
+      </p:sp>
+      <p:sp>
+        <p:nvSpPr>
+          <p:cNvPr id="39" name="TextBox 38"/>
+          <p:cNvSpPr txBox="1"/>
+          <p:nvPr/>
+        </p:nvSpPr>
+        <p:spPr>
+          <a:xfrm>
+            <a:off x="1490472" y="3639312"/>
+            <a:ext cx="950976" cy="228600"/>
+          </a:xfrm>
+          <a:prstGeom prst="rect">
+            <a:avLst/>
+          </a:prstGeom>
+          <a:noFill/>
+        </p:spPr>
+        <p:txBody>
+          <a:bodyPr wrap="square">
+            <a:spAutoFit/>
+          </a:bodyPr>
+          <a:lstStyle/>
+          <a:p>
+            <a:pPr algn="ctr"/>
+            <a:r>
+              <a:rPr sz="950" b="1" i="0">
+                <a:solidFill>
+                  <a:srgbClr val="003087"/>
+                </a:solidFill>
+                <a:latin typeface="Calibri"/>
+              </a:rPr>
+              <a:t>−1.225</a:t>
+            </a:r>
+          </a:p>
+        </p:txBody>
+      </p:sp>
+      <p:sp>
+        <p:nvSpPr>
+          <p:cNvPr id="40" name="Rectangle 39"/>
+          <p:cNvSpPr/>
+          <p:nvPr/>
+        </p:nvSpPr>
+        <p:spPr>
+          <a:xfrm>
+            <a:off x="2560320" y="3611880"/>
+            <a:ext cx="1005840" cy="274320"/>
+          </a:xfrm>
+          <a:prstGeom prst="rect">
+            <a:avLst/>
+          </a:prstGeom>
+          <a:solidFill>
+            <a:srgbClr val="EBF3FB"/>
+          </a:solidFill>
+          <a:ln>
+            <a:noFill/>
+          </a:ln>
+        </p:spPr>
+        <p:style>
+          <a:lnRef idx="1">
+            <a:schemeClr val="accent1"/>
+          </a:lnRef>
+          <a:fillRef idx="3">
+            <a:schemeClr val="accent1"/>
+          </a:fillRef>
+          <a:effectRef idx="2">
+            <a:schemeClr val="accent1"/>
+          </a:effectRef>
+          <a:fontRef idx="minor">
+            <a:schemeClr val="lt1"/>
+          </a:fontRef>
+        </p:style>
+        <p:txBody>
+          <a:bodyPr rtlCol="0" anchor="ctr"/>
+          <a:lstStyle/>
+          <a:p>
+            <a:pPr algn="ctr"/>
+          </a:p>
+        </p:txBody>
+      </p:sp>
+      <p:sp>
+        <p:nvSpPr>
+          <p:cNvPr id="41" name="TextBox 40"/>
+          <p:cNvSpPr txBox="1"/>
+          <p:nvPr/>
+        </p:nvSpPr>
+        <p:spPr>
+          <a:xfrm>
+            <a:off x="2587752" y="3639312"/>
+            <a:ext cx="950976" cy="228600"/>
+          </a:xfrm>
+          <a:prstGeom prst="rect">
+            <a:avLst/>
+          </a:prstGeom>
+          <a:noFill/>
+        </p:spPr>
+        <p:txBody>
+          <a:bodyPr wrap="square">
+            <a:spAutoFit/>
+          </a:bodyPr>
+          <a:lstStyle/>
+          <a:p>
+            <a:pPr algn="ctr"/>
+            <a:r>
+              <a:rPr sz="950" b="1" i="0">
+                <a:solidFill>
+                  <a:srgbClr val="003087"/>
+                </a:solidFill>
+                <a:latin typeface="Calibri"/>
+              </a:rPr>
+              <a:t>0.010**</a:t>
+            </a:r>
+          </a:p>
+        </p:txBody>
+      </p:sp>
+      <p:sp>
+        <p:nvSpPr>
+          <p:cNvPr id="42" name="Rectangle 41"/>
+          <p:cNvSpPr/>
+          <p:nvPr/>
+        </p:nvSpPr>
+        <p:spPr>
+          <a:xfrm>
+            <a:off x="3657600" y="3611880"/>
+            <a:ext cx="1005840" cy="274320"/>
+          </a:xfrm>
+          <a:prstGeom prst="rect">
+            <a:avLst/>
+          </a:prstGeom>
+          <a:solidFill>
+            <a:srgbClr val="EBF3FB"/>
+          </a:solidFill>
+          <a:ln>
+            <a:noFill/>
+          </a:ln>
+        </p:spPr>
+        <p:style>
+          <a:lnRef idx="1">
+            <a:schemeClr val="accent1"/>
+          </a:lnRef>
+          <a:fillRef idx="3">
+            <a:schemeClr val="accent1"/>
+          </a:fillRef>
+          <a:effectRef idx="2">
+            <a:schemeClr val="accent1"/>
+          </a:effectRef>
+          <a:fontRef idx="minor">
+            <a:schemeClr val="lt1"/>
+          </a:fontRef>
+        </p:style>
+        <p:txBody>
+          <a:bodyPr rtlCol="0" anchor="ctr"/>
+          <a:lstStyle/>
+          <a:p>
+            <a:pPr algn="ctr"/>
+          </a:p>
+        </p:txBody>
+      </p:sp>
+      <p:sp>
+        <p:nvSpPr>
+          <p:cNvPr id="43" name="TextBox 42"/>
+          <p:cNvSpPr txBox="1"/>
+          <p:nvPr/>
+        </p:nvSpPr>
+        <p:spPr>
+          <a:xfrm>
+            <a:off x="3685032" y="3639312"/>
+            <a:ext cx="950976" cy="228600"/>
+          </a:xfrm>
+          <a:prstGeom prst="rect">
+            <a:avLst/>
+          </a:prstGeom>
+          <a:noFill/>
+        </p:spPr>
+        <p:txBody>
+          <a:bodyPr wrap="square">
+            <a:spAutoFit/>
+          </a:bodyPr>
+          <a:lstStyle/>
+          <a:p>
+            <a:pPr algn="ctr"/>
+            <a:r>
+              <a:rPr sz="950" b="0" i="0">
+                <a:solidFill>
+                  <a:srgbClr val="003087"/>
+                </a:solidFill>
+                <a:latin typeface="Calibri"/>
+              </a:rPr>
+              <a:t>+0.452</a:t>
+            </a:r>
+          </a:p>
+        </p:txBody>
+      </p:sp>
+      <p:sp>
+        <p:nvSpPr>
+          <p:cNvPr id="44" name="Rectangle 43"/>
+          <p:cNvSpPr/>
+          <p:nvPr/>
+        </p:nvSpPr>
+        <p:spPr>
+          <a:xfrm>
+            <a:off x="4754880" y="3611880"/>
+            <a:ext cx="1005840" cy="274320"/>
+          </a:xfrm>
+          <a:prstGeom prst="rect">
+            <a:avLst/>
+          </a:prstGeom>
+          <a:solidFill>
+            <a:srgbClr val="EBF3FB"/>
+          </a:solidFill>
+          <a:ln>
+            <a:noFill/>
+          </a:ln>
+        </p:spPr>
+        <p:style>
+          <a:lnRef idx="1">
+            <a:schemeClr val="accent1"/>
+          </a:lnRef>
+          <a:fillRef idx="3">
+            <a:schemeClr val="accent1"/>
+          </a:fillRef>
+          <a:effectRef idx="2">
+            <a:schemeClr val="accent1"/>
+          </a:effectRef>
+          <a:fontRef idx="minor">
+            <a:schemeClr val="lt1"/>
+          </a:fontRef>
+        </p:style>
+        <p:txBody>
+          <a:bodyPr rtlCol="0" anchor="ctr"/>
+          <a:lstStyle/>
+          <a:p>
+            <a:pPr algn="ctr"/>
+          </a:p>
+        </p:txBody>
+      </p:sp>
+      <p:sp>
+        <p:nvSpPr>
+          <p:cNvPr id="45" name="TextBox 44"/>
+          <p:cNvSpPr txBox="1"/>
+          <p:nvPr/>
+        </p:nvSpPr>
+        <p:spPr>
+          <a:xfrm>
+            <a:off x="4782312" y="3639312"/>
+            <a:ext cx="950976" cy="228600"/>
+          </a:xfrm>
+          <a:prstGeom prst="rect">
+            <a:avLst/>
+          </a:prstGeom>
+          <a:noFill/>
+        </p:spPr>
+        <p:txBody>
+          <a:bodyPr wrap="square">
+            <a:spAutoFit/>
+          </a:bodyPr>
+          <a:lstStyle/>
+          <a:p>
+            <a:pPr algn="ctr"/>
+            <a:r>
+              <a:rPr sz="950" b="0" i="0">
+                <a:solidFill>
+                  <a:srgbClr val="003087"/>
+                </a:solidFill>
+                <a:latin typeface="Calibri"/>
+              </a:rPr>
+              <a:t>0.060</a:t>
+            </a:r>
+          </a:p>
+        </p:txBody>
+      </p:sp>
+      <p:sp>
+        <p:nvSpPr>
+          <p:cNvPr id="46" name="Rectangle 45"/>
+          <p:cNvSpPr/>
+          <p:nvPr/>
+        </p:nvSpPr>
+        <p:spPr>
+          <a:xfrm>
+            <a:off x="5852160" y="3611880"/>
+            <a:ext cx="1005840" cy="274320"/>
+          </a:xfrm>
+          <a:prstGeom prst="rect">
+            <a:avLst/>
+          </a:prstGeom>
+          <a:solidFill>
+            <a:srgbClr val="EBF3FB"/>
+          </a:solidFill>
+          <a:ln>
+            <a:noFill/>
+          </a:ln>
+        </p:spPr>
+        <p:style>
+          <a:lnRef idx="1">
+            <a:schemeClr val="accent1"/>
+          </a:lnRef>
+          <a:fillRef idx="3">
+            <a:schemeClr val="accent1"/>
+          </a:fillRef>
+          <a:effectRef idx="2">
+            <a:schemeClr val="accent1"/>
+          </a:effectRef>
+          <a:fontRef idx="minor">
+            <a:schemeClr val="lt1"/>
+          </a:fontRef>
+        </p:style>
+        <p:txBody>
+          <a:bodyPr rtlCol="0" anchor="ctr"/>
+          <a:lstStyle/>
+          <a:p>
+            <a:pPr algn="ctr"/>
+          </a:p>
+        </p:txBody>
+      </p:sp>
+      <p:sp>
+        <p:nvSpPr>
+          <p:cNvPr id="47" name="TextBox 46"/>
+          <p:cNvSpPr txBox="1"/>
+          <p:nvPr/>
+        </p:nvSpPr>
+        <p:spPr>
+          <a:xfrm>
+            <a:off x="5879592" y="3639312"/>
+            <a:ext cx="950976" cy="228600"/>
+          </a:xfrm>
+          <a:prstGeom prst="rect">
+            <a:avLst/>
+          </a:prstGeom>
+          <a:noFill/>
+        </p:spPr>
+        <p:txBody>
+          <a:bodyPr wrap="square">
+            <a:spAutoFit/>
+          </a:bodyPr>
+          <a:lstStyle/>
+          <a:p>
+            <a:pPr algn="ctr"/>
+            <a:r>
+              <a:rPr sz="950" b="0" i="0">
+                <a:solidFill>
+                  <a:srgbClr val="003087"/>
+                </a:solidFill>
+                <a:latin typeface="Calibri"/>
+              </a:rPr>
+              <a:t>0.001***</a:t>
+            </a:r>
+          </a:p>
+        </p:txBody>
+      </p:sp>
+      <p:sp>
+        <p:nvSpPr>
+          <p:cNvPr id="48" name="Rectangle 47"/>
+          <p:cNvSpPr/>
+          <p:nvPr/>
+        </p:nvSpPr>
+        <p:spPr>
+          <a:xfrm>
+            <a:off x="365760" y="3913632"/>
+            <a:ext cx="1005840" cy="274320"/>
+          </a:xfrm>
+          <a:prstGeom prst="rect">
+            <a:avLst/>
+          </a:prstGeom>
+          <a:solidFill>
+            <a:srgbClr val="FFFFFF"/>
+          </a:solidFill>
+          <a:ln>
+            <a:noFill/>
+          </a:ln>
+        </p:spPr>
+        <p:style>
+          <a:lnRef idx="1">
+            <a:schemeClr val="accent1"/>
+          </a:lnRef>
+          <a:fillRef idx="3">
+            <a:schemeClr val="accent1"/>
+          </a:fillRef>
+          <a:effectRef idx="2">
+            <a:schemeClr val="accent1"/>
+          </a:effectRef>
+          <a:fontRef idx="minor">
+            <a:schemeClr val="lt1"/>
+          </a:fontRef>
+        </p:style>
+        <p:txBody>
+          <a:bodyPr rtlCol="0" anchor="ctr"/>
+          <a:lstStyle/>
+          <a:p>
+            <a:pPr algn="ctr"/>
+          </a:p>
+        </p:txBody>
+      </p:sp>
+      <p:sp>
+        <p:nvSpPr>
+          <p:cNvPr id="49" name="TextBox 48"/>
+          <p:cNvSpPr txBox="1"/>
+          <p:nvPr/>
+        </p:nvSpPr>
+        <p:spPr>
+          <a:xfrm>
+            <a:off x="393192" y="3941064"/>
+            <a:ext cx="950976" cy="228600"/>
+          </a:xfrm>
+          <a:prstGeom prst="rect">
+            <a:avLst/>
+          </a:prstGeom>
+          <a:noFill/>
+        </p:spPr>
+        <p:txBody>
+          <a:bodyPr wrap="square">
+            <a:spAutoFit/>
+          </a:bodyPr>
+          <a:lstStyle/>
+          <a:p>
+            <a:pPr algn="l"/>
+            <a:r>
+              <a:rPr sz="950" b="0" i="0">
+                <a:solidFill>
+                  <a:srgbClr val="003087"/>
+                </a:solidFill>
+                <a:latin typeface="Calibri"/>
+              </a:rPr>
+              <a:t>8-Week</a:t>
+            </a:r>
+          </a:p>
+        </p:txBody>
+      </p:sp>
+      <p:sp>
+        <p:nvSpPr>
+          <p:cNvPr id="50" name="Rectangle 49"/>
+          <p:cNvSpPr/>
+          <p:nvPr/>
+        </p:nvSpPr>
+        <p:spPr>
+          <a:xfrm>
+            <a:off x="1463040" y="3913632"/>
+            <a:ext cx="1005840" cy="274320"/>
+          </a:xfrm>
+          <a:prstGeom prst="rect">
+            <a:avLst/>
+          </a:prstGeom>
+          <a:solidFill>
+            <a:srgbClr val="FFFFFF"/>
+          </a:solidFill>
+          <a:ln>
+            <a:noFill/>
+          </a:ln>
+        </p:spPr>
+        <p:style>
+          <a:lnRef idx="1">
+            <a:schemeClr val="accent1"/>
+          </a:lnRef>
+          <a:fillRef idx="3">
+            <a:schemeClr val="accent1"/>
+          </a:fillRef>
+          <a:effectRef idx="2">
+            <a:schemeClr val="accent1"/>
+          </a:effectRef>
+          <a:fontRef idx="minor">
+            <a:schemeClr val="lt1"/>
+          </a:fontRef>
+        </p:style>
+        <p:txBody>
+          <a:bodyPr rtlCol="0" anchor="ctr"/>
+          <a:lstStyle/>
+          <a:p>
+            <a:pPr algn="ctr"/>
+          </a:p>
+        </p:txBody>
+      </p:sp>
+      <p:sp>
+        <p:nvSpPr>
+          <p:cNvPr id="51" name="TextBox 50"/>
+          <p:cNvSpPr txBox="1"/>
+          <p:nvPr/>
+        </p:nvSpPr>
+        <p:spPr>
+          <a:xfrm>
+            <a:off x="1490472" y="3941064"/>
+            <a:ext cx="950976" cy="228600"/>
+          </a:xfrm>
+          <a:prstGeom prst="rect">
+            <a:avLst/>
+          </a:prstGeom>
+          <a:noFill/>
+        </p:spPr>
+        <p:txBody>
+          <a:bodyPr wrap="square">
+            <a:spAutoFit/>
+          </a:bodyPr>
+          <a:lstStyle/>
+          <a:p>
+            <a:pPr algn="ctr"/>
+            <a:r>
+              <a:rPr sz="950" b="1" i="0">
+                <a:solidFill>
+                  <a:srgbClr val="003087"/>
+                </a:solidFill>
+                <a:latin typeface="Calibri"/>
+              </a:rPr>
+              <a:t>−1.553</a:t>
+            </a:r>
+          </a:p>
+        </p:txBody>
+      </p:sp>
+      <p:sp>
+        <p:nvSpPr>
+          <p:cNvPr id="52" name="Rectangle 51"/>
+          <p:cNvSpPr/>
+          <p:nvPr/>
+        </p:nvSpPr>
+        <p:spPr>
+          <a:xfrm>
+            <a:off x="2560320" y="3913632"/>
+            <a:ext cx="1005840" cy="274320"/>
+          </a:xfrm>
+          <a:prstGeom prst="rect">
+            <a:avLst/>
+          </a:prstGeom>
+          <a:solidFill>
+            <a:srgbClr val="FFFFFF"/>
+          </a:solidFill>
+          <a:ln>
+            <a:noFill/>
+          </a:ln>
+        </p:spPr>
+        <p:style>
+          <a:lnRef idx="1">
+            <a:schemeClr val="accent1"/>
+          </a:lnRef>
+          <a:fillRef idx="3">
+            <a:schemeClr val="accent1"/>
+          </a:fillRef>
+          <a:effectRef idx="2">
+            <a:schemeClr val="accent1"/>
+          </a:effectRef>
+          <a:fontRef idx="minor">
+            <a:schemeClr val="lt1"/>
+          </a:fontRef>
+        </p:style>
+        <p:txBody>
+          <a:bodyPr rtlCol="0" anchor="ctr"/>
+          <a:lstStyle/>
+          <a:p>
+            <a:pPr algn="ctr"/>
+          </a:p>
+        </p:txBody>
+      </p:sp>
+      <p:sp>
+        <p:nvSpPr>
+          <p:cNvPr id="53" name="TextBox 52"/>
+          <p:cNvSpPr txBox="1"/>
+          <p:nvPr/>
+        </p:nvSpPr>
+        <p:spPr>
+          <a:xfrm>
+            <a:off x="2587752" y="3941064"/>
+            <a:ext cx="950976" cy="228600"/>
+          </a:xfrm>
+          <a:prstGeom prst="rect">
+            <a:avLst/>
+          </a:prstGeom>
+          <a:noFill/>
+        </p:spPr>
+        <p:txBody>
+          <a:bodyPr wrap="square">
+            <a:spAutoFit/>
+          </a:bodyPr>
+          <a:lstStyle/>
+          <a:p>
+            <a:pPr algn="ctr"/>
+            <a:r>
+              <a:rPr sz="950" b="1" i="0">
+                <a:solidFill>
+                  <a:srgbClr val="003087"/>
+                </a:solidFill>
+                <a:latin typeface="Calibri"/>
+              </a:rPr>
+              <a:t>0.007***</a:t>
+            </a:r>
+          </a:p>
+        </p:txBody>
+      </p:sp>
+      <p:sp>
+        <p:nvSpPr>
+          <p:cNvPr id="54" name="Rectangle 53"/>
+          <p:cNvSpPr/>
+          <p:nvPr/>
+        </p:nvSpPr>
+        <p:spPr>
+          <a:xfrm>
+            <a:off x="3657600" y="3913632"/>
+            <a:ext cx="1005840" cy="274320"/>
+          </a:xfrm>
+          <a:prstGeom prst="rect">
+            <a:avLst/>
+          </a:prstGeom>
+          <a:solidFill>
+            <a:srgbClr val="FFFFFF"/>
+          </a:solidFill>
+          <a:ln>
+            <a:noFill/>
+          </a:ln>
+        </p:spPr>
+        <p:style>
+          <a:lnRef idx="1">
+            <a:schemeClr val="accent1"/>
+          </a:lnRef>
+          <a:fillRef idx="3">
+            <a:schemeClr val="accent1"/>
+          </a:fillRef>
+          <a:effectRef idx="2">
+            <a:schemeClr val="accent1"/>
+          </a:effectRef>
+          <a:fontRef idx="minor">
+            <a:schemeClr val="lt1"/>
+          </a:fontRef>
+        </p:style>
+        <p:txBody>
+          <a:bodyPr rtlCol="0" anchor="ctr"/>
+          <a:lstStyle/>
+          <a:p>
+            <a:pPr algn="ctr"/>
+          </a:p>
+        </p:txBody>
+      </p:sp>
+      <p:sp>
+        <p:nvSpPr>
+          <p:cNvPr id="55" name="TextBox 54"/>
+          <p:cNvSpPr txBox="1"/>
+          <p:nvPr/>
+        </p:nvSpPr>
+        <p:spPr>
+          <a:xfrm>
+            <a:off x="3685032" y="3941064"/>
+            <a:ext cx="950976" cy="228600"/>
+          </a:xfrm>
+          <a:prstGeom prst="rect">
+            <a:avLst/>
+          </a:prstGeom>
+          <a:noFill/>
+        </p:spPr>
+        <p:txBody>
+          <a:bodyPr wrap="square">
+            <a:spAutoFit/>
+          </a:bodyPr>
+          <a:lstStyle/>
+          <a:p>
+            <a:pPr algn="ctr"/>
+            <a:r>
+              <a:rPr sz="950" b="0" i="0">
+                <a:solidFill>
+                  <a:srgbClr val="003087"/>
+                </a:solidFill>
+                <a:latin typeface="Calibri"/>
+              </a:rPr>
+              <a:t>+0.145</a:t>
+            </a:r>
+          </a:p>
+        </p:txBody>
+      </p:sp>
+      <p:sp>
+        <p:nvSpPr>
+          <p:cNvPr id="56" name="Rectangle 55"/>
+          <p:cNvSpPr/>
+          <p:nvPr/>
+        </p:nvSpPr>
+        <p:spPr>
+          <a:xfrm>
+            <a:off x="4754880" y="3913632"/>
+            <a:ext cx="1005840" cy="274320"/>
+          </a:xfrm>
+          <a:prstGeom prst="rect">
+            <a:avLst/>
+          </a:prstGeom>
+          <a:solidFill>
+            <a:srgbClr val="FFFFFF"/>
+          </a:solidFill>
+          <a:ln>
+            <a:noFill/>
+          </a:ln>
+        </p:spPr>
+        <p:style>
+          <a:lnRef idx="1">
+            <a:schemeClr val="accent1"/>
+          </a:lnRef>
+          <a:fillRef idx="3">
+            <a:schemeClr val="accent1"/>
+          </a:fillRef>
+          <a:effectRef idx="2">
+            <a:schemeClr val="accent1"/>
+          </a:effectRef>
+          <a:fontRef idx="minor">
+            <a:schemeClr val="lt1"/>
+          </a:fontRef>
+        </p:style>
+        <p:txBody>
+          <a:bodyPr rtlCol="0" anchor="ctr"/>
+          <a:lstStyle/>
+          <a:p>
+            <a:pPr algn="ctr"/>
+          </a:p>
+        </p:txBody>
+      </p:sp>
+      <p:sp>
+        <p:nvSpPr>
+          <p:cNvPr id="57" name="TextBox 56"/>
+          <p:cNvSpPr txBox="1"/>
+          <p:nvPr/>
+        </p:nvSpPr>
+        <p:spPr>
+          <a:xfrm>
+            <a:off x="4782312" y="3941064"/>
+            <a:ext cx="950976" cy="228600"/>
+          </a:xfrm>
+          <a:prstGeom prst="rect">
+            <a:avLst/>
+          </a:prstGeom>
+          <a:noFill/>
+        </p:spPr>
+        <p:txBody>
+          <a:bodyPr wrap="square">
+            <a:spAutoFit/>
+          </a:bodyPr>
+          <a:lstStyle/>
+          <a:p>
+            <a:pPr algn="ctr"/>
+            <a:r>
+              <a:rPr sz="950" b="0" i="0">
+                <a:solidFill>
+                  <a:srgbClr val="003087"/>
+                </a:solidFill>
+                <a:latin typeface="Calibri"/>
+              </a:rPr>
+              <a:t>0.516</a:t>
+            </a:r>
+          </a:p>
+        </p:txBody>
+      </p:sp>
+      <p:sp>
+        <p:nvSpPr>
+          <p:cNvPr id="58" name="Rectangle 57"/>
+          <p:cNvSpPr/>
+          <p:nvPr/>
+        </p:nvSpPr>
+        <p:spPr>
+          <a:xfrm>
+            <a:off x="5852160" y="3913632"/>
+            <a:ext cx="1005840" cy="274320"/>
+          </a:xfrm>
+          <a:prstGeom prst="rect">
+            <a:avLst/>
+          </a:prstGeom>
+          <a:solidFill>
+            <a:srgbClr val="FFFFFF"/>
+          </a:solidFill>
+          <a:ln>
+            <a:noFill/>
+          </a:ln>
+        </p:spPr>
+        <p:style>
+          <a:lnRef idx="1">
+            <a:schemeClr val="accent1"/>
+          </a:lnRef>
+          <a:fillRef idx="3">
+            <a:schemeClr val="accent1"/>
+          </a:fillRef>
+          <a:effectRef idx="2">
+            <a:schemeClr val="accent1"/>
+          </a:effectRef>
+          <a:fontRef idx="minor">
+            <a:schemeClr val="lt1"/>
+          </a:fontRef>
+        </p:style>
+        <p:txBody>
+          <a:bodyPr rtlCol="0" anchor="ctr"/>
+          <a:lstStyle/>
+          <a:p>
+            <a:pPr algn="ctr"/>
+          </a:p>
+        </p:txBody>
+      </p:sp>
+      <p:sp>
+        <p:nvSpPr>
+          <p:cNvPr id="59" name="TextBox 58"/>
+          <p:cNvSpPr txBox="1"/>
+          <p:nvPr/>
+        </p:nvSpPr>
+        <p:spPr>
+          <a:xfrm>
+            <a:off x="5879592" y="3941064"/>
+            <a:ext cx="950976" cy="228600"/>
+          </a:xfrm>
+          <a:prstGeom prst="rect">
+            <a:avLst/>
+          </a:prstGeom>
+          <a:noFill/>
+        </p:spPr>
+        <p:txBody>
+          <a:bodyPr wrap="square">
+            <a:spAutoFit/>
+          </a:bodyPr>
+          <a:lstStyle/>
+          <a:p>
+            <a:pPr algn="ctr"/>
+            <a:r>
+              <a:rPr sz="950" b="0" i="0">
+                <a:solidFill>
+                  <a:srgbClr val="003087"/>
+                </a:solidFill>
+                <a:latin typeface="Calibri"/>
+              </a:rPr>
+              <a:t>0.003***</a:t>
+            </a:r>
+          </a:p>
+        </p:txBody>
+      </p:sp>
+      <p:sp>
+        <p:nvSpPr>
+          <p:cNvPr id="60" name="Rectangle 59"/>
+          <p:cNvSpPr/>
+          <p:nvPr/>
+        </p:nvSpPr>
+        <p:spPr>
+          <a:xfrm>
+            <a:off x="365760" y="4215384"/>
+            <a:ext cx="1005840" cy="274320"/>
+          </a:xfrm>
+          <a:prstGeom prst="rect">
+            <a:avLst/>
+          </a:prstGeom>
+          <a:solidFill>
+            <a:srgbClr val="EBF3FB"/>
+          </a:solidFill>
+          <a:ln>
+            <a:noFill/>
+          </a:ln>
+        </p:spPr>
+        <p:style>
+          <a:lnRef idx="1">
+            <a:schemeClr val="accent1"/>
+          </a:lnRef>
+          <a:fillRef idx="3">
+            <a:schemeClr val="accent1"/>
+          </a:fillRef>
+          <a:effectRef idx="2">
+            <a:schemeClr val="accent1"/>
+          </a:effectRef>
+          <a:fontRef idx="minor">
+            <a:schemeClr val="lt1"/>
+          </a:fontRef>
+        </p:style>
+        <p:txBody>
+          <a:bodyPr rtlCol="0" anchor="ctr"/>
+          <a:lstStyle/>
+          <a:p>
+            <a:pPr algn="ctr"/>
+          </a:p>
+        </p:txBody>
+      </p:sp>
+      <p:sp>
+        <p:nvSpPr>
+          <p:cNvPr id="61" name="TextBox 60"/>
+          <p:cNvSpPr txBox="1"/>
+          <p:nvPr/>
+        </p:nvSpPr>
+        <p:spPr>
+          <a:xfrm>
+            <a:off x="393192" y="4242816"/>
+            <a:ext cx="950976" cy="228600"/>
+          </a:xfrm>
+          <a:prstGeom prst="rect">
+            <a:avLst/>
+          </a:prstGeom>
+          <a:noFill/>
+        </p:spPr>
+        <p:txBody>
+          <a:bodyPr wrap="square">
+            <a:spAutoFit/>
+          </a:bodyPr>
+          <a:lstStyle/>
+          <a:p>
+            <a:pPr algn="l"/>
+            <a:r>
+              <a:rPr sz="950" b="0" i="0">
+                <a:solidFill>
+                  <a:srgbClr val="003087"/>
+                </a:solidFill>
+                <a:latin typeface="Calibri"/>
+              </a:rPr>
+              <a:t>13-Week</a:t>
+            </a:r>
+          </a:p>
+        </p:txBody>
+      </p:sp>
+      <p:sp>
+        <p:nvSpPr>
+          <p:cNvPr id="62" name="Rectangle 61"/>
+          <p:cNvSpPr/>
+          <p:nvPr/>
+        </p:nvSpPr>
+        <p:spPr>
+          <a:xfrm>
+            <a:off x="1463040" y="4215384"/>
+            <a:ext cx="1005840" cy="274320"/>
+          </a:xfrm>
+          <a:prstGeom prst="rect">
+            <a:avLst/>
+          </a:prstGeom>
+          <a:solidFill>
+            <a:srgbClr val="EBF3FB"/>
+          </a:solidFill>
+          <a:ln>
+            <a:noFill/>
+          </a:ln>
+        </p:spPr>
+        <p:style>
+          <a:lnRef idx="1">
+            <a:schemeClr val="accent1"/>
+          </a:lnRef>
+          <a:fillRef idx="3">
+            <a:schemeClr val="accent1"/>
+          </a:fillRef>
+          <a:effectRef idx="2">
+            <a:schemeClr val="accent1"/>
+          </a:effectRef>
+          <a:fontRef idx="minor">
+            <a:schemeClr val="lt1"/>
+          </a:fontRef>
+        </p:style>
+        <p:txBody>
+          <a:bodyPr rtlCol="0" anchor="ctr"/>
+          <a:lstStyle/>
+          <a:p>
+            <a:pPr algn="ctr"/>
+          </a:p>
+        </p:txBody>
+      </p:sp>
+      <p:sp>
+        <p:nvSpPr>
+          <p:cNvPr id="63" name="TextBox 62"/>
+          <p:cNvSpPr txBox="1"/>
+          <p:nvPr/>
+        </p:nvSpPr>
+        <p:spPr>
+          <a:xfrm>
+            <a:off x="1490472" y="4242816"/>
+            <a:ext cx="950976" cy="228600"/>
+          </a:xfrm>
+          <a:prstGeom prst="rect">
+            <a:avLst/>
+          </a:prstGeom>
+          <a:noFill/>
+        </p:spPr>
+        <p:txBody>
+          <a:bodyPr wrap="square">
+            <a:spAutoFit/>
+          </a:bodyPr>
+          <a:lstStyle/>
+          <a:p>
+            <a:pPr algn="ctr"/>
+            <a:r>
+              <a:rPr sz="950" b="1" i="0">
+                <a:solidFill>
+                  <a:srgbClr val="003087"/>
+                </a:solidFill>
+                <a:latin typeface="Calibri"/>
+              </a:rPr>
+              <a:t>−1.366</a:t>
+            </a:r>
+          </a:p>
+        </p:txBody>
+      </p:sp>
+      <p:sp>
+        <p:nvSpPr>
+          <p:cNvPr id="64" name="Rectangle 63"/>
+          <p:cNvSpPr/>
+          <p:nvPr/>
+        </p:nvSpPr>
+        <p:spPr>
+          <a:xfrm>
+            <a:off x="2560320" y="4215384"/>
+            <a:ext cx="1005840" cy="274320"/>
+          </a:xfrm>
+          <a:prstGeom prst="rect">
+            <a:avLst/>
+          </a:prstGeom>
+          <a:solidFill>
+            <a:srgbClr val="EBF3FB"/>
+          </a:solidFill>
+          <a:ln>
+            <a:noFill/>
+          </a:ln>
+        </p:spPr>
+        <p:style>
+          <a:lnRef idx="1">
+            <a:schemeClr val="accent1"/>
+          </a:lnRef>
+          <a:fillRef idx="3">
+            <a:schemeClr val="accent1"/>
+          </a:fillRef>
+          <a:effectRef idx="2">
+            <a:schemeClr val="accent1"/>
+          </a:effectRef>
+          <a:fontRef idx="minor">
+            <a:schemeClr val="lt1"/>
+          </a:fontRef>
+        </p:style>
+        <p:txBody>
+          <a:bodyPr rtlCol="0" anchor="ctr"/>
+          <a:lstStyle/>
+          <a:p>
+            <a:pPr algn="ctr"/>
+          </a:p>
+        </p:txBody>
+      </p:sp>
+      <p:sp>
+        <p:nvSpPr>
+          <p:cNvPr id="65" name="TextBox 64"/>
+          <p:cNvSpPr txBox="1"/>
+          <p:nvPr/>
+        </p:nvSpPr>
+        <p:spPr>
+          <a:xfrm>
+            <a:off x="2587752" y="4242816"/>
+            <a:ext cx="950976" cy="228600"/>
+          </a:xfrm>
+          <a:prstGeom prst="rect">
+            <a:avLst/>
+          </a:prstGeom>
+          <a:noFill/>
+        </p:spPr>
+        <p:txBody>
+          <a:bodyPr wrap="square">
+            <a:spAutoFit/>
+          </a:bodyPr>
+          <a:lstStyle/>
+          <a:p>
+            <a:pPr algn="ctr"/>
+            <a:r>
+              <a:rPr sz="950" b="1" i="0">
+                <a:solidFill>
+                  <a:srgbClr val="003087"/>
+                </a:solidFill>
+                <a:latin typeface="Calibri"/>
+              </a:rPr>
+              <a:t>0.003***</a:t>
+            </a:r>
+          </a:p>
+        </p:txBody>
+      </p:sp>
+      <p:sp>
+        <p:nvSpPr>
+          <p:cNvPr id="66" name="Rectangle 65"/>
+          <p:cNvSpPr/>
+          <p:nvPr/>
+        </p:nvSpPr>
+        <p:spPr>
+          <a:xfrm>
+            <a:off x="3657600" y="4215384"/>
+            <a:ext cx="1005840" cy="274320"/>
+          </a:xfrm>
+          <a:prstGeom prst="rect">
+            <a:avLst/>
+          </a:prstGeom>
+          <a:solidFill>
+            <a:srgbClr val="EBF3FB"/>
+          </a:solidFill>
+          <a:ln>
+            <a:noFill/>
+          </a:ln>
+        </p:spPr>
+        <p:style>
+          <a:lnRef idx="1">
+            <a:schemeClr val="accent1"/>
+          </a:lnRef>
+          <a:fillRef idx="3">
+            <a:schemeClr val="accent1"/>
+          </a:fillRef>
+          <a:effectRef idx="2">
+            <a:schemeClr val="accent1"/>
+          </a:effectRef>
+          <a:fontRef idx="minor">
+            <a:schemeClr val="lt1"/>
+          </a:fontRef>
+        </p:style>
+        <p:txBody>
+          <a:bodyPr rtlCol="0" anchor="ctr"/>
+          <a:lstStyle/>
+          <a:p>
+            <a:pPr algn="ctr"/>
+          </a:p>
+        </p:txBody>
+      </p:sp>
+      <p:sp>
+        <p:nvSpPr>
+          <p:cNvPr id="67" name="TextBox 66"/>
+          <p:cNvSpPr txBox="1"/>
+          <p:nvPr/>
+        </p:nvSpPr>
+        <p:spPr>
+          <a:xfrm>
+            <a:off x="3685032" y="4242816"/>
+            <a:ext cx="950976" cy="228600"/>
+          </a:xfrm>
+          <a:prstGeom prst="rect">
+            <a:avLst/>
+          </a:prstGeom>
+          <a:noFill/>
+        </p:spPr>
+        <p:txBody>
+          <a:bodyPr wrap="square">
+            <a:spAutoFit/>
+          </a:bodyPr>
+          <a:lstStyle/>
+          <a:p>
+            <a:pPr algn="ctr"/>
+            <a:r>
+              <a:rPr sz="950" b="0" i="0">
+                <a:solidFill>
+                  <a:srgbClr val="003087"/>
+                </a:solidFill>
+                <a:latin typeface="Calibri"/>
+              </a:rPr>
+              <a:t>+0.338</a:t>
+            </a:r>
+          </a:p>
+        </p:txBody>
+      </p:sp>
+      <p:sp>
+        <p:nvSpPr>
+          <p:cNvPr id="68" name="Rectangle 67"/>
+          <p:cNvSpPr/>
+          <p:nvPr/>
+        </p:nvSpPr>
+        <p:spPr>
+          <a:xfrm>
+            <a:off x="4754880" y="4215384"/>
+            <a:ext cx="1005840" cy="274320"/>
+          </a:xfrm>
+          <a:prstGeom prst="rect">
+            <a:avLst/>
+          </a:prstGeom>
+          <a:solidFill>
+            <a:srgbClr val="EBF3FB"/>
+          </a:solidFill>
+          <a:ln>
+            <a:noFill/>
+          </a:ln>
+        </p:spPr>
+        <p:style>
+          <a:lnRef idx="1">
+            <a:schemeClr val="accent1"/>
+          </a:lnRef>
+          <a:fillRef idx="3">
+            <a:schemeClr val="accent1"/>
+          </a:fillRef>
+          <a:effectRef idx="2">
+            <a:schemeClr val="accent1"/>
+          </a:effectRef>
+          <a:fontRef idx="minor">
+            <a:schemeClr val="lt1"/>
+          </a:fontRef>
+        </p:style>
+        <p:txBody>
+          <a:bodyPr rtlCol="0" anchor="ctr"/>
+          <a:lstStyle/>
+          <a:p>
+            <a:pPr algn="ctr"/>
+          </a:p>
+        </p:txBody>
+      </p:sp>
+      <p:sp>
+        <p:nvSpPr>
+          <p:cNvPr id="69" name="TextBox 68"/>
+          <p:cNvSpPr txBox="1"/>
+          <p:nvPr/>
+        </p:nvSpPr>
+        <p:spPr>
+          <a:xfrm>
+            <a:off x="4782312" y="4242816"/>
+            <a:ext cx="950976" cy="228600"/>
+          </a:xfrm>
+          <a:prstGeom prst="rect">
+            <a:avLst/>
+          </a:prstGeom>
+          <a:noFill/>
+        </p:spPr>
+        <p:txBody>
+          <a:bodyPr wrap="square">
+            <a:spAutoFit/>
+          </a:bodyPr>
+          <a:lstStyle/>
+          <a:p>
+            <a:pPr algn="ctr"/>
+            <a:r>
+              <a:rPr sz="950" b="0" i="0">
+                <a:solidFill>
+                  <a:srgbClr val="003087"/>
+                </a:solidFill>
+                <a:latin typeface="Calibri"/>
+              </a:rPr>
+              <a:t>0.131</a:t>
+            </a:r>
+          </a:p>
+        </p:txBody>
+      </p:sp>
+      <p:sp>
+        <p:nvSpPr>
+          <p:cNvPr id="70" name="Rectangle 69"/>
+          <p:cNvSpPr/>
+          <p:nvPr/>
+        </p:nvSpPr>
+        <p:spPr>
+          <a:xfrm>
+            <a:off x="5852160" y="4215384"/>
+            <a:ext cx="1005840" cy="274320"/>
+          </a:xfrm>
+          <a:prstGeom prst="rect">
+            <a:avLst/>
+          </a:prstGeom>
+          <a:solidFill>
+            <a:srgbClr val="EBF3FB"/>
+          </a:solidFill>
+          <a:ln>
+            <a:noFill/>
+          </a:ln>
+        </p:spPr>
+        <p:style>
+          <a:lnRef idx="1">
+            <a:schemeClr val="accent1"/>
+          </a:lnRef>
+          <a:fillRef idx="3">
+            <a:schemeClr val="accent1"/>
+          </a:fillRef>
+          <a:effectRef idx="2">
+            <a:schemeClr val="accent1"/>
+          </a:effectRef>
+          <a:fontRef idx="minor">
+            <a:schemeClr val="lt1"/>
+          </a:fontRef>
+        </p:style>
+        <p:txBody>
+          <a:bodyPr rtlCol="0" anchor="ctr"/>
+          <a:lstStyle/>
+          <a:p>
+            <a:pPr algn="ctr"/>
+          </a:p>
+        </p:txBody>
+      </p:sp>
+      <p:sp>
+        <p:nvSpPr>
+          <p:cNvPr id="71" name="TextBox 70"/>
+          <p:cNvSpPr txBox="1"/>
+          <p:nvPr/>
+        </p:nvSpPr>
+        <p:spPr>
+          <a:xfrm>
+            <a:off x="5879592" y="4242816"/>
+            <a:ext cx="950976" cy="228600"/>
+          </a:xfrm>
+          <a:prstGeom prst="rect">
+            <a:avLst/>
+          </a:prstGeom>
+          <a:noFill/>
+        </p:spPr>
+        <p:txBody>
+          <a:bodyPr wrap="square">
+            <a:spAutoFit/>
+          </a:bodyPr>
+          <a:lstStyle/>
+          <a:p>
+            <a:pPr algn="ctr"/>
+            <a:r>
+              <a:rPr sz="950" b="0" i="0">
+                <a:solidFill>
+                  <a:srgbClr val="003087"/>
+                </a:solidFill>
+                <a:latin typeface="Calibri"/>
+              </a:rPr>
+              <a:t>0.000***</a:t>
+            </a:r>
+          </a:p>
+        </p:txBody>
+      </p:sp>
+      <p:sp>
+        <p:nvSpPr>
+          <p:cNvPr id="72" name="Rectangle 71"/>
+          <p:cNvSpPr/>
+          <p:nvPr/>
+        </p:nvSpPr>
+        <p:spPr>
+          <a:xfrm>
+            <a:off x="365760" y="4517136"/>
+            <a:ext cx="1005840" cy="274320"/>
+          </a:xfrm>
+          <a:prstGeom prst="rect">
+            <a:avLst/>
+          </a:prstGeom>
+          <a:solidFill>
+            <a:srgbClr val="FFFFFF"/>
+          </a:solidFill>
+          <a:ln>
+            <a:noFill/>
+          </a:ln>
+        </p:spPr>
+        <p:style>
+          <a:lnRef idx="1">
+            <a:schemeClr val="accent1"/>
+          </a:lnRef>
+          <a:fillRef idx="3">
+            <a:schemeClr val="accent1"/>
+          </a:fillRef>
+          <a:effectRef idx="2">
+            <a:schemeClr val="accent1"/>
+          </a:effectRef>
+          <a:fontRef idx="minor">
+            <a:schemeClr val="lt1"/>
+          </a:fontRef>
+        </p:style>
+        <p:txBody>
+          <a:bodyPr rtlCol="0" anchor="ctr"/>
+          <a:lstStyle/>
+          <a:p>
+            <a:pPr algn="ctr"/>
+          </a:p>
+        </p:txBody>
+      </p:sp>
+      <p:sp>
+        <p:nvSpPr>
+          <p:cNvPr id="73" name="TextBox 72"/>
+          <p:cNvSpPr txBox="1"/>
+          <p:nvPr/>
+        </p:nvSpPr>
+        <p:spPr>
+          <a:xfrm>
+            <a:off x="393192" y="4544568"/>
+            <a:ext cx="950976" cy="228600"/>
+          </a:xfrm>
+          <a:prstGeom prst="rect">
+            <a:avLst/>
+          </a:prstGeom>
+          <a:noFill/>
+        </p:spPr>
+        <p:txBody>
+          <a:bodyPr wrap="square">
+            <a:spAutoFit/>
+          </a:bodyPr>
+          <a:lstStyle/>
+          <a:p>
+            <a:pPr algn="l"/>
+            <a:r>
+              <a:rPr sz="950" b="0" i="0">
+                <a:solidFill>
+                  <a:srgbClr val="003087"/>
+                </a:solidFill>
+                <a:latin typeface="Calibri"/>
+              </a:rPr>
+              <a:t>26-Week</a:t>
+            </a:r>
+          </a:p>
+        </p:txBody>
+      </p:sp>
+      <p:sp>
+        <p:nvSpPr>
+          <p:cNvPr id="74" name="Rectangle 73"/>
+          <p:cNvSpPr/>
+          <p:nvPr/>
+        </p:nvSpPr>
+        <p:spPr>
+          <a:xfrm>
+            <a:off x="1463040" y="4517136"/>
+            <a:ext cx="1005840" cy="274320"/>
+          </a:xfrm>
+          <a:prstGeom prst="rect">
+            <a:avLst/>
+          </a:prstGeom>
+          <a:solidFill>
+            <a:srgbClr val="FFFFFF"/>
+          </a:solidFill>
+          <a:ln>
+            <a:noFill/>
+          </a:ln>
+        </p:spPr>
+        <p:style>
+          <a:lnRef idx="1">
+            <a:schemeClr val="accent1"/>
+          </a:lnRef>
+          <a:fillRef idx="3">
+            <a:schemeClr val="accent1"/>
+          </a:fillRef>
+          <a:effectRef idx="2">
+            <a:schemeClr val="accent1"/>
+          </a:effectRef>
+          <a:fontRef idx="minor">
+            <a:schemeClr val="lt1"/>
+          </a:fontRef>
+        </p:style>
+        <p:txBody>
+          <a:bodyPr rtlCol="0" anchor="ctr"/>
+          <a:lstStyle/>
+          <a:p>
+            <a:pPr algn="ctr"/>
+          </a:p>
+        </p:txBody>
+      </p:sp>
+      <p:sp>
+        <p:nvSpPr>
+          <p:cNvPr id="75" name="TextBox 74"/>
+          <p:cNvSpPr txBox="1"/>
+          <p:nvPr/>
+        </p:nvSpPr>
+        <p:spPr>
+          <a:xfrm>
+            <a:off x="1490472" y="4544568"/>
+            <a:ext cx="950976" cy="228600"/>
+          </a:xfrm>
+          <a:prstGeom prst="rect">
+            <a:avLst/>
+          </a:prstGeom>
+          <a:noFill/>
+        </p:spPr>
+        <p:txBody>
+          <a:bodyPr wrap="square">
+            <a:spAutoFit/>
+          </a:bodyPr>
+          <a:lstStyle/>
+          <a:p>
+            <a:pPr algn="ctr"/>
+            <a:r>
+              <a:rPr sz="950" b="1" i="0">
+                <a:solidFill>
+                  <a:srgbClr val="003087"/>
+                </a:solidFill>
+                <a:latin typeface="Calibri"/>
+              </a:rPr>
+              <a:t>−1.587</a:t>
+            </a:r>
+          </a:p>
+        </p:txBody>
+      </p:sp>
+      <p:sp>
+        <p:nvSpPr>
+          <p:cNvPr id="76" name="Rectangle 75"/>
+          <p:cNvSpPr/>
+          <p:nvPr/>
+        </p:nvSpPr>
+        <p:spPr>
+          <a:xfrm>
+            <a:off x="2560320" y="4517136"/>
+            <a:ext cx="1005840" cy="274320"/>
+          </a:xfrm>
+          <a:prstGeom prst="rect">
+            <a:avLst/>
+          </a:prstGeom>
+          <a:solidFill>
+            <a:srgbClr val="FFFFFF"/>
+          </a:solidFill>
+          <a:ln>
+            <a:noFill/>
+          </a:ln>
+        </p:spPr>
+        <p:style>
+          <a:lnRef idx="1">
+            <a:schemeClr val="accent1"/>
+          </a:lnRef>
+          <a:fillRef idx="3">
+            <a:schemeClr val="accent1"/>
+          </a:fillRef>
+          <a:effectRef idx="2">
+            <a:schemeClr val="accent1"/>
+          </a:effectRef>
+          <a:fontRef idx="minor">
+            <a:schemeClr val="lt1"/>
+          </a:fontRef>
+        </p:style>
+        <p:txBody>
+          <a:bodyPr rtlCol="0" anchor="ctr"/>
+          <a:lstStyle/>
+          <a:p>
+            <a:pPr algn="ctr"/>
+          </a:p>
+        </p:txBody>
+      </p:sp>
+      <p:sp>
+        <p:nvSpPr>
+          <p:cNvPr id="77" name="TextBox 76"/>
+          <p:cNvSpPr txBox="1"/>
+          <p:nvPr/>
+        </p:nvSpPr>
+        <p:spPr>
+          <a:xfrm>
+            <a:off x="2587752" y="4544568"/>
+            <a:ext cx="950976" cy="228600"/>
+          </a:xfrm>
+          <a:prstGeom prst="rect">
+            <a:avLst/>
+          </a:prstGeom>
+          <a:noFill/>
+        </p:spPr>
+        <p:txBody>
+          <a:bodyPr wrap="square">
+            <a:spAutoFit/>
+          </a:bodyPr>
+          <a:lstStyle/>
+          <a:p>
+            <a:pPr algn="ctr"/>
+            <a:r>
+              <a:rPr sz="950" b="1" i="0">
+                <a:solidFill>
+                  <a:srgbClr val="003087"/>
+                </a:solidFill>
+                <a:latin typeface="Calibri"/>
+              </a:rPr>
+              <a:t>0.000***</a:t>
+            </a:r>
+          </a:p>
+        </p:txBody>
+      </p:sp>
+      <p:sp>
+        <p:nvSpPr>
+          <p:cNvPr id="78" name="Rectangle 77"/>
+          <p:cNvSpPr/>
+          <p:nvPr/>
+        </p:nvSpPr>
+        <p:spPr>
+          <a:xfrm>
+            <a:off x="3657600" y="4517136"/>
+            <a:ext cx="1005840" cy="274320"/>
+          </a:xfrm>
+          <a:prstGeom prst="rect">
+            <a:avLst/>
+          </a:prstGeom>
+          <a:solidFill>
+            <a:srgbClr val="FFFFFF"/>
+          </a:solidFill>
+          <a:ln>
+            <a:noFill/>
+          </a:ln>
+        </p:spPr>
+        <p:style>
+          <a:lnRef idx="1">
+            <a:schemeClr val="accent1"/>
+          </a:lnRef>
+          <a:fillRef idx="3">
+            <a:schemeClr val="accent1"/>
+          </a:fillRef>
+          <a:effectRef idx="2">
+            <a:schemeClr val="accent1"/>
+          </a:effectRef>
+          <a:fontRef idx="minor">
+            <a:schemeClr val="lt1"/>
+          </a:fontRef>
+        </p:style>
+        <p:txBody>
+          <a:bodyPr rtlCol="0" anchor="ctr"/>
+          <a:lstStyle/>
+          <a:p>
+            <a:pPr algn="ctr"/>
+          </a:p>
+        </p:txBody>
+      </p:sp>
+      <p:sp>
+        <p:nvSpPr>
+          <p:cNvPr id="79" name="TextBox 78"/>
+          <p:cNvSpPr txBox="1"/>
+          <p:nvPr/>
+        </p:nvSpPr>
+        <p:spPr>
+          <a:xfrm>
+            <a:off x="3685032" y="4544568"/>
+            <a:ext cx="950976" cy="228600"/>
+          </a:xfrm>
+          <a:prstGeom prst="rect">
+            <a:avLst/>
+          </a:prstGeom>
+          <a:noFill/>
+        </p:spPr>
+        <p:txBody>
+          <a:bodyPr wrap="square">
+            <a:spAutoFit/>
+          </a:bodyPr>
+          <a:lstStyle/>
+          <a:p>
+            <a:pPr algn="ctr"/>
+            <a:r>
+              <a:rPr sz="950" b="0" i="0">
+                <a:solidFill>
+                  <a:srgbClr val="003087"/>
+                </a:solidFill>
+                <a:latin typeface="Calibri"/>
+              </a:rPr>
+              <a:t>−0.016</a:t>
+            </a:r>
+          </a:p>
+        </p:txBody>
+      </p:sp>
+      <p:sp>
+        <p:nvSpPr>
+          <p:cNvPr id="80" name="Rectangle 79"/>
+          <p:cNvSpPr/>
+          <p:nvPr/>
+        </p:nvSpPr>
+        <p:spPr>
+          <a:xfrm>
+            <a:off x="4754880" y="4517136"/>
+            <a:ext cx="1005840" cy="274320"/>
+          </a:xfrm>
+          <a:prstGeom prst="rect">
+            <a:avLst/>
+          </a:prstGeom>
+          <a:solidFill>
+            <a:srgbClr val="FFFFFF"/>
+          </a:solidFill>
+          <a:ln>
+            <a:noFill/>
+          </a:ln>
+        </p:spPr>
+        <p:style>
+          <a:lnRef idx="1">
+            <a:schemeClr val="accent1"/>
+          </a:lnRef>
+          <a:fillRef idx="3">
+            <a:schemeClr val="accent1"/>
+          </a:fillRef>
+          <a:effectRef idx="2">
+            <a:schemeClr val="accent1"/>
+          </a:effectRef>
+          <a:fontRef idx="minor">
+            <a:schemeClr val="lt1"/>
+          </a:fontRef>
+        </p:style>
+        <p:txBody>
+          <a:bodyPr rtlCol="0" anchor="ctr"/>
+          <a:lstStyle/>
+          <a:p>
+            <a:pPr algn="ctr"/>
+          </a:p>
+        </p:txBody>
+      </p:sp>
+      <p:sp>
+        <p:nvSpPr>
+          <p:cNvPr id="81" name="TextBox 80"/>
+          <p:cNvSpPr txBox="1"/>
+          <p:nvPr/>
+        </p:nvSpPr>
+        <p:spPr>
+          <a:xfrm>
+            <a:off x="4782312" y="4544568"/>
+            <a:ext cx="950976" cy="228600"/>
+          </a:xfrm>
+          <a:prstGeom prst="rect">
+            <a:avLst/>
+          </a:prstGeom>
+          <a:noFill/>
+        </p:spPr>
+        <p:txBody>
+          <a:bodyPr wrap="square">
+            <a:spAutoFit/>
+          </a:bodyPr>
+          <a:lstStyle/>
+          <a:p>
+            <a:pPr algn="ctr"/>
+            <a:r>
+              <a:rPr sz="950" b="0" i="0">
+                <a:solidFill>
+                  <a:srgbClr val="003087"/>
+                </a:solidFill>
+                <a:latin typeface="Calibri"/>
+              </a:rPr>
+              <a:t>0.937</a:t>
+            </a:r>
+          </a:p>
+        </p:txBody>
+      </p:sp>
+      <p:sp>
+        <p:nvSpPr>
+          <p:cNvPr id="82" name="Rectangle 81"/>
+          <p:cNvSpPr/>
+          <p:nvPr/>
+        </p:nvSpPr>
+        <p:spPr>
+          <a:xfrm>
+            <a:off x="5852160" y="4517136"/>
+            <a:ext cx="1005840" cy="274320"/>
+          </a:xfrm>
+          <a:prstGeom prst="rect">
+            <a:avLst/>
+          </a:prstGeom>
+          <a:solidFill>
+            <a:srgbClr val="FFFFFF"/>
+          </a:solidFill>
+          <a:ln>
+            <a:noFill/>
+          </a:ln>
+        </p:spPr>
+        <p:style>
+          <a:lnRef idx="1">
+            <a:schemeClr val="accent1"/>
+          </a:lnRef>
+          <a:fillRef idx="3">
+            <a:schemeClr val="accent1"/>
+          </a:fillRef>
+          <a:effectRef idx="2">
+            <a:schemeClr val="accent1"/>
+          </a:effectRef>
+          <a:fontRef idx="minor">
+            <a:schemeClr val="lt1"/>
+          </a:fontRef>
+        </p:style>
+        <p:txBody>
+          <a:bodyPr rtlCol="0" anchor="ctr"/>
+          <a:lstStyle/>
+          <a:p>
+            <a:pPr algn="ctr"/>
+          </a:p>
+        </p:txBody>
+      </p:sp>
+      <p:sp>
+        <p:nvSpPr>
+          <p:cNvPr id="83" name="TextBox 82"/>
+          <p:cNvSpPr txBox="1"/>
+          <p:nvPr/>
+        </p:nvSpPr>
+        <p:spPr>
+          <a:xfrm>
+            <a:off x="5879592" y="4544568"/>
+            <a:ext cx="950976" cy="228600"/>
+          </a:xfrm>
+          <a:prstGeom prst="rect">
+            <a:avLst/>
+          </a:prstGeom>
+          <a:noFill/>
+        </p:spPr>
+        <p:txBody>
+          <a:bodyPr wrap="square">
+            <a:spAutoFit/>
+          </a:bodyPr>
+          <a:lstStyle/>
+          <a:p>
+            <a:pPr algn="ctr"/>
+            <a:r>
+              <a:rPr sz="950" b="0" i="0">
+                <a:solidFill>
+                  <a:srgbClr val="003087"/>
+                </a:solidFill>
+                <a:latin typeface="Calibri"/>
+              </a:rPr>
+              <a:t>0.001***</a:t>
+            </a:r>
+          </a:p>
+        </p:txBody>
+      </p:sp>
+      <p:sp>
+        <p:nvSpPr>
+          <p:cNvPr id="84" name="Rectangle 83"/>
+          <p:cNvSpPr/>
+          <p:nvPr/>
+        </p:nvSpPr>
+        <p:spPr>
+          <a:xfrm>
+            <a:off x="274320" y="4983480"/>
+            <a:ext cx="9464040" cy="713232"/>
+          </a:xfrm>
+          <a:prstGeom prst="rect">
+            <a:avLst/>
+          </a:prstGeom>
+          <a:solidFill>
+            <a:srgbClr val="003087"/>
+          </a:solidFill>
+          <a:ln>
+            <a:noFill/>
+          </a:ln>
+        </p:spPr>
+        <p:style>
+          <a:lnRef idx="1">
+            <a:schemeClr val="accent1"/>
+          </a:lnRef>
+          <a:fillRef idx="3">
+            <a:schemeClr val="accent1"/>
+          </a:fillRef>
+          <a:effectRef idx="2">
+            <a:schemeClr val="accent1"/>
+          </a:effectRef>
+          <a:fontRef idx="minor">
+            <a:schemeClr val="lt1"/>
+          </a:fontRef>
+        </p:style>
+        <p:txBody>
+          <a:bodyPr rtlCol="0" anchor="ctr"/>
+          <a:lstStyle/>
+          <a:p>
+            <a:pPr algn="ctr"/>
+          </a:p>
+        </p:txBody>
+      </p:sp>
+      <p:sp>
+        <p:nvSpPr>
+          <p:cNvPr id="85" name="TextBox 84"/>
+          <p:cNvSpPr txBox="1"/>
+          <p:nvPr/>
+        </p:nvSpPr>
+        <p:spPr>
+          <a:xfrm>
+            <a:off x="457200" y="5029200"/>
+            <a:ext cx="9144000" cy="621792"/>
+          </a:xfrm>
+          <a:prstGeom prst="rect">
+            <a:avLst/>
+          </a:prstGeom>
+          <a:noFill/>
+        </p:spPr>
+        <p:txBody>
+          <a:bodyPr wrap="square">
+            <a:spAutoFit/>
+          </a:bodyPr>
+          <a:lstStyle/>
+          <a:p>
+            <a:pPr algn="l"/>
+            <a:r>
+              <a:rPr sz="950" b="0" i="0">
+                <a:solidFill>
+                  <a:srgbClr val="FFFFFF"/>
+                </a:solidFill>
+                <a:latin typeface="Calibri"/>
+              </a:rPr>
+              <a:t>USDT: negative and significant at ALL FOUR maturities  |  USDC: insignificant at all four  |  Wald test rejects β_USDT = β_USDC (p &lt; 0.004 everywhere)
+→ Reserve-composition channel confirmed.  This does NOT change β₁ = −7.57*** or q* = 13% — it validates the mechanism behind them.</a:t>
+            </a:r>
+          </a:p>
+        </p:txBody>
+      </p:sp>
+      <p:sp>
+        <p:nvSpPr>
+          <p:cNvPr id="86" name="TextBox 85"/>
+          <p:cNvSpPr txBox="1"/>
+          <p:nvPr/>
+        </p:nvSpPr>
+        <p:spPr>
+          <a:xfrm>
+            <a:off x="365760" y="5760720"/>
+            <a:ext cx="9464040" cy="411480"/>
+          </a:xfrm>
+          <a:prstGeom prst="rect">
+            <a:avLst/>
+          </a:prstGeom>
+          <a:noFill/>
+        </p:spPr>
+        <p:txBody>
+          <a:bodyPr wrap="square">
+            <a:spAutoFit/>
+          </a:bodyPr>
+          <a:lstStyle/>
+          <a:p>
+            <a:pPr algn="l"/>
+            <a:r>
+              <a:rPr sz="800" b="0" i="1">
+                <a:solidFill>
+                  <a:srgbClr val="888888"/>
+                </a:solidFill>
+                <a:latin typeface="Calibri"/>
+              </a:rPr>
+              <a:t>Note: Bid-cover data from TreasuryDirect API (4/8/13/26-week auctions). Issuer supply growth from daily panel month-end values. Same controls as main regression.</a:t>
+            </a:r>
+          </a:p>
+        </p:txBody>
+      </p:sp>
+    </p:spTree>
+  </p:cSld>
+  <p:clrMapOvr>
+    <a:masterClrMapping/>
+  </p:clrMapOvr>
+</p:sld>
+</file>
+
+<file path=ppt/slides/slide13.xml><?xml version="1.0" encoding="utf-8"?>
 <p:sld xmlns:a="http://schemas.openxmlformats.org/drawingml/2006/main" xmlns:p="http://schemas.openxmlformats.org/presentationml/2006/main" xmlns:r="http://schemas.openxmlformats.org/officeDocument/2006/relationships">
   <p:cSld>
     <p:spTree>
@@ -7662,1134 +11029,6 @@
 </p:sld>
 </file>
 
-<file path=ppt/slides/slide13.xml><?xml version="1.0" encoding="utf-8"?>
-<p:sld xmlns:a="http://schemas.openxmlformats.org/drawingml/2006/main" xmlns:p="http://schemas.openxmlformats.org/presentationml/2006/main" xmlns:r="http://schemas.openxmlformats.org/officeDocument/2006/relationships">
-  <p:cSld>
-    <p:spTree>
-      <p:nvGrpSpPr>
-        <p:cNvPr id="1" name=""/>
-        <p:cNvGrpSpPr/>
-        <p:nvPr/>
-      </p:nvGrpSpPr>
-      <p:grpSpPr/>
-      <p:sp>
-        <p:nvSpPr>
-          <p:cNvPr id="2" name="Rectangle 1"/>
-          <p:cNvSpPr/>
-          <p:nvPr/>
-        </p:nvSpPr>
-        <p:spPr>
-          <a:xfrm>
-            <a:off x="0" y="0"/>
-            <a:ext cx="12188952" cy="6858000"/>
-          </a:xfrm>
-          <a:prstGeom prst="rect">
-            <a:avLst/>
-          </a:prstGeom>
-          <a:solidFill>
-            <a:srgbClr val="F8F9FA"/>
-          </a:solidFill>
-          <a:ln>
-            <a:noFill/>
-          </a:ln>
-        </p:spPr>
-        <p:style>
-          <a:lnRef idx="1">
-            <a:schemeClr val="accent1"/>
-          </a:lnRef>
-          <a:fillRef idx="3">
-            <a:schemeClr val="accent1"/>
-          </a:fillRef>
-          <a:effectRef idx="2">
-            <a:schemeClr val="accent1"/>
-          </a:effectRef>
-          <a:fontRef idx="minor">
-            <a:schemeClr val="lt1"/>
-          </a:fontRef>
-        </p:style>
-        <p:txBody>
-          <a:bodyPr rtlCol="0" anchor="ctr"/>
-          <a:lstStyle/>
-          <a:p>
-            <a:pPr algn="ctr"/>
-          </a:p>
-        </p:txBody>
-      </p:sp>
-      <p:sp>
-        <p:nvSpPr>
-          <p:cNvPr id="3" name="Rectangle 2"/>
-          <p:cNvSpPr/>
-          <p:nvPr/>
-        </p:nvSpPr>
-        <p:spPr>
-          <a:xfrm>
-            <a:off x="0" y="0"/>
-            <a:ext cx="12188952" cy="822960"/>
-          </a:xfrm>
-          <a:prstGeom prst="rect">
-            <a:avLst/>
-          </a:prstGeom>
-          <a:solidFill>
-            <a:srgbClr val="003087"/>
-          </a:solidFill>
-          <a:ln>
-            <a:noFill/>
-          </a:ln>
-        </p:spPr>
-        <p:style>
-          <a:lnRef idx="1">
-            <a:schemeClr val="accent1"/>
-          </a:lnRef>
-          <a:fillRef idx="3">
-            <a:schemeClr val="accent1"/>
-          </a:fillRef>
-          <a:effectRef idx="2">
-            <a:schemeClr val="accent1"/>
-          </a:effectRef>
-          <a:fontRef idx="minor">
-            <a:schemeClr val="lt1"/>
-          </a:fontRef>
-        </p:style>
-        <p:txBody>
-          <a:bodyPr rtlCol="0" anchor="ctr"/>
-          <a:lstStyle/>
-          <a:p>
-            <a:pPr algn="ctr"/>
-          </a:p>
-        </p:txBody>
-      </p:sp>
-      <p:sp>
-        <p:nvSpPr>
-          <p:cNvPr id="4" name="TextBox 3"/>
-          <p:cNvSpPr txBox="1"/>
-          <p:nvPr/>
-        </p:nvSpPr>
-        <p:spPr>
-          <a:xfrm>
-            <a:off x="274320" y="64008"/>
-            <a:ext cx="10515600" cy="457200"/>
-          </a:xfrm>
-          <a:prstGeom prst="rect">
-            <a:avLst/>
-          </a:prstGeom>
-          <a:noFill/>
-        </p:spPr>
-        <p:txBody>
-          <a:bodyPr wrap="square">
-            <a:spAutoFit/>
-          </a:bodyPr>
-          <a:lstStyle/>
-          <a:p>
-            <a:pPr algn="l"/>
-            <a:r>
-              <a:rPr sz="2000" b="1" i="0">
-                <a:solidFill>
-                  <a:srgbClr val="FFFFFF"/>
-                </a:solidFill>
-                <a:latin typeface="Calibri"/>
-              </a:rPr>
-              <a:t>Policy Implications</a:t>
-            </a:r>
-          </a:p>
-        </p:txBody>
-      </p:sp>
-      <p:sp>
-        <p:nvSpPr>
-          <p:cNvPr id="5" name="TextBox 4"/>
-          <p:cNvSpPr txBox="1"/>
-          <p:nvPr/>
-        </p:nvSpPr>
-        <p:spPr>
-          <a:xfrm>
-            <a:off x="274320" y="502920"/>
-            <a:ext cx="8229600" cy="292608"/>
-          </a:xfrm>
-          <a:prstGeom prst="rect">
-            <a:avLst/>
-          </a:prstGeom>
-          <a:noFill/>
-        </p:spPr>
-        <p:txBody>
-          <a:bodyPr wrap="square">
-            <a:spAutoFit/>
-          </a:bodyPr>
-          <a:lstStyle/>
-          <a:p>
-            <a:pPr algn="l"/>
-            <a:r>
-              <a:rPr sz="1100" b="0" i="1">
-                <a:solidFill>
-                  <a:srgbClr val="FFFFFF"/>
-                </a:solidFill>
-                <a:latin typeface="Calibri"/>
-              </a:rPr>
-              <a:t>From empirical threshold to regulatory reference point</a:t>
-            </a:r>
-          </a:p>
-        </p:txBody>
-      </p:sp>
-      <p:sp>
-        <p:nvSpPr>
-          <p:cNvPr id="6" name="TextBox 5"/>
-          <p:cNvSpPr txBox="1"/>
-          <p:nvPr/>
-        </p:nvSpPr>
-        <p:spPr>
-          <a:xfrm>
-            <a:off x="9601200" y="45720"/>
-            <a:ext cx="2377440" cy="320040"/>
-          </a:xfrm>
-          <a:prstGeom prst="rect">
-            <a:avLst/>
-          </a:prstGeom>
-          <a:noFill/>
-        </p:spPr>
-        <p:txBody>
-          <a:bodyPr wrap="square">
-            <a:spAutoFit/>
-          </a:bodyPr>
-          <a:lstStyle/>
-          <a:p>
-            <a:pPr algn="r"/>
-            <a:r>
-              <a:rPr sz="900" b="1" i="0">
-                <a:solidFill>
-                  <a:srgbClr val="E87722"/>
-                </a:solidFill>
-                <a:latin typeface="Calibri"/>
-              </a:rPr>
-              <a:t>Slide 13 / 16</a:t>
-            </a:r>
-          </a:p>
-        </p:txBody>
-      </p:sp>
-      <p:sp>
-        <p:nvSpPr>
-          <p:cNvPr id="7" name="Rectangle 6"/>
-          <p:cNvSpPr/>
-          <p:nvPr/>
-        </p:nvSpPr>
-        <p:spPr>
-          <a:xfrm>
-            <a:off x="9902952" y="822960"/>
-            <a:ext cx="2286000" cy="6035040"/>
-          </a:xfrm>
-          <a:prstGeom prst="rect">
-            <a:avLst/>
-          </a:prstGeom>
-          <a:solidFill>
-            <a:srgbClr val="003087"/>
-          </a:solidFill>
-          <a:ln>
-            <a:noFill/>
-          </a:ln>
-        </p:spPr>
-        <p:style>
-          <a:lnRef idx="1">
-            <a:schemeClr val="accent1"/>
-          </a:lnRef>
-          <a:fillRef idx="3">
-            <a:schemeClr val="accent1"/>
-          </a:fillRef>
-          <a:effectRef idx="2">
-            <a:schemeClr val="accent1"/>
-          </a:effectRef>
-          <a:fontRef idx="minor">
-            <a:schemeClr val="lt1"/>
-          </a:fontRef>
-        </p:style>
-        <p:txBody>
-          <a:bodyPr rtlCol="0" anchor="ctr"/>
-          <a:lstStyle/>
-          <a:p>
-            <a:pPr algn="ctr"/>
-          </a:p>
-        </p:txBody>
-      </p:sp>
-      <p:sp>
-        <p:nvSpPr>
-          <p:cNvPr id="8" name="Rectangle 7"/>
-          <p:cNvSpPr/>
-          <p:nvPr/>
-        </p:nvSpPr>
-        <p:spPr>
-          <a:xfrm>
-            <a:off x="9902952" y="822960"/>
-            <a:ext cx="2286000" cy="36576"/>
-          </a:xfrm>
-          <a:prstGeom prst="rect">
-            <a:avLst/>
-          </a:prstGeom>
-          <a:solidFill>
-            <a:srgbClr val="E87722"/>
-          </a:solidFill>
-          <a:ln>
-            <a:noFill/>
-          </a:ln>
-        </p:spPr>
-        <p:style>
-          <a:lnRef idx="1">
-            <a:schemeClr val="accent1"/>
-          </a:lnRef>
-          <a:fillRef idx="3">
-            <a:schemeClr val="accent1"/>
-          </a:fillRef>
-          <a:effectRef idx="2">
-            <a:schemeClr val="accent1"/>
-          </a:effectRef>
-          <a:fontRef idx="minor">
-            <a:schemeClr val="lt1"/>
-          </a:fontRef>
-        </p:style>
-        <p:txBody>
-          <a:bodyPr rtlCol="0" anchor="ctr"/>
-          <a:lstStyle/>
-          <a:p>
-            <a:pPr algn="ctr"/>
-          </a:p>
-        </p:txBody>
-      </p:sp>
-      <p:sp>
-        <p:nvSpPr>
-          <p:cNvPr id="9" name="TextBox 8"/>
-          <p:cNvSpPr txBox="1"/>
-          <p:nvPr/>
-        </p:nvSpPr>
-        <p:spPr>
-          <a:xfrm>
-            <a:off x="9994392" y="914400"/>
-            <a:ext cx="2103120" cy="1097280"/>
-          </a:xfrm>
-          <a:prstGeom prst="rect">
-            <a:avLst/>
-          </a:prstGeom>
-          <a:noFill/>
-        </p:spPr>
-        <p:txBody>
-          <a:bodyPr wrap="square">
-            <a:spAutoFit/>
-          </a:bodyPr>
-          <a:lstStyle/>
-          <a:p>
-            <a:pPr algn="ctr"/>
-            <a:r>
-              <a:rPr sz="1100" b="1" i="0">
-                <a:solidFill>
-                  <a:srgbClr val="E87722"/>
-                </a:solidFill>
-                <a:latin typeface="Calibri"/>
-              </a:rPr>
-              <a:t>Key Results</a:t>
-            </a:r>
-          </a:p>
-        </p:txBody>
-      </p:sp>
-      <p:sp>
-        <p:nvSpPr>
-          <p:cNvPr id="10" name="TextBox 9"/>
-          <p:cNvSpPr txBox="1"/>
-          <p:nvPr/>
-        </p:nvSpPr>
-        <p:spPr>
-          <a:xfrm>
-            <a:off x="9976104" y="1828800"/>
-            <a:ext cx="2103120" cy="548640"/>
-          </a:xfrm>
-          <a:prstGeom prst="rect">
-            <a:avLst/>
-          </a:prstGeom>
-          <a:noFill/>
-        </p:spPr>
-        <p:txBody>
-          <a:bodyPr wrap="square">
-            <a:spAutoFit/>
-          </a:bodyPr>
-          <a:lstStyle/>
-          <a:p>
-            <a:pPr algn="ctr"/>
-            <a:r>
-              <a:rPr sz="1500" b="1" i="0">
-                <a:solidFill>
-                  <a:srgbClr val="FFFFFF"/>
-                </a:solidFill>
-                <a:latin typeface="Calibri"/>
-              </a:rPr>
-              <a:t>β₁ = −7.57***</a:t>
-            </a:r>
-          </a:p>
-        </p:txBody>
-      </p:sp>
-      <p:sp>
-        <p:nvSpPr>
-          <p:cNvPr id="11" name="TextBox 10"/>
-          <p:cNvSpPr txBox="1"/>
-          <p:nvPr/>
-        </p:nvSpPr>
-        <p:spPr>
-          <a:xfrm>
-            <a:off x="9976104" y="2331720"/>
-            <a:ext cx="2103120" cy="365760"/>
-          </a:xfrm>
-          <a:prstGeom prst="rect">
-            <a:avLst/>
-          </a:prstGeom>
-          <a:noFill/>
-        </p:spPr>
-        <p:txBody>
-          <a:bodyPr wrap="square">
-            <a:spAutoFit/>
-          </a:bodyPr>
-          <a:lstStyle/>
-          <a:p>
-            <a:pPr algn="ctr"/>
-            <a:r>
-              <a:rPr sz="1000" b="0" i="1">
-                <a:solidFill>
-                  <a:srgbClr val="E87722"/>
-                </a:solidFill>
-                <a:latin typeface="Calibri"/>
-              </a:rPr>
-              <a:t>p = 0.004</a:t>
-            </a:r>
-          </a:p>
-        </p:txBody>
-      </p:sp>
-      <p:sp>
-        <p:nvSpPr>
-          <p:cNvPr id="12" name="Rectangle 11"/>
-          <p:cNvSpPr/>
-          <p:nvPr/>
-        </p:nvSpPr>
-        <p:spPr>
-          <a:xfrm>
-            <a:off x="10040112" y="2788920"/>
-            <a:ext cx="2011680" cy="22860"/>
-          </a:xfrm>
-          <a:prstGeom prst="rect">
-            <a:avLst/>
-          </a:prstGeom>
-          <a:solidFill>
-            <a:srgbClr val="E87722"/>
-          </a:solidFill>
-          <a:ln>
-            <a:noFill/>
-          </a:ln>
-        </p:spPr>
-        <p:style>
-          <a:lnRef idx="1">
-            <a:schemeClr val="accent1"/>
-          </a:lnRef>
-          <a:fillRef idx="3">
-            <a:schemeClr val="accent1"/>
-          </a:fillRef>
-          <a:effectRef idx="2">
-            <a:schemeClr val="accent1"/>
-          </a:effectRef>
-          <a:fontRef idx="minor">
-            <a:schemeClr val="lt1"/>
-          </a:fontRef>
-        </p:style>
-        <p:txBody>
-          <a:bodyPr rtlCol="0" anchor="ctr"/>
-          <a:lstStyle/>
-          <a:p>
-            <a:pPr algn="ctr"/>
-          </a:p>
-        </p:txBody>
-      </p:sp>
-      <p:sp>
-        <p:nvSpPr>
-          <p:cNvPr id="13" name="TextBox 12"/>
-          <p:cNvSpPr txBox="1"/>
-          <p:nvPr/>
-        </p:nvSpPr>
-        <p:spPr>
-          <a:xfrm>
-            <a:off x="9976104" y="2880360"/>
-            <a:ext cx="2103120" cy="548640"/>
-          </a:xfrm>
-          <a:prstGeom prst="rect">
-            <a:avLst/>
-          </a:prstGeom>
-          <a:noFill/>
-        </p:spPr>
-        <p:txBody>
-          <a:bodyPr wrap="square">
-            <a:spAutoFit/>
-          </a:bodyPr>
-          <a:lstStyle/>
-          <a:p>
-            <a:pPr algn="ctr"/>
-            <a:r>
-              <a:rPr sz="1500" b="1" i="0">
-                <a:solidFill>
-                  <a:srgbClr val="FFFFFF"/>
-                </a:solidFill>
-                <a:latin typeface="Calibri"/>
-              </a:rPr>
-              <a:t>q* = 13%</a:t>
-            </a:r>
-          </a:p>
-        </p:txBody>
-      </p:sp>
-      <p:sp>
-        <p:nvSpPr>
-          <p:cNvPr id="14" name="TextBox 13"/>
-          <p:cNvSpPr txBox="1"/>
-          <p:nvPr/>
-        </p:nvSpPr>
-        <p:spPr>
-          <a:xfrm>
-            <a:off x="9976104" y="3383280"/>
-            <a:ext cx="2103120" cy="457200"/>
-          </a:xfrm>
-          <a:prstGeom prst="rect">
-            <a:avLst/>
-          </a:prstGeom>
-          <a:noFill/>
-        </p:spPr>
-        <p:txBody>
-          <a:bodyPr wrap="square">
-            <a:spAutoFit/>
-          </a:bodyPr>
-          <a:lstStyle/>
-          <a:p>
-            <a:pPr algn="ctr"/>
-            <a:r>
-              <a:rPr sz="900" b="0" i="1">
-                <a:solidFill>
-                  <a:srgbClr val="E87722"/>
-                </a:solidFill>
-                <a:latin typeface="Calibri"/>
-              </a:rPr>
-              <a:t>Bootstrap CI
-[3.1%, 14.5%]</a:t>
-            </a:r>
-          </a:p>
-        </p:txBody>
-      </p:sp>
-      <p:sp>
-        <p:nvSpPr>
-          <p:cNvPr id="15" name="Rectangle 14"/>
-          <p:cNvSpPr/>
-          <p:nvPr/>
-        </p:nvSpPr>
-        <p:spPr>
-          <a:xfrm>
-            <a:off x="10040112" y="3931920"/>
-            <a:ext cx="2011680" cy="22860"/>
-          </a:xfrm>
-          <a:prstGeom prst="rect">
-            <a:avLst/>
-          </a:prstGeom>
-          <a:solidFill>
-            <a:srgbClr val="E87722"/>
-          </a:solidFill>
-          <a:ln>
-            <a:noFill/>
-          </a:ln>
-        </p:spPr>
-        <p:style>
-          <a:lnRef idx="1">
-            <a:schemeClr val="accent1"/>
-          </a:lnRef>
-          <a:fillRef idx="3">
-            <a:schemeClr val="accent1"/>
-          </a:fillRef>
-          <a:effectRef idx="2">
-            <a:schemeClr val="accent1"/>
-          </a:effectRef>
-          <a:fontRef idx="minor">
-            <a:schemeClr val="lt1"/>
-          </a:fontRef>
-        </p:style>
-        <p:txBody>
-          <a:bodyPr rtlCol="0" anchor="ctr"/>
-          <a:lstStyle/>
-          <a:p>
-            <a:pPr algn="ctr"/>
-          </a:p>
-        </p:txBody>
-      </p:sp>
-      <p:sp>
-        <p:nvSpPr>
-          <p:cNvPr id="16" name="TextBox 15"/>
-          <p:cNvSpPr txBox="1"/>
-          <p:nvPr/>
-        </p:nvSpPr>
-        <p:spPr>
-          <a:xfrm>
-            <a:off x="9976104" y="4023360"/>
-            <a:ext cx="2103120" cy="1463040"/>
-          </a:xfrm>
-          <a:prstGeom prst="rect">
-            <a:avLst/>
-          </a:prstGeom>
-          <a:noFill/>
-        </p:spPr>
-        <p:txBody>
-          <a:bodyPr wrap="square">
-            <a:spAutoFit/>
-          </a:bodyPr>
-          <a:lstStyle/>
-          <a:p>
-            <a:pPr algn="ctr"/>
-            <a:r>
-              <a:rPr sz="950" b="0" i="0">
-                <a:solidFill>
-                  <a:srgbClr val="FFFFFF"/>
-                </a:solidFill>
-                <a:latin typeface="Calibri"/>
-              </a:rPr>
-              <a:t>3 convergent
-methods:
-β₁ ✓
-q* ✓
-Event study
-(directional)</a:t>
-            </a:r>
-          </a:p>
-        </p:txBody>
-      </p:sp>
-      <p:sp>
-        <p:nvSpPr>
-          <p:cNvPr id="17" name="Rectangle 16"/>
-          <p:cNvSpPr/>
-          <p:nvPr/>
-        </p:nvSpPr>
-        <p:spPr>
-          <a:xfrm>
-            <a:off x="274320" y="960120"/>
-            <a:ext cx="2971800" cy="2011680"/>
-          </a:xfrm>
-          <a:prstGeom prst="rect">
-            <a:avLst/>
-          </a:prstGeom>
-          <a:solidFill>
-            <a:srgbClr val="003087"/>
-          </a:solidFill>
-          <a:ln>
-            <a:noFill/>
-          </a:ln>
-        </p:spPr>
-        <p:style>
-          <a:lnRef idx="1">
-            <a:schemeClr val="accent1"/>
-          </a:lnRef>
-          <a:fillRef idx="3">
-            <a:schemeClr val="accent1"/>
-          </a:fillRef>
-          <a:effectRef idx="2">
-            <a:schemeClr val="accent1"/>
-          </a:effectRef>
-          <a:fontRef idx="minor">
-            <a:schemeClr val="lt1"/>
-          </a:fontRef>
-        </p:style>
-        <p:txBody>
-          <a:bodyPr rtlCol="0" anchor="ctr"/>
-          <a:lstStyle/>
-          <a:p>
-            <a:pPr algn="ctr"/>
-          </a:p>
-        </p:txBody>
-      </p:sp>
-      <p:sp>
-        <p:nvSpPr>
-          <p:cNvPr id="18" name="TextBox 17"/>
-          <p:cNvSpPr txBox="1"/>
-          <p:nvPr/>
-        </p:nvSpPr>
-        <p:spPr>
-          <a:xfrm>
-            <a:off x="411480" y="1024128"/>
-            <a:ext cx="2697480" cy="411480"/>
-          </a:xfrm>
-          <a:prstGeom prst="rect">
-            <a:avLst/>
-          </a:prstGeom>
-          <a:noFill/>
-        </p:spPr>
-        <p:txBody>
-          <a:bodyPr wrap="square">
-            <a:spAutoFit/>
-          </a:bodyPr>
-          <a:lstStyle/>
-          <a:p>
-            <a:pPr algn="l"/>
-            <a:r>
-              <a:rPr sz="1150" b="1" i="0">
-                <a:solidFill>
-                  <a:srgbClr val="E87722"/>
-                </a:solidFill>
-                <a:latin typeface="Calibri"/>
-              </a:rPr>
-              <a:t>MiCA (EU, 2024)</a:t>
-            </a:r>
-          </a:p>
-        </p:txBody>
-      </p:sp>
-      <p:sp>
-        <p:nvSpPr>
-          <p:cNvPr id="19" name="TextBox 18"/>
-          <p:cNvSpPr txBox="1"/>
-          <p:nvPr/>
-        </p:nvSpPr>
-        <p:spPr>
-          <a:xfrm>
-            <a:off x="411480" y="1463040"/>
-            <a:ext cx="2697480" cy="1371600"/>
-          </a:xfrm>
-          <a:prstGeom prst="rect">
-            <a:avLst/>
-          </a:prstGeom>
-          <a:noFill/>
-        </p:spPr>
-        <p:txBody>
-          <a:bodyPr wrap="square">
-            <a:spAutoFit/>
-          </a:bodyPr>
-          <a:lstStyle/>
-          <a:p>
-            <a:pPr algn="l"/>
-            <a:r>
-              <a:rPr sz="1000" b="0" i="0">
-                <a:solidFill>
-                  <a:srgbClr val="FFFFFF"/>
-                </a:solidFill>
-                <a:latin typeface="Calibri"/>
-              </a:rPr>
-              <a:t>Mandates liquid reserve requirements for 'significant' e-money tokens. Our q* = 13% provides an empirically grounded floor.</a:t>
-            </a:r>
-          </a:p>
-        </p:txBody>
-      </p:sp>
-      <p:sp>
-        <p:nvSpPr>
-          <p:cNvPr id="20" name="Rectangle 19"/>
-          <p:cNvSpPr/>
-          <p:nvPr/>
-        </p:nvSpPr>
-        <p:spPr>
-          <a:xfrm>
-            <a:off x="3429000" y="960120"/>
-            <a:ext cx="2971800" cy="2011680"/>
-          </a:xfrm>
-          <a:prstGeom prst="rect">
-            <a:avLst/>
-          </a:prstGeom>
-          <a:solidFill>
-            <a:srgbClr val="003087"/>
-          </a:solidFill>
-          <a:ln>
-            <a:noFill/>
-          </a:ln>
-        </p:spPr>
-        <p:style>
-          <a:lnRef idx="1">
-            <a:schemeClr val="accent1"/>
-          </a:lnRef>
-          <a:fillRef idx="3">
-            <a:schemeClr val="accent1"/>
-          </a:fillRef>
-          <a:effectRef idx="2">
-            <a:schemeClr val="accent1"/>
-          </a:effectRef>
-          <a:fontRef idx="minor">
-            <a:schemeClr val="lt1"/>
-          </a:fontRef>
-        </p:style>
-        <p:txBody>
-          <a:bodyPr rtlCol="0" anchor="ctr"/>
-          <a:lstStyle/>
-          <a:p>
-            <a:pPr algn="ctr"/>
-          </a:p>
-        </p:txBody>
-      </p:sp>
-      <p:sp>
-        <p:nvSpPr>
-          <p:cNvPr id="21" name="TextBox 20"/>
-          <p:cNvSpPr txBox="1"/>
-          <p:nvPr/>
-        </p:nvSpPr>
-        <p:spPr>
-          <a:xfrm>
-            <a:off x="3566160" y="1024128"/>
-            <a:ext cx="2697480" cy="411480"/>
-          </a:xfrm>
-          <a:prstGeom prst="rect">
-            <a:avLst/>
-          </a:prstGeom>
-          <a:noFill/>
-        </p:spPr>
-        <p:txBody>
-          <a:bodyPr wrap="square">
-            <a:spAutoFit/>
-          </a:bodyPr>
-          <a:lstStyle/>
-          <a:p>
-            <a:pPr algn="l"/>
-            <a:r>
-              <a:rPr sz="1150" b="1" i="0">
-                <a:solidFill>
-                  <a:srgbClr val="E87722"/>
-                </a:solidFill>
-                <a:latin typeface="Calibri"/>
-              </a:rPr>
-              <a:t>GENIUS Act (US, 2025)</a:t>
-            </a:r>
-          </a:p>
-        </p:txBody>
-      </p:sp>
-      <p:sp>
-        <p:nvSpPr>
-          <p:cNvPr id="22" name="TextBox 21"/>
-          <p:cNvSpPr txBox="1"/>
-          <p:nvPr/>
-        </p:nvSpPr>
-        <p:spPr>
-          <a:xfrm>
-            <a:off x="3566160" y="1463040"/>
-            <a:ext cx="2697480" cy="1371600"/>
-          </a:xfrm>
-          <a:prstGeom prst="rect">
-            <a:avLst/>
-          </a:prstGeom>
-          <a:noFill/>
-        </p:spPr>
-        <p:txBody>
-          <a:bodyPr wrap="square">
-            <a:spAutoFit/>
-          </a:bodyPr>
-          <a:lstStyle/>
-          <a:p>
-            <a:pPr algn="l"/>
-            <a:r>
-              <a:rPr sz="1000" b="0" i="0">
-                <a:solidFill>
-                  <a:srgbClr val="FFFFFF"/>
-                </a:solidFill>
-                <a:latin typeface="Calibri"/>
-              </a:rPr>
-              <a:t>Requires stablecoin issuers to hold cash or near-cash reserves. Our CI [3.1%, 14.5%] maps to a regulatory range, not a precise floor.</a:t>
-            </a:r>
-          </a:p>
-        </p:txBody>
-      </p:sp>
-      <p:sp>
-        <p:nvSpPr>
-          <p:cNvPr id="23" name="Rectangle 22"/>
-          <p:cNvSpPr/>
-          <p:nvPr/>
-        </p:nvSpPr>
-        <p:spPr>
-          <a:xfrm>
-            <a:off x="6583680" y="960120"/>
-            <a:ext cx="2971800" cy="2011680"/>
-          </a:xfrm>
-          <a:prstGeom prst="rect">
-            <a:avLst/>
-          </a:prstGeom>
-          <a:solidFill>
-            <a:srgbClr val="003087"/>
-          </a:solidFill>
-          <a:ln>
-            <a:noFill/>
-          </a:ln>
-        </p:spPr>
-        <p:style>
-          <a:lnRef idx="1">
-            <a:schemeClr val="accent1"/>
-          </a:lnRef>
-          <a:fillRef idx="3">
-            <a:schemeClr val="accent1"/>
-          </a:fillRef>
-          <a:effectRef idx="2">
-            <a:schemeClr val="accent1"/>
-          </a:effectRef>
-          <a:fontRef idx="minor">
-            <a:schemeClr val="lt1"/>
-          </a:fontRef>
-        </p:style>
-        <p:txBody>
-          <a:bodyPr rtlCol="0" anchor="ctr"/>
-          <a:lstStyle/>
-          <a:p>
-            <a:pPr algn="ctr"/>
-          </a:p>
-        </p:txBody>
-      </p:sp>
-      <p:sp>
-        <p:nvSpPr>
-          <p:cNvPr id="24" name="TextBox 23"/>
-          <p:cNvSpPr txBox="1"/>
-          <p:nvPr/>
-        </p:nvSpPr>
-        <p:spPr>
-          <a:xfrm>
-            <a:off x="6720840" y="1024128"/>
-            <a:ext cx="2697480" cy="411480"/>
-          </a:xfrm>
-          <a:prstGeom prst="rect">
-            <a:avLst/>
-          </a:prstGeom>
-          <a:noFill/>
-        </p:spPr>
-        <p:txBody>
-          <a:bodyPr wrap="square">
-            <a:spAutoFit/>
-          </a:bodyPr>
-          <a:lstStyle/>
-          <a:p>
-            <a:pPr algn="l"/>
-            <a:r>
-              <a:rPr sz="1150" b="1" i="0">
-                <a:solidFill>
-                  <a:srgbClr val="E87722"/>
-                </a:solidFill>
-                <a:latin typeface="Calibri"/>
-              </a:rPr>
-              <a:t>Market trajectory</a:t>
-            </a:r>
-          </a:p>
-        </p:txBody>
-      </p:sp>
-      <p:sp>
-        <p:nvSpPr>
-          <p:cNvPr id="25" name="TextBox 24"/>
-          <p:cNvSpPr txBox="1"/>
-          <p:nvPr/>
-        </p:nvSpPr>
-        <p:spPr>
-          <a:xfrm>
-            <a:off x="6720840" y="1463040"/>
-            <a:ext cx="2697480" cy="1371600"/>
-          </a:xfrm>
-          <a:prstGeom prst="rect">
-            <a:avLst/>
-          </a:prstGeom>
-          <a:noFill/>
-        </p:spPr>
-        <p:txBody>
-          <a:bodyPr wrap="square">
-            <a:spAutoFit/>
-          </a:bodyPr>
-          <a:lstStyle/>
-          <a:p>
-            <a:pPr algn="l"/>
-            <a:r>
-              <a:rPr sz="1000" b="0" i="0">
-                <a:solidFill>
-                  <a:srgbClr val="FFFFFF"/>
-                </a:solidFill>
-                <a:latin typeface="Calibri"/>
-              </a:rPr>
-              <a:t>Supply growing toward $1–2T. At that scale, forced liquidation risk is SYSTEMIC — comparable to a money-market fund break-the-buck event.</a:t>
-            </a:r>
-          </a:p>
-        </p:txBody>
-      </p:sp>
-      <p:sp>
-        <p:nvSpPr>
-          <p:cNvPr id="26" name="Rectangle 25"/>
-          <p:cNvSpPr/>
-          <p:nvPr/>
-        </p:nvSpPr>
-        <p:spPr>
-          <a:xfrm>
-            <a:off x="274320" y="3154680"/>
-            <a:ext cx="9326880" cy="1097280"/>
-          </a:xfrm>
-          <a:prstGeom prst="rect">
-            <a:avLst/>
-          </a:prstGeom>
-          <a:solidFill>
-            <a:srgbClr val="FFF3E0"/>
-          </a:solidFill>
-          <a:ln>
-            <a:noFill/>
-          </a:ln>
-        </p:spPr>
-        <p:style>
-          <a:lnRef idx="1">
-            <a:schemeClr val="accent1"/>
-          </a:lnRef>
-          <a:fillRef idx="3">
-            <a:schemeClr val="accent1"/>
-          </a:fillRef>
-          <a:effectRef idx="2">
-            <a:schemeClr val="accent1"/>
-          </a:effectRef>
-          <a:fontRef idx="minor">
-            <a:schemeClr val="lt1"/>
-          </a:fontRef>
-        </p:style>
-        <p:txBody>
-          <a:bodyPr rtlCol="0" anchor="ctr"/>
-          <a:lstStyle/>
-          <a:p>
-            <a:pPr algn="ctr"/>
-          </a:p>
-        </p:txBody>
-      </p:sp>
-      <p:sp>
-        <p:nvSpPr>
-          <p:cNvPr id="27" name="TextBox 26"/>
-          <p:cNvSpPr txBox="1"/>
-          <p:nvPr/>
-        </p:nvSpPr>
-        <p:spPr>
-          <a:xfrm>
-            <a:off x="411480" y="3200400"/>
-            <a:ext cx="9052560" cy="365760"/>
-          </a:xfrm>
-          <a:prstGeom prst="rect">
-            <a:avLst/>
-          </a:prstGeom>
-          <a:noFill/>
-        </p:spPr>
-        <p:txBody>
-          <a:bodyPr wrap="square">
-            <a:spAutoFit/>
-          </a:bodyPr>
-          <a:lstStyle/>
-          <a:p>
-            <a:pPr algn="l"/>
-            <a:r>
-              <a:rPr sz="1200" b="1" i="0">
-                <a:solidFill>
-                  <a:srgbClr val="E87722"/>
-                </a:solidFill>
-                <a:latin typeface="Calibri"/>
-              </a:rPr>
-              <a:t>Direct Regulatory Reference</a:t>
-            </a:r>
-          </a:p>
-        </p:txBody>
-      </p:sp>
-      <p:sp>
-        <p:nvSpPr>
-          <p:cNvPr id="28" name="TextBox 27"/>
-          <p:cNvSpPr txBox="1"/>
-          <p:nvPr/>
-        </p:nvSpPr>
-        <p:spPr>
-          <a:xfrm>
-            <a:off x="411480" y="3611880"/>
-            <a:ext cx="9052560" cy="548640"/>
-          </a:xfrm>
-          <a:prstGeom prst="rect">
-            <a:avLst/>
-          </a:prstGeom>
-          <a:noFill/>
-        </p:spPr>
-        <p:txBody>
-          <a:bodyPr wrap="square">
-            <a:spAutoFit/>
-          </a:bodyPr>
-          <a:lstStyle/>
-          <a:p>
-            <a:pPr algn="l"/>
-            <a:r>
-              <a:rPr sz="1050" b="0" i="0">
-                <a:solidFill>
-                  <a:srgbClr val="222222"/>
-                </a:solidFill>
-                <a:latin typeface="Calibri"/>
-              </a:rPr>
-              <a:t>Our estimate: require cash/near-cash ≥ 13% of supply outstanding.   Caveat: 90% CI [3.1%, 14.5%] — this is a range, not a precise floor.   Interpretation: anything below 3% is clearly under-reserved; above 14.5% is clearly adequate.</a:t>
-            </a:r>
-          </a:p>
-        </p:txBody>
-      </p:sp>
-      <p:sp>
-        <p:nvSpPr>
-          <p:cNvPr id="29" name="Rectangle 28"/>
-          <p:cNvSpPr/>
-          <p:nvPr/>
-        </p:nvSpPr>
-        <p:spPr>
-          <a:xfrm>
-            <a:off x="274320" y="4370832"/>
-            <a:ext cx="9326880" cy="777240"/>
-          </a:xfrm>
-          <a:prstGeom prst="rect">
-            <a:avLst/>
-          </a:prstGeom>
-          <a:solidFill>
-            <a:srgbClr val="003087"/>
-          </a:solidFill>
-          <a:ln>
-            <a:noFill/>
-          </a:ln>
-        </p:spPr>
-        <p:style>
-          <a:lnRef idx="1">
-            <a:schemeClr val="accent1"/>
-          </a:lnRef>
-          <a:fillRef idx="3">
-            <a:schemeClr val="accent1"/>
-          </a:fillRef>
-          <a:effectRef idx="2">
-            <a:schemeClr val="accent1"/>
-          </a:effectRef>
-          <a:fontRef idx="minor">
-            <a:schemeClr val="lt1"/>
-          </a:fontRef>
-        </p:style>
-        <p:txBody>
-          <a:bodyPr rtlCol="0" anchor="ctr"/>
-          <a:lstStyle/>
-          <a:p>
-            <a:pPr algn="ctr"/>
-          </a:p>
-        </p:txBody>
-      </p:sp>
-      <p:sp>
-        <p:nvSpPr>
-          <p:cNvPr id="30" name="TextBox 29"/>
-          <p:cNvSpPr txBox="1"/>
-          <p:nvPr/>
-        </p:nvSpPr>
-        <p:spPr>
-          <a:xfrm>
-            <a:off x="457200" y="4416552"/>
-            <a:ext cx="9052560" cy="685800"/>
-          </a:xfrm>
-          <a:prstGeom prst="rect">
-            <a:avLst/>
-          </a:prstGeom>
-          <a:noFill/>
-        </p:spPr>
-        <p:txBody>
-          <a:bodyPr wrap="square">
-            <a:spAutoFit/>
-          </a:bodyPr>
-          <a:lstStyle/>
-          <a:p>
-            <a:pPr algn="l"/>
-            <a:r>
-              <a:rPr sz="1100" b="1" i="0">
-                <a:solidFill>
-                  <a:srgbClr val="FFFFFF"/>
-                </a:solidFill>
-                <a:latin typeface="Calibri"/>
-              </a:rPr>
-              <a:t>First paper to provide an empirical threshold directly relevant to reserve legislation.
-As attestation data accumulates, this estimate will sharpen.</a:t>
-            </a:r>
-          </a:p>
-        </p:txBody>
-      </p:sp>
-    </p:spTree>
-  </p:cSld>
-  <p:clrMapOvr>
-    <a:masterClrMapping/>
-  </p:clrMapOvr>
-</p:sld>
-</file>
-
 <file path=ppt/slides/slide14.xml><?xml version="1.0" encoding="utf-8"?>
 <p:sld xmlns:a="http://schemas.openxmlformats.org/drawingml/2006/main" xmlns:p="http://schemas.openxmlformats.org/presentationml/2006/main" xmlns:r="http://schemas.openxmlformats.org/officeDocument/2006/relationships">
   <p:cSld>
@@ -8916,7 +11155,7 @@
                 </a:solidFill>
                 <a:latin typeface="Calibri"/>
               </a:rPr>
-              <a:t>Summary: Three Convergent Lines of Evidence</a:t>
+              <a:t>Policy Implications</a:t>
             </a:r>
           </a:p>
         </p:txBody>
@@ -8951,7 +11190,7 @@
                 </a:solidFill>
                 <a:latin typeface="Calibri"/>
               </a:rPr>
-              <a:t>Each method is individually limited; together they point to the same conclusion</a:t>
+              <a:t>From empirical threshold to regulatory reference point</a:t>
             </a:r>
           </a:p>
         </p:txBody>
@@ -8986,7 +11225,7 @@
                 </a:solidFill>
                 <a:latin typeface="Calibri"/>
               </a:rPr>
-              <a:t>Slide 14 / 16</a:t>
+              <a:t>Slide 14 / 17</a:t>
             </a:r>
           </a:p>
         </p:txBody>
@@ -9388,7 +11627,7 @@
         <p:spPr>
           <a:xfrm>
             <a:off x="274320" y="960120"/>
-            <a:ext cx="2926080" cy="502920"/>
+            <a:ext cx="2971800" cy="2011680"/>
           </a:xfrm>
           <a:prstGeom prst="rect">
             <a:avLst/>
@@ -9430,43 +11669,304 @@
         </p:nvSpPr>
         <p:spPr>
           <a:xfrm>
-            <a:off x="365760" y="987552"/>
-            <a:ext cx="2743200" cy="411480"/>
-          </a:xfrm>
-          <a:prstGeom prst="rect">
-            <a:avLst/>
-          </a:prstGeom>
-          <a:noFill/>
-        </p:spPr>
-        <p:txBody>
-          <a:bodyPr wrap="square">
-            <a:spAutoFit/>
-          </a:bodyPr>
-          <a:lstStyle/>
-          <a:p>
-            <a:pPr algn="ctr"/>
-            <a:r>
-              <a:rPr sz="1200" b="1" i="0">
+            <a:off x="411480" y="1024128"/>
+            <a:ext cx="2697480" cy="411480"/>
+          </a:xfrm>
+          <a:prstGeom prst="rect">
+            <a:avLst/>
+          </a:prstGeom>
+          <a:noFill/>
+        </p:spPr>
+        <p:txBody>
+          <a:bodyPr wrap="square">
+            <a:spAutoFit/>
+          </a:bodyPr>
+          <a:lstStyle/>
+          <a:p>
+            <a:pPr algn="l"/>
+            <a:r>
+              <a:rPr sz="1150" b="1" i="0">
+                <a:solidFill>
+                  <a:srgbClr val="E87722"/>
+                </a:solidFill>
+                <a:latin typeface="Calibri"/>
+              </a:rPr>
+              <a:t>MiCA (EU, 2024)</a:t>
+            </a:r>
+          </a:p>
+        </p:txBody>
+      </p:sp>
+      <p:sp>
+        <p:nvSpPr>
+          <p:cNvPr id="19" name="TextBox 18"/>
+          <p:cNvSpPr txBox="1"/>
+          <p:nvPr/>
+        </p:nvSpPr>
+        <p:spPr>
+          <a:xfrm>
+            <a:off x="411480" y="1463040"/>
+            <a:ext cx="2697480" cy="1371600"/>
+          </a:xfrm>
+          <a:prstGeom prst="rect">
+            <a:avLst/>
+          </a:prstGeom>
+          <a:noFill/>
+        </p:spPr>
+        <p:txBody>
+          <a:bodyPr wrap="square">
+            <a:spAutoFit/>
+          </a:bodyPr>
+          <a:lstStyle/>
+          <a:p>
+            <a:pPr algn="l"/>
+            <a:r>
+              <a:rPr sz="1000" b="0" i="0">
                 <a:solidFill>
                   <a:srgbClr val="FFFFFF"/>
                 </a:solidFill>
                 <a:latin typeface="Calibri"/>
               </a:rPr>
-              <a:t>1.  Regression</a:t>
-            </a:r>
-          </a:p>
-        </p:txBody>
-      </p:sp>
-      <p:sp>
-        <p:nvSpPr>
-          <p:cNvPr id="19" name="Rectangle 18"/>
+              <a:t>Mandates liquid reserve requirements for 'significant' e-money tokens. Our q* = 13% provides an empirically grounded floor.</a:t>
+            </a:r>
+          </a:p>
+        </p:txBody>
+      </p:sp>
+      <p:sp>
+        <p:nvSpPr>
+          <p:cNvPr id="20" name="Rectangle 19"/>
           <p:cNvSpPr/>
           <p:nvPr/>
         </p:nvSpPr>
         <p:spPr>
           <a:xfrm>
-            <a:off x="274320" y="1481328"/>
-            <a:ext cx="2926080" cy="502920"/>
+            <a:off x="3429000" y="960120"/>
+            <a:ext cx="2971800" cy="2011680"/>
+          </a:xfrm>
+          <a:prstGeom prst="rect">
+            <a:avLst/>
+          </a:prstGeom>
+          <a:solidFill>
+            <a:srgbClr val="003087"/>
+          </a:solidFill>
+          <a:ln>
+            <a:noFill/>
+          </a:ln>
+        </p:spPr>
+        <p:style>
+          <a:lnRef idx="1">
+            <a:schemeClr val="accent1"/>
+          </a:lnRef>
+          <a:fillRef idx="3">
+            <a:schemeClr val="accent1"/>
+          </a:fillRef>
+          <a:effectRef idx="2">
+            <a:schemeClr val="accent1"/>
+          </a:effectRef>
+          <a:fontRef idx="minor">
+            <a:schemeClr val="lt1"/>
+          </a:fontRef>
+        </p:style>
+        <p:txBody>
+          <a:bodyPr rtlCol="0" anchor="ctr"/>
+          <a:lstStyle/>
+          <a:p>
+            <a:pPr algn="ctr"/>
+          </a:p>
+        </p:txBody>
+      </p:sp>
+      <p:sp>
+        <p:nvSpPr>
+          <p:cNvPr id="21" name="TextBox 20"/>
+          <p:cNvSpPr txBox="1"/>
+          <p:nvPr/>
+        </p:nvSpPr>
+        <p:spPr>
+          <a:xfrm>
+            <a:off x="3566160" y="1024128"/>
+            <a:ext cx="2697480" cy="411480"/>
+          </a:xfrm>
+          <a:prstGeom prst="rect">
+            <a:avLst/>
+          </a:prstGeom>
+          <a:noFill/>
+        </p:spPr>
+        <p:txBody>
+          <a:bodyPr wrap="square">
+            <a:spAutoFit/>
+          </a:bodyPr>
+          <a:lstStyle/>
+          <a:p>
+            <a:pPr algn="l"/>
+            <a:r>
+              <a:rPr sz="1150" b="1" i="0">
+                <a:solidFill>
+                  <a:srgbClr val="E87722"/>
+                </a:solidFill>
+                <a:latin typeface="Calibri"/>
+              </a:rPr>
+              <a:t>GENIUS Act (US, 2025)</a:t>
+            </a:r>
+          </a:p>
+        </p:txBody>
+      </p:sp>
+      <p:sp>
+        <p:nvSpPr>
+          <p:cNvPr id="22" name="TextBox 21"/>
+          <p:cNvSpPr txBox="1"/>
+          <p:nvPr/>
+        </p:nvSpPr>
+        <p:spPr>
+          <a:xfrm>
+            <a:off x="3566160" y="1463040"/>
+            <a:ext cx="2697480" cy="1371600"/>
+          </a:xfrm>
+          <a:prstGeom prst="rect">
+            <a:avLst/>
+          </a:prstGeom>
+          <a:noFill/>
+        </p:spPr>
+        <p:txBody>
+          <a:bodyPr wrap="square">
+            <a:spAutoFit/>
+          </a:bodyPr>
+          <a:lstStyle/>
+          <a:p>
+            <a:pPr algn="l"/>
+            <a:r>
+              <a:rPr sz="1000" b="0" i="0">
+                <a:solidFill>
+                  <a:srgbClr val="FFFFFF"/>
+                </a:solidFill>
+                <a:latin typeface="Calibri"/>
+              </a:rPr>
+              <a:t>Requires stablecoin issuers to hold cash or near-cash reserves. Our CI [3.1%, 14.5%] maps to a regulatory range, not a precise floor.</a:t>
+            </a:r>
+          </a:p>
+        </p:txBody>
+      </p:sp>
+      <p:sp>
+        <p:nvSpPr>
+          <p:cNvPr id="23" name="Rectangle 22"/>
+          <p:cNvSpPr/>
+          <p:nvPr/>
+        </p:nvSpPr>
+        <p:spPr>
+          <a:xfrm>
+            <a:off x="6583680" y="960120"/>
+            <a:ext cx="2971800" cy="2011680"/>
+          </a:xfrm>
+          <a:prstGeom prst="rect">
+            <a:avLst/>
+          </a:prstGeom>
+          <a:solidFill>
+            <a:srgbClr val="003087"/>
+          </a:solidFill>
+          <a:ln>
+            <a:noFill/>
+          </a:ln>
+        </p:spPr>
+        <p:style>
+          <a:lnRef idx="1">
+            <a:schemeClr val="accent1"/>
+          </a:lnRef>
+          <a:fillRef idx="3">
+            <a:schemeClr val="accent1"/>
+          </a:fillRef>
+          <a:effectRef idx="2">
+            <a:schemeClr val="accent1"/>
+          </a:effectRef>
+          <a:fontRef idx="minor">
+            <a:schemeClr val="lt1"/>
+          </a:fontRef>
+        </p:style>
+        <p:txBody>
+          <a:bodyPr rtlCol="0" anchor="ctr"/>
+          <a:lstStyle/>
+          <a:p>
+            <a:pPr algn="ctr"/>
+          </a:p>
+        </p:txBody>
+      </p:sp>
+      <p:sp>
+        <p:nvSpPr>
+          <p:cNvPr id="24" name="TextBox 23"/>
+          <p:cNvSpPr txBox="1"/>
+          <p:nvPr/>
+        </p:nvSpPr>
+        <p:spPr>
+          <a:xfrm>
+            <a:off x="6720840" y="1024128"/>
+            <a:ext cx="2697480" cy="411480"/>
+          </a:xfrm>
+          <a:prstGeom prst="rect">
+            <a:avLst/>
+          </a:prstGeom>
+          <a:noFill/>
+        </p:spPr>
+        <p:txBody>
+          <a:bodyPr wrap="square">
+            <a:spAutoFit/>
+          </a:bodyPr>
+          <a:lstStyle/>
+          <a:p>
+            <a:pPr algn="l"/>
+            <a:r>
+              <a:rPr sz="1150" b="1" i="0">
+                <a:solidFill>
+                  <a:srgbClr val="E87722"/>
+                </a:solidFill>
+                <a:latin typeface="Calibri"/>
+              </a:rPr>
+              <a:t>Market trajectory</a:t>
+            </a:r>
+          </a:p>
+        </p:txBody>
+      </p:sp>
+      <p:sp>
+        <p:nvSpPr>
+          <p:cNvPr id="25" name="TextBox 24"/>
+          <p:cNvSpPr txBox="1"/>
+          <p:nvPr/>
+        </p:nvSpPr>
+        <p:spPr>
+          <a:xfrm>
+            <a:off x="6720840" y="1463040"/>
+            <a:ext cx="2697480" cy="1371600"/>
+          </a:xfrm>
+          <a:prstGeom prst="rect">
+            <a:avLst/>
+          </a:prstGeom>
+          <a:noFill/>
+        </p:spPr>
+        <p:txBody>
+          <a:bodyPr wrap="square">
+            <a:spAutoFit/>
+          </a:bodyPr>
+          <a:lstStyle/>
+          <a:p>
+            <a:pPr algn="l"/>
+            <a:r>
+              <a:rPr sz="1000" b="0" i="0">
+                <a:solidFill>
+                  <a:srgbClr val="FFFFFF"/>
+                </a:solidFill>
+                <a:latin typeface="Calibri"/>
+              </a:rPr>
+              <a:t>Supply growing toward $1–2T. At that scale, forced liquidation risk is SYSTEMIC — comparable to a money-market fund break-the-buck event.</a:t>
+            </a:r>
+          </a:p>
+        </p:txBody>
+      </p:sp>
+      <p:sp>
+        <p:nvSpPr>
+          <p:cNvPr id="26" name="Rectangle 25"/>
+          <p:cNvSpPr/>
+          <p:nvPr/>
+        </p:nvSpPr>
+        <p:spPr>
+          <a:xfrm>
+            <a:off x="274320" y="3154680"/>
+            <a:ext cx="9326880" cy="1097280"/>
           </a:xfrm>
           <a:prstGeom prst="rect">
             <a:avLst/>
@@ -9502,127 +12002,14 @@
       </p:sp>
       <p:sp>
         <p:nvSpPr>
-          <p:cNvPr id="20" name="TextBox 19"/>
-          <p:cNvSpPr txBox="1"/>
-          <p:nvPr/>
-        </p:nvSpPr>
-        <p:spPr>
-          <a:xfrm>
-            <a:off x="320040" y="1508760"/>
-            <a:ext cx="2834640" cy="411480"/>
-          </a:xfrm>
-          <a:prstGeom prst="rect">
-            <a:avLst/>
-          </a:prstGeom>
-          <a:noFill/>
-        </p:spPr>
-        <p:txBody>
-          <a:bodyPr wrap="square">
-            <a:spAutoFit/>
-          </a:bodyPr>
-          <a:lstStyle/>
-          <a:p>
-            <a:pPr algn="ctr"/>
-            <a:r>
-              <a:rPr sz="1300" b="1" i="0">
-                <a:solidFill>
-                  <a:srgbClr val="003087"/>
-                </a:solidFill>
-                <a:latin typeface="Calibri"/>
-              </a:rPr>
-              <a:t>β₁ = −7.57***</a:t>
-            </a:r>
-          </a:p>
-        </p:txBody>
-      </p:sp>
-      <p:sp>
-        <p:nvSpPr>
-          <p:cNvPr id="21" name="TextBox 20"/>
-          <p:cNvSpPr txBox="1"/>
-          <p:nvPr/>
-        </p:nvSpPr>
-        <p:spPr>
-          <a:xfrm>
-            <a:off x="320040" y="2029968"/>
-            <a:ext cx="2834640" cy="292608"/>
-          </a:xfrm>
-          <a:prstGeom prst="rect">
-            <a:avLst/>
-          </a:prstGeom>
-          <a:noFill/>
-        </p:spPr>
-        <p:txBody>
-          <a:bodyPr wrap="square">
-            <a:spAutoFit/>
-          </a:bodyPr>
-          <a:lstStyle/>
-          <a:p>
-            <a:pPr algn="ctr"/>
-            <a:r>
-              <a:rPr sz="950" b="0" i="1">
-                <a:solidFill>
-                  <a:srgbClr val="003087"/>
-                </a:solidFill>
-                <a:latin typeface="Calibri"/>
-              </a:rPr>
-              <a:t>p = 0.004  (buffer-ratio spec)</a:t>
-            </a:r>
-          </a:p>
-        </p:txBody>
-      </p:sp>
-      <p:sp>
-        <p:nvSpPr>
-          <p:cNvPr id="22" name="Rectangle 21"/>
-          <p:cNvSpPr/>
-          <p:nvPr/>
-        </p:nvSpPr>
-        <p:spPr>
-          <a:xfrm>
-            <a:off x="274320" y="2359152"/>
-            <a:ext cx="2926080" cy="2423160"/>
-          </a:xfrm>
-          <a:prstGeom prst="rect">
-            <a:avLst/>
-          </a:prstGeom>
-          <a:solidFill>
-            <a:srgbClr val="F2F2F2"/>
-          </a:solidFill>
-          <a:ln>
-            <a:noFill/>
-          </a:ln>
-        </p:spPr>
-        <p:style>
-          <a:lnRef idx="1">
-            <a:schemeClr val="accent1"/>
-          </a:lnRef>
-          <a:fillRef idx="3">
-            <a:schemeClr val="accent1"/>
-          </a:fillRef>
-          <a:effectRef idx="2">
-            <a:schemeClr val="accent1"/>
-          </a:effectRef>
-          <a:fontRef idx="minor">
-            <a:schemeClr val="lt1"/>
-          </a:fontRef>
-        </p:style>
-        <p:txBody>
-          <a:bodyPr rtlCol="0" anchor="ctr"/>
-          <a:lstStyle/>
-          <a:p>
-            <a:pPr algn="ctr"/>
-          </a:p>
-        </p:txBody>
-      </p:sp>
-      <p:sp>
-        <p:nvSpPr>
-          <p:cNvPr id="23" name="TextBox 22"/>
-          <p:cNvSpPr txBox="1"/>
-          <p:nvPr/>
-        </p:nvSpPr>
-        <p:spPr>
-          <a:xfrm>
-            <a:off x="365760" y="2423160"/>
-            <a:ext cx="2743200" cy="2286000"/>
+          <p:cNvPr id="27" name="TextBox 26"/>
+          <p:cNvSpPr txBox="1"/>
+          <p:nvPr/>
+        </p:nvSpPr>
+        <p:spPr>
+          <a:xfrm>
+            <a:off x="411480" y="3200400"/>
+            <a:ext cx="9052560" cy="365760"/>
           </a:xfrm>
           <a:prstGeom prst="rect">
             <a:avLst/>
@@ -9637,209 +12024,48 @@
           <a:p>
             <a:pPr algn="l"/>
             <a:r>
-              <a:rPr sz="1000" b="0" i="0">
+              <a:rPr sz="1200" b="1" i="0">
+                <a:solidFill>
+                  <a:srgbClr val="E87722"/>
+                </a:solidFill>
+                <a:latin typeface="Calibri"/>
+              </a:rPr>
+              <a:t>Direct Regulatory Reference</a:t>
+            </a:r>
+          </a:p>
+        </p:txBody>
+      </p:sp>
+      <p:sp>
+        <p:nvSpPr>
+          <p:cNvPr id="28" name="TextBox 27"/>
+          <p:cNvSpPr txBox="1"/>
+          <p:nvPr/>
+        </p:nvSpPr>
+        <p:spPr>
+          <a:xfrm>
+            <a:off x="411480" y="3611880"/>
+            <a:ext cx="9052560" cy="548640"/>
+          </a:xfrm>
+          <a:prstGeom prst="rect">
+            <a:avLst/>
+          </a:prstGeom>
+          <a:noFill/>
+        </p:spPr>
+        <p:txBody>
+          <a:bodyPr wrap="square">
+            <a:spAutoFit/>
+          </a:bodyPr>
+          <a:lstStyle/>
+          <a:p>
+            <a:pPr algn="l"/>
+            <a:r>
+              <a:rPr sz="1050" b="0" i="0">
                 <a:solidFill>
                   <a:srgbClr val="222222"/>
                 </a:solidFill>
                 <a:latin typeface="Calibri"/>
               </a:rPr>
-              <a:t>Privilege amplification confirmed.
-1-SD supply growth → 30 bps spread compression.
-B×ΔlnS = −7.52** (p=0.019): fragility channel
-now significant at 5%.
-VIX and rate controls; HAC s.e.
-STRONGEST evidence</a:t>
-            </a:r>
-          </a:p>
-        </p:txBody>
-      </p:sp>
-      <p:sp>
-        <p:nvSpPr>
-          <p:cNvPr id="24" name="Rectangle 23"/>
-          <p:cNvSpPr/>
-          <p:nvPr/>
-        </p:nvSpPr>
-        <p:spPr>
-          <a:xfrm>
-            <a:off x="3401568" y="960120"/>
-            <a:ext cx="2926080" cy="502920"/>
-          </a:xfrm>
-          <a:prstGeom prst="rect">
-            <a:avLst/>
-          </a:prstGeom>
-          <a:solidFill>
-            <a:srgbClr val="C0392B"/>
-          </a:solidFill>
-          <a:ln>
-            <a:noFill/>
-          </a:ln>
-        </p:spPr>
-        <p:style>
-          <a:lnRef idx="1">
-            <a:schemeClr val="accent1"/>
-          </a:lnRef>
-          <a:fillRef idx="3">
-            <a:schemeClr val="accent1"/>
-          </a:fillRef>
-          <a:effectRef idx="2">
-            <a:schemeClr val="accent1"/>
-          </a:effectRef>
-          <a:fontRef idx="minor">
-            <a:schemeClr val="lt1"/>
-          </a:fontRef>
-        </p:style>
-        <p:txBody>
-          <a:bodyPr rtlCol="0" anchor="ctr"/>
-          <a:lstStyle/>
-          <a:p>
-            <a:pPr algn="ctr"/>
-          </a:p>
-        </p:txBody>
-      </p:sp>
-      <p:sp>
-        <p:nvSpPr>
-          <p:cNvPr id="25" name="TextBox 24"/>
-          <p:cNvSpPr txBox="1"/>
-          <p:nvPr/>
-        </p:nvSpPr>
-        <p:spPr>
-          <a:xfrm>
-            <a:off x="3493008" y="987552"/>
-            <a:ext cx="2743200" cy="411480"/>
-          </a:xfrm>
-          <a:prstGeom prst="rect">
-            <a:avLst/>
-          </a:prstGeom>
-          <a:noFill/>
-        </p:spPr>
-        <p:txBody>
-          <a:bodyPr wrap="square">
-            <a:spAutoFit/>
-          </a:bodyPr>
-          <a:lstStyle/>
-          <a:p>
-            <a:pPr algn="ctr"/>
-            <a:r>
-              <a:rPr sz="1200" b="1" i="0">
-                <a:solidFill>
-                  <a:srgbClr val="FFFFFF"/>
-                </a:solidFill>
-                <a:latin typeface="Calibri"/>
-              </a:rPr>
-              <a:t>2.  Hansen Threshold</a:t>
-            </a:r>
-          </a:p>
-        </p:txBody>
-      </p:sp>
-      <p:sp>
-        <p:nvSpPr>
-          <p:cNvPr id="26" name="Rectangle 25"/>
-          <p:cNvSpPr/>
-          <p:nvPr/>
-        </p:nvSpPr>
-        <p:spPr>
-          <a:xfrm>
-            <a:off x="3401568" y="1481328"/>
-            <a:ext cx="2926080" cy="502920"/>
-          </a:xfrm>
-          <a:prstGeom prst="rect">
-            <a:avLst/>
-          </a:prstGeom>
-          <a:solidFill>
-            <a:srgbClr val="FFF3E0"/>
-          </a:solidFill>
-          <a:ln>
-            <a:noFill/>
-          </a:ln>
-        </p:spPr>
-        <p:style>
-          <a:lnRef idx="1">
-            <a:schemeClr val="accent1"/>
-          </a:lnRef>
-          <a:fillRef idx="3">
-            <a:schemeClr val="accent1"/>
-          </a:fillRef>
-          <a:effectRef idx="2">
-            <a:schemeClr val="accent1"/>
-          </a:effectRef>
-          <a:fontRef idx="minor">
-            <a:schemeClr val="lt1"/>
-          </a:fontRef>
-        </p:style>
-        <p:txBody>
-          <a:bodyPr rtlCol="0" anchor="ctr"/>
-          <a:lstStyle/>
-          <a:p>
-            <a:pPr algn="ctr"/>
-          </a:p>
-        </p:txBody>
-      </p:sp>
-      <p:sp>
-        <p:nvSpPr>
-          <p:cNvPr id="27" name="TextBox 26"/>
-          <p:cNvSpPr txBox="1"/>
-          <p:nvPr/>
-        </p:nvSpPr>
-        <p:spPr>
-          <a:xfrm>
-            <a:off x="3447288" y="1508760"/>
-            <a:ext cx="2834640" cy="411480"/>
-          </a:xfrm>
-          <a:prstGeom prst="rect">
-            <a:avLst/>
-          </a:prstGeom>
-          <a:noFill/>
-        </p:spPr>
-        <p:txBody>
-          <a:bodyPr wrap="square">
-            <a:spAutoFit/>
-          </a:bodyPr>
-          <a:lstStyle/>
-          <a:p>
-            <a:pPr algn="ctr"/>
-            <a:r>
-              <a:rPr sz="1300" b="1" i="0">
-                <a:solidFill>
-                  <a:srgbClr val="C0392B"/>
-                </a:solidFill>
-                <a:latin typeface="Calibri"/>
-              </a:rPr>
-              <a:t>q* = 13%</a:t>
-            </a:r>
-          </a:p>
-        </p:txBody>
-      </p:sp>
-      <p:sp>
-        <p:nvSpPr>
-          <p:cNvPr id="28" name="TextBox 27"/>
-          <p:cNvSpPr txBox="1"/>
-          <p:nvPr/>
-        </p:nvSpPr>
-        <p:spPr>
-          <a:xfrm>
-            <a:off x="3447288" y="2029968"/>
-            <a:ext cx="2834640" cy="292608"/>
-          </a:xfrm>
-          <a:prstGeom prst="rect">
-            <a:avLst/>
-          </a:prstGeom>
-          <a:noFill/>
-        </p:spPr>
-        <p:txBody>
-          <a:bodyPr wrap="square">
-            <a:spAutoFit/>
-          </a:bodyPr>
-          <a:lstStyle/>
-          <a:p>
-            <a:pPr algn="ctr"/>
-            <a:r>
-              <a:rPr sz="950" b="0" i="1">
-                <a:solidFill>
-                  <a:srgbClr val="C0392B"/>
-                </a:solidFill>
-                <a:latin typeface="Calibri"/>
-              </a:rPr>
-              <a:t>Bootstrap CI [3.1%, 14.5%]</a:t>
+              <a:t>Our estimate: require cash/near-cash ≥ 13% of supply outstanding.   Caveat: 90% CI [3.1%, 14.5%] — this is a range, not a precise floor.   Interpretation: anything below 3% is clearly under-reserved; above 14.5% is clearly adequate.</a:t>
             </a:r>
           </a:p>
         </p:txBody>
@@ -9852,362 +12078,7 @@
         </p:nvSpPr>
         <p:spPr>
           <a:xfrm>
-            <a:off x="3401568" y="2359152"/>
-            <a:ext cx="2926080" cy="2423160"/>
-          </a:xfrm>
-          <a:prstGeom prst="rect">
-            <a:avLst/>
-          </a:prstGeom>
-          <a:solidFill>
-            <a:srgbClr val="F2F2F2"/>
-          </a:solidFill>
-          <a:ln>
-            <a:noFill/>
-          </a:ln>
-        </p:spPr>
-        <p:style>
-          <a:lnRef idx="1">
-            <a:schemeClr val="accent1"/>
-          </a:lnRef>
-          <a:fillRef idx="3">
-            <a:schemeClr val="accent1"/>
-          </a:fillRef>
-          <a:effectRef idx="2">
-            <a:schemeClr val="accent1"/>
-          </a:effectRef>
-          <a:fontRef idx="minor">
-            <a:schemeClr val="lt1"/>
-          </a:fontRef>
-        </p:style>
-        <p:txBody>
-          <a:bodyPr rtlCol="0" anchor="ctr"/>
-          <a:lstStyle/>
-          <a:p>
-            <a:pPr algn="ctr"/>
-          </a:p>
-        </p:txBody>
-      </p:sp>
-      <p:sp>
-        <p:nvSpPr>
-          <p:cNvPr id="30" name="TextBox 29"/>
-          <p:cNvSpPr txBox="1"/>
-          <p:nvPr/>
-        </p:nvSpPr>
-        <p:spPr>
-          <a:xfrm>
-            <a:off x="3493008" y="2423160"/>
-            <a:ext cx="2743200" cy="2286000"/>
-          </a:xfrm>
-          <a:prstGeom prst="rect">
-            <a:avLst/>
-          </a:prstGeom>
-          <a:noFill/>
-        </p:spPr>
-        <p:txBody>
-          <a:bodyPr wrap="square">
-            <a:spAutoFit/>
-          </a:bodyPr>
-          <a:lstStyle/>
-          <a:p>
-            <a:pPr algn="l"/>
-            <a:r>
-              <a:rPr sz="1000" b="0" i="0">
-                <a:solidFill>
-                  <a:srgbClr val="222222"/>
-                </a:solidFill>
-                <a:latin typeface="Calibri"/>
-              </a:rPr>
-              <a:t>Threshold identified independently by
-Hansen grid search AND LSTAR (c* = 14.9%).
-Sign flip: β = −2.80 (low) → +1.63 (high).
-p = 0.406 — suggestive, not confirmed.
-N = 51 limits power.</a:t>
-            </a:r>
-          </a:p>
-        </p:txBody>
-      </p:sp>
-      <p:sp>
-        <p:nvSpPr>
-          <p:cNvPr id="31" name="Rectangle 30"/>
-          <p:cNvSpPr/>
-          <p:nvPr/>
-        </p:nvSpPr>
-        <p:spPr>
-          <a:xfrm>
-            <a:off x="6528816" y="960120"/>
-            <a:ext cx="2926080" cy="502920"/>
-          </a:xfrm>
-          <a:prstGeom prst="rect">
-            <a:avLst/>
-          </a:prstGeom>
-          <a:solidFill>
-            <a:srgbClr val="666666"/>
-          </a:solidFill>
-          <a:ln>
-            <a:noFill/>
-          </a:ln>
-        </p:spPr>
-        <p:style>
-          <a:lnRef idx="1">
-            <a:schemeClr val="accent1"/>
-          </a:lnRef>
-          <a:fillRef idx="3">
-            <a:schemeClr val="accent1"/>
-          </a:fillRef>
-          <a:effectRef idx="2">
-            <a:schemeClr val="accent1"/>
-          </a:effectRef>
-          <a:fontRef idx="minor">
-            <a:schemeClr val="lt1"/>
-          </a:fontRef>
-        </p:style>
-        <p:txBody>
-          <a:bodyPr rtlCol="0" anchor="ctr"/>
-          <a:lstStyle/>
-          <a:p>
-            <a:pPr algn="ctr"/>
-          </a:p>
-        </p:txBody>
-      </p:sp>
-      <p:sp>
-        <p:nvSpPr>
-          <p:cNvPr id="32" name="TextBox 31"/>
-          <p:cNvSpPr txBox="1"/>
-          <p:nvPr/>
-        </p:nvSpPr>
-        <p:spPr>
-          <a:xfrm>
-            <a:off x="6620256" y="987552"/>
-            <a:ext cx="2743200" cy="411480"/>
-          </a:xfrm>
-          <a:prstGeom prst="rect">
-            <a:avLst/>
-          </a:prstGeom>
-          <a:noFill/>
-        </p:spPr>
-        <p:txBody>
-          <a:bodyPr wrap="square">
-            <a:spAutoFit/>
-          </a:bodyPr>
-          <a:lstStyle/>
-          <a:p>
-            <a:pPr algn="ctr"/>
-            <a:r>
-              <a:rPr sz="1200" b="1" i="0">
-                <a:solidFill>
-                  <a:srgbClr val="FFFFFF"/>
-                </a:solidFill>
-                <a:latin typeface="Calibri"/>
-              </a:rPr>
-              <a:t>3.  Event Study</a:t>
-            </a:r>
-          </a:p>
-        </p:txBody>
-      </p:sp>
-      <p:sp>
-        <p:nvSpPr>
-          <p:cNvPr id="33" name="Rectangle 32"/>
-          <p:cNvSpPr/>
-          <p:nvPr/>
-        </p:nvSpPr>
-        <p:spPr>
-          <a:xfrm>
-            <a:off x="6528816" y="1481328"/>
-            <a:ext cx="2926080" cy="502920"/>
-          </a:xfrm>
-          <a:prstGeom prst="rect">
-            <a:avLst/>
-          </a:prstGeom>
-          <a:solidFill>
-            <a:srgbClr val="FFF3E0"/>
-          </a:solidFill>
-          <a:ln>
-            <a:noFill/>
-          </a:ln>
-        </p:spPr>
-        <p:style>
-          <a:lnRef idx="1">
-            <a:schemeClr val="accent1"/>
-          </a:lnRef>
-          <a:fillRef idx="3">
-            <a:schemeClr val="accent1"/>
-          </a:fillRef>
-          <a:effectRef idx="2">
-            <a:schemeClr val="accent1"/>
-          </a:effectRef>
-          <a:fontRef idx="minor">
-            <a:schemeClr val="lt1"/>
-          </a:fontRef>
-        </p:style>
-        <p:txBody>
-          <a:bodyPr rtlCol="0" anchor="ctr"/>
-          <a:lstStyle/>
-          <a:p>
-            <a:pPr algn="ctr"/>
-          </a:p>
-        </p:txBody>
-      </p:sp>
-      <p:sp>
-        <p:nvSpPr>
-          <p:cNvPr id="34" name="TextBox 33"/>
-          <p:cNvSpPr txBox="1"/>
-          <p:nvPr/>
-        </p:nvSpPr>
-        <p:spPr>
-          <a:xfrm>
-            <a:off x="6574536" y="1508760"/>
-            <a:ext cx="2834640" cy="411480"/>
-          </a:xfrm>
-          <a:prstGeom prst="rect">
-            <a:avLst/>
-          </a:prstGeom>
-          <a:noFill/>
-        </p:spPr>
-        <p:txBody>
-          <a:bodyPr wrap="square">
-            <a:spAutoFit/>
-          </a:bodyPr>
-          <a:lstStyle/>
-          <a:p>
-            <a:pPr algn="ctr"/>
-            <a:r>
-              <a:rPr sz="1300" b="1" i="0">
-                <a:solidFill>
-                  <a:srgbClr val="666666"/>
-                </a:solidFill>
-                <a:latin typeface="Calibri"/>
-              </a:rPr>
-              <a:t>All CARs insignificant</a:t>
-            </a:r>
-          </a:p>
-        </p:txBody>
-      </p:sp>
-      <p:sp>
-        <p:nvSpPr>
-          <p:cNvPr id="35" name="TextBox 34"/>
-          <p:cNvSpPr txBox="1"/>
-          <p:nvPr/>
-        </p:nvSpPr>
-        <p:spPr>
-          <a:xfrm>
-            <a:off x="6574536" y="2029968"/>
-            <a:ext cx="2834640" cy="292608"/>
-          </a:xfrm>
-          <a:prstGeom prst="rect">
-            <a:avLst/>
-          </a:prstGeom>
-          <a:noFill/>
-        </p:spPr>
-        <p:txBody>
-          <a:bodyPr wrap="square">
-            <a:spAutoFit/>
-          </a:bodyPr>
-          <a:lstStyle/>
-          <a:p>
-            <a:pPr algn="ctr"/>
-            <a:r>
-              <a:rPr sz="950" b="0" i="1">
-                <a:solidFill>
-                  <a:srgbClr val="666666"/>
-                </a:solidFill>
-                <a:latin typeface="Calibri"/>
-              </a:rPr>
-              <a:t>−15 to −2 bps</a:t>
-            </a:r>
-          </a:p>
-        </p:txBody>
-      </p:sp>
-      <p:sp>
-        <p:nvSpPr>
-          <p:cNvPr id="36" name="Rectangle 35"/>
-          <p:cNvSpPr/>
-          <p:nvPr/>
-        </p:nvSpPr>
-        <p:spPr>
-          <a:xfrm>
-            <a:off x="6528816" y="2359152"/>
-            <a:ext cx="2926080" cy="2423160"/>
-          </a:xfrm>
-          <a:prstGeom prst="rect">
-            <a:avLst/>
-          </a:prstGeom>
-          <a:solidFill>
-            <a:srgbClr val="F2F2F2"/>
-          </a:solidFill>
-          <a:ln>
-            <a:noFill/>
-          </a:ln>
-        </p:spPr>
-        <p:style>
-          <a:lnRef idx="1">
-            <a:schemeClr val="accent1"/>
-          </a:lnRef>
-          <a:fillRef idx="3">
-            <a:schemeClr val="accent1"/>
-          </a:fillRef>
-          <a:effectRef idx="2">
-            <a:schemeClr val="accent1"/>
-          </a:effectRef>
-          <a:fontRef idx="minor">
-            <a:schemeClr val="lt1"/>
-          </a:fontRef>
-        </p:style>
-        <p:txBody>
-          <a:bodyPr rtlCol="0" anchor="ctr"/>
-          <a:lstStyle/>
-          <a:p>
-            <a:pPr algn="ctr"/>
-          </a:p>
-        </p:txBody>
-      </p:sp>
-      <p:sp>
-        <p:nvSpPr>
-          <p:cNvPr id="37" name="TextBox 36"/>
-          <p:cNvSpPr txBox="1"/>
-          <p:nvPr/>
-        </p:nvSpPr>
-        <p:spPr>
-          <a:xfrm>
-            <a:off x="6620256" y="2423160"/>
-            <a:ext cx="2743200" cy="2286000"/>
-          </a:xfrm>
-          <a:prstGeom prst="rect">
-            <a:avLst/>
-          </a:prstGeom>
-          <a:noFill/>
-        </p:spPr>
-        <p:txBody>
-          <a:bodyPr wrap="square">
-            <a:spAutoFit/>
-          </a:bodyPr>
-          <a:lstStyle/>
-          <a:p>
-            <a:pPr algn="l"/>
-            <a:r>
-              <a:rPr sz="1000" b="0" i="0">
-                <a:solidFill>
-                  <a:srgbClr val="222222"/>
-                </a:solidFill>
-                <a:latin typeface="Calibri"/>
-              </a:rPr>
-              <a:t>Directionally consistent.
-FOMC contamination in 2 of 3 events.
-SVB = flight-to-safety, not mechanism.
-LUNA: 14.0 bps (corrected spread).
-Qualitative context only.</a:t>
-            </a:r>
-          </a:p>
-        </p:txBody>
-      </p:sp>
-      <p:sp>
-        <p:nvSpPr>
-          <p:cNvPr id="38" name="Rectangle 37"/>
-          <p:cNvSpPr/>
-          <p:nvPr/>
-        </p:nvSpPr>
-        <p:spPr>
-          <a:xfrm>
-            <a:off x="274320" y="4937760"/>
+            <a:off x="274320" y="4370832"/>
             <a:ext cx="9326880" cy="777240"/>
           </a:xfrm>
           <a:prstGeom prst="rect">
@@ -10244,13 +12115,13 @@
       </p:sp>
       <p:sp>
         <p:nvSpPr>
-          <p:cNvPr id="39" name="TextBox 38"/>
-          <p:cNvSpPr txBox="1"/>
-          <p:nvPr/>
-        </p:nvSpPr>
-        <p:spPr>
-          <a:xfrm>
-            <a:off x="457200" y="4983480"/>
+          <p:cNvPr id="30" name="TextBox 29"/>
+          <p:cNvSpPr txBox="1"/>
+          <p:nvPr/>
+        </p:nvSpPr>
+        <p:spPr>
+          <a:xfrm>
+            <a:off x="457200" y="4416552"/>
             <a:ext cx="9052560" cy="685800"/>
           </a:xfrm>
           <a:prstGeom prst="rect">
@@ -10264,15 +12135,16 @@
           </a:bodyPr>
           <a:lstStyle/>
           <a:p>
-            <a:pPr algn="ctr"/>
-            <a:r>
-              <a:rPr sz="1200" b="1" i="1">
-                <a:solidFill>
-                  <a:srgbClr val="E87722"/>
-                </a:solidFill>
-                <a:latin typeface="Calibri"/>
-              </a:rPr>
-              <a:t>"All three methods point to the same conclusion: stablecoins amplify the exorbitant privilege, with a fragility threshold near 13% liquid buffer."</a:t>
+            <a:pPr algn="l"/>
+            <a:r>
+              <a:rPr sz="1100" b="1" i="0">
+                <a:solidFill>
+                  <a:srgbClr val="FFFFFF"/>
+                </a:solidFill>
+                <a:latin typeface="Calibri"/>
+              </a:rPr>
+              <a:t>First paper to provide an empirical threshold directly relevant to reserve legislation.
+As attestation data accumulates, this estimate will sharpen.</a:t>
             </a:r>
           </a:p>
         </p:txBody>
@@ -10411,7 +12283,7 @@
                 </a:solidFill>
                 <a:latin typeface="Calibri"/>
               </a:rPr>
-              <a:t>Limitations &amp; Next Steps</a:t>
+              <a:t>Summary: Three Convergent Lines of Evidence</a:t>
             </a:r>
           </a:p>
         </p:txBody>
@@ -10446,7 +12318,7 @@
                 </a:solidFill>
                 <a:latin typeface="Calibri"/>
               </a:rPr>
-              <a:t>Honest accounting of constraints and the research agenda ahead</a:t>
+              <a:t>Each method is individually limited; together they point to the same conclusion</a:t>
             </a:r>
           </a:p>
         </p:txBody>
@@ -10481,7 +12353,7 @@
                 </a:solidFill>
                 <a:latin typeface="Calibri"/>
               </a:rPr>
-              <a:t>Slide 15 / 16</a:t>
+              <a:t>Slide 15 / 17</a:t>
             </a:r>
           </a:p>
         </p:txBody>
@@ -10883,13 +12755,13 @@
         <p:spPr>
           <a:xfrm>
             <a:off x="274320" y="960120"/>
-            <a:ext cx="4297680" cy="4114800"/>
+            <a:ext cx="2926080" cy="502920"/>
           </a:xfrm>
           <a:prstGeom prst="rect">
             <a:avLst/>
           </a:prstGeom>
           <a:solidFill>
-            <a:srgbClr val="FFEDED"/>
+            <a:srgbClr val="003087"/>
           </a:solidFill>
           <a:ln>
             <a:noFill/>
@@ -10925,29 +12797,29 @@
         </p:nvSpPr>
         <p:spPr>
           <a:xfrm>
-            <a:off x="411480" y="1005840"/>
-            <a:ext cx="4023360" cy="411480"/>
-          </a:xfrm>
-          <a:prstGeom prst="rect">
-            <a:avLst/>
-          </a:prstGeom>
-          <a:noFill/>
-        </p:spPr>
-        <p:txBody>
-          <a:bodyPr wrap="square">
-            <a:spAutoFit/>
-          </a:bodyPr>
-          <a:lstStyle/>
-          <a:p>
-            <a:pPr algn="l"/>
-            <a:r>
-              <a:rPr sz="1300" b="1" i="0">
-                <a:solidFill>
-                  <a:srgbClr val="C0392B"/>
-                </a:solidFill>
-                <a:latin typeface="Calibri"/>
-              </a:rPr>
-              <a:t>Limitations</a:t>
+            <a:off x="365760" y="987552"/>
+            <a:ext cx="2743200" cy="411480"/>
+          </a:xfrm>
+          <a:prstGeom prst="rect">
+            <a:avLst/>
+          </a:prstGeom>
+          <a:noFill/>
+        </p:spPr>
+        <p:txBody>
+          <a:bodyPr wrap="square">
+            <a:spAutoFit/>
+          </a:bodyPr>
+          <a:lstStyle/>
+          <a:p>
+            <a:pPr algn="ctr"/>
+            <a:r>
+              <a:rPr sz="1200" b="1" i="0">
+                <a:solidFill>
+                  <a:srgbClr val="FFFFFF"/>
+                </a:solidFill>
+                <a:latin typeface="Calibri"/>
+              </a:rPr>
+              <a:t>1.  Regression</a:t>
             </a:r>
           </a:p>
         </p:txBody>
@@ -10960,8 +12832,204 @@
         </p:nvSpPr>
         <p:spPr>
           <a:xfrm>
-            <a:off x="365760" y="1508760"/>
-            <a:ext cx="201168" cy="201168"/>
+            <a:off x="274320" y="1481328"/>
+            <a:ext cx="2926080" cy="502920"/>
+          </a:xfrm>
+          <a:prstGeom prst="rect">
+            <a:avLst/>
+          </a:prstGeom>
+          <a:solidFill>
+            <a:srgbClr val="FFF3E0"/>
+          </a:solidFill>
+          <a:ln>
+            <a:noFill/>
+          </a:ln>
+        </p:spPr>
+        <p:style>
+          <a:lnRef idx="1">
+            <a:schemeClr val="accent1"/>
+          </a:lnRef>
+          <a:fillRef idx="3">
+            <a:schemeClr val="accent1"/>
+          </a:fillRef>
+          <a:effectRef idx="2">
+            <a:schemeClr val="accent1"/>
+          </a:effectRef>
+          <a:fontRef idx="minor">
+            <a:schemeClr val="lt1"/>
+          </a:fontRef>
+        </p:style>
+        <p:txBody>
+          <a:bodyPr rtlCol="0" anchor="ctr"/>
+          <a:lstStyle/>
+          <a:p>
+            <a:pPr algn="ctr"/>
+          </a:p>
+        </p:txBody>
+      </p:sp>
+      <p:sp>
+        <p:nvSpPr>
+          <p:cNvPr id="20" name="TextBox 19"/>
+          <p:cNvSpPr txBox="1"/>
+          <p:nvPr/>
+        </p:nvSpPr>
+        <p:spPr>
+          <a:xfrm>
+            <a:off x="320040" y="1508760"/>
+            <a:ext cx="2834640" cy="411480"/>
+          </a:xfrm>
+          <a:prstGeom prst="rect">
+            <a:avLst/>
+          </a:prstGeom>
+          <a:noFill/>
+        </p:spPr>
+        <p:txBody>
+          <a:bodyPr wrap="square">
+            <a:spAutoFit/>
+          </a:bodyPr>
+          <a:lstStyle/>
+          <a:p>
+            <a:pPr algn="ctr"/>
+            <a:r>
+              <a:rPr sz="1300" b="1" i="0">
+                <a:solidFill>
+                  <a:srgbClr val="003087"/>
+                </a:solidFill>
+                <a:latin typeface="Calibri"/>
+              </a:rPr>
+              <a:t>β₁ = −7.57***</a:t>
+            </a:r>
+          </a:p>
+        </p:txBody>
+      </p:sp>
+      <p:sp>
+        <p:nvSpPr>
+          <p:cNvPr id="21" name="TextBox 20"/>
+          <p:cNvSpPr txBox="1"/>
+          <p:nvPr/>
+        </p:nvSpPr>
+        <p:spPr>
+          <a:xfrm>
+            <a:off x="320040" y="2029968"/>
+            <a:ext cx="2834640" cy="292608"/>
+          </a:xfrm>
+          <a:prstGeom prst="rect">
+            <a:avLst/>
+          </a:prstGeom>
+          <a:noFill/>
+        </p:spPr>
+        <p:txBody>
+          <a:bodyPr wrap="square">
+            <a:spAutoFit/>
+          </a:bodyPr>
+          <a:lstStyle/>
+          <a:p>
+            <a:pPr algn="ctr"/>
+            <a:r>
+              <a:rPr sz="950" b="0" i="1">
+                <a:solidFill>
+                  <a:srgbClr val="003087"/>
+                </a:solidFill>
+                <a:latin typeface="Calibri"/>
+              </a:rPr>
+              <a:t>p = 0.004  (buffer-ratio spec)</a:t>
+            </a:r>
+          </a:p>
+        </p:txBody>
+      </p:sp>
+      <p:sp>
+        <p:nvSpPr>
+          <p:cNvPr id="22" name="Rectangle 21"/>
+          <p:cNvSpPr/>
+          <p:nvPr/>
+        </p:nvSpPr>
+        <p:spPr>
+          <a:xfrm>
+            <a:off x="274320" y="2359152"/>
+            <a:ext cx="2926080" cy="2423160"/>
+          </a:xfrm>
+          <a:prstGeom prst="rect">
+            <a:avLst/>
+          </a:prstGeom>
+          <a:solidFill>
+            <a:srgbClr val="F2F2F2"/>
+          </a:solidFill>
+          <a:ln>
+            <a:noFill/>
+          </a:ln>
+        </p:spPr>
+        <p:style>
+          <a:lnRef idx="1">
+            <a:schemeClr val="accent1"/>
+          </a:lnRef>
+          <a:fillRef idx="3">
+            <a:schemeClr val="accent1"/>
+          </a:fillRef>
+          <a:effectRef idx="2">
+            <a:schemeClr val="accent1"/>
+          </a:effectRef>
+          <a:fontRef idx="minor">
+            <a:schemeClr val="lt1"/>
+          </a:fontRef>
+        </p:style>
+        <p:txBody>
+          <a:bodyPr rtlCol="0" anchor="ctr"/>
+          <a:lstStyle/>
+          <a:p>
+            <a:pPr algn="ctr"/>
+          </a:p>
+        </p:txBody>
+      </p:sp>
+      <p:sp>
+        <p:nvSpPr>
+          <p:cNvPr id="23" name="TextBox 22"/>
+          <p:cNvSpPr txBox="1"/>
+          <p:nvPr/>
+        </p:nvSpPr>
+        <p:spPr>
+          <a:xfrm>
+            <a:off x="365760" y="2423160"/>
+            <a:ext cx="2743200" cy="2286000"/>
+          </a:xfrm>
+          <a:prstGeom prst="rect">
+            <a:avLst/>
+          </a:prstGeom>
+          <a:noFill/>
+        </p:spPr>
+        <p:txBody>
+          <a:bodyPr wrap="square">
+            <a:spAutoFit/>
+          </a:bodyPr>
+          <a:lstStyle/>
+          <a:p>
+            <a:pPr algn="l"/>
+            <a:r>
+              <a:rPr sz="1000" b="0" i="0">
+                <a:solidFill>
+                  <a:srgbClr val="222222"/>
+                </a:solidFill>
+                <a:latin typeface="Calibri"/>
+              </a:rPr>
+              <a:t>Privilege amplification confirmed.
+1-SD supply growth → 30 bps spread compression.
+B×ΔlnS = −7.52** (p=0.019): fragility channel
+now significant at 5%.
+VIX and rate controls; HAC s.e.
+STRONGEST evidence</a:t>
+            </a:r>
+          </a:p>
+        </p:txBody>
+      </p:sp>
+      <p:sp>
+        <p:nvSpPr>
+          <p:cNvPr id="24" name="Rectangle 23"/>
+          <p:cNvSpPr/>
+          <p:nvPr/>
+        </p:nvSpPr>
+        <p:spPr>
+          <a:xfrm>
+            <a:off x="3401568" y="960120"/>
+            <a:ext cx="2926080" cy="502920"/>
           </a:xfrm>
           <a:prstGeom prst="rect">
             <a:avLst/>
@@ -10997,56 +13065,55 @@
       </p:sp>
       <p:sp>
         <p:nvSpPr>
-          <p:cNvPr id="20" name="TextBox 19"/>
-          <p:cNvSpPr txBox="1"/>
-          <p:nvPr/>
-        </p:nvSpPr>
-        <p:spPr>
-          <a:xfrm>
-            <a:off x="640080" y="1472184"/>
-            <a:ext cx="3749039" cy="594360"/>
-          </a:xfrm>
-          <a:prstGeom prst="rect">
-            <a:avLst/>
-          </a:prstGeom>
-          <a:noFill/>
-        </p:spPr>
-        <p:txBody>
-          <a:bodyPr wrap="square">
-            <a:spAutoFit/>
-          </a:bodyPr>
-          <a:lstStyle/>
-          <a:p>
-            <a:pPr algn="l"/>
-            <a:r>
-              <a:rPr sz="1000" b="0" i="0">
-                <a:solidFill>
-                  <a:srgbClr val="222222"/>
-                </a:solidFill>
-                <a:latin typeface="Calibri"/>
-              </a:rPr>
-              <a:t>N = 51 months limits statistical power
-for threshold confirmation</a:t>
-            </a:r>
-          </a:p>
-        </p:txBody>
-      </p:sp>
-      <p:sp>
-        <p:nvSpPr>
-          <p:cNvPr id="21" name="Rectangle 20"/>
+          <p:cNvPr id="25" name="TextBox 24"/>
+          <p:cNvSpPr txBox="1"/>
+          <p:nvPr/>
+        </p:nvSpPr>
+        <p:spPr>
+          <a:xfrm>
+            <a:off x="3493008" y="987552"/>
+            <a:ext cx="2743200" cy="411480"/>
+          </a:xfrm>
+          <a:prstGeom prst="rect">
+            <a:avLst/>
+          </a:prstGeom>
+          <a:noFill/>
+        </p:spPr>
+        <p:txBody>
+          <a:bodyPr wrap="square">
+            <a:spAutoFit/>
+          </a:bodyPr>
+          <a:lstStyle/>
+          <a:p>
+            <a:pPr algn="ctr"/>
+            <a:r>
+              <a:rPr sz="1200" b="1" i="0">
+                <a:solidFill>
+                  <a:srgbClr val="FFFFFF"/>
+                </a:solidFill>
+                <a:latin typeface="Calibri"/>
+              </a:rPr>
+              <a:t>2.  Hansen Threshold</a:t>
+            </a:r>
+          </a:p>
+        </p:txBody>
+      </p:sp>
+      <p:sp>
+        <p:nvSpPr>
+          <p:cNvPr id="26" name="Rectangle 25"/>
           <p:cNvSpPr/>
           <p:nvPr/>
         </p:nvSpPr>
         <p:spPr>
           <a:xfrm>
-            <a:off x="365760" y="2148840"/>
-            <a:ext cx="201168" cy="201168"/>
+            <a:off x="3401568" y="1481328"/>
+            <a:ext cx="2926080" cy="502920"/>
           </a:xfrm>
           <a:prstGeom prst="rect">
             <a:avLst/>
           </a:prstGeom>
           <a:solidFill>
-            <a:srgbClr val="C0392B"/>
+            <a:srgbClr val="FFF3E0"/>
           </a:solidFill>
           <a:ln>
             <a:noFill/>
@@ -11076,56 +13143,90 @@
       </p:sp>
       <p:sp>
         <p:nvSpPr>
-          <p:cNvPr id="22" name="TextBox 21"/>
-          <p:cNvSpPr txBox="1"/>
-          <p:nvPr/>
-        </p:nvSpPr>
-        <p:spPr>
-          <a:xfrm>
-            <a:off x="640080" y="2112264"/>
-            <a:ext cx="3749039" cy="594360"/>
-          </a:xfrm>
-          <a:prstGeom prst="rect">
-            <a:avLst/>
-          </a:prstGeom>
-          <a:noFill/>
-        </p:spPr>
-        <p:txBody>
-          <a:bodyPr wrap="square">
-            <a:spAutoFit/>
-          </a:bodyPr>
-          <a:lstStyle/>
-          <a:p>
-            <a:pPr algn="l"/>
-            <a:r>
-              <a:rPr sz="1000" b="0" i="0">
-                <a:solidFill>
-                  <a:srgbClr val="222222"/>
-                </a:solidFill>
-                <a:latin typeface="Calibri"/>
-              </a:rPr>
-              <a:t>Liquid buffer L forward-filled for 13 months
-(Tether quarterly attestation lag)</a:t>
-            </a:r>
-          </a:p>
-        </p:txBody>
-      </p:sp>
-      <p:sp>
-        <p:nvSpPr>
-          <p:cNvPr id="23" name="Rectangle 22"/>
+          <p:cNvPr id="27" name="TextBox 26"/>
+          <p:cNvSpPr txBox="1"/>
+          <p:nvPr/>
+        </p:nvSpPr>
+        <p:spPr>
+          <a:xfrm>
+            <a:off x="3447288" y="1508760"/>
+            <a:ext cx="2834640" cy="411480"/>
+          </a:xfrm>
+          <a:prstGeom prst="rect">
+            <a:avLst/>
+          </a:prstGeom>
+          <a:noFill/>
+        </p:spPr>
+        <p:txBody>
+          <a:bodyPr wrap="square">
+            <a:spAutoFit/>
+          </a:bodyPr>
+          <a:lstStyle/>
+          <a:p>
+            <a:pPr algn="ctr"/>
+            <a:r>
+              <a:rPr sz="1300" b="1" i="0">
+                <a:solidFill>
+                  <a:srgbClr val="C0392B"/>
+                </a:solidFill>
+                <a:latin typeface="Calibri"/>
+              </a:rPr>
+              <a:t>q* = 13%</a:t>
+            </a:r>
+          </a:p>
+        </p:txBody>
+      </p:sp>
+      <p:sp>
+        <p:nvSpPr>
+          <p:cNvPr id="28" name="TextBox 27"/>
+          <p:cNvSpPr txBox="1"/>
+          <p:nvPr/>
+        </p:nvSpPr>
+        <p:spPr>
+          <a:xfrm>
+            <a:off x="3447288" y="2029968"/>
+            <a:ext cx="2834640" cy="292608"/>
+          </a:xfrm>
+          <a:prstGeom prst="rect">
+            <a:avLst/>
+          </a:prstGeom>
+          <a:noFill/>
+        </p:spPr>
+        <p:txBody>
+          <a:bodyPr wrap="square">
+            <a:spAutoFit/>
+          </a:bodyPr>
+          <a:lstStyle/>
+          <a:p>
+            <a:pPr algn="ctr"/>
+            <a:r>
+              <a:rPr sz="950" b="0" i="1">
+                <a:solidFill>
+                  <a:srgbClr val="C0392B"/>
+                </a:solidFill>
+                <a:latin typeface="Calibri"/>
+              </a:rPr>
+              <a:t>Bootstrap CI [3.1%, 14.5%]</a:t>
+            </a:r>
+          </a:p>
+        </p:txBody>
+      </p:sp>
+      <p:sp>
+        <p:nvSpPr>
+          <p:cNvPr id="29" name="Rectangle 28"/>
           <p:cNvSpPr/>
           <p:nvPr/>
         </p:nvSpPr>
         <p:spPr>
           <a:xfrm>
-            <a:off x="365760" y="2788920"/>
-            <a:ext cx="201168" cy="201168"/>
+            <a:off x="3401568" y="2359152"/>
+            <a:ext cx="2926080" cy="2423160"/>
           </a:xfrm>
           <a:prstGeom prst="rect">
             <a:avLst/>
           </a:prstGeom>
           <a:solidFill>
-            <a:srgbClr val="C0392B"/>
+            <a:srgbClr val="F2F2F2"/>
           </a:solidFill>
           <a:ln>
             <a:noFill/>
@@ -11155,14 +13256,14 @@
       </p:sp>
       <p:sp>
         <p:nvSpPr>
-          <p:cNvPr id="24" name="TextBox 23"/>
-          <p:cNvSpPr txBox="1"/>
-          <p:nvPr/>
-        </p:nvSpPr>
-        <p:spPr>
-          <a:xfrm>
-            <a:off x="640080" y="2752344"/>
-            <a:ext cx="3749039" cy="594360"/>
+          <p:cNvPr id="30" name="TextBox 29"/>
+          <p:cNvSpPr txBox="1"/>
+          <p:nvPr/>
+        </p:nvSpPr>
+        <p:spPr>
+          <a:xfrm>
+            <a:off x="3493008" y="2423160"/>
+            <a:ext cx="2743200" cy="2286000"/>
           </a:xfrm>
           <a:prstGeom prst="rect">
             <a:avLst/>
@@ -11183,28 +13284,31 @@
                 </a:solidFill>
                 <a:latin typeface="Calibri"/>
               </a:rPr>
-              <a:t>Endogeneity not fully resolved
-(Granger test addresses but doesn't solve)</a:t>
-            </a:r>
-          </a:p>
-        </p:txBody>
-      </p:sp>
-      <p:sp>
-        <p:nvSpPr>
-          <p:cNvPr id="25" name="Rectangle 24"/>
+              <a:t>Threshold identified independently by
+Hansen grid search AND LSTAR (c* = 14.9%).
+Sign flip: β = −2.80 (low) → +1.63 (high).
+p = 0.406 — suggestive, not confirmed.
+N = 51 limits power.</a:t>
+            </a:r>
+          </a:p>
+        </p:txBody>
+      </p:sp>
+      <p:sp>
+        <p:nvSpPr>
+          <p:cNvPr id="31" name="Rectangle 30"/>
           <p:cNvSpPr/>
           <p:nvPr/>
         </p:nvSpPr>
         <p:spPr>
           <a:xfrm>
-            <a:off x="365760" y="3429000"/>
-            <a:ext cx="201168" cy="201168"/>
+            <a:off x="6528816" y="960120"/>
+            <a:ext cx="2926080" cy="502920"/>
           </a:xfrm>
           <a:prstGeom prst="rect">
             <a:avLst/>
           </a:prstGeom>
           <a:solidFill>
-            <a:srgbClr val="C0392B"/>
+            <a:srgbClr val="666666"/>
           </a:solidFill>
           <a:ln>
             <a:noFill/>
@@ -11234,56 +13338,55 @@
       </p:sp>
       <p:sp>
         <p:nvSpPr>
-          <p:cNvPr id="26" name="TextBox 25"/>
-          <p:cNvSpPr txBox="1"/>
-          <p:nvPr/>
-        </p:nvSpPr>
-        <p:spPr>
-          <a:xfrm>
-            <a:off x="640080" y="3392424"/>
-            <a:ext cx="3749039" cy="594360"/>
-          </a:xfrm>
-          <a:prstGeom prst="rect">
-            <a:avLst/>
-          </a:prstGeom>
-          <a:noFill/>
-        </p:spPr>
-        <p:txBody>
-          <a:bodyPr wrap="square">
-            <a:spAutoFit/>
-          </a:bodyPr>
-          <a:lstStyle/>
-          <a:p>
-            <a:pPr algn="l"/>
-            <a:r>
-              <a:rPr sz="1000" b="0" i="0">
-                <a:solidFill>
-                  <a:srgbClr val="222222"/>
-                </a:solidFill>
-                <a:latin typeface="Calibri"/>
-              </a:rPr>
-              <a:t>Only 3 stress events;
-FOMC contamination in 2 of 3</a:t>
-            </a:r>
-          </a:p>
-        </p:txBody>
-      </p:sp>
-      <p:sp>
-        <p:nvSpPr>
-          <p:cNvPr id="27" name="Rectangle 26"/>
+          <p:cNvPr id="32" name="TextBox 31"/>
+          <p:cNvSpPr txBox="1"/>
+          <p:nvPr/>
+        </p:nvSpPr>
+        <p:spPr>
+          <a:xfrm>
+            <a:off x="6620256" y="987552"/>
+            <a:ext cx="2743200" cy="411480"/>
+          </a:xfrm>
+          <a:prstGeom prst="rect">
+            <a:avLst/>
+          </a:prstGeom>
+          <a:noFill/>
+        </p:spPr>
+        <p:txBody>
+          <a:bodyPr wrap="square">
+            <a:spAutoFit/>
+          </a:bodyPr>
+          <a:lstStyle/>
+          <a:p>
+            <a:pPr algn="ctr"/>
+            <a:r>
+              <a:rPr sz="1200" b="1" i="0">
+                <a:solidFill>
+                  <a:srgbClr val="FFFFFF"/>
+                </a:solidFill>
+                <a:latin typeface="Calibri"/>
+              </a:rPr>
+              <a:t>3.  Event Study</a:t>
+            </a:r>
+          </a:p>
+        </p:txBody>
+      </p:sp>
+      <p:sp>
+        <p:nvSpPr>
+          <p:cNvPr id="33" name="Rectangle 32"/>
           <p:cNvSpPr/>
           <p:nvPr/>
         </p:nvSpPr>
         <p:spPr>
           <a:xfrm>
-            <a:off x="365760" y="4069080"/>
-            <a:ext cx="201168" cy="201168"/>
+            <a:off x="6528816" y="1481328"/>
+            <a:ext cx="2926080" cy="502920"/>
           </a:xfrm>
           <a:prstGeom prst="rect">
             <a:avLst/>
           </a:prstGeom>
           <a:solidFill>
-            <a:srgbClr val="C0392B"/>
+            <a:srgbClr val="FFF3E0"/>
           </a:solidFill>
           <a:ln>
             <a:noFill/>
@@ -11313,56 +13416,90 @@
       </p:sp>
       <p:sp>
         <p:nvSpPr>
-          <p:cNvPr id="28" name="TextBox 27"/>
-          <p:cNvSpPr txBox="1"/>
-          <p:nvPr/>
-        </p:nvSpPr>
-        <p:spPr>
-          <a:xfrm>
-            <a:off x="640080" y="4032504"/>
-            <a:ext cx="3749039" cy="594360"/>
-          </a:xfrm>
-          <a:prstGeom prst="rect">
-            <a:avLst/>
-          </a:prstGeom>
-          <a:noFill/>
-        </p:spPr>
-        <p:txBody>
-          <a:bodyPr wrap="square">
-            <a:spAutoFit/>
-          </a:bodyPr>
-          <a:lstStyle/>
-          <a:p>
-            <a:pPr algn="l"/>
-            <a:r>
-              <a:rPr sz="1000" b="0" i="0">
-                <a:solidFill>
-                  <a:srgbClr val="222222"/>
-                </a:solidFill>
-                <a:latin typeface="Calibri"/>
-              </a:rPr>
-              <a:t>Sample covers 2020–2024 only;
-may not generalize to other regimes</a:t>
-            </a:r>
-          </a:p>
-        </p:txBody>
-      </p:sp>
-      <p:sp>
-        <p:nvSpPr>
-          <p:cNvPr id="29" name="Rectangle 28"/>
+          <p:cNvPr id="34" name="TextBox 33"/>
+          <p:cNvSpPr txBox="1"/>
+          <p:nvPr/>
+        </p:nvSpPr>
+        <p:spPr>
+          <a:xfrm>
+            <a:off x="6574536" y="1508760"/>
+            <a:ext cx="2834640" cy="411480"/>
+          </a:xfrm>
+          <a:prstGeom prst="rect">
+            <a:avLst/>
+          </a:prstGeom>
+          <a:noFill/>
+        </p:spPr>
+        <p:txBody>
+          <a:bodyPr wrap="square">
+            <a:spAutoFit/>
+          </a:bodyPr>
+          <a:lstStyle/>
+          <a:p>
+            <a:pPr algn="ctr"/>
+            <a:r>
+              <a:rPr sz="1300" b="1" i="0">
+                <a:solidFill>
+                  <a:srgbClr val="666666"/>
+                </a:solidFill>
+                <a:latin typeface="Calibri"/>
+              </a:rPr>
+              <a:t>All CARs insignificant</a:t>
+            </a:r>
+          </a:p>
+        </p:txBody>
+      </p:sp>
+      <p:sp>
+        <p:nvSpPr>
+          <p:cNvPr id="35" name="TextBox 34"/>
+          <p:cNvSpPr txBox="1"/>
+          <p:nvPr/>
+        </p:nvSpPr>
+        <p:spPr>
+          <a:xfrm>
+            <a:off x="6574536" y="2029968"/>
+            <a:ext cx="2834640" cy="292608"/>
+          </a:xfrm>
+          <a:prstGeom prst="rect">
+            <a:avLst/>
+          </a:prstGeom>
+          <a:noFill/>
+        </p:spPr>
+        <p:txBody>
+          <a:bodyPr wrap="square">
+            <a:spAutoFit/>
+          </a:bodyPr>
+          <a:lstStyle/>
+          <a:p>
+            <a:pPr algn="ctr"/>
+            <a:r>
+              <a:rPr sz="950" b="0" i="1">
+                <a:solidFill>
+                  <a:srgbClr val="666666"/>
+                </a:solidFill>
+                <a:latin typeface="Calibri"/>
+              </a:rPr>
+              <a:t>−15 to −2 bps</a:t>
+            </a:r>
+          </a:p>
+        </p:txBody>
+      </p:sp>
+      <p:sp>
+        <p:nvSpPr>
+          <p:cNvPr id="36" name="Rectangle 35"/>
           <p:cNvSpPr/>
           <p:nvPr/>
         </p:nvSpPr>
         <p:spPr>
           <a:xfrm>
-            <a:off x="4754880" y="960120"/>
-            <a:ext cx="4663440" cy="4114800"/>
+            <a:off x="6528816" y="2359152"/>
+            <a:ext cx="2926080" cy="2423160"/>
           </a:xfrm>
           <a:prstGeom prst="rect">
             <a:avLst/>
           </a:prstGeom>
           <a:solidFill>
-            <a:srgbClr val="E8F5E9"/>
+            <a:srgbClr val="F2F2F2"/>
           </a:solidFill>
           <a:ln>
             <a:noFill/>
@@ -11392,14 +13529,14 @@
       </p:sp>
       <p:sp>
         <p:nvSpPr>
-          <p:cNvPr id="30" name="TextBox 29"/>
-          <p:cNvSpPr txBox="1"/>
-          <p:nvPr/>
-        </p:nvSpPr>
-        <p:spPr>
-          <a:xfrm>
-            <a:off x="4892040" y="1005840"/>
-            <a:ext cx="4389120" cy="411480"/>
+          <p:cNvPr id="37" name="TextBox 36"/>
+          <p:cNvSpPr txBox="1"/>
+          <p:nvPr/>
+        </p:nvSpPr>
+        <p:spPr>
+          <a:xfrm>
+            <a:off x="6620256" y="2423160"/>
+            <a:ext cx="2743200" cy="2286000"/>
           </a:xfrm>
           <a:prstGeom prst="rect">
             <a:avLst/>
@@ -11414,592 +13551,31 @@
           <a:p>
             <a:pPr algn="l"/>
             <a:r>
-              <a:rPr sz="1300" b="1" i="0">
-                <a:solidFill>
-                  <a:srgbClr val="1A7A4A"/>
-                </a:solidFill>
-                <a:latin typeface="Calibri"/>
-              </a:rPr>
-              <a:t>Next Steps</a:t>
-            </a:r>
-          </a:p>
-        </p:txBody>
-      </p:sp>
-      <p:sp>
-        <p:nvSpPr>
-          <p:cNvPr id="31" name="Rectangle 30"/>
+              <a:rPr sz="1000" b="0" i="0">
+                <a:solidFill>
+                  <a:srgbClr val="222222"/>
+                </a:solidFill>
+                <a:latin typeface="Calibri"/>
+              </a:rPr>
+              <a:t>Directionally consistent.
+FOMC contamination in 2 of 3 events.
+SVB = flight-to-safety, not mechanism.
+LUNA: 14.0 bps (corrected spread).
+Qualitative context only.</a:t>
+            </a:r>
+          </a:p>
+        </p:txBody>
+      </p:sp>
+      <p:sp>
+        <p:nvSpPr>
+          <p:cNvPr id="38" name="Rectangle 37"/>
           <p:cNvSpPr/>
           <p:nvPr/>
         </p:nvSpPr>
         <p:spPr>
           <a:xfrm>
-            <a:off x="4846320" y="1508760"/>
-            <a:ext cx="201168" cy="201168"/>
-          </a:xfrm>
-          <a:prstGeom prst="rect">
-            <a:avLst/>
-          </a:prstGeom>
-          <a:solidFill>
-            <a:srgbClr val="1A7A4A"/>
-          </a:solidFill>
-          <a:ln>
-            <a:noFill/>
-          </a:ln>
-        </p:spPr>
-        <p:style>
-          <a:lnRef idx="1">
-            <a:schemeClr val="accent1"/>
-          </a:lnRef>
-          <a:fillRef idx="3">
-            <a:schemeClr val="accent1"/>
-          </a:fillRef>
-          <a:effectRef idx="2">
-            <a:schemeClr val="accent1"/>
-          </a:effectRef>
-          <a:fontRef idx="minor">
-            <a:schemeClr val="lt1"/>
-          </a:fontRef>
-        </p:style>
-        <p:txBody>
-          <a:bodyPr rtlCol="0" anchor="ctr"/>
-          <a:lstStyle/>
-          <a:p>
-            <a:pPr algn="ctr"/>
-          </a:p>
-        </p:txBody>
-      </p:sp>
-      <p:sp>
-        <p:nvSpPr>
-          <p:cNvPr id="32" name="TextBox 31"/>
-          <p:cNvSpPr txBox="1"/>
-          <p:nvPr/>
-        </p:nvSpPr>
-        <p:spPr>
-          <a:xfrm>
-            <a:off x="5120640" y="1490472"/>
-            <a:ext cx="4114800" cy="256032"/>
-          </a:xfrm>
-          <a:prstGeom prst="rect">
-            <a:avLst/>
-          </a:prstGeom>
-          <a:noFill/>
-        </p:spPr>
-        <p:txBody>
-          <a:bodyPr wrap="square">
-            <a:spAutoFit/>
-          </a:bodyPr>
-          <a:lstStyle/>
-          <a:p>
-            <a:pPr algn="l"/>
-            <a:r>
-              <a:rPr sz="1050" b="1" i="0">
-                <a:solidFill>
-                  <a:srgbClr val="1A7A4A"/>
-                </a:solidFill>
-                <a:latin typeface="Calibri"/>
-              </a:rPr>
-              <a:t>Longer sample</a:t>
-            </a:r>
-          </a:p>
-        </p:txBody>
-      </p:sp>
-      <p:sp>
-        <p:nvSpPr>
-          <p:cNvPr id="33" name="TextBox 32"/>
-          <p:cNvSpPr txBox="1"/>
-          <p:nvPr/>
-        </p:nvSpPr>
-        <p:spPr>
-          <a:xfrm>
-            <a:off x="5120640" y="1737360"/>
-            <a:ext cx="4114800" cy="292608"/>
-          </a:xfrm>
-          <a:prstGeom prst="rect">
-            <a:avLst/>
-          </a:prstGeom>
-          <a:noFill/>
-        </p:spPr>
-        <p:txBody>
-          <a:bodyPr wrap="square">
-            <a:spAutoFit/>
-          </a:bodyPr>
-          <a:lstStyle/>
-          <a:p>
-            <a:pPr algn="l"/>
-            <a:r>
-              <a:rPr sz="950" b="0" i="0">
-                <a:solidFill>
-                  <a:srgbClr val="222222"/>
-                </a:solidFill>
-                <a:latin typeface="Calibri"/>
-              </a:rPr>
-              <a:t>As weekly/monthly attestations accumulate, N grows → power improves</a:t>
-            </a:r>
-          </a:p>
-        </p:txBody>
-      </p:sp>
-      <p:sp>
-        <p:nvSpPr>
-          <p:cNvPr id="34" name="Rectangle 33"/>
-          <p:cNvSpPr/>
-          <p:nvPr/>
-        </p:nvSpPr>
-        <p:spPr>
-          <a:xfrm>
-            <a:off x="4846320" y="2194560"/>
-            <a:ext cx="201168" cy="201168"/>
-          </a:xfrm>
-          <a:prstGeom prst="rect">
-            <a:avLst/>
-          </a:prstGeom>
-          <a:solidFill>
-            <a:srgbClr val="1A7A4A"/>
-          </a:solidFill>
-          <a:ln>
-            <a:noFill/>
-          </a:ln>
-        </p:spPr>
-        <p:style>
-          <a:lnRef idx="1">
-            <a:schemeClr val="accent1"/>
-          </a:lnRef>
-          <a:fillRef idx="3">
-            <a:schemeClr val="accent1"/>
-          </a:fillRef>
-          <a:effectRef idx="2">
-            <a:schemeClr val="accent1"/>
-          </a:effectRef>
-          <a:fontRef idx="minor">
-            <a:schemeClr val="lt1"/>
-          </a:fontRef>
-        </p:style>
-        <p:txBody>
-          <a:bodyPr rtlCol="0" anchor="ctr"/>
-          <a:lstStyle/>
-          <a:p>
-            <a:pPr algn="ctr"/>
-          </a:p>
-        </p:txBody>
-      </p:sp>
-      <p:sp>
-        <p:nvSpPr>
-          <p:cNvPr id="35" name="TextBox 34"/>
-          <p:cNvSpPr txBox="1"/>
-          <p:nvPr/>
-        </p:nvSpPr>
-        <p:spPr>
-          <a:xfrm>
-            <a:off x="5120640" y="2176272"/>
-            <a:ext cx="4114800" cy="256032"/>
-          </a:xfrm>
-          <a:prstGeom prst="rect">
-            <a:avLst/>
-          </a:prstGeom>
-          <a:noFill/>
-        </p:spPr>
-        <p:txBody>
-          <a:bodyPr wrap="square">
-            <a:spAutoFit/>
-          </a:bodyPr>
-          <a:lstStyle/>
-          <a:p>
-            <a:pPr algn="l"/>
-            <a:r>
-              <a:rPr sz="1050" b="1" i="0">
-                <a:solidFill>
-                  <a:srgbClr val="1A7A4A"/>
-                </a:solidFill>
-                <a:latin typeface="Calibri"/>
-              </a:rPr>
-              <a:t>Better identification</a:t>
-            </a:r>
-          </a:p>
-        </p:txBody>
-      </p:sp>
-      <p:sp>
-        <p:nvSpPr>
-          <p:cNvPr id="36" name="TextBox 35"/>
-          <p:cNvSpPr txBox="1"/>
-          <p:nvPr/>
-        </p:nvSpPr>
-        <p:spPr>
-          <a:xfrm>
-            <a:off x="5120640" y="2423160"/>
-            <a:ext cx="4114800" cy="292608"/>
-          </a:xfrm>
-          <a:prstGeom prst="rect">
-            <a:avLst/>
-          </a:prstGeom>
-          <a:noFill/>
-        </p:spPr>
-        <p:txBody>
-          <a:bodyPr wrap="square">
-            <a:spAutoFit/>
-          </a:bodyPr>
-          <a:lstStyle/>
-          <a:p>
-            <a:pPr algn="l"/>
-            <a:r>
-              <a:rPr sz="950" b="0" i="0">
-                <a:solidFill>
-                  <a:srgbClr val="222222"/>
-                </a:solidFill>
-                <a:latin typeface="Calibri"/>
-              </a:rPr>
-              <a:t>Instrument for supply growth (e.g., regulatory announcements)</a:t>
-            </a:r>
-          </a:p>
-        </p:txBody>
-      </p:sp>
-      <p:sp>
-        <p:nvSpPr>
-          <p:cNvPr id="37" name="Rectangle 36"/>
-          <p:cNvSpPr/>
-          <p:nvPr/>
-        </p:nvSpPr>
-        <p:spPr>
-          <a:xfrm>
-            <a:off x="4846320" y="2880360"/>
-            <a:ext cx="201168" cy="201168"/>
-          </a:xfrm>
-          <a:prstGeom prst="rect">
-            <a:avLst/>
-          </a:prstGeom>
-          <a:solidFill>
-            <a:srgbClr val="1A7A4A"/>
-          </a:solidFill>
-          <a:ln>
-            <a:noFill/>
-          </a:ln>
-        </p:spPr>
-        <p:style>
-          <a:lnRef idx="1">
-            <a:schemeClr val="accent1"/>
-          </a:lnRef>
-          <a:fillRef idx="3">
-            <a:schemeClr val="accent1"/>
-          </a:fillRef>
-          <a:effectRef idx="2">
-            <a:schemeClr val="accent1"/>
-          </a:effectRef>
-          <a:fontRef idx="minor">
-            <a:schemeClr val="lt1"/>
-          </a:fontRef>
-        </p:style>
-        <p:txBody>
-          <a:bodyPr rtlCol="0" anchor="ctr"/>
-          <a:lstStyle/>
-          <a:p>
-            <a:pPr algn="ctr"/>
-          </a:p>
-        </p:txBody>
-      </p:sp>
-      <p:sp>
-        <p:nvSpPr>
-          <p:cNvPr id="38" name="TextBox 37"/>
-          <p:cNvSpPr txBox="1"/>
-          <p:nvPr/>
-        </p:nvSpPr>
-        <p:spPr>
-          <a:xfrm>
-            <a:off x="5120640" y="2862072"/>
-            <a:ext cx="4114800" cy="256032"/>
-          </a:xfrm>
-          <a:prstGeom prst="rect">
-            <a:avLst/>
-          </a:prstGeom>
-          <a:noFill/>
-        </p:spPr>
-        <p:txBody>
-          <a:bodyPr wrap="square">
-            <a:spAutoFit/>
-          </a:bodyPr>
-          <a:lstStyle/>
-          <a:p>
-            <a:pPr algn="l"/>
-            <a:r>
-              <a:rPr sz="1050" b="1" i="0">
-                <a:solidFill>
-                  <a:srgbClr val="1A7A4A"/>
-                </a:solidFill>
-                <a:latin typeface="Calibri"/>
-              </a:rPr>
-              <a:t>Non-USD ecosystems</a:t>
-            </a:r>
-          </a:p>
-        </p:txBody>
-      </p:sp>
-      <p:sp>
-        <p:nvSpPr>
-          <p:cNvPr id="39" name="TextBox 38"/>
-          <p:cNvSpPr txBox="1"/>
-          <p:nvPr/>
-        </p:nvSpPr>
-        <p:spPr>
-          <a:xfrm>
-            <a:off x="5120640" y="3108960"/>
-            <a:ext cx="4114800" cy="292608"/>
-          </a:xfrm>
-          <a:prstGeom prst="rect">
-            <a:avLst/>
-          </a:prstGeom>
-          <a:noFill/>
-        </p:spPr>
-        <p:txBody>
-          <a:bodyPr wrap="square">
-            <a:spAutoFit/>
-          </a:bodyPr>
-          <a:lstStyle/>
-          <a:p>
-            <a:pPr algn="l"/>
-            <a:r>
-              <a:rPr sz="950" b="0" i="0">
-                <a:solidFill>
-                  <a:srgbClr val="222222"/>
-                </a:solidFill>
-                <a:latin typeface="Calibri"/>
-              </a:rPr>
-              <a:t>Euro stablecoins, CBDC interactions — broader privilege question</a:t>
-            </a:r>
-          </a:p>
-        </p:txBody>
-      </p:sp>
-      <p:sp>
-        <p:nvSpPr>
-          <p:cNvPr id="40" name="Rectangle 39"/>
-          <p:cNvSpPr/>
-          <p:nvPr/>
-        </p:nvSpPr>
-        <p:spPr>
-          <a:xfrm>
-            <a:off x="4846320" y="3566160"/>
-            <a:ext cx="201168" cy="201168"/>
-          </a:xfrm>
-          <a:prstGeom prst="rect">
-            <a:avLst/>
-          </a:prstGeom>
-          <a:solidFill>
-            <a:srgbClr val="1A7A4A"/>
-          </a:solidFill>
-          <a:ln>
-            <a:noFill/>
-          </a:ln>
-        </p:spPr>
-        <p:style>
-          <a:lnRef idx="1">
-            <a:schemeClr val="accent1"/>
-          </a:lnRef>
-          <a:fillRef idx="3">
-            <a:schemeClr val="accent1"/>
-          </a:fillRef>
-          <a:effectRef idx="2">
-            <a:schemeClr val="accent1"/>
-          </a:effectRef>
-          <a:fontRef idx="minor">
-            <a:schemeClr val="lt1"/>
-          </a:fontRef>
-        </p:style>
-        <p:txBody>
-          <a:bodyPr rtlCol="0" anchor="ctr"/>
-          <a:lstStyle/>
-          <a:p>
-            <a:pPr algn="ctr"/>
-          </a:p>
-        </p:txBody>
-      </p:sp>
-      <p:sp>
-        <p:nvSpPr>
-          <p:cNvPr id="41" name="TextBox 40"/>
-          <p:cNvSpPr txBox="1"/>
-          <p:nvPr/>
-        </p:nvSpPr>
-        <p:spPr>
-          <a:xfrm>
-            <a:off x="5120640" y="3547872"/>
-            <a:ext cx="4114800" cy="256032"/>
-          </a:xfrm>
-          <a:prstGeom prst="rect">
-            <a:avLst/>
-          </a:prstGeom>
-          <a:noFill/>
-        </p:spPr>
-        <p:txBody>
-          <a:bodyPr wrap="square">
-            <a:spAutoFit/>
-          </a:bodyPr>
-          <a:lstStyle/>
-          <a:p>
-            <a:pPr algn="l"/>
-            <a:r>
-              <a:rPr sz="1050" b="1" i="0">
-                <a:solidFill>
-                  <a:srgbClr val="1A7A4A"/>
-                </a:solidFill>
-                <a:latin typeface="Calibri"/>
-              </a:rPr>
-              <a:t>High-frequency data</a:t>
-            </a:r>
-          </a:p>
-        </p:txBody>
-      </p:sp>
-      <p:sp>
-        <p:nvSpPr>
-          <p:cNvPr id="42" name="TextBox 41"/>
-          <p:cNvSpPr txBox="1"/>
-          <p:nvPr/>
-        </p:nvSpPr>
-        <p:spPr>
-          <a:xfrm>
-            <a:off x="5120640" y="3794760"/>
-            <a:ext cx="4114800" cy="292608"/>
-          </a:xfrm>
-          <a:prstGeom prst="rect">
-            <a:avLst/>
-          </a:prstGeom>
-          <a:noFill/>
-        </p:spPr>
-        <p:txBody>
-          <a:bodyPr wrap="square">
-            <a:spAutoFit/>
-          </a:bodyPr>
-          <a:lstStyle/>
-          <a:p>
-            <a:pPr algn="l"/>
-            <a:r>
-              <a:rPr sz="950" b="0" i="0">
-                <a:solidFill>
-                  <a:srgbClr val="222222"/>
-                </a:solidFill>
-                <a:latin typeface="Calibri"/>
-              </a:rPr>
-              <a:t>Daily spread + daily supply → better event identification</a:t>
-            </a:r>
-          </a:p>
-        </p:txBody>
-      </p:sp>
-      <p:sp>
-        <p:nvSpPr>
-          <p:cNvPr id="43" name="Rectangle 42"/>
-          <p:cNvSpPr/>
-          <p:nvPr/>
-        </p:nvSpPr>
-        <p:spPr>
-          <a:xfrm>
-            <a:off x="4846320" y="4251960"/>
-            <a:ext cx="201168" cy="201168"/>
-          </a:xfrm>
-          <a:prstGeom prst="rect">
-            <a:avLst/>
-          </a:prstGeom>
-          <a:solidFill>
-            <a:srgbClr val="1A7A4A"/>
-          </a:solidFill>
-          <a:ln>
-            <a:noFill/>
-          </a:ln>
-        </p:spPr>
-        <p:style>
-          <a:lnRef idx="1">
-            <a:schemeClr val="accent1"/>
-          </a:lnRef>
-          <a:fillRef idx="3">
-            <a:schemeClr val="accent1"/>
-          </a:fillRef>
-          <a:effectRef idx="2">
-            <a:schemeClr val="accent1"/>
-          </a:effectRef>
-          <a:fontRef idx="minor">
-            <a:schemeClr val="lt1"/>
-          </a:fontRef>
-        </p:style>
-        <p:txBody>
-          <a:bodyPr rtlCol="0" anchor="ctr"/>
-          <a:lstStyle/>
-          <a:p>
-            <a:pPr algn="ctr"/>
-          </a:p>
-        </p:txBody>
-      </p:sp>
-      <p:sp>
-        <p:nvSpPr>
-          <p:cNvPr id="44" name="TextBox 43"/>
-          <p:cNvSpPr txBox="1"/>
-          <p:nvPr/>
-        </p:nvSpPr>
-        <p:spPr>
-          <a:xfrm>
-            <a:off x="5120640" y="4233672"/>
-            <a:ext cx="4114800" cy="256032"/>
-          </a:xfrm>
-          <a:prstGeom prst="rect">
-            <a:avLst/>
-          </a:prstGeom>
-          <a:noFill/>
-        </p:spPr>
-        <p:txBody>
-          <a:bodyPr wrap="square">
-            <a:spAutoFit/>
-          </a:bodyPr>
-          <a:lstStyle/>
-          <a:p>
-            <a:pPr algn="l"/>
-            <a:r>
-              <a:rPr sz="1050" b="1" i="0">
-                <a:solidFill>
-                  <a:srgbClr val="1A7A4A"/>
-                </a:solidFill>
-                <a:latin typeface="Calibri"/>
-              </a:rPr>
-              <a:t>Cross-country comparison</a:t>
-            </a:r>
-          </a:p>
-        </p:txBody>
-      </p:sp>
-      <p:sp>
-        <p:nvSpPr>
-          <p:cNvPr id="45" name="TextBox 44"/>
-          <p:cNvSpPr txBox="1"/>
-          <p:nvPr/>
-        </p:nvSpPr>
-        <p:spPr>
-          <a:xfrm>
-            <a:off x="5120640" y="4480560"/>
-            <a:ext cx="4114800" cy="292608"/>
-          </a:xfrm>
-          <a:prstGeom prst="rect">
-            <a:avLst/>
-          </a:prstGeom>
-          <a:noFill/>
-        </p:spPr>
-        <p:txBody>
-          <a:bodyPr wrap="square">
-            <a:spAutoFit/>
-          </a:bodyPr>
-          <a:lstStyle/>
-          <a:p>
-            <a:pPr algn="l"/>
-            <a:r>
-              <a:rPr sz="950" b="0" i="0">
-                <a:solidFill>
-                  <a:srgbClr val="222222"/>
-                </a:solidFill>
-                <a:latin typeface="Calibri"/>
-              </a:rPr>
-              <a:t>Does same mechanism operate for EUR-denominated safe assets?</a:t>
-            </a:r>
-          </a:p>
-        </p:txBody>
-      </p:sp>
-      <p:sp>
-        <p:nvSpPr>
-          <p:cNvPr id="46" name="Rectangle 45"/>
-          <p:cNvSpPr/>
-          <p:nvPr/>
-        </p:nvSpPr>
-        <p:spPr>
-          <a:xfrm>
-            <a:off x="274320" y="5212080"/>
-            <a:ext cx="9326880" cy="548640"/>
+            <a:off x="274320" y="4937760"/>
+            <a:ext cx="9326880" cy="777240"/>
           </a:xfrm>
           <a:prstGeom prst="rect">
             <a:avLst/>
@@ -12035,35 +13611,35 @@
       </p:sp>
       <p:sp>
         <p:nvSpPr>
-          <p:cNvPr id="47" name="TextBox 46"/>
-          <p:cNvSpPr txBox="1"/>
-          <p:nvPr/>
-        </p:nvSpPr>
-        <p:spPr>
-          <a:xfrm>
-            <a:off x="457200" y="5257800"/>
-            <a:ext cx="9052560" cy="457200"/>
-          </a:xfrm>
-          <a:prstGeom prst="rect">
-            <a:avLst/>
-          </a:prstGeom>
-          <a:noFill/>
-        </p:spPr>
-        <p:txBody>
-          <a:bodyPr wrap="square">
-            <a:spAutoFit/>
-          </a:bodyPr>
-          <a:lstStyle/>
-          <a:p>
-            <a:pPr algn="ctr"/>
-            <a:r>
-              <a:rPr sz="1100" b="1" i="0">
+          <p:cNvPr id="39" name="TextBox 38"/>
+          <p:cNvSpPr txBox="1"/>
+          <p:nvPr/>
+        </p:nvSpPr>
+        <p:spPr>
+          <a:xfrm>
+            <a:off x="457200" y="4983480"/>
+            <a:ext cx="9052560" cy="685800"/>
+          </a:xfrm>
+          <a:prstGeom prst="rect">
+            <a:avLst/>
+          </a:prstGeom>
+          <a:noFill/>
+        </p:spPr>
+        <p:txBody>
+          <a:bodyPr wrap="square">
+            <a:spAutoFit/>
+          </a:bodyPr>
+          <a:lstStyle/>
+          <a:p>
+            <a:pPr algn="ctr"/>
+            <a:r>
+              <a:rPr sz="1200" b="1" i="1">
                 <a:solidFill>
                   <a:srgbClr val="E87722"/>
                 </a:solidFill>
                 <a:latin typeface="Calibri"/>
               </a:rPr>
-              <a:t>This paper is the first step. The research agenda is clear and tractable.</a:t>
+              <a:t>"All three methods point to the same conclusion: stablecoins amplify the exorbitant privilege, with a fragility threshold near 13% liquid buffer."</a:t>
             </a:r>
           </a:p>
         </p:txBody>
@@ -12077,6 +13653,1797 @@
 </file>
 
 <file path=ppt/slides/slide16.xml><?xml version="1.0" encoding="utf-8"?>
+<p:sld xmlns:a="http://schemas.openxmlformats.org/drawingml/2006/main" xmlns:p="http://schemas.openxmlformats.org/presentationml/2006/main" xmlns:r="http://schemas.openxmlformats.org/officeDocument/2006/relationships">
+  <p:cSld>
+    <p:spTree>
+      <p:nvGrpSpPr>
+        <p:cNvPr id="1" name=""/>
+        <p:cNvGrpSpPr/>
+        <p:nvPr/>
+      </p:nvGrpSpPr>
+      <p:grpSpPr/>
+      <p:sp>
+        <p:nvSpPr>
+          <p:cNvPr id="2" name="Rectangle 1"/>
+          <p:cNvSpPr/>
+          <p:nvPr/>
+        </p:nvSpPr>
+        <p:spPr>
+          <a:xfrm>
+            <a:off x="0" y="0"/>
+            <a:ext cx="12188952" cy="6858000"/>
+          </a:xfrm>
+          <a:prstGeom prst="rect">
+            <a:avLst/>
+          </a:prstGeom>
+          <a:solidFill>
+            <a:srgbClr val="F8F9FA"/>
+          </a:solidFill>
+          <a:ln>
+            <a:noFill/>
+          </a:ln>
+        </p:spPr>
+        <p:style>
+          <a:lnRef idx="1">
+            <a:schemeClr val="accent1"/>
+          </a:lnRef>
+          <a:fillRef idx="3">
+            <a:schemeClr val="accent1"/>
+          </a:fillRef>
+          <a:effectRef idx="2">
+            <a:schemeClr val="accent1"/>
+          </a:effectRef>
+          <a:fontRef idx="minor">
+            <a:schemeClr val="lt1"/>
+          </a:fontRef>
+        </p:style>
+        <p:txBody>
+          <a:bodyPr rtlCol="0" anchor="ctr"/>
+          <a:lstStyle/>
+          <a:p>
+            <a:pPr algn="ctr"/>
+          </a:p>
+        </p:txBody>
+      </p:sp>
+      <p:sp>
+        <p:nvSpPr>
+          <p:cNvPr id="3" name="Rectangle 2"/>
+          <p:cNvSpPr/>
+          <p:nvPr/>
+        </p:nvSpPr>
+        <p:spPr>
+          <a:xfrm>
+            <a:off x="0" y="0"/>
+            <a:ext cx="12188952" cy="822960"/>
+          </a:xfrm>
+          <a:prstGeom prst="rect">
+            <a:avLst/>
+          </a:prstGeom>
+          <a:solidFill>
+            <a:srgbClr val="003087"/>
+          </a:solidFill>
+          <a:ln>
+            <a:noFill/>
+          </a:ln>
+        </p:spPr>
+        <p:style>
+          <a:lnRef idx="1">
+            <a:schemeClr val="accent1"/>
+          </a:lnRef>
+          <a:fillRef idx="3">
+            <a:schemeClr val="accent1"/>
+          </a:fillRef>
+          <a:effectRef idx="2">
+            <a:schemeClr val="accent1"/>
+          </a:effectRef>
+          <a:fontRef idx="minor">
+            <a:schemeClr val="lt1"/>
+          </a:fontRef>
+        </p:style>
+        <p:txBody>
+          <a:bodyPr rtlCol="0" anchor="ctr"/>
+          <a:lstStyle/>
+          <a:p>
+            <a:pPr algn="ctr"/>
+          </a:p>
+        </p:txBody>
+      </p:sp>
+      <p:sp>
+        <p:nvSpPr>
+          <p:cNvPr id="4" name="TextBox 3"/>
+          <p:cNvSpPr txBox="1"/>
+          <p:nvPr/>
+        </p:nvSpPr>
+        <p:spPr>
+          <a:xfrm>
+            <a:off x="274320" y="64008"/>
+            <a:ext cx="10515600" cy="457200"/>
+          </a:xfrm>
+          <a:prstGeom prst="rect">
+            <a:avLst/>
+          </a:prstGeom>
+          <a:noFill/>
+        </p:spPr>
+        <p:txBody>
+          <a:bodyPr wrap="square">
+            <a:spAutoFit/>
+          </a:bodyPr>
+          <a:lstStyle/>
+          <a:p>
+            <a:pPr algn="l"/>
+            <a:r>
+              <a:rPr sz="2000" b="1" i="0">
+                <a:solidFill>
+                  <a:srgbClr val="FFFFFF"/>
+                </a:solidFill>
+                <a:latin typeface="Calibri"/>
+              </a:rPr>
+              <a:t>Limitations &amp; Next Steps</a:t>
+            </a:r>
+          </a:p>
+        </p:txBody>
+      </p:sp>
+      <p:sp>
+        <p:nvSpPr>
+          <p:cNvPr id="5" name="TextBox 4"/>
+          <p:cNvSpPr txBox="1"/>
+          <p:nvPr/>
+        </p:nvSpPr>
+        <p:spPr>
+          <a:xfrm>
+            <a:off x="274320" y="502920"/>
+            <a:ext cx="8229600" cy="292608"/>
+          </a:xfrm>
+          <a:prstGeom prst="rect">
+            <a:avLst/>
+          </a:prstGeom>
+          <a:noFill/>
+        </p:spPr>
+        <p:txBody>
+          <a:bodyPr wrap="square">
+            <a:spAutoFit/>
+          </a:bodyPr>
+          <a:lstStyle/>
+          <a:p>
+            <a:pPr algn="l"/>
+            <a:r>
+              <a:rPr sz="1100" b="0" i="1">
+                <a:solidFill>
+                  <a:srgbClr val="FFFFFF"/>
+                </a:solidFill>
+                <a:latin typeface="Calibri"/>
+              </a:rPr>
+              <a:t>Honest accounting of constraints and the research agenda ahead</a:t>
+            </a:r>
+          </a:p>
+        </p:txBody>
+      </p:sp>
+      <p:sp>
+        <p:nvSpPr>
+          <p:cNvPr id="6" name="TextBox 5"/>
+          <p:cNvSpPr txBox="1"/>
+          <p:nvPr/>
+        </p:nvSpPr>
+        <p:spPr>
+          <a:xfrm>
+            <a:off x="9601200" y="45720"/>
+            <a:ext cx="2377440" cy="320040"/>
+          </a:xfrm>
+          <a:prstGeom prst="rect">
+            <a:avLst/>
+          </a:prstGeom>
+          <a:noFill/>
+        </p:spPr>
+        <p:txBody>
+          <a:bodyPr wrap="square">
+            <a:spAutoFit/>
+          </a:bodyPr>
+          <a:lstStyle/>
+          <a:p>
+            <a:pPr algn="r"/>
+            <a:r>
+              <a:rPr sz="900" b="1" i="0">
+                <a:solidFill>
+                  <a:srgbClr val="E87722"/>
+                </a:solidFill>
+                <a:latin typeface="Calibri"/>
+              </a:rPr>
+              <a:t>Slide 16 / 17</a:t>
+            </a:r>
+          </a:p>
+        </p:txBody>
+      </p:sp>
+      <p:sp>
+        <p:nvSpPr>
+          <p:cNvPr id="7" name="Rectangle 6"/>
+          <p:cNvSpPr/>
+          <p:nvPr/>
+        </p:nvSpPr>
+        <p:spPr>
+          <a:xfrm>
+            <a:off x="9902952" y="822960"/>
+            <a:ext cx="2286000" cy="6035040"/>
+          </a:xfrm>
+          <a:prstGeom prst="rect">
+            <a:avLst/>
+          </a:prstGeom>
+          <a:solidFill>
+            <a:srgbClr val="003087"/>
+          </a:solidFill>
+          <a:ln>
+            <a:noFill/>
+          </a:ln>
+        </p:spPr>
+        <p:style>
+          <a:lnRef idx="1">
+            <a:schemeClr val="accent1"/>
+          </a:lnRef>
+          <a:fillRef idx="3">
+            <a:schemeClr val="accent1"/>
+          </a:fillRef>
+          <a:effectRef idx="2">
+            <a:schemeClr val="accent1"/>
+          </a:effectRef>
+          <a:fontRef idx="minor">
+            <a:schemeClr val="lt1"/>
+          </a:fontRef>
+        </p:style>
+        <p:txBody>
+          <a:bodyPr rtlCol="0" anchor="ctr"/>
+          <a:lstStyle/>
+          <a:p>
+            <a:pPr algn="ctr"/>
+          </a:p>
+        </p:txBody>
+      </p:sp>
+      <p:sp>
+        <p:nvSpPr>
+          <p:cNvPr id="8" name="Rectangle 7"/>
+          <p:cNvSpPr/>
+          <p:nvPr/>
+        </p:nvSpPr>
+        <p:spPr>
+          <a:xfrm>
+            <a:off x="9902952" y="822960"/>
+            <a:ext cx="2286000" cy="36576"/>
+          </a:xfrm>
+          <a:prstGeom prst="rect">
+            <a:avLst/>
+          </a:prstGeom>
+          <a:solidFill>
+            <a:srgbClr val="E87722"/>
+          </a:solidFill>
+          <a:ln>
+            <a:noFill/>
+          </a:ln>
+        </p:spPr>
+        <p:style>
+          <a:lnRef idx="1">
+            <a:schemeClr val="accent1"/>
+          </a:lnRef>
+          <a:fillRef idx="3">
+            <a:schemeClr val="accent1"/>
+          </a:fillRef>
+          <a:effectRef idx="2">
+            <a:schemeClr val="accent1"/>
+          </a:effectRef>
+          <a:fontRef idx="minor">
+            <a:schemeClr val="lt1"/>
+          </a:fontRef>
+        </p:style>
+        <p:txBody>
+          <a:bodyPr rtlCol="0" anchor="ctr"/>
+          <a:lstStyle/>
+          <a:p>
+            <a:pPr algn="ctr"/>
+          </a:p>
+        </p:txBody>
+      </p:sp>
+      <p:sp>
+        <p:nvSpPr>
+          <p:cNvPr id="9" name="TextBox 8"/>
+          <p:cNvSpPr txBox="1"/>
+          <p:nvPr/>
+        </p:nvSpPr>
+        <p:spPr>
+          <a:xfrm>
+            <a:off x="9994392" y="914400"/>
+            <a:ext cx="2103120" cy="1097280"/>
+          </a:xfrm>
+          <a:prstGeom prst="rect">
+            <a:avLst/>
+          </a:prstGeom>
+          <a:noFill/>
+        </p:spPr>
+        <p:txBody>
+          <a:bodyPr wrap="square">
+            <a:spAutoFit/>
+          </a:bodyPr>
+          <a:lstStyle/>
+          <a:p>
+            <a:pPr algn="ctr"/>
+            <a:r>
+              <a:rPr sz="1100" b="1" i="0">
+                <a:solidFill>
+                  <a:srgbClr val="E87722"/>
+                </a:solidFill>
+                <a:latin typeface="Calibri"/>
+              </a:rPr>
+              <a:t>Key Results</a:t>
+            </a:r>
+          </a:p>
+        </p:txBody>
+      </p:sp>
+      <p:sp>
+        <p:nvSpPr>
+          <p:cNvPr id="10" name="TextBox 9"/>
+          <p:cNvSpPr txBox="1"/>
+          <p:nvPr/>
+        </p:nvSpPr>
+        <p:spPr>
+          <a:xfrm>
+            <a:off x="9976104" y="1828800"/>
+            <a:ext cx="2103120" cy="548640"/>
+          </a:xfrm>
+          <a:prstGeom prst="rect">
+            <a:avLst/>
+          </a:prstGeom>
+          <a:noFill/>
+        </p:spPr>
+        <p:txBody>
+          <a:bodyPr wrap="square">
+            <a:spAutoFit/>
+          </a:bodyPr>
+          <a:lstStyle/>
+          <a:p>
+            <a:pPr algn="ctr"/>
+            <a:r>
+              <a:rPr sz="1500" b="1" i="0">
+                <a:solidFill>
+                  <a:srgbClr val="FFFFFF"/>
+                </a:solidFill>
+                <a:latin typeface="Calibri"/>
+              </a:rPr>
+              <a:t>β₁ = −7.57***</a:t>
+            </a:r>
+          </a:p>
+        </p:txBody>
+      </p:sp>
+      <p:sp>
+        <p:nvSpPr>
+          <p:cNvPr id="11" name="TextBox 10"/>
+          <p:cNvSpPr txBox="1"/>
+          <p:nvPr/>
+        </p:nvSpPr>
+        <p:spPr>
+          <a:xfrm>
+            <a:off x="9976104" y="2331720"/>
+            <a:ext cx="2103120" cy="365760"/>
+          </a:xfrm>
+          <a:prstGeom prst="rect">
+            <a:avLst/>
+          </a:prstGeom>
+          <a:noFill/>
+        </p:spPr>
+        <p:txBody>
+          <a:bodyPr wrap="square">
+            <a:spAutoFit/>
+          </a:bodyPr>
+          <a:lstStyle/>
+          <a:p>
+            <a:pPr algn="ctr"/>
+            <a:r>
+              <a:rPr sz="1000" b="0" i="1">
+                <a:solidFill>
+                  <a:srgbClr val="E87722"/>
+                </a:solidFill>
+                <a:latin typeface="Calibri"/>
+              </a:rPr>
+              <a:t>p = 0.004</a:t>
+            </a:r>
+          </a:p>
+        </p:txBody>
+      </p:sp>
+      <p:sp>
+        <p:nvSpPr>
+          <p:cNvPr id="12" name="Rectangle 11"/>
+          <p:cNvSpPr/>
+          <p:nvPr/>
+        </p:nvSpPr>
+        <p:spPr>
+          <a:xfrm>
+            <a:off x="10040112" y="2788920"/>
+            <a:ext cx="2011680" cy="22860"/>
+          </a:xfrm>
+          <a:prstGeom prst="rect">
+            <a:avLst/>
+          </a:prstGeom>
+          <a:solidFill>
+            <a:srgbClr val="E87722"/>
+          </a:solidFill>
+          <a:ln>
+            <a:noFill/>
+          </a:ln>
+        </p:spPr>
+        <p:style>
+          <a:lnRef idx="1">
+            <a:schemeClr val="accent1"/>
+          </a:lnRef>
+          <a:fillRef idx="3">
+            <a:schemeClr val="accent1"/>
+          </a:fillRef>
+          <a:effectRef idx="2">
+            <a:schemeClr val="accent1"/>
+          </a:effectRef>
+          <a:fontRef idx="minor">
+            <a:schemeClr val="lt1"/>
+          </a:fontRef>
+        </p:style>
+        <p:txBody>
+          <a:bodyPr rtlCol="0" anchor="ctr"/>
+          <a:lstStyle/>
+          <a:p>
+            <a:pPr algn="ctr"/>
+          </a:p>
+        </p:txBody>
+      </p:sp>
+      <p:sp>
+        <p:nvSpPr>
+          <p:cNvPr id="13" name="TextBox 12"/>
+          <p:cNvSpPr txBox="1"/>
+          <p:nvPr/>
+        </p:nvSpPr>
+        <p:spPr>
+          <a:xfrm>
+            <a:off x="9976104" y="2880360"/>
+            <a:ext cx="2103120" cy="548640"/>
+          </a:xfrm>
+          <a:prstGeom prst="rect">
+            <a:avLst/>
+          </a:prstGeom>
+          <a:noFill/>
+        </p:spPr>
+        <p:txBody>
+          <a:bodyPr wrap="square">
+            <a:spAutoFit/>
+          </a:bodyPr>
+          <a:lstStyle/>
+          <a:p>
+            <a:pPr algn="ctr"/>
+            <a:r>
+              <a:rPr sz="1500" b="1" i="0">
+                <a:solidFill>
+                  <a:srgbClr val="FFFFFF"/>
+                </a:solidFill>
+                <a:latin typeface="Calibri"/>
+              </a:rPr>
+              <a:t>q* = 13%</a:t>
+            </a:r>
+          </a:p>
+        </p:txBody>
+      </p:sp>
+      <p:sp>
+        <p:nvSpPr>
+          <p:cNvPr id="14" name="TextBox 13"/>
+          <p:cNvSpPr txBox="1"/>
+          <p:nvPr/>
+        </p:nvSpPr>
+        <p:spPr>
+          <a:xfrm>
+            <a:off x="9976104" y="3383280"/>
+            <a:ext cx="2103120" cy="457200"/>
+          </a:xfrm>
+          <a:prstGeom prst="rect">
+            <a:avLst/>
+          </a:prstGeom>
+          <a:noFill/>
+        </p:spPr>
+        <p:txBody>
+          <a:bodyPr wrap="square">
+            <a:spAutoFit/>
+          </a:bodyPr>
+          <a:lstStyle/>
+          <a:p>
+            <a:pPr algn="ctr"/>
+            <a:r>
+              <a:rPr sz="900" b="0" i="1">
+                <a:solidFill>
+                  <a:srgbClr val="E87722"/>
+                </a:solidFill>
+                <a:latin typeface="Calibri"/>
+              </a:rPr>
+              <a:t>Bootstrap CI
+[3.1%, 14.5%]</a:t>
+            </a:r>
+          </a:p>
+        </p:txBody>
+      </p:sp>
+      <p:sp>
+        <p:nvSpPr>
+          <p:cNvPr id="15" name="Rectangle 14"/>
+          <p:cNvSpPr/>
+          <p:nvPr/>
+        </p:nvSpPr>
+        <p:spPr>
+          <a:xfrm>
+            <a:off x="10040112" y="3931920"/>
+            <a:ext cx="2011680" cy="22860"/>
+          </a:xfrm>
+          <a:prstGeom prst="rect">
+            <a:avLst/>
+          </a:prstGeom>
+          <a:solidFill>
+            <a:srgbClr val="E87722"/>
+          </a:solidFill>
+          <a:ln>
+            <a:noFill/>
+          </a:ln>
+        </p:spPr>
+        <p:style>
+          <a:lnRef idx="1">
+            <a:schemeClr val="accent1"/>
+          </a:lnRef>
+          <a:fillRef idx="3">
+            <a:schemeClr val="accent1"/>
+          </a:fillRef>
+          <a:effectRef idx="2">
+            <a:schemeClr val="accent1"/>
+          </a:effectRef>
+          <a:fontRef idx="minor">
+            <a:schemeClr val="lt1"/>
+          </a:fontRef>
+        </p:style>
+        <p:txBody>
+          <a:bodyPr rtlCol="0" anchor="ctr"/>
+          <a:lstStyle/>
+          <a:p>
+            <a:pPr algn="ctr"/>
+          </a:p>
+        </p:txBody>
+      </p:sp>
+      <p:sp>
+        <p:nvSpPr>
+          <p:cNvPr id="16" name="TextBox 15"/>
+          <p:cNvSpPr txBox="1"/>
+          <p:nvPr/>
+        </p:nvSpPr>
+        <p:spPr>
+          <a:xfrm>
+            <a:off x="9976104" y="4023360"/>
+            <a:ext cx="2103120" cy="1463040"/>
+          </a:xfrm>
+          <a:prstGeom prst="rect">
+            <a:avLst/>
+          </a:prstGeom>
+          <a:noFill/>
+        </p:spPr>
+        <p:txBody>
+          <a:bodyPr wrap="square">
+            <a:spAutoFit/>
+          </a:bodyPr>
+          <a:lstStyle/>
+          <a:p>
+            <a:pPr algn="ctr"/>
+            <a:r>
+              <a:rPr sz="950" b="0" i="0">
+                <a:solidFill>
+                  <a:srgbClr val="FFFFFF"/>
+                </a:solidFill>
+                <a:latin typeface="Calibri"/>
+              </a:rPr>
+              <a:t>3 convergent
+methods:
+β₁ ✓
+q* ✓
+Event study
+(directional)</a:t>
+            </a:r>
+          </a:p>
+        </p:txBody>
+      </p:sp>
+      <p:sp>
+        <p:nvSpPr>
+          <p:cNvPr id="17" name="Rectangle 16"/>
+          <p:cNvSpPr/>
+          <p:nvPr/>
+        </p:nvSpPr>
+        <p:spPr>
+          <a:xfrm>
+            <a:off x="274320" y="960120"/>
+            <a:ext cx="4297680" cy="4114800"/>
+          </a:xfrm>
+          <a:prstGeom prst="rect">
+            <a:avLst/>
+          </a:prstGeom>
+          <a:solidFill>
+            <a:srgbClr val="FFEDED"/>
+          </a:solidFill>
+          <a:ln>
+            <a:noFill/>
+          </a:ln>
+        </p:spPr>
+        <p:style>
+          <a:lnRef idx="1">
+            <a:schemeClr val="accent1"/>
+          </a:lnRef>
+          <a:fillRef idx="3">
+            <a:schemeClr val="accent1"/>
+          </a:fillRef>
+          <a:effectRef idx="2">
+            <a:schemeClr val="accent1"/>
+          </a:effectRef>
+          <a:fontRef idx="minor">
+            <a:schemeClr val="lt1"/>
+          </a:fontRef>
+        </p:style>
+        <p:txBody>
+          <a:bodyPr rtlCol="0" anchor="ctr"/>
+          <a:lstStyle/>
+          <a:p>
+            <a:pPr algn="ctr"/>
+          </a:p>
+        </p:txBody>
+      </p:sp>
+      <p:sp>
+        <p:nvSpPr>
+          <p:cNvPr id="18" name="TextBox 17"/>
+          <p:cNvSpPr txBox="1"/>
+          <p:nvPr/>
+        </p:nvSpPr>
+        <p:spPr>
+          <a:xfrm>
+            <a:off x="411480" y="1005840"/>
+            <a:ext cx="4023360" cy="411480"/>
+          </a:xfrm>
+          <a:prstGeom prst="rect">
+            <a:avLst/>
+          </a:prstGeom>
+          <a:noFill/>
+        </p:spPr>
+        <p:txBody>
+          <a:bodyPr wrap="square">
+            <a:spAutoFit/>
+          </a:bodyPr>
+          <a:lstStyle/>
+          <a:p>
+            <a:pPr algn="l"/>
+            <a:r>
+              <a:rPr sz="1300" b="1" i="0">
+                <a:solidFill>
+                  <a:srgbClr val="C0392B"/>
+                </a:solidFill>
+                <a:latin typeface="Calibri"/>
+              </a:rPr>
+              <a:t>Limitations</a:t>
+            </a:r>
+          </a:p>
+        </p:txBody>
+      </p:sp>
+      <p:sp>
+        <p:nvSpPr>
+          <p:cNvPr id="19" name="Rectangle 18"/>
+          <p:cNvSpPr/>
+          <p:nvPr/>
+        </p:nvSpPr>
+        <p:spPr>
+          <a:xfrm>
+            <a:off x="365760" y="1508760"/>
+            <a:ext cx="201168" cy="201168"/>
+          </a:xfrm>
+          <a:prstGeom prst="rect">
+            <a:avLst/>
+          </a:prstGeom>
+          <a:solidFill>
+            <a:srgbClr val="C0392B"/>
+          </a:solidFill>
+          <a:ln>
+            <a:noFill/>
+          </a:ln>
+        </p:spPr>
+        <p:style>
+          <a:lnRef idx="1">
+            <a:schemeClr val="accent1"/>
+          </a:lnRef>
+          <a:fillRef idx="3">
+            <a:schemeClr val="accent1"/>
+          </a:fillRef>
+          <a:effectRef idx="2">
+            <a:schemeClr val="accent1"/>
+          </a:effectRef>
+          <a:fontRef idx="minor">
+            <a:schemeClr val="lt1"/>
+          </a:fontRef>
+        </p:style>
+        <p:txBody>
+          <a:bodyPr rtlCol="0" anchor="ctr"/>
+          <a:lstStyle/>
+          <a:p>
+            <a:pPr algn="ctr"/>
+          </a:p>
+        </p:txBody>
+      </p:sp>
+      <p:sp>
+        <p:nvSpPr>
+          <p:cNvPr id="20" name="TextBox 19"/>
+          <p:cNvSpPr txBox="1"/>
+          <p:nvPr/>
+        </p:nvSpPr>
+        <p:spPr>
+          <a:xfrm>
+            <a:off x="640080" y="1472184"/>
+            <a:ext cx="3749039" cy="594360"/>
+          </a:xfrm>
+          <a:prstGeom prst="rect">
+            <a:avLst/>
+          </a:prstGeom>
+          <a:noFill/>
+        </p:spPr>
+        <p:txBody>
+          <a:bodyPr wrap="square">
+            <a:spAutoFit/>
+          </a:bodyPr>
+          <a:lstStyle/>
+          <a:p>
+            <a:pPr algn="l"/>
+            <a:r>
+              <a:rPr sz="1000" b="0" i="0">
+                <a:solidFill>
+                  <a:srgbClr val="222222"/>
+                </a:solidFill>
+                <a:latin typeface="Calibri"/>
+              </a:rPr>
+              <a:t>N = 51 months limits statistical power
+for threshold confirmation</a:t>
+            </a:r>
+          </a:p>
+        </p:txBody>
+      </p:sp>
+      <p:sp>
+        <p:nvSpPr>
+          <p:cNvPr id="21" name="Rectangle 20"/>
+          <p:cNvSpPr/>
+          <p:nvPr/>
+        </p:nvSpPr>
+        <p:spPr>
+          <a:xfrm>
+            <a:off x="365760" y="2148840"/>
+            <a:ext cx="201168" cy="201168"/>
+          </a:xfrm>
+          <a:prstGeom prst="rect">
+            <a:avLst/>
+          </a:prstGeom>
+          <a:solidFill>
+            <a:srgbClr val="C0392B"/>
+          </a:solidFill>
+          <a:ln>
+            <a:noFill/>
+          </a:ln>
+        </p:spPr>
+        <p:style>
+          <a:lnRef idx="1">
+            <a:schemeClr val="accent1"/>
+          </a:lnRef>
+          <a:fillRef idx="3">
+            <a:schemeClr val="accent1"/>
+          </a:fillRef>
+          <a:effectRef idx="2">
+            <a:schemeClr val="accent1"/>
+          </a:effectRef>
+          <a:fontRef idx="minor">
+            <a:schemeClr val="lt1"/>
+          </a:fontRef>
+        </p:style>
+        <p:txBody>
+          <a:bodyPr rtlCol="0" anchor="ctr"/>
+          <a:lstStyle/>
+          <a:p>
+            <a:pPr algn="ctr"/>
+          </a:p>
+        </p:txBody>
+      </p:sp>
+      <p:sp>
+        <p:nvSpPr>
+          <p:cNvPr id="22" name="TextBox 21"/>
+          <p:cNvSpPr txBox="1"/>
+          <p:nvPr/>
+        </p:nvSpPr>
+        <p:spPr>
+          <a:xfrm>
+            <a:off x="640080" y="2112264"/>
+            <a:ext cx="3749039" cy="594360"/>
+          </a:xfrm>
+          <a:prstGeom prst="rect">
+            <a:avLst/>
+          </a:prstGeom>
+          <a:noFill/>
+        </p:spPr>
+        <p:txBody>
+          <a:bodyPr wrap="square">
+            <a:spAutoFit/>
+          </a:bodyPr>
+          <a:lstStyle/>
+          <a:p>
+            <a:pPr algn="l"/>
+            <a:r>
+              <a:rPr sz="1000" b="0" i="0">
+                <a:solidFill>
+                  <a:srgbClr val="222222"/>
+                </a:solidFill>
+                <a:latin typeface="Calibri"/>
+              </a:rPr>
+              <a:t>Liquid buffer L forward-filled for 13 months
+(Tether quarterly attestation lag)</a:t>
+            </a:r>
+          </a:p>
+        </p:txBody>
+      </p:sp>
+      <p:sp>
+        <p:nvSpPr>
+          <p:cNvPr id="23" name="Rectangle 22"/>
+          <p:cNvSpPr/>
+          <p:nvPr/>
+        </p:nvSpPr>
+        <p:spPr>
+          <a:xfrm>
+            <a:off x="365760" y="2788920"/>
+            <a:ext cx="201168" cy="201168"/>
+          </a:xfrm>
+          <a:prstGeom prst="rect">
+            <a:avLst/>
+          </a:prstGeom>
+          <a:solidFill>
+            <a:srgbClr val="C0392B"/>
+          </a:solidFill>
+          <a:ln>
+            <a:noFill/>
+          </a:ln>
+        </p:spPr>
+        <p:style>
+          <a:lnRef idx="1">
+            <a:schemeClr val="accent1"/>
+          </a:lnRef>
+          <a:fillRef idx="3">
+            <a:schemeClr val="accent1"/>
+          </a:fillRef>
+          <a:effectRef idx="2">
+            <a:schemeClr val="accent1"/>
+          </a:effectRef>
+          <a:fontRef idx="minor">
+            <a:schemeClr val="lt1"/>
+          </a:fontRef>
+        </p:style>
+        <p:txBody>
+          <a:bodyPr rtlCol="0" anchor="ctr"/>
+          <a:lstStyle/>
+          <a:p>
+            <a:pPr algn="ctr"/>
+          </a:p>
+        </p:txBody>
+      </p:sp>
+      <p:sp>
+        <p:nvSpPr>
+          <p:cNvPr id="24" name="TextBox 23"/>
+          <p:cNvSpPr txBox="1"/>
+          <p:nvPr/>
+        </p:nvSpPr>
+        <p:spPr>
+          <a:xfrm>
+            <a:off x="640080" y="2752344"/>
+            <a:ext cx="3749039" cy="594360"/>
+          </a:xfrm>
+          <a:prstGeom prst="rect">
+            <a:avLst/>
+          </a:prstGeom>
+          <a:noFill/>
+        </p:spPr>
+        <p:txBody>
+          <a:bodyPr wrap="square">
+            <a:spAutoFit/>
+          </a:bodyPr>
+          <a:lstStyle/>
+          <a:p>
+            <a:pPr algn="l"/>
+            <a:r>
+              <a:rPr sz="1000" b="0" i="0">
+                <a:solidFill>
+                  <a:srgbClr val="222222"/>
+                </a:solidFill>
+                <a:latin typeface="Calibri"/>
+              </a:rPr>
+              <a:t>Endogeneity not fully resolved
+(Granger test addresses but doesn't solve)</a:t>
+            </a:r>
+          </a:p>
+        </p:txBody>
+      </p:sp>
+      <p:sp>
+        <p:nvSpPr>
+          <p:cNvPr id="25" name="Rectangle 24"/>
+          <p:cNvSpPr/>
+          <p:nvPr/>
+        </p:nvSpPr>
+        <p:spPr>
+          <a:xfrm>
+            <a:off x="365760" y="3429000"/>
+            <a:ext cx="201168" cy="201168"/>
+          </a:xfrm>
+          <a:prstGeom prst="rect">
+            <a:avLst/>
+          </a:prstGeom>
+          <a:solidFill>
+            <a:srgbClr val="C0392B"/>
+          </a:solidFill>
+          <a:ln>
+            <a:noFill/>
+          </a:ln>
+        </p:spPr>
+        <p:style>
+          <a:lnRef idx="1">
+            <a:schemeClr val="accent1"/>
+          </a:lnRef>
+          <a:fillRef idx="3">
+            <a:schemeClr val="accent1"/>
+          </a:fillRef>
+          <a:effectRef idx="2">
+            <a:schemeClr val="accent1"/>
+          </a:effectRef>
+          <a:fontRef idx="minor">
+            <a:schemeClr val="lt1"/>
+          </a:fontRef>
+        </p:style>
+        <p:txBody>
+          <a:bodyPr rtlCol="0" anchor="ctr"/>
+          <a:lstStyle/>
+          <a:p>
+            <a:pPr algn="ctr"/>
+          </a:p>
+        </p:txBody>
+      </p:sp>
+      <p:sp>
+        <p:nvSpPr>
+          <p:cNvPr id="26" name="TextBox 25"/>
+          <p:cNvSpPr txBox="1"/>
+          <p:nvPr/>
+        </p:nvSpPr>
+        <p:spPr>
+          <a:xfrm>
+            <a:off x="640080" y="3392424"/>
+            <a:ext cx="3749039" cy="594360"/>
+          </a:xfrm>
+          <a:prstGeom prst="rect">
+            <a:avLst/>
+          </a:prstGeom>
+          <a:noFill/>
+        </p:spPr>
+        <p:txBody>
+          <a:bodyPr wrap="square">
+            <a:spAutoFit/>
+          </a:bodyPr>
+          <a:lstStyle/>
+          <a:p>
+            <a:pPr algn="l"/>
+            <a:r>
+              <a:rPr sz="1000" b="0" i="0">
+                <a:solidFill>
+                  <a:srgbClr val="222222"/>
+                </a:solidFill>
+                <a:latin typeface="Calibri"/>
+              </a:rPr>
+              <a:t>Only 3 stress events;
+FOMC contamination in 2 of 3</a:t>
+            </a:r>
+          </a:p>
+        </p:txBody>
+      </p:sp>
+      <p:sp>
+        <p:nvSpPr>
+          <p:cNvPr id="27" name="Rectangle 26"/>
+          <p:cNvSpPr/>
+          <p:nvPr/>
+        </p:nvSpPr>
+        <p:spPr>
+          <a:xfrm>
+            <a:off x="365760" y="4069080"/>
+            <a:ext cx="201168" cy="201168"/>
+          </a:xfrm>
+          <a:prstGeom prst="rect">
+            <a:avLst/>
+          </a:prstGeom>
+          <a:solidFill>
+            <a:srgbClr val="C0392B"/>
+          </a:solidFill>
+          <a:ln>
+            <a:noFill/>
+          </a:ln>
+        </p:spPr>
+        <p:style>
+          <a:lnRef idx="1">
+            <a:schemeClr val="accent1"/>
+          </a:lnRef>
+          <a:fillRef idx="3">
+            <a:schemeClr val="accent1"/>
+          </a:fillRef>
+          <a:effectRef idx="2">
+            <a:schemeClr val="accent1"/>
+          </a:effectRef>
+          <a:fontRef idx="minor">
+            <a:schemeClr val="lt1"/>
+          </a:fontRef>
+        </p:style>
+        <p:txBody>
+          <a:bodyPr rtlCol="0" anchor="ctr"/>
+          <a:lstStyle/>
+          <a:p>
+            <a:pPr algn="ctr"/>
+          </a:p>
+        </p:txBody>
+      </p:sp>
+      <p:sp>
+        <p:nvSpPr>
+          <p:cNvPr id="28" name="TextBox 27"/>
+          <p:cNvSpPr txBox="1"/>
+          <p:nvPr/>
+        </p:nvSpPr>
+        <p:spPr>
+          <a:xfrm>
+            <a:off x="640080" y="4032504"/>
+            <a:ext cx="3749039" cy="594360"/>
+          </a:xfrm>
+          <a:prstGeom prst="rect">
+            <a:avLst/>
+          </a:prstGeom>
+          <a:noFill/>
+        </p:spPr>
+        <p:txBody>
+          <a:bodyPr wrap="square">
+            <a:spAutoFit/>
+          </a:bodyPr>
+          <a:lstStyle/>
+          <a:p>
+            <a:pPr algn="l"/>
+            <a:r>
+              <a:rPr sz="1000" b="0" i="0">
+                <a:solidFill>
+                  <a:srgbClr val="222222"/>
+                </a:solidFill>
+                <a:latin typeface="Calibri"/>
+              </a:rPr>
+              <a:t>Sample covers 2020–2024 only;
+may not generalize to other regimes</a:t>
+            </a:r>
+          </a:p>
+        </p:txBody>
+      </p:sp>
+      <p:sp>
+        <p:nvSpPr>
+          <p:cNvPr id="29" name="Rectangle 28"/>
+          <p:cNvSpPr/>
+          <p:nvPr/>
+        </p:nvSpPr>
+        <p:spPr>
+          <a:xfrm>
+            <a:off x="4754880" y="960120"/>
+            <a:ext cx="4663440" cy="4114800"/>
+          </a:xfrm>
+          <a:prstGeom prst="rect">
+            <a:avLst/>
+          </a:prstGeom>
+          <a:solidFill>
+            <a:srgbClr val="E8F5E9"/>
+          </a:solidFill>
+          <a:ln>
+            <a:noFill/>
+          </a:ln>
+        </p:spPr>
+        <p:style>
+          <a:lnRef idx="1">
+            <a:schemeClr val="accent1"/>
+          </a:lnRef>
+          <a:fillRef idx="3">
+            <a:schemeClr val="accent1"/>
+          </a:fillRef>
+          <a:effectRef idx="2">
+            <a:schemeClr val="accent1"/>
+          </a:effectRef>
+          <a:fontRef idx="minor">
+            <a:schemeClr val="lt1"/>
+          </a:fontRef>
+        </p:style>
+        <p:txBody>
+          <a:bodyPr rtlCol="0" anchor="ctr"/>
+          <a:lstStyle/>
+          <a:p>
+            <a:pPr algn="ctr"/>
+          </a:p>
+        </p:txBody>
+      </p:sp>
+      <p:sp>
+        <p:nvSpPr>
+          <p:cNvPr id="30" name="TextBox 29"/>
+          <p:cNvSpPr txBox="1"/>
+          <p:nvPr/>
+        </p:nvSpPr>
+        <p:spPr>
+          <a:xfrm>
+            <a:off x="4892040" y="1005840"/>
+            <a:ext cx="4389120" cy="411480"/>
+          </a:xfrm>
+          <a:prstGeom prst="rect">
+            <a:avLst/>
+          </a:prstGeom>
+          <a:noFill/>
+        </p:spPr>
+        <p:txBody>
+          <a:bodyPr wrap="square">
+            <a:spAutoFit/>
+          </a:bodyPr>
+          <a:lstStyle/>
+          <a:p>
+            <a:pPr algn="l"/>
+            <a:r>
+              <a:rPr sz="1300" b="1" i="0">
+                <a:solidFill>
+                  <a:srgbClr val="1A7A4A"/>
+                </a:solidFill>
+                <a:latin typeface="Calibri"/>
+              </a:rPr>
+              <a:t>Next Steps</a:t>
+            </a:r>
+          </a:p>
+        </p:txBody>
+      </p:sp>
+      <p:sp>
+        <p:nvSpPr>
+          <p:cNvPr id="31" name="Rectangle 30"/>
+          <p:cNvSpPr/>
+          <p:nvPr/>
+        </p:nvSpPr>
+        <p:spPr>
+          <a:xfrm>
+            <a:off x="4846320" y="1508760"/>
+            <a:ext cx="201168" cy="201168"/>
+          </a:xfrm>
+          <a:prstGeom prst="rect">
+            <a:avLst/>
+          </a:prstGeom>
+          <a:solidFill>
+            <a:srgbClr val="1A7A4A"/>
+          </a:solidFill>
+          <a:ln>
+            <a:noFill/>
+          </a:ln>
+        </p:spPr>
+        <p:style>
+          <a:lnRef idx="1">
+            <a:schemeClr val="accent1"/>
+          </a:lnRef>
+          <a:fillRef idx="3">
+            <a:schemeClr val="accent1"/>
+          </a:fillRef>
+          <a:effectRef idx="2">
+            <a:schemeClr val="accent1"/>
+          </a:effectRef>
+          <a:fontRef idx="minor">
+            <a:schemeClr val="lt1"/>
+          </a:fontRef>
+        </p:style>
+        <p:txBody>
+          <a:bodyPr rtlCol="0" anchor="ctr"/>
+          <a:lstStyle/>
+          <a:p>
+            <a:pPr algn="ctr"/>
+          </a:p>
+        </p:txBody>
+      </p:sp>
+      <p:sp>
+        <p:nvSpPr>
+          <p:cNvPr id="32" name="TextBox 31"/>
+          <p:cNvSpPr txBox="1"/>
+          <p:nvPr/>
+        </p:nvSpPr>
+        <p:spPr>
+          <a:xfrm>
+            <a:off x="5120640" y="1490472"/>
+            <a:ext cx="4114800" cy="256032"/>
+          </a:xfrm>
+          <a:prstGeom prst="rect">
+            <a:avLst/>
+          </a:prstGeom>
+          <a:noFill/>
+        </p:spPr>
+        <p:txBody>
+          <a:bodyPr wrap="square">
+            <a:spAutoFit/>
+          </a:bodyPr>
+          <a:lstStyle/>
+          <a:p>
+            <a:pPr algn="l"/>
+            <a:r>
+              <a:rPr sz="1050" b="1" i="0">
+                <a:solidFill>
+                  <a:srgbClr val="1A7A4A"/>
+                </a:solidFill>
+                <a:latin typeface="Calibri"/>
+              </a:rPr>
+              <a:t>Longer sample</a:t>
+            </a:r>
+          </a:p>
+        </p:txBody>
+      </p:sp>
+      <p:sp>
+        <p:nvSpPr>
+          <p:cNvPr id="33" name="TextBox 32"/>
+          <p:cNvSpPr txBox="1"/>
+          <p:nvPr/>
+        </p:nvSpPr>
+        <p:spPr>
+          <a:xfrm>
+            <a:off x="5120640" y="1737360"/>
+            <a:ext cx="4114800" cy="292608"/>
+          </a:xfrm>
+          <a:prstGeom prst="rect">
+            <a:avLst/>
+          </a:prstGeom>
+          <a:noFill/>
+        </p:spPr>
+        <p:txBody>
+          <a:bodyPr wrap="square">
+            <a:spAutoFit/>
+          </a:bodyPr>
+          <a:lstStyle/>
+          <a:p>
+            <a:pPr algn="l"/>
+            <a:r>
+              <a:rPr sz="950" b="0" i="0">
+                <a:solidFill>
+                  <a:srgbClr val="222222"/>
+                </a:solidFill>
+                <a:latin typeface="Calibri"/>
+              </a:rPr>
+              <a:t>As weekly/monthly attestations accumulate, N grows → power improves</a:t>
+            </a:r>
+          </a:p>
+        </p:txBody>
+      </p:sp>
+      <p:sp>
+        <p:nvSpPr>
+          <p:cNvPr id="34" name="Rectangle 33"/>
+          <p:cNvSpPr/>
+          <p:nvPr/>
+        </p:nvSpPr>
+        <p:spPr>
+          <a:xfrm>
+            <a:off x="4846320" y="2194560"/>
+            <a:ext cx="201168" cy="201168"/>
+          </a:xfrm>
+          <a:prstGeom prst="rect">
+            <a:avLst/>
+          </a:prstGeom>
+          <a:solidFill>
+            <a:srgbClr val="1A7A4A"/>
+          </a:solidFill>
+          <a:ln>
+            <a:noFill/>
+          </a:ln>
+        </p:spPr>
+        <p:style>
+          <a:lnRef idx="1">
+            <a:schemeClr val="accent1"/>
+          </a:lnRef>
+          <a:fillRef idx="3">
+            <a:schemeClr val="accent1"/>
+          </a:fillRef>
+          <a:effectRef idx="2">
+            <a:schemeClr val="accent1"/>
+          </a:effectRef>
+          <a:fontRef idx="minor">
+            <a:schemeClr val="lt1"/>
+          </a:fontRef>
+        </p:style>
+        <p:txBody>
+          <a:bodyPr rtlCol="0" anchor="ctr"/>
+          <a:lstStyle/>
+          <a:p>
+            <a:pPr algn="ctr"/>
+          </a:p>
+        </p:txBody>
+      </p:sp>
+      <p:sp>
+        <p:nvSpPr>
+          <p:cNvPr id="35" name="TextBox 34"/>
+          <p:cNvSpPr txBox="1"/>
+          <p:nvPr/>
+        </p:nvSpPr>
+        <p:spPr>
+          <a:xfrm>
+            <a:off x="5120640" y="2176272"/>
+            <a:ext cx="4114800" cy="256032"/>
+          </a:xfrm>
+          <a:prstGeom prst="rect">
+            <a:avLst/>
+          </a:prstGeom>
+          <a:noFill/>
+        </p:spPr>
+        <p:txBody>
+          <a:bodyPr wrap="square">
+            <a:spAutoFit/>
+          </a:bodyPr>
+          <a:lstStyle/>
+          <a:p>
+            <a:pPr algn="l"/>
+            <a:r>
+              <a:rPr sz="1050" b="1" i="0">
+                <a:solidFill>
+                  <a:srgbClr val="1A7A4A"/>
+                </a:solidFill>
+                <a:latin typeface="Calibri"/>
+              </a:rPr>
+              <a:t>Better identification</a:t>
+            </a:r>
+          </a:p>
+        </p:txBody>
+      </p:sp>
+      <p:sp>
+        <p:nvSpPr>
+          <p:cNvPr id="36" name="TextBox 35"/>
+          <p:cNvSpPr txBox="1"/>
+          <p:nvPr/>
+        </p:nvSpPr>
+        <p:spPr>
+          <a:xfrm>
+            <a:off x="5120640" y="2423160"/>
+            <a:ext cx="4114800" cy="292608"/>
+          </a:xfrm>
+          <a:prstGeom prst="rect">
+            <a:avLst/>
+          </a:prstGeom>
+          <a:noFill/>
+        </p:spPr>
+        <p:txBody>
+          <a:bodyPr wrap="square">
+            <a:spAutoFit/>
+          </a:bodyPr>
+          <a:lstStyle/>
+          <a:p>
+            <a:pPr algn="l"/>
+            <a:r>
+              <a:rPr sz="950" b="0" i="0">
+                <a:solidFill>
+                  <a:srgbClr val="222222"/>
+                </a:solidFill>
+                <a:latin typeface="Calibri"/>
+              </a:rPr>
+              <a:t>Instrument for supply growth (e.g., regulatory announcements)</a:t>
+            </a:r>
+          </a:p>
+        </p:txBody>
+      </p:sp>
+      <p:sp>
+        <p:nvSpPr>
+          <p:cNvPr id="37" name="Rectangle 36"/>
+          <p:cNvSpPr/>
+          <p:nvPr/>
+        </p:nvSpPr>
+        <p:spPr>
+          <a:xfrm>
+            <a:off x="4846320" y="2880360"/>
+            <a:ext cx="201168" cy="201168"/>
+          </a:xfrm>
+          <a:prstGeom prst="rect">
+            <a:avLst/>
+          </a:prstGeom>
+          <a:solidFill>
+            <a:srgbClr val="1A7A4A"/>
+          </a:solidFill>
+          <a:ln>
+            <a:noFill/>
+          </a:ln>
+        </p:spPr>
+        <p:style>
+          <a:lnRef idx="1">
+            <a:schemeClr val="accent1"/>
+          </a:lnRef>
+          <a:fillRef idx="3">
+            <a:schemeClr val="accent1"/>
+          </a:fillRef>
+          <a:effectRef idx="2">
+            <a:schemeClr val="accent1"/>
+          </a:effectRef>
+          <a:fontRef idx="minor">
+            <a:schemeClr val="lt1"/>
+          </a:fontRef>
+        </p:style>
+        <p:txBody>
+          <a:bodyPr rtlCol="0" anchor="ctr"/>
+          <a:lstStyle/>
+          <a:p>
+            <a:pPr algn="ctr"/>
+          </a:p>
+        </p:txBody>
+      </p:sp>
+      <p:sp>
+        <p:nvSpPr>
+          <p:cNvPr id="38" name="TextBox 37"/>
+          <p:cNvSpPr txBox="1"/>
+          <p:nvPr/>
+        </p:nvSpPr>
+        <p:spPr>
+          <a:xfrm>
+            <a:off x="5120640" y="2862072"/>
+            <a:ext cx="4114800" cy="256032"/>
+          </a:xfrm>
+          <a:prstGeom prst="rect">
+            <a:avLst/>
+          </a:prstGeom>
+          <a:noFill/>
+        </p:spPr>
+        <p:txBody>
+          <a:bodyPr wrap="square">
+            <a:spAutoFit/>
+          </a:bodyPr>
+          <a:lstStyle/>
+          <a:p>
+            <a:pPr algn="l"/>
+            <a:r>
+              <a:rPr sz="1050" b="1" i="0">
+                <a:solidFill>
+                  <a:srgbClr val="1A7A4A"/>
+                </a:solidFill>
+                <a:latin typeface="Calibri"/>
+              </a:rPr>
+              <a:t>Non-USD ecosystems</a:t>
+            </a:r>
+          </a:p>
+        </p:txBody>
+      </p:sp>
+      <p:sp>
+        <p:nvSpPr>
+          <p:cNvPr id="39" name="TextBox 38"/>
+          <p:cNvSpPr txBox="1"/>
+          <p:nvPr/>
+        </p:nvSpPr>
+        <p:spPr>
+          <a:xfrm>
+            <a:off x="5120640" y="3108960"/>
+            <a:ext cx="4114800" cy="292608"/>
+          </a:xfrm>
+          <a:prstGeom prst="rect">
+            <a:avLst/>
+          </a:prstGeom>
+          <a:noFill/>
+        </p:spPr>
+        <p:txBody>
+          <a:bodyPr wrap="square">
+            <a:spAutoFit/>
+          </a:bodyPr>
+          <a:lstStyle/>
+          <a:p>
+            <a:pPr algn="l"/>
+            <a:r>
+              <a:rPr sz="950" b="0" i="0">
+                <a:solidFill>
+                  <a:srgbClr val="222222"/>
+                </a:solidFill>
+                <a:latin typeface="Calibri"/>
+              </a:rPr>
+              <a:t>Euro stablecoins, CBDC interactions — broader privilege question</a:t>
+            </a:r>
+          </a:p>
+        </p:txBody>
+      </p:sp>
+      <p:sp>
+        <p:nvSpPr>
+          <p:cNvPr id="40" name="Rectangle 39"/>
+          <p:cNvSpPr/>
+          <p:nvPr/>
+        </p:nvSpPr>
+        <p:spPr>
+          <a:xfrm>
+            <a:off x="4846320" y="3566160"/>
+            <a:ext cx="201168" cy="201168"/>
+          </a:xfrm>
+          <a:prstGeom prst="rect">
+            <a:avLst/>
+          </a:prstGeom>
+          <a:solidFill>
+            <a:srgbClr val="1A7A4A"/>
+          </a:solidFill>
+          <a:ln>
+            <a:noFill/>
+          </a:ln>
+        </p:spPr>
+        <p:style>
+          <a:lnRef idx="1">
+            <a:schemeClr val="accent1"/>
+          </a:lnRef>
+          <a:fillRef idx="3">
+            <a:schemeClr val="accent1"/>
+          </a:fillRef>
+          <a:effectRef idx="2">
+            <a:schemeClr val="accent1"/>
+          </a:effectRef>
+          <a:fontRef idx="minor">
+            <a:schemeClr val="lt1"/>
+          </a:fontRef>
+        </p:style>
+        <p:txBody>
+          <a:bodyPr rtlCol="0" anchor="ctr"/>
+          <a:lstStyle/>
+          <a:p>
+            <a:pPr algn="ctr"/>
+          </a:p>
+        </p:txBody>
+      </p:sp>
+      <p:sp>
+        <p:nvSpPr>
+          <p:cNvPr id="41" name="TextBox 40"/>
+          <p:cNvSpPr txBox="1"/>
+          <p:nvPr/>
+        </p:nvSpPr>
+        <p:spPr>
+          <a:xfrm>
+            <a:off x="5120640" y="3547872"/>
+            <a:ext cx="4114800" cy="256032"/>
+          </a:xfrm>
+          <a:prstGeom prst="rect">
+            <a:avLst/>
+          </a:prstGeom>
+          <a:noFill/>
+        </p:spPr>
+        <p:txBody>
+          <a:bodyPr wrap="square">
+            <a:spAutoFit/>
+          </a:bodyPr>
+          <a:lstStyle/>
+          <a:p>
+            <a:pPr algn="l"/>
+            <a:r>
+              <a:rPr sz="1050" b="1" i="0">
+                <a:solidFill>
+                  <a:srgbClr val="1A7A4A"/>
+                </a:solidFill>
+                <a:latin typeface="Calibri"/>
+              </a:rPr>
+              <a:t>High-frequency data</a:t>
+            </a:r>
+          </a:p>
+        </p:txBody>
+      </p:sp>
+      <p:sp>
+        <p:nvSpPr>
+          <p:cNvPr id="42" name="TextBox 41"/>
+          <p:cNvSpPr txBox="1"/>
+          <p:nvPr/>
+        </p:nvSpPr>
+        <p:spPr>
+          <a:xfrm>
+            <a:off x="5120640" y="3794760"/>
+            <a:ext cx="4114800" cy="292608"/>
+          </a:xfrm>
+          <a:prstGeom prst="rect">
+            <a:avLst/>
+          </a:prstGeom>
+          <a:noFill/>
+        </p:spPr>
+        <p:txBody>
+          <a:bodyPr wrap="square">
+            <a:spAutoFit/>
+          </a:bodyPr>
+          <a:lstStyle/>
+          <a:p>
+            <a:pPr algn="l"/>
+            <a:r>
+              <a:rPr sz="950" b="0" i="0">
+                <a:solidFill>
+                  <a:srgbClr val="222222"/>
+                </a:solidFill>
+                <a:latin typeface="Calibri"/>
+              </a:rPr>
+              <a:t>Daily spread + daily supply → better event identification</a:t>
+            </a:r>
+          </a:p>
+        </p:txBody>
+      </p:sp>
+      <p:sp>
+        <p:nvSpPr>
+          <p:cNvPr id="43" name="Rectangle 42"/>
+          <p:cNvSpPr/>
+          <p:nvPr/>
+        </p:nvSpPr>
+        <p:spPr>
+          <a:xfrm>
+            <a:off x="4846320" y="4251960"/>
+            <a:ext cx="201168" cy="201168"/>
+          </a:xfrm>
+          <a:prstGeom prst="rect">
+            <a:avLst/>
+          </a:prstGeom>
+          <a:solidFill>
+            <a:srgbClr val="1A7A4A"/>
+          </a:solidFill>
+          <a:ln>
+            <a:noFill/>
+          </a:ln>
+        </p:spPr>
+        <p:style>
+          <a:lnRef idx="1">
+            <a:schemeClr val="accent1"/>
+          </a:lnRef>
+          <a:fillRef idx="3">
+            <a:schemeClr val="accent1"/>
+          </a:fillRef>
+          <a:effectRef idx="2">
+            <a:schemeClr val="accent1"/>
+          </a:effectRef>
+          <a:fontRef idx="minor">
+            <a:schemeClr val="lt1"/>
+          </a:fontRef>
+        </p:style>
+        <p:txBody>
+          <a:bodyPr rtlCol="0" anchor="ctr"/>
+          <a:lstStyle/>
+          <a:p>
+            <a:pPr algn="ctr"/>
+          </a:p>
+        </p:txBody>
+      </p:sp>
+      <p:sp>
+        <p:nvSpPr>
+          <p:cNvPr id="44" name="TextBox 43"/>
+          <p:cNvSpPr txBox="1"/>
+          <p:nvPr/>
+        </p:nvSpPr>
+        <p:spPr>
+          <a:xfrm>
+            <a:off x="5120640" y="4233672"/>
+            <a:ext cx="4114800" cy="256032"/>
+          </a:xfrm>
+          <a:prstGeom prst="rect">
+            <a:avLst/>
+          </a:prstGeom>
+          <a:noFill/>
+        </p:spPr>
+        <p:txBody>
+          <a:bodyPr wrap="square">
+            <a:spAutoFit/>
+          </a:bodyPr>
+          <a:lstStyle/>
+          <a:p>
+            <a:pPr algn="l"/>
+            <a:r>
+              <a:rPr sz="1050" b="1" i="0">
+                <a:solidFill>
+                  <a:srgbClr val="1A7A4A"/>
+                </a:solidFill>
+                <a:latin typeface="Calibri"/>
+              </a:rPr>
+              <a:t>Cross-country comparison</a:t>
+            </a:r>
+          </a:p>
+        </p:txBody>
+      </p:sp>
+      <p:sp>
+        <p:nvSpPr>
+          <p:cNvPr id="45" name="TextBox 44"/>
+          <p:cNvSpPr txBox="1"/>
+          <p:nvPr/>
+        </p:nvSpPr>
+        <p:spPr>
+          <a:xfrm>
+            <a:off x="5120640" y="4480560"/>
+            <a:ext cx="4114800" cy="292608"/>
+          </a:xfrm>
+          <a:prstGeom prst="rect">
+            <a:avLst/>
+          </a:prstGeom>
+          <a:noFill/>
+        </p:spPr>
+        <p:txBody>
+          <a:bodyPr wrap="square">
+            <a:spAutoFit/>
+          </a:bodyPr>
+          <a:lstStyle/>
+          <a:p>
+            <a:pPr algn="l"/>
+            <a:r>
+              <a:rPr sz="950" b="0" i="0">
+                <a:solidFill>
+                  <a:srgbClr val="222222"/>
+                </a:solidFill>
+                <a:latin typeface="Calibri"/>
+              </a:rPr>
+              <a:t>Does same mechanism operate for EUR-denominated safe assets?</a:t>
+            </a:r>
+          </a:p>
+        </p:txBody>
+      </p:sp>
+      <p:sp>
+        <p:nvSpPr>
+          <p:cNvPr id="46" name="Rectangle 45"/>
+          <p:cNvSpPr/>
+          <p:nvPr/>
+        </p:nvSpPr>
+        <p:spPr>
+          <a:xfrm>
+            <a:off x="274320" y="5212080"/>
+            <a:ext cx="9326880" cy="548640"/>
+          </a:xfrm>
+          <a:prstGeom prst="rect">
+            <a:avLst/>
+          </a:prstGeom>
+          <a:solidFill>
+            <a:srgbClr val="003087"/>
+          </a:solidFill>
+          <a:ln>
+            <a:noFill/>
+          </a:ln>
+        </p:spPr>
+        <p:style>
+          <a:lnRef idx="1">
+            <a:schemeClr val="accent1"/>
+          </a:lnRef>
+          <a:fillRef idx="3">
+            <a:schemeClr val="accent1"/>
+          </a:fillRef>
+          <a:effectRef idx="2">
+            <a:schemeClr val="accent1"/>
+          </a:effectRef>
+          <a:fontRef idx="minor">
+            <a:schemeClr val="lt1"/>
+          </a:fontRef>
+        </p:style>
+        <p:txBody>
+          <a:bodyPr rtlCol="0" anchor="ctr"/>
+          <a:lstStyle/>
+          <a:p>
+            <a:pPr algn="ctr"/>
+          </a:p>
+        </p:txBody>
+      </p:sp>
+      <p:sp>
+        <p:nvSpPr>
+          <p:cNvPr id="47" name="TextBox 46"/>
+          <p:cNvSpPr txBox="1"/>
+          <p:nvPr/>
+        </p:nvSpPr>
+        <p:spPr>
+          <a:xfrm>
+            <a:off x="457200" y="5257800"/>
+            <a:ext cx="9052560" cy="457200"/>
+          </a:xfrm>
+          <a:prstGeom prst="rect">
+            <a:avLst/>
+          </a:prstGeom>
+          <a:noFill/>
+        </p:spPr>
+        <p:txBody>
+          <a:bodyPr wrap="square">
+            <a:spAutoFit/>
+          </a:bodyPr>
+          <a:lstStyle/>
+          <a:p>
+            <a:pPr algn="ctr"/>
+            <a:r>
+              <a:rPr sz="1100" b="1" i="0">
+                <a:solidFill>
+                  <a:srgbClr val="E87722"/>
+                </a:solidFill>
+                <a:latin typeface="Calibri"/>
+              </a:rPr>
+              <a:t>This paper is the first step. The research agenda is clear and tractable.</a:t>
+            </a:r>
+          </a:p>
+        </p:txBody>
+      </p:sp>
+    </p:spTree>
+  </p:cSld>
+  <p:clrMapOvr>
+    <a:masterClrMapping/>
+  </p:clrMapOvr>
+</p:sld>
+</file>
+
+<file path=ppt/slides/slide17.xml><?xml version="1.0" encoding="utf-8"?>
 <p:sld xmlns:a="http://schemas.openxmlformats.org/drawingml/2006/main" xmlns:p="http://schemas.openxmlformats.org/presentationml/2006/main" xmlns:r="http://schemas.openxmlformats.org/officeDocument/2006/relationships">
   <p:cSld>
     <p:spTree>

--- a/presentations/0609_Stablecoin_Exorbitant_Privilege.pptx
+++ b/presentations/0609_Stablecoin_Exorbitant_Privilege.pptx
@@ -7568,14 +7568,14 @@
           <a:p>
             <a:pPr algn="ctr"/>
             <a:r>
-              <a:rPr sz="900" b="0" i="1">
-                <a:solidFill>
-                  <a:srgbClr val="E87722"/>
-                </a:solidFill>
-                <a:latin typeface="Calibri"/>
-              </a:rPr>
-              <a:t>Bootstrap CI
-[3.1%, 14.5%]</a:t>
+              <a:rPr sz="1100"/>
+              <a:t>Hansen 90% CI</a:t>
+            </a:r>
+          </a:p>
+          <a:p>
+            <a:r>
+              <a:rPr sz="1100"/>
+              <a:t>[3.1%, 14.5%]</a:t>
             </a:r>
           </a:p>
         </p:txBody>
@@ -8050,13 +8050,8 @@
           <a:p>
             <a:pPr algn="l"/>
             <a:r>
-              <a:rPr sz="950" b="1" i="0">
-                <a:solidFill>
-                  <a:srgbClr val="003087"/>
-                </a:solidFill>
-                <a:latin typeface="Calibri"/>
-              </a:rPr>
-              <a:t>[3.1%,  14.5%]</a:t>
+              <a:rPr sz="950" b="1"/>
+              <a:t>[3.2%,  14.5%]</a:t>
             </a:r>
           </a:p>
         </p:txBody>
@@ -8354,15 +8349,20 @@
           <a:p>
             <a:pPr algn="l"/>
             <a:r>
-              <a:rPr sz="950" b="1" i="0">
-                <a:solidFill>
-                  <a:srgbClr val="FFFFFF"/>
-                </a:solidFill>
-                <a:latin typeface="Calibri"/>
-              </a:rPr>
-              <a:t>Hansen q* = 13.0%  inside  LSTAR CI [3.1%, 14.5%]
-→ CONVERGENT VALIDITY ✓
-Two models, same threshold region.</a:t>
+              <a:rPr sz="950" b="1"/>
+              <a:t>Hansen q* = 13.0%  inside  LSTAR CI [3.2%, 14.5%]</a:t>
+            </a:r>
+          </a:p>
+          <a:p>
+            <a:r>
+              <a:rPr sz="950" b="1"/>
+              <a:t>→ CONVERGENT VALIDITY ✓</a:t>
+            </a:r>
+          </a:p>
+          <a:p>
+            <a:r>
+              <a:rPr sz="950" b="1"/>
+              <a:t>Two models, same threshold region.</a:t>
             </a:r>
           </a:p>
         </p:txBody>
@@ -9313,6 +9313,59 @@
               </a:rPr>
               <a:t>LUNA: spread = 14.0 bps (corrected; was 70.9 bps with lagging SOFR) — barely moved, FOMC hike 5 days prior contaminates.
 SVB: dramatic compression (−52 bps) = flight-to-safety, NOT forced T-bill selling.</a:t>
+            </a:r>
+          </a:p>
+        </p:txBody>
+      </p:sp>
+      <p:sp>
+        <p:nvSpPr>
+          <p:cNvPr id="23" name="TextBox 22"/>
+          <p:cNvSpPr txBox="1"/>
+          <p:nvPr/>
+        </p:nvSpPr>
+        <p:spPr>
+          <a:xfrm>
+            <a:off x="182880" y="3566160"/>
+            <a:ext cx="9509760" cy="1417320"/>
+          </a:xfrm>
+          <a:prstGeom prst="rect">
+            <a:avLst/>
+          </a:prstGeom>
+          <a:noFill/>
+        </p:spPr>
+        <p:txBody>
+          <a:bodyPr wrap="square">
+            <a:spAutoFit/>
+          </a:bodyPr>
+          <a:lstStyle/>
+          <a:p>
+            <a:r>
+              <a:rPr b="1" sz="900"/>
+              <a:t>Corrected Event Study CARs (first-difference normal model, [−5,+20] window):</a:t>
+            </a:r>
+          </a:p>
+          <a:p>
+            <a:r>
+              <a:rPr b="0" sz="850"/>
+              <a:t>LUNA/UST  (low buffer, May 2022):   CAR = −41.0 bps   t = −0.74   p = 0.469   (n.s.)</a:t>
+            </a:r>
+          </a:p>
+          <a:p>
+            <a:r>
+              <a:rPr b="0" sz="850"/>
+              <a:t>USDT depeg  (low buffer, May 2022):  CAR = +22.5 bps   t = +1.52   p = 0.141   (n.s.)</a:t>
+            </a:r>
+          </a:p>
+          <a:p>
+            <a:r>
+              <a:rPr b="0" sz="850"/>
+              <a:t>USDC/SVB  (high buffer, Mar 2023):   CAR = −27.4 bps   t = −0.44   p = 0.665   (n.s.)</a:t>
+            </a:r>
+          </a:p>
+          <a:p>
+            <a:r>
+              <a:rPr b="0" sz="850"/>
+              <a:t>Placebo test:  actual mean |CAR| = 30.3 bps  vs  placebo = 4.3 bps  →  ratio 7.0×  (individually insig.; magnitude larger than placebo)</a:t>
             </a:r>
           </a:p>
         </p:txBody>
@@ -16472,13 +16525,8 @@
           <a:p>
             <a:pPr algn="ctr"/>
             <a:r>
-              <a:rPr sz="950" b="0" i="1">
-                <a:solidFill>
-                  <a:srgbClr val="666666"/>
-                </a:solidFill>
-                <a:latin typeface="Calibri"/>
-              </a:rPr>
-              <a:t>−15 to −2 bps</a:t>
+              <a:rPr sz="950" b="0"/>
+              <a:t>−41.0 to +22.5 bps</a:t>
             </a:r>
           </a:p>
         </p:txBody>
@@ -16550,17 +16598,44 @@
           <a:p>
             <a:pPr algn="l"/>
             <a:r>
-              <a:rPr sz="1000" b="0" i="0">
-                <a:solidFill>
-                  <a:srgbClr val="222222"/>
-                </a:solidFill>
-                <a:latin typeface="Calibri"/>
-              </a:rPr>
-              <a:t>Directionally consistent.
-FOMC contamination in 2 of 3 events.
-SVB = flight-to-safety, not mechanism.
-LUNA: 14.0 bps (corrected spread).
-Qualitative context only.</a:t>
+              <a:rPr sz="1000" b="0"/>
+              <a:t>Directionally consistent.</a:t>
+            </a:r>
+          </a:p>
+          <a:p>
+            <a:r>
+              <a:rPr sz="1000" b="0"/>
+              <a:t>FOMC contamination in 2 of 3 events.</a:t>
+            </a:r>
+          </a:p>
+          <a:p>
+            <a:r>
+              <a:rPr sz="1000" b="0"/>
+              <a:t>SVB = flight-to-safety, not mechanism.</a:t>
+            </a:r>
+          </a:p>
+          <a:p>
+            <a:r>
+              <a:rPr sz="1000" b="0"/>
+              <a:t>LUNA: −41.0 bps (n.s.) — flight-to-safety</a:t>
+            </a:r>
+          </a:p>
+          <a:p>
+            <a:r>
+              <a:rPr sz="1000" b="0"/>
+              <a:t>USDT: +22.5 bps (n.s.) — some selling pressure</a:t>
+            </a:r>
+          </a:p>
+          <a:p>
+            <a:r>
+              <a:rPr sz="1000" b="0"/>
+              <a:t>SVB: −27.4 bps (n.s.) — macro safe-haven.</a:t>
+            </a:r>
+          </a:p>
+          <a:p>
+            <a:r>
+              <a:rPr sz="1000" b="0"/>
+              <a:t>Qualitative context only.</a:t>
             </a:r>
           </a:p>
         </p:txBody>
@@ -17701,14 +17776,14 @@
           <a:p>
             <a:pPr algn="l"/>
             <a:r>
-              <a:rPr sz="1000" b="0" i="0">
-                <a:solidFill>
-                  <a:srgbClr val="222222"/>
-                </a:solidFill>
-                <a:latin typeface="Calibri"/>
-              </a:rPr>
-              <a:t>Sample covers 2020–2024 only;
-may not generalize to other regimes</a:t>
+              <a:rPr sz="1000" b="0"/>
+              <a:t>Sample covers January 2022 – March 2026;</a:t>
+            </a:r>
+          </a:p>
+          <a:p>
+            <a:r>
+              <a:rPr sz="1000" b="0"/>
+              <a:t>may not generalize to post-2026 regimes</a:t>
             </a:r>
           </a:p>
         </p:txBody>
@@ -18430,6 +18505,39 @@
                 <a:latin typeface="Calibri"/>
               </a:rPr>
               <a:t>This paper is the first step. The research agenda is clear and tractable.</a:t>
+            </a:r>
+          </a:p>
+        </p:txBody>
+      </p:sp>
+      <p:sp>
+        <p:nvSpPr>
+          <p:cNvPr id="48" name="TextBox 47"/>
+          <p:cNvSpPr txBox="1"/>
+          <p:nvPr/>
+        </p:nvSpPr>
+        <p:spPr>
+          <a:xfrm>
+            <a:off x="274320" y="5212080"/>
+            <a:ext cx="9326880" cy="685800"/>
+          </a:xfrm>
+          <a:prstGeom prst="rect">
+            <a:avLst/>
+          </a:prstGeom>
+          <a:noFill/>
+        </p:spPr>
+        <p:txBody>
+          <a:bodyPr wrap="square">
+            <a:spAutoFit/>
+          </a:bodyPr>
+          <a:lstStyle/>
+          <a:p>
+            <a:r>
+              <a:rPr sz="850" b="0">
+                <a:solidFill>
+                  <a:srgbClr val="333333"/>
+                </a:solidFill>
+              </a:rPr>
+              <a:t>Post-2023 sub-sample (N=39): θ becomes individually significant (β₂ = −0.232, p = 0.008) — Treasury-exposure channel has identifiable content as sample lengthens. β₁ = −2.43 (p = 0.063, marginal). L×ΔlnS still n.s. — separating cash buffer requires more observations.</a:t>
             </a:r>
           </a:p>
         </p:txBody>
@@ -21989,13 +22097,8 @@
           <a:p>
             <a:pPr algn="l"/>
             <a:r>
-              <a:rPr sz="1100" b="0" i="1">
-                <a:solidFill>
-                  <a:srgbClr val="FFFFFF"/>
-                </a:solidFill>
-                <a:latin typeface="Calibri"/>
-              </a:rPr>
-              <a:t>Monthly panel 2020–2024; spread from FRED; stablecoin supply from DeFiLlama</a:t>
+              <a:rPr sz="1100" b="0"/>
+              <a:t>Monthly panel January 2022 – March 2026 (N = 51); spread: DGS3MO − overnight SOFR (FRED); supply: DeFiLlama</a:t>
             </a:r>
           </a:p>
         </p:txBody>
@@ -24065,7 +24168,7 @@
                           </a:solidFill>
                           <a:latin typeface="Calibri"/>
                         </a:rPr>
-                        <a:t>+0.043</a:t>
+                        <a:t>+0.010</a:t>
                       </a:r>
                     </a:p>
                   </a:txBody>
@@ -24088,7 +24191,7 @@
                           </a:solidFill>
                           <a:latin typeface="Calibri"/>
                         </a:rPr>
-                        <a:t>0.019</a:t>
+                        <a:t>0.007</a:t>
                       </a:r>
                     </a:p>
                   </a:txBody>
@@ -24111,7 +24214,7 @@
                           </a:solidFill>
                           <a:latin typeface="Calibri"/>
                         </a:rPr>
-                        <a:t>0.032*</a:t>
+                        <a:t>0.173</a:t>
                       </a:r>
                     </a:p>
                   </a:txBody>
@@ -24134,7 +24237,7 @@
                           </a:solidFill>
                           <a:latin typeface="Calibri"/>
                         </a:rPr>
-                        <a:t>Global risk-off widens spread</a:t>
+                        <a:t>Risk-off (directionally correct; not sig.)</a:t>
                       </a:r>
                     </a:p>
                   </a:txBody>
@@ -24159,7 +24262,7 @@
                           </a:solidFill>
                           <a:latin typeface="Calibri"/>
                         </a:rPr>
-                        <a:t>ΔFed Funds  β₃</a:t>
+                        <a:t>Velocity (V)  β₃</a:t>
                       </a:r>
                     </a:p>
                   </a:txBody>
@@ -24182,7 +24285,7 @@
                           </a:solidFill>
                           <a:latin typeface="Calibri"/>
                         </a:rPr>
-                        <a:t>+0.18</a:t>
+                        <a:t>−52.87</a:t>
                       </a:r>
                     </a:p>
                   </a:txBody>
@@ -24205,7 +24308,7 @@
                           </a:solidFill>
                           <a:latin typeface="Calibri"/>
                         </a:rPr>
-                        <a:t>0.14</a:t>
+                        <a:t>23.84</a:t>
                       </a:r>
                     </a:p>
                   </a:txBody>
@@ -24228,7 +24331,7 @@
                           </a:solidFill>
                           <a:latin typeface="Calibri"/>
                         </a:rPr>
-                        <a:t>0.213</a:t>
+                        <a:t>0.027**</a:t>
                       </a:r>
                     </a:p>
                   </a:txBody>
@@ -24251,7 +24354,7 @@
                           </a:solidFill>
                           <a:latin typeface="Calibri"/>
                         </a:rPr>
-                        <a:t>Rate changes (partially absorbed)</a:t>
+                        <a:t>Erratic supply growth attenuates privilege</a:t>
                       </a:r>
                     </a:p>
                   </a:txBody>
@@ -24276,7 +24379,7 @@
                           </a:solidFill>
                           <a:latin typeface="Calibri"/>
                         </a:rPr>
-                        <a:t>Constant</a:t>
+                        <a:t>B×ΔlnS  β₄  (buffer interaction)</a:t>
                       </a:r>
                     </a:p>
                   </a:txBody>
@@ -24299,7 +24402,7 @@
                           </a:solidFill>
                           <a:latin typeface="Calibri"/>
                         </a:rPr>
-                        <a:t>+12.3</a:t>
+                        <a:t>−7.52</a:t>
                       </a:r>
                     </a:p>
                   </a:txBody>
@@ -24322,7 +24425,7 @@
                           </a:solidFill>
                           <a:latin typeface="Calibri"/>
                         </a:rPr>
-                        <a:t>8.4</a:t>
+                        <a:t>3.21</a:t>
                       </a:r>
                     </a:p>
                   </a:txBody>
@@ -24345,7 +24448,7 @@
                           </a:solidFill>
                           <a:latin typeface="Calibri"/>
                         </a:rPr>
-                        <a:t>0.148</a:t>
+                        <a:t>0.019**</a:t>
                       </a:r>
                     </a:p>
                   </a:txBody>
@@ -24368,7 +24471,7 @@
                           </a:solidFill>
                           <a:latin typeface="Calibri"/>
                         </a:rPr>
-                        <a:t>Baseline spread level</a:t>
+                        <a:t>Fragility channel — confirms H2</a:t>
                       </a:r>
                     </a:p>
                   </a:txBody>
@@ -24393,7 +24496,7 @@
                           </a:solidFill>
                           <a:latin typeface="Calibri"/>
                         </a:rPr>
-                        <a:t>R²  =  0.502</a:t>
+                        <a:t>N = 51  |  R² = 0.411  |  Adj-R² = 0.330</a:t>
                       </a:r>
                     </a:p>
                   </a:txBody>
@@ -24485,7 +24588,7 @@
                           </a:solidFill>
                           <a:latin typeface="Calibri"/>
                         </a:rPr>
-                        <a:t>Regression explains 50% of variance</a:t>
+                        <a:t>Buffer-ratio spec (Column 2); HAC s.e.</a:t>
                       </a:r>
                     </a:p>
                   </a:txBody>
